--- a/slides/figures_AI_agent.pptx
+++ b/slides/figures_AI_agent.pptx
@@ -104,7 +104,57 @@
       </a:defRPr>
     </a:lvl9pPr>
   </p:defaultTextStyle>
+  <p:extLst>
+    <p:ext uri="{EFAFB233-063F-42B5-8137-9DF3F51BA10A}">
+      <p15:sldGuideLst xmlns:p15="http://schemas.microsoft.com/office/powerpoint/2012/main"/>
+    </p:ext>
+  </p:extLst>
 </p:presentation>
+</file>
+
+<file path=ppt/changesInfos/changesInfo1.xml><?xml version="1.0" encoding="utf-8"?>
+<pc:chgInfo xmlns:a="http://schemas.openxmlformats.org/drawingml/2006/main" xmlns:r="http://schemas.openxmlformats.org/officeDocument/2006/relationships" xmlns:ac="http://schemas.microsoft.com/office/drawing/2013/main/command" xmlns:pc="http://schemas.microsoft.com/office/powerpoint/2013/main/command">
+  <pc:docChgLst>
+    <pc:chgData name="Tiago Janela" userId="ee1a79fe-c79c-4f34-9602-7f6f2f0482b3" providerId="ADAL" clId="{DC72B5B4-B17B-4D99-A471-9D4A1A65A636}"/>
+    <pc:docChg chg="modSld">
+      <pc:chgData name="Tiago Janela" userId="ee1a79fe-c79c-4f34-9602-7f6f2f0482b3" providerId="ADAL" clId="{DC72B5B4-B17B-4D99-A471-9D4A1A65A636}" dt="2026-04-10T09:47:32.948" v="0" actId="164"/>
+      <pc:docMkLst>
+        <pc:docMk/>
+      </pc:docMkLst>
+      <pc:sldChg chg="addSp modSp">
+        <pc:chgData name="Tiago Janela" userId="ee1a79fe-c79c-4f34-9602-7f6f2f0482b3" providerId="ADAL" clId="{DC72B5B4-B17B-4D99-A471-9D4A1A65A636}" dt="2026-04-10T09:47:32.948" v="0" actId="164"/>
+        <pc:sldMkLst>
+          <pc:docMk/>
+          <pc:sldMk cId="3157379607" sldId="256"/>
+        </pc:sldMkLst>
+        <pc:grpChg chg="add mod">
+          <ac:chgData name="Tiago Janela" userId="ee1a79fe-c79c-4f34-9602-7f6f2f0482b3" providerId="ADAL" clId="{DC72B5B4-B17B-4D99-A471-9D4A1A65A636}" dt="2026-04-10T09:47:32.948" v="0" actId="164"/>
+          <ac:grpSpMkLst>
+            <pc:docMk/>
+            <pc:sldMk cId="3157379607" sldId="256"/>
+            <ac:grpSpMk id="2" creationId="{29B5869D-89AA-074F-A57C-6183A17CB9BA}"/>
+          </ac:grpSpMkLst>
+        </pc:grpChg>
+        <pc:grpChg chg="mod">
+          <ac:chgData name="Tiago Janela" userId="ee1a79fe-c79c-4f34-9602-7f6f2f0482b3" providerId="ADAL" clId="{DC72B5B4-B17B-4D99-A471-9D4A1A65A636}" dt="2026-04-10T09:47:32.948" v="0" actId="164"/>
+          <ac:grpSpMkLst>
+            <pc:docMk/>
+            <pc:sldMk cId="3157379607" sldId="256"/>
+            <ac:grpSpMk id="142" creationId="{10981DF9-3B88-6642-A38A-F557DBD8A271}"/>
+          </ac:grpSpMkLst>
+        </pc:grpChg>
+        <pc:grpChg chg="mod">
+          <ac:chgData name="Tiago Janela" userId="ee1a79fe-c79c-4f34-9602-7f6f2f0482b3" providerId="ADAL" clId="{DC72B5B4-B17B-4D99-A471-9D4A1A65A636}" dt="2026-04-10T09:47:32.948" v="0" actId="164"/>
+          <ac:grpSpMkLst>
+            <pc:docMk/>
+            <pc:sldMk cId="3157379607" sldId="256"/>
+            <ac:grpSpMk id="143" creationId="{44DF905F-D3A1-4FD5-B979-6E405669B5A0}"/>
+          </ac:grpSpMkLst>
+        </pc:grpChg>
+      </pc:sldChg>
+    </pc:docChg>
+  </pc:docChgLst>
+</pc:chgInfo>
 </file>
 
 <file path=ppt/slideLayouts/slideLayout1.xml><?xml version="1.0" encoding="utf-8"?>
@@ -254,7 +304,7 @@
           <a:p>
             <a:fld id="{DA6F0F7C-4BCE-44E3-AC6F-932A28F11178}" type="datetimeFigureOut">
               <a:rPr lang="en-US" smtClean="0"/>
-              <a:t>3/16/2026</a:t>
+              <a:t>4/10/2026</a:t>
             </a:fld>
             <a:endParaRPr lang="en-US"/>
           </a:p>
@@ -452,7 +502,7 @@
           <a:p>
             <a:fld id="{DA6F0F7C-4BCE-44E3-AC6F-932A28F11178}" type="datetimeFigureOut">
               <a:rPr lang="en-US" smtClean="0"/>
-              <a:t>3/16/2026</a:t>
+              <a:t>4/10/2026</a:t>
             </a:fld>
             <a:endParaRPr lang="en-US"/>
           </a:p>
@@ -660,7 +710,7 @@
           <a:p>
             <a:fld id="{DA6F0F7C-4BCE-44E3-AC6F-932A28F11178}" type="datetimeFigureOut">
               <a:rPr lang="en-US" smtClean="0"/>
-              <a:t>3/16/2026</a:t>
+              <a:t>4/10/2026</a:t>
             </a:fld>
             <a:endParaRPr lang="en-US"/>
           </a:p>
@@ -858,7 +908,7 @@
           <a:p>
             <a:fld id="{DA6F0F7C-4BCE-44E3-AC6F-932A28F11178}" type="datetimeFigureOut">
               <a:rPr lang="en-US" smtClean="0"/>
-              <a:t>3/16/2026</a:t>
+              <a:t>4/10/2026</a:t>
             </a:fld>
             <a:endParaRPr lang="en-US"/>
           </a:p>
@@ -1133,7 +1183,7 @@
           <a:p>
             <a:fld id="{DA6F0F7C-4BCE-44E3-AC6F-932A28F11178}" type="datetimeFigureOut">
               <a:rPr lang="en-US" smtClean="0"/>
-              <a:t>3/16/2026</a:t>
+              <a:t>4/10/2026</a:t>
             </a:fld>
             <a:endParaRPr lang="en-US"/>
           </a:p>
@@ -1398,7 +1448,7 @@
           <a:p>
             <a:fld id="{DA6F0F7C-4BCE-44E3-AC6F-932A28F11178}" type="datetimeFigureOut">
               <a:rPr lang="en-US" smtClean="0"/>
-              <a:t>3/16/2026</a:t>
+              <a:t>4/10/2026</a:t>
             </a:fld>
             <a:endParaRPr lang="en-US"/>
           </a:p>
@@ -1810,7 +1860,7 @@
           <a:p>
             <a:fld id="{DA6F0F7C-4BCE-44E3-AC6F-932A28F11178}" type="datetimeFigureOut">
               <a:rPr lang="en-US" smtClean="0"/>
-              <a:t>3/16/2026</a:t>
+              <a:t>4/10/2026</a:t>
             </a:fld>
             <a:endParaRPr lang="en-US"/>
           </a:p>
@@ -1951,7 +2001,7 @@
           <a:p>
             <a:fld id="{DA6F0F7C-4BCE-44E3-AC6F-932A28F11178}" type="datetimeFigureOut">
               <a:rPr lang="en-US" smtClean="0"/>
-              <a:t>3/16/2026</a:t>
+              <a:t>4/10/2026</a:t>
             </a:fld>
             <a:endParaRPr lang="en-US"/>
           </a:p>
@@ -2064,7 +2114,7 @@
           <a:p>
             <a:fld id="{DA6F0F7C-4BCE-44E3-AC6F-932A28F11178}" type="datetimeFigureOut">
               <a:rPr lang="en-US" smtClean="0"/>
-              <a:t>3/16/2026</a:t>
+              <a:t>4/10/2026</a:t>
             </a:fld>
             <a:endParaRPr lang="en-US"/>
           </a:p>
@@ -2375,7 +2425,7 @@
           <a:p>
             <a:fld id="{DA6F0F7C-4BCE-44E3-AC6F-932A28F11178}" type="datetimeFigureOut">
               <a:rPr lang="en-US" smtClean="0"/>
-              <a:t>3/16/2026</a:t>
+              <a:t>4/10/2026</a:t>
             </a:fld>
             <a:endParaRPr lang="en-US"/>
           </a:p>
@@ -2663,7 +2713,7 @@
           <a:p>
             <a:fld id="{DA6F0F7C-4BCE-44E3-AC6F-932A28F11178}" type="datetimeFigureOut">
               <a:rPr lang="en-US" smtClean="0"/>
-              <a:t>3/16/2026</a:t>
+              <a:t>4/10/2026</a:t>
             </a:fld>
             <a:endParaRPr lang="en-US"/>
           </a:p>
@@ -2904,7 +2954,7 @@
           <a:p>
             <a:fld id="{DA6F0F7C-4BCE-44E3-AC6F-932A28F11178}" type="datetimeFigureOut">
               <a:rPr lang="en-US" smtClean="0"/>
-              <a:t>3/16/2026</a:t>
+              <a:t>4/10/2026</a:t>
             </a:fld>
             <a:endParaRPr lang="en-US"/>
           </a:p>
@@ -4780,10 +4830,10 @@
       </p:sp>
       <p:grpSp>
         <p:nvGrpSpPr>
-          <p:cNvPr id="142" name="Group 141">
-            <a:extLst>
-              <a:ext uri="{FF2B5EF4-FFF2-40B4-BE49-F238E27FC236}">
-                <a16:creationId xmlns:a16="http://schemas.microsoft.com/office/drawing/2014/main" id="{10981DF9-3B88-6642-A38A-F557DBD8A271}"/>
+          <p:cNvPr id="2" name="Group 1">
+            <a:extLst>
+              <a:ext uri="{FF2B5EF4-FFF2-40B4-BE49-F238E27FC236}">
+                <a16:creationId xmlns:a16="http://schemas.microsoft.com/office/drawing/2014/main" id="{29B5869D-89AA-074F-A57C-6183A17CB9BA}"/>
               </a:ext>
             </a:extLst>
           </p:cNvPr>
@@ -4793,454 +4843,475 @@
         <p:grpSpPr>
           <a:xfrm>
             <a:off x="7610596" y="1349580"/>
-            <a:ext cx="1799603" cy="2941699"/>
+            <a:ext cx="3542419" cy="3005096"/>
             <a:chOff x="7610596" y="1349580"/>
-            <a:chExt cx="1799603" cy="2941699"/>
+            <a:chExt cx="3542419" cy="3005096"/>
           </a:xfrm>
         </p:grpSpPr>
-        <p:pic>
-          <p:nvPicPr>
-            <p:cNvPr id="125" name="Graphic 124">
+        <p:grpSp>
+          <p:nvGrpSpPr>
+            <p:cNvPr id="142" name="Group 141">
               <a:extLst>
                 <a:ext uri="{FF2B5EF4-FFF2-40B4-BE49-F238E27FC236}">
-                  <a16:creationId xmlns:a16="http://schemas.microsoft.com/office/drawing/2014/main" id="{C79B781B-3EC9-8D56-5649-7E84B7805E5E}"/>
+                  <a16:creationId xmlns:a16="http://schemas.microsoft.com/office/drawing/2014/main" id="{10981DF9-3B88-6642-A38A-F557DBD8A271}"/>
                 </a:ext>
               </a:extLst>
             </p:cNvPr>
-            <p:cNvPicPr>
-              <a:picLocks noChangeAspect="1"/>
-            </p:cNvPicPr>
+            <p:cNvGrpSpPr/>
             <p:nvPr/>
-          </p:nvPicPr>
-          <p:blipFill>
-            <a:blip r:embed="rId10">
-              <a:extLst>
-                <a:ext uri="{28A0092B-C50C-407E-A947-70E740481C1C}">
-                  <a14:useLocalDpi xmlns:a14="http://schemas.microsoft.com/office/drawing/2010/main" val="0"/>
-                </a:ext>
-                <a:ext uri="{96DAC541-7B7A-43D3-8B79-37D633B846F1}">
-                  <asvg:svgBlip xmlns:asvg="http://schemas.microsoft.com/office/drawing/2016/SVG/main" r:embed="rId11"/>
-                </a:ext>
-              </a:extLst>
-            </a:blip>
-            <a:stretch>
-              <a:fillRect/>
-            </a:stretch>
-          </p:blipFill>
-          <p:spPr>
+          </p:nvGrpSpPr>
+          <p:grpSpPr>
             <a:xfrm>
-              <a:off x="7610596" y="3154433"/>
-              <a:ext cx="1799603" cy="1136846"/>
+              <a:off x="7610596" y="1349580"/>
+              <a:ext cx="1799603" cy="2941699"/>
+              <a:chOff x="7610596" y="1349580"/>
+              <a:chExt cx="1799603" cy="2941699"/>
             </a:xfrm>
-            <a:prstGeom prst="rect">
-              <a:avLst/>
-            </a:prstGeom>
-          </p:spPr>
-        </p:pic>
-        <p:pic>
-          <p:nvPicPr>
-            <p:cNvPr id="126" name="Picture 125">
+          </p:grpSpPr>
+          <p:pic>
+            <p:nvPicPr>
+              <p:cNvPr id="125" name="Graphic 124">
+                <a:extLst>
+                  <a:ext uri="{FF2B5EF4-FFF2-40B4-BE49-F238E27FC236}">
+                    <a16:creationId xmlns:a16="http://schemas.microsoft.com/office/drawing/2014/main" id="{C79B781B-3EC9-8D56-5649-7E84B7805E5E}"/>
+                  </a:ext>
+                </a:extLst>
+              </p:cNvPr>
+              <p:cNvPicPr>
+                <a:picLocks noChangeAspect="1"/>
+              </p:cNvPicPr>
+              <p:nvPr/>
+            </p:nvPicPr>
+            <p:blipFill>
+              <a:blip r:embed="rId10">
+                <a:extLst>
+                  <a:ext uri="{28A0092B-C50C-407E-A947-70E740481C1C}">
+                    <a14:useLocalDpi xmlns:a14="http://schemas.microsoft.com/office/drawing/2010/main" val="0"/>
+                  </a:ext>
+                  <a:ext uri="{96DAC541-7B7A-43D3-8B79-37D633B846F1}">
+                    <asvg:svgBlip xmlns:asvg="http://schemas.microsoft.com/office/drawing/2016/SVG/main" r:embed="rId11"/>
+                  </a:ext>
+                </a:extLst>
+              </a:blip>
+              <a:stretch>
+                <a:fillRect/>
+              </a:stretch>
+            </p:blipFill>
+            <p:spPr>
+              <a:xfrm>
+                <a:off x="7610596" y="3154433"/>
+                <a:ext cx="1799603" cy="1136846"/>
+              </a:xfrm>
+              <a:prstGeom prst="rect">
+                <a:avLst/>
+              </a:prstGeom>
+            </p:spPr>
+          </p:pic>
+          <p:pic>
+            <p:nvPicPr>
+              <p:cNvPr id="126" name="Picture 125">
+                <a:extLst>
+                  <a:ext uri="{FF2B5EF4-FFF2-40B4-BE49-F238E27FC236}">
+                    <a16:creationId xmlns:a16="http://schemas.microsoft.com/office/drawing/2014/main" id="{818766DF-CDB2-59A5-14AE-55EEA959C11D}"/>
+                  </a:ext>
+                </a:extLst>
+              </p:cNvPr>
+              <p:cNvPicPr>
+                <a:picLocks noChangeAspect="1"/>
+              </p:cNvPicPr>
+              <p:nvPr/>
+            </p:nvPicPr>
+            <p:blipFill rotWithShape="1">
+              <a:blip r:embed="rId12">
+                <a:extLst>
+                  <a:ext uri="{28A0092B-C50C-407E-A947-70E740481C1C}">
+                    <a14:useLocalDpi xmlns:a14="http://schemas.microsoft.com/office/drawing/2010/main" val="0"/>
+                  </a:ext>
+                </a:extLst>
+              </a:blip>
+              <a:srcRect l="11108" t="19807" r="13646" b="22794"/>
+              <a:stretch/>
+            </p:blipFill>
+            <p:spPr>
+              <a:xfrm>
+                <a:off x="7689053" y="1596574"/>
+                <a:ext cx="1642689" cy="1253061"/>
+              </a:xfrm>
+              <a:prstGeom prst="rect">
+                <a:avLst/>
+              </a:prstGeom>
+            </p:spPr>
+          </p:pic>
+          <p:sp>
+            <p:nvSpPr>
+              <p:cNvPr id="131" name="TextBox 130">
+                <a:extLst>
+                  <a:ext uri="{FF2B5EF4-FFF2-40B4-BE49-F238E27FC236}">
+                    <a16:creationId xmlns:a16="http://schemas.microsoft.com/office/drawing/2014/main" id="{30B447AA-6E7A-E938-36FB-3B18BDD86AA9}"/>
+                  </a:ext>
+                </a:extLst>
+              </p:cNvPr>
+              <p:cNvSpPr txBox="1"/>
+              <p:nvPr/>
+            </p:nvSpPr>
+            <p:spPr>
+              <a:xfrm>
+                <a:off x="8141530" y="1349580"/>
+                <a:ext cx="737734" cy="307777"/>
+              </a:xfrm>
+              <a:prstGeom prst="rect">
+                <a:avLst/>
+              </a:prstGeom>
+              <a:noFill/>
+            </p:spPr>
+            <p:txBody>
+              <a:bodyPr wrap="square" rtlCol="0">
+                <a:spAutoFit/>
+              </a:bodyPr>
+              <a:lstStyle/>
+              <a:p>
+                <a:pPr algn="ctr"/>
+                <a:r>
+                  <a:rPr lang="en-US" sz="1400" dirty="0"/>
+                  <a:t>SHAP</a:t>
+                </a:r>
+              </a:p>
+            </p:txBody>
+          </p:sp>
+          <p:sp>
+            <p:nvSpPr>
+              <p:cNvPr id="133" name="TextBox 132">
+                <a:extLst>
+                  <a:ext uri="{FF2B5EF4-FFF2-40B4-BE49-F238E27FC236}">
+                    <a16:creationId xmlns:a16="http://schemas.microsoft.com/office/drawing/2014/main" id="{2EA89C04-883D-8AC3-FC42-C45F07A23A14}"/>
+                  </a:ext>
+                </a:extLst>
+              </p:cNvPr>
+              <p:cNvSpPr txBox="1"/>
+              <p:nvPr/>
+            </p:nvSpPr>
+            <p:spPr>
+              <a:xfrm>
+                <a:off x="7759960" y="2907557"/>
+                <a:ext cx="1500875" cy="307777"/>
+              </a:xfrm>
+              <a:prstGeom prst="rect">
+                <a:avLst/>
+              </a:prstGeom>
+              <a:noFill/>
+            </p:spPr>
+            <p:txBody>
+              <a:bodyPr wrap="square" rtlCol="0">
+                <a:spAutoFit/>
+              </a:bodyPr>
+              <a:lstStyle/>
+              <a:p>
+                <a:pPr algn="ctr"/>
+                <a:r>
+                  <a:rPr lang="en-US" sz="1400" dirty="0"/>
+                  <a:t>Counterfactuals</a:t>
+                </a:r>
+              </a:p>
+            </p:txBody>
+          </p:sp>
+        </p:grpSp>
+        <p:grpSp>
+          <p:nvGrpSpPr>
+            <p:cNvPr id="143" name="Group 142">
               <a:extLst>
                 <a:ext uri="{FF2B5EF4-FFF2-40B4-BE49-F238E27FC236}">
-                  <a16:creationId xmlns:a16="http://schemas.microsoft.com/office/drawing/2014/main" id="{818766DF-CDB2-59A5-14AE-55EEA959C11D}"/>
+                  <a16:creationId xmlns:a16="http://schemas.microsoft.com/office/drawing/2014/main" id="{44DF905F-D3A1-4FD5-B979-6E405669B5A0}"/>
                 </a:ext>
               </a:extLst>
             </p:cNvPr>
-            <p:cNvPicPr>
-              <a:picLocks noChangeAspect="1"/>
-            </p:cNvPicPr>
+            <p:cNvGrpSpPr/>
             <p:nvPr/>
-          </p:nvPicPr>
-          <p:blipFill rotWithShape="1">
-            <a:blip r:embed="rId12">
-              <a:extLst>
-                <a:ext uri="{28A0092B-C50C-407E-A947-70E740481C1C}">
-                  <a14:useLocalDpi xmlns:a14="http://schemas.microsoft.com/office/drawing/2010/main" val="0"/>
-                </a:ext>
-              </a:extLst>
-            </a:blip>
-            <a:srcRect l="11108" t="19807" r="13646" b="22794"/>
-            <a:stretch/>
-          </p:blipFill>
-          <p:spPr>
+          </p:nvGrpSpPr>
+          <p:grpSpPr>
             <a:xfrm>
-              <a:off x="7689053" y="1596574"/>
-              <a:ext cx="1642689" cy="1253061"/>
+              <a:off x="9454227" y="1349580"/>
+              <a:ext cx="1698788" cy="3005096"/>
+              <a:chOff x="9454227" y="1349580"/>
+              <a:chExt cx="1698788" cy="3005096"/>
             </a:xfrm>
-            <a:prstGeom prst="rect">
-              <a:avLst/>
-            </a:prstGeom>
-          </p:spPr>
-        </p:pic>
-        <p:sp>
-          <p:nvSpPr>
-            <p:cNvPr id="131" name="TextBox 130">
-              <a:extLst>
-                <a:ext uri="{FF2B5EF4-FFF2-40B4-BE49-F238E27FC236}">
-                  <a16:creationId xmlns:a16="http://schemas.microsoft.com/office/drawing/2014/main" id="{30B447AA-6E7A-E938-36FB-3B18BDD86AA9}"/>
-                </a:ext>
-              </a:extLst>
-            </p:cNvPr>
-            <p:cNvSpPr txBox="1"/>
-            <p:nvPr/>
-          </p:nvSpPr>
-          <p:spPr>
-            <a:xfrm>
-              <a:off x="8141530" y="1349580"/>
-              <a:ext cx="737734" cy="307777"/>
-            </a:xfrm>
-            <a:prstGeom prst="rect">
-              <a:avLst/>
-            </a:prstGeom>
-            <a:noFill/>
-          </p:spPr>
-          <p:txBody>
-            <a:bodyPr wrap="square" rtlCol="0">
-              <a:spAutoFit/>
-            </a:bodyPr>
-            <a:lstStyle/>
-            <a:p>
-              <a:pPr algn="ctr"/>
-              <a:r>
-                <a:rPr lang="en-US" sz="1400" dirty="0"/>
-                <a:t>SHAP</a:t>
-              </a:r>
-            </a:p>
-          </p:txBody>
-        </p:sp>
-        <p:sp>
-          <p:nvSpPr>
-            <p:cNvPr id="133" name="TextBox 132">
-              <a:extLst>
-                <a:ext uri="{FF2B5EF4-FFF2-40B4-BE49-F238E27FC236}">
-                  <a16:creationId xmlns:a16="http://schemas.microsoft.com/office/drawing/2014/main" id="{2EA89C04-883D-8AC3-FC42-C45F07A23A14}"/>
-                </a:ext>
-              </a:extLst>
-            </p:cNvPr>
-            <p:cNvSpPr txBox="1"/>
-            <p:nvPr/>
-          </p:nvSpPr>
-          <p:spPr>
-            <a:xfrm>
-              <a:off x="7759960" y="2907557"/>
-              <a:ext cx="1500875" cy="307777"/>
-            </a:xfrm>
-            <a:prstGeom prst="rect">
-              <a:avLst/>
-            </a:prstGeom>
-            <a:noFill/>
-          </p:spPr>
-          <p:txBody>
-            <a:bodyPr wrap="square" rtlCol="0">
-              <a:spAutoFit/>
-            </a:bodyPr>
-            <a:lstStyle/>
-            <a:p>
-              <a:pPr algn="ctr"/>
-              <a:r>
-                <a:rPr lang="en-US" sz="1400" dirty="0"/>
-                <a:t>Counterfactuals</a:t>
-              </a:r>
-            </a:p>
-          </p:txBody>
-        </p:sp>
-      </p:grpSp>
-      <p:grpSp>
-        <p:nvGrpSpPr>
-          <p:cNvPr id="143" name="Group 142">
-            <a:extLst>
-              <a:ext uri="{FF2B5EF4-FFF2-40B4-BE49-F238E27FC236}">
-                <a16:creationId xmlns:a16="http://schemas.microsoft.com/office/drawing/2014/main" id="{44DF905F-D3A1-4FD5-B979-6E405669B5A0}"/>
-              </a:ext>
-            </a:extLst>
-          </p:cNvPr>
-          <p:cNvGrpSpPr/>
-          <p:nvPr/>
-        </p:nvGrpSpPr>
-        <p:grpSpPr>
-          <a:xfrm>
-            <a:off x="9454227" y="1349580"/>
-            <a:ext cx="1698788" cy="3005096"/>
-            <a:chOff x="9454227" y="1349580"/>
-            <a:chExt cx="1698788" cy="3005096"/>
-          </a:xfrm>
-        </p:grpSpPr>
-        <p:pic>
-          <p:nvPicPr>
-            <p:cNvPr id="127" name="Graphic 126">
-              <a:extLst>
-                <a:ext uri="{FF2B5EF4-FFF2-40B4-BE49-F238E27FC236}">
-                  <a16:creationId xmlns:a16="http://schemas.microsoft.com/office/drawing/2014/main" id="{3FE957ED-4E4C-EFCC-3B97-2B55171D3A8D}"/>
-                </a:ext>
-              </a:extLst>
-            </p:cNvPr>
-            <p:cNvPicPr>
-              <a:picLocks noChangeAspect="1"/>
-            </p:cNvPicPr>
-            <p:nvPr/>
-          </p:nvPicPr>
-          <p:blipFill rotWithShape="1">
-            <a:blip r:embed="rId13">
-              <a:extLst>
-                <a:ext uri="{28A0092B-C50C-407E-A947-70E740481C1C}">
-                  <a14:useLocalDpi xmlns:a14="http://schemas.microsoft.com/office/drawing/2010/main" val="0"/>
-                </a:ext>
-                <a:ext uri="{96DAC541-7B7A-43D3-8B79-37D633B846F1}">
-                  <asvg:svgBlip xmlns:asvg="http://schemas.microsoft.com/office/drawing/2016/SVG/main" r:embed="rId14"/>
-                </a:ext>
-              </a:extLst>
-            </a:blip>
-            <a:srcRect t="12321" b="13057"/>
-            <a:stretch/>
-          </p:blipFill>
-          <p:spPr>
-            <a:xfrm>
-              <a:off x="9454227" y="1614810"/>
-              <a:ext cx="1630322" cy="1216589"/>
-            </a:xfrm>
-            <a:prstGeom prst="rect">
-              <a:avLst/>
-            </a:prstGeom>
-          </p:spPr>
-        </p:pic>
-        <p:sp>
-          <p:nvSpPr>
-            <p:cNvPr id="132" name="TextBox 131">
-              <a:extLst>
-                <a:ext uri="{FF2B5EF4-FFF2-40B4-BE49-F238E27FC236}">
-                  <a16:creationId xmlns:a16="http://schemas.microsoft.com/office/drawing/2014/main" id="{42C94301-9EFA-C916-8445-A8D784F80786}"/>
-                </a:ext>
-              </a:extLst>
-            </p:cNvPr>
-            <p:cNvSpPr txBox="1"/>
-            <p:nvPr/>
-          </p:nvSpPr>
-          <p:spPr>
-            <a:xfrm>
-              <a:off x="9743895" y="1349580"/>
-              <a:ext cx="1050987" cy="307777"/>
-            </a:xfrm>
-            <a:prstGeom prst="rect">
-              <a:avLst/>
-            </a:prstGeom>
-            <a:noFill/>
-          </p:spPr>
-          <p:txBody>
-            <a:bodyPr wrap="square" rtlCol="0">
-              <a:spAutoFit/>
-            </a:bodyPr>
-            <a:lstStyle/>
-            <a:p>
-              <a:pPr algn="ctr"/>
-              <a:r>
-                <a:rPr lang="en-US" sz="1400" dirty="0" err="1"/>
-                <a:t>MolAnchor</a:t>
-              </a:r>
-              <a:endParaRPr lang="en-US" sz="1400" dirty="0"/>
-            </a:p>
-          </p:txBody>
-        </p:sp>
-        <p:sp>
-          <p:nvSpPr>
-            <p:cNvPr id="135" name="TextBox 134">
-              <a:extLst>
-                <a:ext uri="{FF2B5EF4-FFF2-40B4-BE49-F238E27FC236}">
-                  <a16:creationId xmlns:a16="http://schemas.microsoft.com/office/drawing/2014/main" id="{C4FCF618-49AF-DF82-8B0D-58D9D04FA886}"/>
-                </a:ext>
-              </a:extLst>
-            </p:cNvPr>
-            <p:cNvSpPr txBox="1"/>
-            <p:nvPr/>
-          </p:nvSpPr>
-          <p:spPr>
-            <a:xfrm>
-              <a:off x="9518951" y="2907557"/>
-              <a:ext cx="1500875" cy="307777"/>
-            </a:xfrm>
-            <a:prstGeom prst="rect">
-              <a:avLst/>
-            </a:prstGeom>
-            <a:noFill/>
-          </p:spPr>
-          <p:txBody>
-            <a:bodyPr wrap="square" rtlCol="0">
-              <a:spAutoFit/>
-            </a:bodyPr>
-            <a:lstStyle/>
-            <a:p>
-              <a:pPr algn="ctr"/>
-              <a:r>
-                <a:rPr lang="en-US" sz="1400" dirty="0" err="1"/>
-                <a:t>MolCE</a:t>
-              </a:r>
-              <a:endParaRPr lang="en-US" sz="1400" dirty="0"/>
-            </a:p>
-          </p:txBody>
-        </p:sp>
-        <p:pic>
-          <p:nvPicPr>
-            <p:cNvPr id="140" name="Graphic 139">
-              <a:extLst>
-                <a:ext uri="{FF2B5EF4-FFF2-40B4-BE49-F238E27FC236}">
-                  <a16:creationId xmlns:a16="http://schemas.microsoft.com/office/drawing/2014/main" id="{A92B0211-A93B-9038-C90D-1361227781BE}"/>
-                </a:ext>
-              </a:extLst>
-            </p:cNvPr>
-            <p:cNvPicPr>
-              <a:picLocks noChangeAspect="1"/>
-            </p:cNvPicPr>
-            <p:nvPr/>
-          </p:nvPicPr>
-          <p:blipFill>
-            <a:blip r:embed="rId15">
-              <a:extLst>
-                <a:ext uri="{28A0092B-C50C-407E-A947-70E740481C1C}">
-                  <a14:useLocalDpi xmlns:a14="http://schemas.microsoft.com/office/drawing/2010/main" val="0"/>
-                </a:ext>
-                <a:ext uri="{96DAC541-7B7A-43D3-8B79-37D633B846F1}">
-                  <asvg:svgBlip xmlns:asvg="http://schemas.microsoft.com/office/drawing/2016/SVG/main" r:embed="rId16"/>
-                </a:ext>
-              </a:extLst>
-            </a:blip>
-            <a:stretch>
-              <a:fillRect/>
-            </a:stretch>
-          </p:blipFill>
-          <p:spPr>
-            <a:xfrm>
-              <a:off x="9493338" y="3313376"/>
-              <a:ext cx="1659677" cy="726753"/>
-            </a:xfrm>
-            <a:prstGeom prst="rect">
-              <a:avLst/>
-            </a:prstGeom>
-          </p:spPr>
-        </p:pic>
-        <mc:AlternateContent xmlns:mc="http://schemas.openxmlformats.org/markup-compatibility/2006">
-          <mc:Choice xmlns:a14="http://schemas.microsoft.com/office/drawing/2010/main" Requires="a14">
-            <p:sp>
-              <p:nvSpPr>
-                <p:cNvPr id="141" name="TextBox 140">
-                  <a:extLst>
-                    <a:ext uri="{FF2B5EF4-FFF2-40B4-BE49-F238E27FC236}">
-                      <a16:creationId xmlns:a16="http://schemas.microsoft.com/office/drawing/2014/main" id="{2B95AB89-8A8A-1216-8C19-F08323741F34}"/>
-                    </a:ext>
-                  </a:extLst>
-                </p:cNvPr>
-                <p:cNvSpPr txBox="1"/>
-                <p:nvPr/>
-              </p:nvSpPr>
-              <p:spPr>
-                <a:xfrm>
-                  <a:off x="9688952" y="4046899"/>
-                  <a:ext cx="1268448" cy="307777"/>
-                </a:xfrm>
-                <a:prstGeom prst="rect">
-                  <a:avLst/>
-                </a:prstGeom>
-                <a:noFill/>
-              </p:spPr>
-              <p:txBody>
-                <a:bodyPr wrap="square" rtlCol="0">
-                  <a:spAutoFit/>
-                </a:bodyPr>
-                <a:lstStyle/>
-                <a:p>
-                  <a:pPr algn="ctr"/>
-                  <a14:m>
-                    <m:oMathPara xmlns:m="http://schemas.openxmlformats.org/officeDocument/2006/math">
-                      <m:oMathParaPr>
-                        <m:jc m:val="centerGroup"/>
-                      </m:oMathParaPr>
-                      <m:oMath xmlns:m="http://schemas.openxmlformats.org/officeDocument/2006/math">
-                        <m:sSubSup>
-                          <m:sSubSupPr>
-                            <m:ctrlPr>
-                              <a:rPr lang="el-GR" sz="1400" i="1" smtClean="0">
-                                <a:latin typeface="Cambria Math" panose="02040503050406030204" pitchFamily="18" charset="0"/>
-                              </a:rPr>
-                            </m:ctrlPr>
-                          </m:sSubSupPr>
-                          <m:e>
-                            <m:r>
-                              <m:rPr>
-                                <m:nor/>
-                              </m:rPr>
-                              <a:rPr lang="el-GR" sz="1400" smtClean="0"/>
-                              <m:t>δ</m:t>
-                            </m:r>
-                          </m:e>
-                          <m:sub>
-                            <m:r>
-                              <m:rPr>
-                                <m:nor/>
-                              </m:rPr>
-                              <a:rPr lang="en-US" sz="800" dirty="0" smtClean="0"/>
-                              <m:t> </m:t>
-                            </m:r>
-                          </m:sub>
-                          <m:sup>
-                            <m:r>
-                              <a:rPr lang="en-US" sz="1400" b="0" i="1" smtClean="0">
-                                <a:latin typeface="Cambria Math" panose="02040503050406030204" pitchFamily="18" charset="0"/>
-                              </a:rPr>
-                              <m:t>𝑐𝑜𝑛𝑡𝑟</m:t>
-                            </m:r>
-                          </m:sup>
-                        </m:sSubSup>
-                      </m:oMath>
-                    </m:oMathPara>
-                  </a14:m>
-                  <a:endParaRPr lang="en-US" sz="1400" dirty="0"/>
-                </a:p>
-              </p:txBody>
-            </p:sp>
-          </mc:Choice>
-          <mc:Fallback>
-            <p:sp>
-              <p:nvSpPr>
-                <p:cNvPr id="141" name="TextBox 140">
-                  <a:extLst>
-                    <a:ext uri="{FF2B5EF4-FFF2-40B4-BE49-F238E27FC236}">
-                      <a16:creationId xmlns:a16="http://schemas.microsoft.com/office/drawing/2014/main" id="{2B95AB89-8A8A-1216-8C19-F08323741F34}"/>
-                    </a:ext>
-                  </a:extLst>
-                </p:cNvPr>
-                <p:cNvSpPr txBox="1">
-                  <a:spLocks noRot="1" noChangeAspect="1" noMove="1" noResize="1" noEditPoints="1" noAdjustHandles="1" noChangeArrowheads="1" noChangeShapeType="1" noTextEdit="1"/>
-                </p:cNvSpPr>
-                <p:nvPr/>
-              </p:nvSpPr>
-              <p:spPr>
-                <a:xfrm>
-                  <a:off x="9688952" y="4046899"/>
-                  <a:ext cx="1268448" cy="307777"/>
-                </a:xfrm>
-                <a:prstGeom prst="rect">
-                  <a:avLst/>
-                </a:prstGeom>
-                <a:blipFill>
-                  <a:blip r:embed="rId17"/>
-                  <a:stretch>
-                    <a:fillRect/>
-                  </a:stretch>
-                </a:blipFill>
-              </p:spPr>
-              <p:txBody>
-                <a:bodyPr/>
-                <a:lstStyle/>
-                <a:p>
-                  <a:r>
-                    <a:rPr lang="en-US">
-                      <a:noFill/>
-                    </a:rPr>
-                    <a:t> </a:t>
-                  </a:r>
-                </a:p>
-              </p:txBody>
-            </p:sp>
-          </mc:Fallback>
-        </mc:AlternateContent>
+          </p:grpSpPr>
+          <p:pic>
+            <p:nvPicPr>
+              <p:cNvPr id="127" name="Graphic 126">
+                <a:extLst>
+                  <a:ext uri="{FF2B5EF4-FFF2-40B4-BE49-F238E27FC236}">
+                    <a16:creationId xmlns:a16="http://schemas.microsoft.com/office/drawing/2014/main" id="{3FE957ED-4E4C-EFCC-3B97-2B55171D3A8D}"/>
+                  </a:ext>
+                </a:extLst>
+              </p:cNvPr>
+              <p:cNvPicPr>
+                <a:picLocks noChangeAspect="1"/>
+              </p:cNvPicPr>
+              <p:nvPr/>
+            </p:nvPicPr>
+            <p:blipFill rotWithShape="1">
+              <a:blip r:embed="rId13">
+                <a:extLst>
+                  <a:ext uri="{28A0092B-C50C-407E-A947-70E740481C1C}">
+                    <a14:useLocalDpi xmlns:a14="http://schemas.microsoft.com/office/drawing/2010/main" val="0"/>
+                  </a:ext>
+                  <a:ext uri="{96DAC541-7B7A-43D3-8B79-37D633B846F1}">
+                    <asvg:svgBlip xmlns:asvg="http://schemas.microsoft.com/office/drawing/2016/SVG/main" r:embed="rId14"/>
+                  </a:ext>
+                </a:extLst>
+              </a:blip>
+              <a:srcRect t="12321" b="13057"/>
+              <a:stretch/>
+            </p:blipFill>
+            <p:spPr>
+              <a:xfrm>
+                <a:off x="9454227" y="1614810"/>
+                <a:ext cx="1630322" cy="1216589"/>
+              </a:xfrm>
+              <a:prstGeom prst="rect">
+                <a:avLst/>
+              </a:prstGeom>
+            </p:spPr>
+          </p:pic>
+          <p:sp>
+            <p:nvSpPr>
+              <p:cNvPr id="132" name="TextBox 131">
+                <a:extLst>
+                  <a:ext uri="{FF2B5EF4-FFF2-40B4-BE49-F238E27FC236}">
+                    <a16:creationId xmlns:a16="http://schemas.microsoft.com/office/drawing/2014/main" id="{42C94301-9EFA-C916-8445-A8D784F80786}"/>
+                  </a:ext>
+                </a:extLst>
+              </p:cNvPr>
+              <p:cNvSpPr txBox="1"/>
+              <p:nvPr/>
+            </p:nvSpPr>
+            <p:spPr>
+              <a:xfrm>
+                <a:off x="9743895" y="1349580"/>
+                <a:ext cx="1050987" cy="307777"/>
+              </a:xfrm>
+              <a:prstGeom prst="rect">
+                <a:avLst/>
+              </a:prstGeom>
+              <a:noFill/>
+            </p:spPr>
+            <p:txBody>
+              <a:bodyPr wrap="square" rtlCol="0">
+                <a:spAutoFit/>
+              </a:bodyPr>
+              <a:lstStyle/>
+              <a:p>
+                <a:pPr algn="ctr"/>
+                <a:r>
+                  <a:rPr lang="en-US" sz="1400" dirty="0" err="1"/>
+                  <a:t>MolAnchor</a:t>
+                </a:r>
+                <a:endParaRPr lang="en-US" sz="1400" dirty="0"/>
+              </a:p>
+            </p:txBody>
+          </p:sp>
+          <p:sp>
+            <p:nvSpPr>
+              <p:cNvPr id="135" name="TextBox 134">
+                <a:extLst>
+                  <a:ext uri="{FF2B5EF4-FFF2-40B4-BE49-F238E27FC236}">
+                    <a16:creationId xmlns:a16="http://schemas.microsoft.com/office/drawing/2014/main" id="{C4FCF618-49AF-DF82-8B0D-58D9D04FA886}"/>
+                  </a:ext>
+                </a:extLst>
+              </p:cNvPr>
+              <p:cNvSpPr txBox="1"/>
+              <p:nvPr/>
+            </p:nvSpPr>
+            <p:spPr>
+              <a:xfrm>
+                <a:off x="9518951" y="2907557"/>
+                <a:ext cx="1500875" cy="307777"/>
+              </a:xfrm>
+              <a:prstGeom prst="rect">
+                <a:avLst/>
+              </a:prstGeom>
+              <a:noFill/>
+            </p:spPr>
+            <p:txBody>
+              <a:bodyPr wrap="square" rtlCol="0">
+                <a:spAutoFit/>
+              </a:bodyPr>
+              <a:lstStyle/>
+              <a:p>
+                <a:pPr algn="ctr"/>
+                <a:r>
+                  <a:rPr lang="en-US" sz="1400" dirty="0" err="1"/>
+                  <a:t>MolCE</a:t>
+                </a:r>
+                <a:endParaRPr lang="en-US" sz="1400" dirty="0"/>
+              </a:p>
+            </p:txBody>
+          </p:sp>
+          <p:pic>
+            <p:nvPicPr>
+              <p:cNvPr id="140" name="Graphic 139">
+                <a:extLst>
+                  <a:ext uri="{FF2B5EF4-FFF2-40B4-BE49-F238E27FC236}">
+                    <a16:creationId xmlns:a16="http://schemas.microsoft.com/office/drawing/2014/main" id="{A92B0211-A93B-9038-C90D-1361227781BE}"/>
+                  </a:ext>
+                </a:extLst>
+              </p:cNvPr>
+              <p:cNvPicPr>
+                <a:picLocks noChangeAspect="1"/>
+              </p:cNvPicPr>
+              <p:nvPr/>
+            </p:nvPicPr>
+            <p:blipFill>
+              <a:blip r:embed="rId15">
+                <a:extLst>
+                  <a:ext uri="{28A0092B-C50C-407E-A947-70E740481C1C}">
+                    <a14:useLocalDpi xmlns:a14="http://schemas.microsoft.com/office/drawing/2010/main" val="0"/>
+                  </a:ext>
+                  <a:ext uri="{96DAC541-7B7A-43D3-8B79-37D633B846F1}">
+                    <asvg:svgBlip xmlns:asvg="http://schemas.microsoft.com/office/drawing/2016/SVG/main" r:embed="rId16"/>
+                  </a:ext>
+                </a:extLst>
+              </a:blip>
+              <a:stretch>
+                <a:fillRect/>
+              </a:stretch>
+            </p:blipFill>
+            <p:spPr>
+              <a:xfrm>
+                <a:off x="9493338" y="3313376"/>
+                <a:ext cx="1659677" cy="726753"/>
+              </a:xfrm>
+              <a:prstGeom prst="rect">
+                <a:avLst/>
+              </a:prstGeom>
+            </p:spPr>
+          </p:pic>
+          <mc:AlternateContent xmlns:mc="http://schemas.openxmlformats.org/markup-compatibility/2006" xmlns:a14="http://schemas.microsoft.com/office/drawing/2010/main">
+            <mc:Choice Requires="a14">
+              <p:sp>
+                <p:nvSpPr>
+                  <p:cNvPr id="141" name="TextBox 140">
+                    <a:extLst>
+                      <a:ext uri="{FF2B5EF4-FFF2-40B4-BE49-F238E27FC236}">
+                        <a16:creationId xmlns:a16="http://schemas.microsoft.com/office/drawing/2014/main" id="{2B95AB89-8A8A-1216-8C19-F08323741F34}"/>
+                      </a:ext>
+                    </a:extLst>
+                  </p:cNvPr>
+                  <p:cNvSpPr txBox="1"/>
+                  <p:nvPr/>
+                </p:nvSpPr>
+                <p:spPr>
+                  <a:xfrm>
+                    <a:off x="9688952" y="4046899"/>
+                    <a:ext cx="1268448" cy="307777"/>
+                  </a:xfrm>
+                  <a:prstGeom prst="rect">
+                    <a:avLst/>
+                  </a:prstGeom>
+                  <a:noFill/>
+                </p:spPr>
+                <p:txBody>
+                  <a:bodyPr wrap="square" rtlCol="0">
+                    <a:spAutoFit/>
+                  </a:bodyPr>
+                  <a:lstStyle/>
+                  <a:p>
+                    <a:pPr algn="ctr"/>
+                    <a14:m>
+                      <m:oMathPara xmlns:m="http://schemas.openxmlformats.org/officeDocument/2006/math">
+                        <m:oMathParaPr>
+                          <m:jc m:val="centerGroup"/>
+                        </m:oMathParaPr>
+                        <m:oMath xmlns:m="http://schemas.openxmlformats.org/officeDocument/2006/math">
+                          <m:sSubSup>
+                            <m:sSubSupPr>
+                              <m:ctrlPr>
+                                <a:rPr lang="el-GR" sz="1400" i="1" smtClean="0">
+                                  <a:latin typeface="Cambria Math" panose="02040503050406030204" pitchFamily="18" charset="0"/>
+                                </a:rPr>
+                              </m:ctrlPr>
+                            </m:sSubSupPr>
+                            <m:e>
+                              <m:r>
+                                <m:rPr>
+                                  <m:nor/>
+                                </m:rPr>
+                                <a:rPr lang="el-GR" sz="1400" smtClean="0"/>
+                                <m:t>δ</m:t>
+                              </m:r>
+                            </m:e>
+                            <m:sub>
+                              <m:r>
+                                <m:rPr>
+                                  <m:nor/>
+                                </m:rPr>
+                                <a:rPr lang="en-US" sz="800" dirty="0" smtClean="0"/>
+                                <m:t> </m:t>
+                              </m:r>
+                            </m:sub>
+                            <m:sup>
+                              <m:r>
+                                <a:rPr lang="en-US" sz="1400" b="0" i="1" smtClean="0">
+                                  <a:latin typeface="Cambria Math" panose="02040503050406030204" pitchFamily="18" charset="0"/>
+                                </a:rPr>
+                                <m:t>𝑐𝑜𝑛𝑡𝑟</m:t>
+                              </m:r>
+                            </m:sup>
+                          </m:sSubSup>
+                        </m:oMath>
+                      </m:oMathPara>
+                    </a14:m>
+                    <a:endParaRPr lang="en-US" sz="1400" dirty="0"/>
+                  </a:p>
+                </p:txBody>
+              </p:sp>
+            </mc:Choice>
+            <mc:Fallback xmlns="">
+              <p:sp>
+                <p:nvSpPr>
+                  <p:cNvPr id="141" name="TextBox 140">
+                    <a:extLst>
+                      <a:ext uri="{FF2B5EF4-FFF2-40B4-BE49-F238E27FC236}">
+                        <a16:creationId xmlns:a16="http://schemas.microsoft.com/office/drawing/2014/main" id="{2B95AB89-8A8A-1216-8C19-F08323741F34}"/>
+                      </a:ext>
+                    </a:extLst>
+                  </p:cNvPr>
+                  <p:cNvSpPr txBox="1">
+                    <a:spLocks noRot="1" noChangeAspect="1" noMove="1" noResize="1" noEditPoints="1" noAdjustHandles="1" noChangeArrowheads="1" noChangeShapeType="1" noTextEdit="1"/>
+                  </p:cNvSpPr>
+                  <p:nvPr/>
+                </p:nvSpPr>
+                <p:spPr>
+                  <a:xfrm>
+                    <a:off x="9688952" y="4046899"/>
+                    <a:ext cx="1268448" cy="307777"/>
+                  </a:xfrm>
+                  <a:prstGeom prst="rect">
+                    <a:avLst/>
+                  </a:prstGeom>
+                  <a:blipFill>
+                    <a:blip r:embed="rId17"/>
+                    <a:stretch>
+                      <a:fillRect/>
+                    </a:stretch>
+                  </a:blipFill>
+                </p:spPr>
+                <p:txBody>
+                  <a:bodyPr/>
+                  <a:lstStyle/>
+                  <a:p>
+                    <a:r>
+                      <a:rPr lang="en-US">
+                        <a:noFill/>
+                      </a:rPr>
+                      <a:t> </a:t>
+                    </a:r>
+                  </a:p>
+                </p:txBody>
+              </p:sp>
+            </mc:Fallback>
+          </mc:AlternateContent>
+        </p:grpSp>
       </p:grpSp>
     </p:spTree>
     <p:extLst>

--- a/slides/figures_AI_agent.pptx
+++ b/slides/figures_AI_agent.pptx
@@ -6,6 +6,7 @@
   </p:sldMasterIdLst>
   <p:sldIdLst>
     <p:sldId id="256" r:id="rId2"/>
+    <p:sldId id="257" r:id="rId3"/>
   </p:sldIdLst>
   <p:sldSz cx="12192000" cy="6858000"/>
   <p:notesSz cx="6858000" cy="9144000"/>
@@ -304,7 +305,7 @@
           <a:p>
             <a:fld id="{DA6F0F7C-4BCE-44E3-AC6F-932A28F11178}" type="datetimeFigureOut">
               <a:rPr lang="en-US" smtClean="0"/>
-              <a:t>4/10/2026</a:t>
+              <a:t>4/15/2026</a:t>
             </a:fld>
             <a:endParaRPr lang="en-US"/>
           </a:p>
@@ -502,7 +503,7 @@
           <a:p>
             <a:fld id="{DA6F0F7C-4BCE-44E3-AC6F-932A28F11178}" type="datetimeFigureOut">
               <a:rPr lang="en-US" smtClean="0"/>
-              <a:t>4/10/2026</a:t>
+              <a:t>4/15/2026</a:t>
             </a:fld>
             <a:endParaRPr lang="en-US"/>
           </a:p>
@@ -710,7 +711,7 @@
           <a:p>
             <a:fld id="{DA6F0F7C-4BCE-44E3-AC6F-932A28F11178}" type="datetimeFigureOut">
               <a:rPr lang="en-US" smtClean="0"/>
-              <a:t>4/10/2026</a:t>
+              <a:t>4/15/2026</a:t>
             </a:fld>
             <a:endParaRPr lang="en-US"/>
           </a:p>
@@ -908,7 +909,7 @@
           <a:p>
             <a:fld id="{DA6F0F7C-4BCE-44E3-AC6F-932A28F11178}" type="datetimeFigureOut">
               <a:rPr lang="en-US" smtClean="0"/>
-              <a:t>4/10/2026</a:t>
+              <a:t>4/15/2026</a:t>
             </a:fld>
             <a:endParaRPr lang="en-US"/>
           </a:p>
@@ -1183,7 +1184,7 @@
           <a:p>
             <a:fld id="{DA6F0F7C-4BCE-44E3-AC6F-932A28F11178}" type="datetimeFigureOut">
               <a:rPr lang="en-US" smtClean="0"/>
-              <a:t>4/10/2026</a:t>
+              <a:t>4/15/2026</a:t>
             </a:fld>
             <a:endParaRPr lang="en-US"/>
           </a:p>
@@ -1448,7 +1449,7 @@
           <a:p>
             <a:fld id="{DA6F0F7C-4BCE-44E3-AC6F-932A28F11178}" type="datetimeFigureOut">
               <a:rPr lang="en-US" smtClean="0"/>
-              <a:t>4/10/2026</a:t>
+              <a:t>4/15/2026</a:t>
             </a:fld>
             <a:endParaRPr lang="en-US"/>
           </a:p>
@@ -1860,7 +1861,7 @@
           <a:p>
             <a:fld id="{DA6F0F7C-4BCE-44E3-AC6F-932A28F11178}" type="datetimeFigureOut">
               <a:rPr lang="en-US" smtClean="0"/>
-              <a:t>4/10/2026</a:t>
+              <a:t>4/15/2026</a:t>
             </a:fld>
             <a:endParaRPr lang="en-US"/>
           </a:p>
@@ -2001,7 +2002,7 @@
           <a:p>
             <a:fld id="{DA6F0F7C-4BCE-44E3-AC6F-932A28F11178}" type="datetimeFigureOut">
               <a:rPr lang="en-US" smtClean="0"/>
-              <a:t>4/10/2026</a:t>
+              <a:t>4/15/2026</a:t>
             </a:fld>
             <a:endParaRPr lang="en-US"/>
           </a:p>
@@ -2114,7 +2115,7 @@
           <a:p>
             <a:fld id="{DA6F0F7C-4BCE-44E3-AC6F-932A28F11178}" type="datetimeFigureOut">
               <a:rPr lang="en-US" smtClean="0"/>
-              <a:t>4/10/2026</a:t>
+              <a:t>4/15/2026</a:t>
             </a:fld>
             <a:endParaRPr lang="en-US"/>
           </a:p>
@@ -2425,7 +2426,7 @@
           <a:p>
             <a:fld id="{DA6F0F7C-4BCE-44E3-AC6F-932A28F11178}" type="datetimeFigureOut">
               <a:rPr lang="en-US" smtClean="0"/>
-              <a:t>4/10/2026</a:t>
+              <a:t>4/15/2026</a:t>
             </a:fld>
             <a:endParaRPr lang="en-US"/>
           </a:p>
@@ -2713,7 +2714,7 @@
           <a:p>
             <a:fld id="{DA6F0F7C-4BCE-44E3-AC6F-932A28F11178}" type="datetimeFigureOut">
               <a:rPr lang="en-US" smtClean="0"/>
-              <a:t>4/10/2026</a:t>
+              <a:t>4/15/2026</a:t>
             </a:fld>
             <a:endParaRPr lang="en-US"/>
           </a:p>
@@ -2954,7 +2955,7 @@
           <a:p>
             <a:fld id="{DA6F0F7C-4BCE-44E3-AC6F-932A28F11178}" type="datetimeFigureOut">
               <a:rPr lang="en-US" smtClean="0"/>
-              <a:t>4/10/2026</a:t>
+              <a:t>4/15/2026</a:t>
             </a:fld>
             <a:endParaRPr lang="en-US"/>
           </a:p>
@@ -5326,6 +5327,2085 @@
 </p:sld>
 </file>
 
+<file path=ppt/slides/slide2.xml><?xml version="1.0" encoding="utf-8"?>
+<p:sld xmlns:a="http://schemas.openxmlformats.org/drawingml/2006/main" xmlns:r="http://schemas.openxmlformats.org/officeDocument/2006/relationships" xmlns:p="http://schemas.openxmlformats.org/presentationml/2006/main">
+  <p:cSld>
+    <p:spTree>
+      <p:nvGrpSpPr>
+        <p:cNvPr id="1" name=""/>
+        <p:cNvGrpSpPr/>
+        <p:nvPr/>
+      </p:nvGrpSpPr>
+      <p:grpSpPr>
+        <a:xfrm>
+          <a:off x="0" y="0"/>
+          <a:ext cx="0" cy="0"/>
+          <a:chOff x="0" y="0"/>
+          <a:chExt cx="0" cy="0"/>
+        </a:xfrm>
+      </p:grpSpPr>
+      <p:grpSp>
+        <p:nvGrpSpPr>
+          <p:cNvPr id="21" name="Group 20">
+            <a:extLst>
+              <a:ext uri="{FF2B5EF4-FFF2-40B4-BE49-F238E27FC236}">
+                <a16:creationId xmlns:a16="http://schemas.microsoft.com/office/drawing/2014/main" id="{E86EE5E3-FE9F-4121-B9A5-B37A7ABDE94A}"/>
+              </a:ext>
+            </a:extLst>
+          </p:cNvPr>
+          <p:cNvGrpSpPr/>
+          <p:nvPr/>
+        </p:nvGrpSpPr>
+        <p:grpSpPr>
+          <a:xfrm>
+            <a:off x="85665" y="58758"/>
+            <a:ext cx="11264427" cy="4786059"/>
+            <a:chOff x="85665" y="58758"/>
+            <a:chExt cx="11264427" cy="4786059"/>
+          </a:xfrm>
+        </p:grpSpPr>
+        <p:grpSp>
+          <p:nvGrpSpPr>
+            <p:cNvPr id="20" name="Group 19">
+              <a:extLst>
+                <a:ext uri="{FF2B5EF4-FFF2-40B4-BE49-F238E27FC236}">
+                  <a16:creationId xmlns:a16="http://schemas.microsoft.com/office/drawing/2014/main" id="{F0EBE845-DF25-4DC2-8967-4CA69A85C48A}"/>
+                </a:ext>
+              </a:extLst>
+            </p:cNvPr>
+            <p:cNvGrpSpPr/>
+            <p:nvPr/>
+          </p:nvGrpSpPr>
+          <p:grpSpPr>
+            <a:xfrm>
+              <a:off x="85665" y="58758"/>
+              <a:ext cx="11264427" cy="4786059"/>
+              <a:chOff x="85665" y="58758"/>
+              <a:chExt cx="11264427" cy="4786059"/>
+            </a:xfrm>
+          </p:grpSpPr>
+          <p:sp>
+            <p:nvSpPr>
+              <p:cNvPr id="4" name="Rectangle 3">
+                <a:extLst>
+                  <a:ext uri="{FF2B5EF4-FFF2-40B4-BE49-F238E27FC236}">
+                    <a16:creationId xmlns:a16="http://schemas.microsoft.com/office/drawing/2014/main" id="{8D392176-39B0-E02A-04FB-B50681B4ED59}"/>
+                  </a:ext>
+                </a:extLst>
+              </p:cNvPr>
+              <p:cNvSpPr/>
+              <p:nvPr/>
+            </p:nvSpPr>
+            <p:spPr>
+              <a:xfrm>
+                <a:off x="4987051" y="1660358"/>
+                <a:ext cx="1774658" cy="2310063"/>
+              </a:xfrm>
+              <a:prstGeom prst="rect">
+                <a:avLst/>
+              </a:prstGeom>
+              <a:solidFill>
+                <a:schemeClr val="accent1">
+                  <a:lumMod val="20000"/>
+                  <a:lumOff val="80000"/>
+                </a:schemeClr>
+              </a:solidFill>
+              <a:ln>
+                <a:solidFill>
+                  <a:schemeClr val="tx2">
+                    <a:lumMod val="25000"/>
+                    <a:lumOff val="75000"/>
+                  </a:schemeClr>
+                </a:solidFill>
+              </a:ln>
+            </p:spPr>
+            <p:style>
+              <a:lnRef idx="2">
+                <a:schemeClr val="accent1">
+                  <a:shade val="15000"/>
+                </a:schemeClr>
+              </a:lnRef>
+              <a:fillRef idx="1">
+                <a:schemeClr val="accent1"/>
+              </a:fillRef>
+              <a:effectRef idx="0">
+                <a:schemeClr val="accent1"/>
+              </a:effectRef>
+              <a:fontRef idx="minor">
+                <a:schemeClr val="lt1"/>
+              </a:fontRef>
+            </p:style>
+            <p:txBody>
+              <a:bodyPr rtlCol="0" anchor="ctr"/>
+              <a:lstStyle/>
+              <a:p>
+                <a:pPr algn="ctr"/>
+                <a:endParaRPr lang="en-US"/>
+              </a:p>
+            </p:txBody>
+          </p:sp>
+          <p:pic>
+            <p:nvPicPr>
+              <p:cNvPr id="6" name="Graphic 5" descr="Customer review with solid fill">
+                <a:extLst>
+                  <a:ext uri="{FF2B5EF4-FFF2-40B4-BE49-F238E27FC236}">
+                    <a16:creationId xmlns:a16="http://schemas.microsoft.com/office/drawing/2014/main" id="{666CD9FA-4187-BB20-E80C-92067F3EC87E}"/>
+                  </a:ext>
+                </a:extLst>
+              </p:cNvPr>
+              <p:cNvPicPr>
+                <a:picLocks noChangeAspect="1"/>
+              </p:cNvPicPr>
+              <p:nvPr/>
+            </p:nvPicPr>
+            <p:blipFill>
+              <a:blip r:embed="rId2">
+                <a:extLst>
+                  <a:ext uri="{96DAC541-7B7A-43D3-8B79-37D633B846F1}">
+                    <asvg:svgBlip xmlns:asvg="http://schemas.microsoft.com/office/drawing/2016/SVG/main" r:embed="rId3"/>
+                  </a:ext>
+                </a:extLst>
+              </a:blip>
+              <a:stretch>
+                <a:fillRect/>
+              </a:stretch>
+            </p:blipFill>
+            <p:spPr>
+              <a:xfrm>
+                <a:off x="5396586" y="2849635"/>
+                <a:ext cx="965534" cy="965534"/>
+              </a:xfrm>
+              <a:prstGeom prst="rect">
+                <a:avLst/>
+              </a:prstGeom>
+            </p:spPr>
+          </p:pic>
+          <p:sp>
+            <p:nvSpPr>
+              <p:cNvPr id="11" name="TextBox 10">
+                <a:extLst>
+                  <a:ext uri="{FF2B5EF4-FFF2-40B4-BE49-F238E27FC236}">
+                    <a16:creationId xmlns:a16="http://schemas.microsoft.com/office/drawing/2014/main" id="{703E178F-D3AC-AB26-D0BF-0CF30E4C6B37}"/>
+                  </a:ext>
+                </a:extLst>
+              </p:cNvPr>
+              <p:cNvSpPr txBox="1"/>
+              <p:nvPr/>
+            </p:nvSpPr>
+            <p:spPr>
+              <a:xfrm>
+                <a:off x="4987052" y="95650"/>
+                <a:ext cx="1774657" cy="307777"/>
+              </a:xfrm>
+              <a:prstGeom prst="rect">
+                <a:avLst/>
+              </a:prstGeom>
+              <a:noFill/>
+            </p:spPr>
+            <p:txBody>
+              <a:bodyPr wrap="square" rtlCol="0">
+                <a:spAutoFit/>
+              </a:bodyPr>
+              <a:lstStyle/>
+              <a:p>
+                <a:pPr algn="ctr"/>
+                <a:r>
+                  <a:rPr lang="en-US" sz="1400" dirty="0"/>
+                  <a:t>Datasets</a:t>
+                </a:r>
+              </a:p>
+            </p:txBody>
+          </p:sp>
+          <p:grpSp>
+            <p:nvGrpSpPr>
+              <p:cNvPr id="89" name="Group 88">
+                <a:extLst>
+                  <a:ext uri="{FF2B5EF4-FFF2-40B4-BE49-F238E27FC236}">
+                    <a16:creationId xmlns:a16="http://schemas.microsoft.com/office/drawing/2014/main" id="{71AF7729-382A-AE37-20A5-F8D46546E3DE}"/>
+                  </a:ext>
+                </a:extLst>
+              </p:cNvPr>
+              <p:cNvGrpSpPr/>
+              <p:nvPr/>
+            </p:nvGrpSpPr>
+            <p:grpSpPr>
+              <a:xfrm>
+                <a:off x="5257760" y="511677"/>
+                <a:ext cx="1233240" cy="545260"/>
+                <a:chOff x="5251780" y="511677"/>
+                <a:chExt cx="1233240" cy="545260"/>
+              </a:xfrm>
+            </p:grpSpPr>
+            <p:grpSp>
+              <p:nvGrpSpPr>
+                <p:cNvPr id="15" name="Group 14">
+                  <a:extLst>
+                    <a:ext uri="{FF2B5EF4-FFF2-40B4-BE49-F238E27FC236}">
+                      <a16:creationId xmlns:a16="http://schemas.microsoft.com/office/drawing/2014/main" id="{56F12FBD-72D5-CE43-8873-59AC5E183FE8}"/>
+                    </a:ext>
+                  </a:extLst>
+                </p:cNvPr>
+                <p:cNvGrpSpPr/>
+                <p:nvPr/>
+              </p:nvGrpSpPr>
+              <p:grpSpPr>
+                <a:xfrm>
+                  <a:off x="5991724" y="511677"/>
+                  <a:ext cx="493296" cy="545260"/>
+                  <a:chOff x="5565105" y="592750"/>
+                  <a:chExt cx="493296" cy="545260"/>
+                </a:xfrm>
+              </p:grpSpPr>
+              <p:sp>
+                <p:nvSpPr>
+                  <p:cNvPr id="8" name="Flowchart: Magnetic Disk 7">
+                    <a:extLst>
+                      <a:ext uri="{FF2B5EF4-FFF2-40B4-BE49-F238E27FC236}">
+                        <a16:creationId xmlns:a16="http://schemas.microsoft.com/office/drawing/2014/main" id="{F818552A-9D01-3E7F-E7DD-AF7044B0581F}"/>
+                      </a:ext>
+                    </a:extLst>
+                  </p:cNvPr>
+                  <p:cNvSpPr/>
+                  <p:nvPr/>
+                </p:nvSpPr>
+                <p:spPr>
+                  <a:xfrm>
+                    <a:off x="5565105" y="888992"/>
+                    <a:ext cx="493295" cy="249018"/>
+                  </a:xfrm>
+                  <a:prstGeom prst="flowChartMagneticDisk">
+                    <a:avLst/>
+                  </a:prstGeom>
+                  <a:solidFill>
+                    <a:schemeClr val="accent3">
+                      <a:lumMod val="40000"/>
+                      <a:lumOff val="60000"/>
+                    </a:schemeClr>
+                  </a:solidFill>
+                  <a:ln>
+                    <a:solidFill>
+                      <a:schemeClr val="bg1"/>
+                    </a:solidFill>
+                  </a:ln>
+                </p:spPr>
+                <p:style>
+                  <a:lnRef idx="2">
+                    <a:schemeClr val="accent1">
+                      <a:shade val="15000"/>
+                    </a:schemeClr>
+                  </a:lnRef>
+                  <a:fillRef idx="1">
+                    <a:schemeClr val="accent1"/>
+                  </a:fillRef>
+                  <a:effectRef idx="0">
+                    <a:schemeClr val="accent1"/>
+                  </a:effectRef>
+                  <a:fontRef idx="minor">
+                    <a:schemeClr val="lt1"/>
+                  </a:fontRef>
+                </p:style>
+                <p:txBody>
+                  <a:bodyPr rtlCol="0" anchor="ctr"/>
+                  <a:lstStyle/>
+                  <a:p>
+                    <a:pPr algn="ctr"/>
+                    <a:endParaRPr lang="en-US"/>
+                  </a:p>
+                </p:txBody>
+              </p:sp>
+              <p:sp>
+                <p:nvSpPr>
+                  <p:cNvPr id="9" name="Flowchart: Magnetic Disk 8">
+                    <a:extLst>
+                      <a:ext uri="{FF2B5EF4-FFF2-40B4-BE49-F238E27FC236}">
+                        <a16:creationId xmlns:a16="http://schemas.microsoft.com/office/drawing/2014/main" id="{A5F9C9D8-5DBC-0B39-BC5F-8233EE7EB83F}"/>
+                      </a:ext>
+                    </a:extLst>
+                  </p:cNvPr>
+                  <p:cNvSpPr/>
+                  <p:nvPr/>
+                </p:nvSpPr>
+                <p:spPr>
+                  <a:xfrm>
+                    <a:off x="5565106" y="740871"/>
+                    <a:ext cx="493295" cy="249018"/>
+                  </a:xfrm>
+                  <a:prstGeom prst="flowChartMagneticDisk">
+                    <a:avLst/>
+                  </a:prstGeom>
+                  <a:solidFill>
+                    <a:schemeClr val="accent3">
+                      <a:lumMod val="40000"/>
+                      <a:lumOff val="60000"/>
+                    </a:schemeClr>
+                  </a:solidFill>
+                  <a:ln>
+                    <a:solidFill>
+                      <a:schemeClr val="bg1"/>
+                    </a:solidFill>
+                  </a:ln>
+                </p:spPr>
+                <p:style>
+                  <a:lnRef idx="2">
+                    <a:schemeClr val="accent1">
+                      <a:shade val="15000"/>
+                    </a:schemeClr>
+                  </a:lnRef>
+                  <a:fillRef idx="1">
+                    <a:schemeClr val="accent1"/>
+                  </a:fillRef>
+                  <a:effectRef idx="0">
+                    <a:schemeClr val="accent1"/>
+                  </a:effectRef>
+                  <a:fontRef idx="minor">
+                    <a:schemeClr val="lt1"/>
+                  </a:fontRef>
+                </p:style>
+                <p:txBody>
+                  <a:bodyPr rtlCol="0" anchor="ctr"/>
+                  <a:lstStyle/>
+                  <a:p>
+                    <a:pPr algn="ctr"/>
+                    <a:endParaRPr lang="en-US"/>
+                  </a:p>
+                </p:txBody>
+              </p:sp>
+              <p:sp>
+                <p:nvSpPr>
+                  <p:cNvPr id="10" name="Flowchart: Magnetic Disk 9">
+                    <a:extLst>
+                      <a:ext uri="{FF2B5EF4-FFF2-40B4-BE49-F238E27FC236}">
+                        <a16:creationId xmlns:a16="http://schemas.microsoft.com/office/drawing/2014/main" id="{B95A12D0-EE62-C91F-1764-CDDE07080691}"/>
+                      </a:ext>
+                    </a:extLst>
+                  </p:cNvPr>
+                  <p:cNvSpPr/>
+                  <p:nvPr/>
+                </p:nvSpPr>
+                <p:spPr>
+                  <a:xfrm>
+                    <a:off x="5565105" y="592750"/>
+                    <a:ext cx="493295" cy="249018"/>
+                  </a:xfrm>
+                  <a:prstGeom prst="flowChartMagneticDisk">
+                    <a:avLst/>
+                  </a:prstGeom>
+                  <a:solidFill>
+                    <a:schemeClr val="accent3">
+                      <a:lumMod val="40000"/>
+                      <a:lumOff val="60000"/>
+                    </a:schemeClr>
+                  </a:solidFill>
+                  <a:ln>
+                    <a:solidFill>
+                      <a:schemeClr val="bg1"/>
+                    </a:solidFill>
+                  </a:ln>
+                </p:spPr>
+                <p:style>
+                  <a:lnRef idx="2">
+                    <a:schemeClr val="accent1">
+                      <a:shade val="15000"/>
+                    </a:schemeClr>
+                  </a:lnRef>
+                  <a:fillRef idx="1">
+                    <a:schemeClr val="accent1"/>
+                  </a:fillRef>
+                  <a:effectRef idx="0">
+                    <a:schemeClr val="accent1"/>
+                  </a:effectRef>
+                  <a:fontRef idx="minor">
+                    <a:schemeClr val="lt1"/>
+                  </a:fontRef>
+                </p:style>
+                <p:txBody>
+                  <a:bodyPr rtlCol="0" anchor="ctr"/>
+                  <a:lstStyle/>
+                  <a:p>
+                    <a:pPr algn="ctr"/>
+                    <a:endParaRPr lang="en-US" dirty="0"/>
+                  </a:p>
+                </p:txBody>
+              </p:sp>
+            </p:grpSp>
+            <p:grpSp>
+              <p:nvGrpSpPr>
+                <p:cNvPr id="16" name="Group 15">
+                  <a:extLst>
+                    <a:ext uri="{FF2B5EF4-FFF2-40B4-BE49-F238E27FC236}">
+                      <a16:creationId xmlns:a16="http://schemas.microsoft.com/office/drawing/2014/main" id="{0555C311-E9A9-8735-0F97-E6BDC20CC19B}"/>
+                    </a:ext>
+                  </a:extLst>
+                </p:cNvPr>
+                <p:cNvGrpSpPr/>
+                <p:nvPr/>
+              </p:nvGrpSpPr>
+              <p:grpSpPr>
+                <a:xfrm>
+                  <a:off x="5251780" y="511677"/>
+                  <a:ext cx="493296" cy="545260"/>
+                  <a:chOff x="5565105" y="592750"/>
+                  <a:chExt cx="493296" cy="545260"/>
+                </a:xfrm>
+              </p:grpSpPr>
+              <p:sp>
+                <p:nvSpPr>
+                  <p:cNvPr id="17" name="Flowchart: Magnetic Disk 16">
+                    <a:extLst>
+                      <a:ext uri="{FF2B5EF4-FFF2-40B4-BE49-F238E27FC236}">
+                        <a16:creationId xmlns:a16="http://schemas.microsoft.com/office/drawing/2014/main" id="{162A01B2-EB49-FC3A-E1CB-402E2E50A460}"/>
+                      </a:ext>
+                    </a:extLst>
+                  </p:cNvPr>
+                  <p:cNvSpPr/>
+                  <p:nvPr/>
+                </p:nvSpPr>
+                <p:spPr>
+                  <a:xfrm>
+                    <a:off x="5565105" y="888992"/>
+                    <a:ext cx="493295" cy="249018"/>
+                  </a:xfrm>
+                  <a:prstGeom prst="flowChartMagneticDisk">
+                    <a:avLst/>
+                  </a:prstGeom>
+                  <a:solidFill>
+                    <a:schemeClr val="accent5">
+                      <a:lumMod val="40000"/>
+                      <a:lumOff val="60000"/>
+                    </a:schemeClr>
+                  </a:solidFill>
+                  <a:ln>
+                    <a:solidFill>
+                      <a:schemeClr val="bg1"/>
+                    </a:solidFill>
+                  </a:ln>
+                </p:spPr>
+                <p:style>
+                  <a:lnRef idx="2">
+                    <a:schemeClr val="accent1">
+                      <a:shade val="15000"/>
+                    </a:schemeClr>
+                  </a:lnRef>
+                  <a:fillRef idx="1">
+                    <a:schemeClr val="accent1"/>
+                  </a:fillRef>
+                  <a:effectRef idx="0">
+                    <a:schemeClr val="accent1"/>
+                  </a:effectRef>
+                  <a:fontRef idx="minor">
+                    <a:schemeClr val="lt1"/>
+                  </a:fontRef>
+                </p:style>
+                <p:txBody>
+                  <a:bodyPr rtlCol="0" anchor="ctr"/>
+                  <a:lstStyle/>
+                  <a:p>
+                    <a:pPr algn="ctr"/>
+                    <a:endParaRPr lang="en-US"/>
+                  </a:p>
+                </p:txBody>
+              </p:sp>
+              <p:sp>
+                <p:nvSpPr>
+                  <p:cNvPr id="18" name="Flowchart: Magnetic Disk 17">
+                    <a:extLst>
+                      <a:ext uri="{FF2B5EF4-FFF2-40B4-BE49-F238E27FC236}">
+                        <a16:creationId xmlns:a16="http://schemas.microsoft.com/office/drawing/2014/main" id="{42DAC98C-6C59-726F-5967-36FD55D3CBFC}"/>
+                      </a:ext>
+                    </a:extLst>
+                  </p:cNvPr>
+                  <p:cNvSpPr/>
+                  <p:nvPr/>
+                </p:nvSpPr>
+                <p:spPr>
+                  <a:xfrm>
+                    <a:off x="5565106" y="740871"/>
+                    <a:ext cx="493295" cy="249018"/>
+                  </a:xfrm>
+                  <a:prstGeom prst="flowChartMagneticDisk">
+                    <a:avLst/>
+                  </a:prstGeom>
+                  <a:solidFill>
+                    <a:schemeClr val="accent5">
+                      <a:lumMod val="40000"/>
+                      <a:lumOff val="60000"/>
+                    </a:schemeClr>
+                  </a:solidFill>
+                  <a:ln>
+                    <a:solidFill>
+                      <a:schemeClr val="bg1"/>
+                    </a:solidFill>
+                  </a:ln>
+                </p:spPr>
+                <p:style>
+                  <a:lnRef idx="2">
+                    <a:schemeClr val="accent1">
+                      <a:shade val="15000"/>
+                    </a:schemeClr>
+                  </a:lnRef>
+                  <a:fillRef idx="1">
+                    <a:schemeClr val="accent1"/>
+                  </a:fillRef>
+                  <a:effectRef idx="0">
+                    <a:schemeClr val="accent1"/>
+                  </a:effectRef>
+                  <a:fontRef idx="minor">
+                    <a:schemeClr val="lt1"/>
+                  </a:fontRef>
+                </p:style>
+                <p:txBody>
+                  <a:bodyPr rtlCol="0" anchor="ctr"/>
+                  <a:lstStyle/>
+                  <a:p>
+                    <a:pPr algn="ctr"/>
+                    <a:endParaRPr lang="en-US"/>
+                  </a:p>
+                </p:txBody>
+              </p:sp>
+              <p:sp>
+                <p:nvSpPr>
+                  <p:cNvPr id="19" name="Flowchart: Magnetic Disk 18">
+                    <a:extLst>
+                      <a:ext uri="{FF2B5EF4-FFF2-40B4-BE49-F238E27FC236}">
+                        <a16:creationId xmlns:a16="http://schemas.microsoft.com/office/drawing/2014/main" id="{3A3B0FA4-C5CD-08DD-41A6-DFAC15A2F9EB}"/>
+                      </a:ext>
+                    </a:extLst>
+                  </p:cNvPr>
+                  <p:cNvSpPr/>
+                  <p:nvPr/>
+                </p:nvSpPr>
+                <p:spPr>
+                  <a:xfrm>
+                    <a:off x="5565105" y="592750"/>
+                    <a:ext cx="493295" cy="249018"/>
+                  </a:xfrm>
+                  <a:prstGeom prst="flowChartMagneticDisk">
+                    <a:avLst/>
+                  </a:prstGeom>
+                  <a:solidFill>
+                    <a:schemeClr val="accent5">
+                      <a:lumMod val="40000"/>
+                      <a:lumOff val="60000"/>
+                    </a:schemeClr>
+                  </a:solidFill>
+                  <a:ln>
+                    <a:solidFill>
+                      <a:schemeClr val="bg1"/>
+                    </a:solidFill>
+                  </a:ln>
+                </p:spPr>
+                <p:style>
+                  <a:lnRef idx="2">
+                    <a:schemeClr val="accent1">
+                      <a:shade val="15000"/>
+                    </a:schemeClr>
+                  </a:lnRef>
+                  <a:fillRef idx="1">
+                    <a:schemeClr val="accent1"/>
+                  </a:fillRef>
+                  <a:effectRef idx="0">
+                    <a:schemeClr val="accent1"/>
+                  </a:effectRef>
+                  <a:fontRef idx="minor">
+                    <a:schemeClr val="lt1"/>
+                  </a:fontRef>
+                </p:style>
+                <p:txBody>
+                  <a:bodyPr rtlCol="0" anchor="ctr"/>
+                  <a:lstStyle/>
+                  <a:p>
+                    <a:pPr algn="ctr"/>
+                    <a:endParaRPr lang="en-US" dirty="0"/>
+                  </a:p>
+                </p:txBody>
+              </p:sp>
+            </p:grpSp>
+          </p:grpSp>
+          <p:grpSp>
+            <p:nvGrpSpPr>
+              <p:cNvPr id="85" name="Group 84">
+                <a:extLst>
+                  <a:ext uri="{FF2B5EF4-FFF2-40B4-BE49-F238E27FC236}">
+                    <a16:creationId xmlns:a16="http://schemas.microsoft.com/office/drawing/2014/main" id="{69D09C75-5D39-3B2F-2841-3698D1D7ED86}"/>
+                  </a:ext>
+                </a:extLst>
+              </p:cNvPr>
+              <p:cNvGrpSpPr/>
+              <p:nvPr/>
+            </p:nvGrpSpPr>
+            <p:grpSpPr>
+              <a:xfrm>
+                <a:off x="421375" y="3441021"/>
+                <a:ext cx="3690026" cy="1096019"/>
+                <a:chOff x="635457" y="3850101"/>
+                <a:chExt cx="3690026" cy="1096019"/>
+              </a:xfrm>
+            </p:grpSpPr>
+            <p:pic>
+              <p:nvPicPr>
+                <p:cNvPr id="36" name="Picture 35">
+                  <a:extLst>
+                    <a:ext uri="{FF2B5EF4-FFF2-40B4-BE49-F238E27FC236}">
+                      <a16:creationId xmlns:a16="http://schemas.microsoft.com/office/drawing/2014/main" id="{BDAB9E77-45E3-5E01-5BBF-A35CA60111CE}"/>
+                    </a:ext>
+                  </a:extLst>
+                </p:cNvPr>
+                <p:cNvPicPr>
+                  <a:picLocks noChangeAspect="1"/>
+                </p:cNvPicPr>
+                <p:nvPr/>
+              </p:nvPicPr>
+              <p:blipFill>
+                <a:blip r:embed="rId4"/>
+                <a:stretch>
+                  <a:fillRect/>
+                </a:stretch>
+              </p:blipFill>
+              <p:spPr>
+                <a:xfrm>
+                  <a:off x="635457" y="3850101"/>
+                  <a:ext cx="1526251" cy="1034629"/>
+                </a:xfrm>
+                <a:prstGeom prst="rect">
+                  <a:avLst/>
+                </a:prstGeom>
+              </p:spPr>
+            </p:pic>
+            <p:pic>
+              <p:nvPicPr>
+                <p:cNvPr id="37" name="Picture 36">
+                  <a:extLst>
+                    <a:ext uri="{FF2B5EF4-FFF2-40B4-BE49-F238E27FC236}">
+                      <a16:creationId xmlns:a16="http://schemas.microsoft.com/office/drawing/2014/main" id="{1F40B101-77A3-9EFD-8791-6FE55BA0AA9A}"/>
+                    </a:ext>
+                  </a:extLst>
+                </p:cNvPr>
+                <p:cNvPicPr>
+                  <a:picLocks noChangeAspect="1"/>
+                </p:cNvPicPr>
+                <p:nvPr/>
+              </p:nvPicPr>
+              <p:blipFill>
+                <a:blip r:embed="rId5"/>
+                <a:stretch>
+                  <a:fillRect/>
+                </a:stretch>
+              </p:blipFill>
+              <p:spPr>
+                <a:xfrm>
+                  <a:off x="2555707" y="3850101"/>
+                  <a:ext cx="1769776" cy="1096019"/>
+                </a:xfrm>
+                <a:prstGeom prst="rect">
+                  <a:avLst/>
+                </a:prstGeom>
+              </p:spPr>
+            </p:pic>
+          </p:grpSp>
+          <p:sp>
+            <p:nvSpPr>
+              <p:cNvPr id="38" name="TextBox 37">
+                <a:extLst>
+                  <a:ext uri="{FF2B5EF4-FFF2-40B4-BE49-F238E27FC236}">
+                    <a16:creationId xmlns:a16="http://schemas.microsoft.com/office/drawing/2014/main" id="{F76C9A29-C3EE-6B30-4036-34D183A20D0D}"/>
+                  </a:ext>
+                </a:extLst>
+              </p:cNvPr>
+              <p:cNvSpPr txBox="1"/>
+              <p:nvPr/>
+            </p:nvSpPr>
+            <p:spPr>
+              <a:xfrm>
+                <a:off x="5866822" y="4537040"/>
+                <a:ext cx="665709" cy="307777"/>
+              </a:xfrm>
+              <a:prstGeom prst="rect">
+                <a:avLst/>
+              </a:prstGeom>
+              <a:noFill/>
+            </p:spPr>
+            <p:txBody>
+              <a:bodyPr wrap="square" rtlCol="0">
+                <a:spAutoFit/>
+              </a:bodyPr>
+              <a:lstStyle/>
+              <a:p>
+                <a:pPr algn="ctr"/>
+                <a:r>
+                  <a:rPr lang="en-US" sz="1400" dirty="0"/>
+                  <a:t>MCP </a:t>
+                </a:r>
+              </a:p>
+            </p:txBody>
+          </p:sp>
+          <p:grpSp>
+            <p:nvGrpSpPr>
+              <p:cNvPr id="84" name="Group 83">
+                <a:extLst>
+                  <a:ext uri="{FF2B5EF4-FFF2-40B4-BE49-F238E27FC236}">
+                    <a16:creationId xmlns:a16="http://schemas.microsoft.com/office/drawing/2014/main" id="{DA76D348-328D-8751-7E8E-5543CDE7DAEB}"/>
+                  </a:ext>
+                </a:extLst>
+              </p:cNvPr>
+              <p:cNvGrpSpPr/>
+              <p:nvPr/>
+            </p:nvGrpSpPr>
+            <p:grpSpPr>
+              <a:xfrm>
+                <a:off x="195368" y="1251278"/>
+                <a:ext cx="4142040" cy="1166284"/>
+                <a:chOff x="326821" y="1660358"/>
+                <a:chExt cx="4142040" cy="1166284"/>
+              </a:xfrm>
+            </p:grpSpPr>
+            <p:pic>
+              <p:nvPicPr>
+                <p:cNvPr id="55" name="Picture 54" descr="A diagram of a molecule&#10;&#10;AI-generated content may be incorrect.">
+                  <a:extLst>
+                    <a:ext uri="{FF2B5EF4-FFF2-40B4-BE49-F238E27FC236}">
+                      <a16:creationId xmlns:a16="http://schemas.microsoft.com/office/drawing/2014/main" id="{4DD92605-1A72-FFE6-AA59-B3EC76A7D964}"/>
+                    </a:ext>
+                  </a:extLst>
+                </p:cNvPr>
+                <p:cNvPicPr>
+                  <a:picLocks noChangeAspect="1"/>
+                </p:cNvPicPr>
+                <p:nvPr/>
+              </p:nvPicPr>
+              <p:blipFill>
+                <a:blip r:embed="rId6">
+                  <a:extLst>
+                    <a:ext uri="{28A0092B-C50C-407E-A947-70E740481C1C}">
+                      <a14:useLocalDpi xmlns:a14="http://schemas.microsoft.com/office/drawing/2010/main" val="0"/>
+                    </a:ext>
+                  </a:extLst>
+                </a:blip>
+                <a:srcRect t="26734" r="52237"/>
+                <a:stretch/>
+              </p:blipFill>
+              <p:spPr>
+                <a:xfrm>
+                  <a:off x="326821" y="1660358"/>
+                  <a:ext cx="1876999" cy="1166284"/>
+                </a:xfrm>
+                <a:prstGeom prst="rect">
+                  <a:avLst/>
+                </a:prstGeom>
+              </p:spPr>
+            </p:pic>
+            <p:pic>
+              <p:nvPicPr>
+                <p:cNvPr id="57" name="Picture 56" descr="A diagram of a molecule">
+                  <a:extLst>
+                    <a:ext uri="{FF2B5EF4-FFF2-40B4-BE49-F238E27FC236}">
+                      <a16:creationId xmlns:a16="http://schemas.microsoft.com/office/drawing/2014/main" id="{2DD5B78F-1513-F8F3-6CCC-353F805FFE86}"/>
+                    </a:ext>
+                  </a:extLst>
+                </p:cNvPr>
+                <p:cNvPicPr>
+                  <a:picLocks noChangeAspect="1"/>
+                </p:cNvPicPr>
+                <p:nvPr/>
+              </p:nvPicPr>
+              <p:blipFill>
+                <a:blip r:embed="rId7">
+                  <a:extLst>
+                    <a:ext uri="{28A0092B-C50C-407E-A947-70E740481C1C}">
+                      <a14:useLocalDpi xmlns:a14="http://schemas.microsoft.com/office/drawing/2010/main" val="0"/>
+                    </a:ext>
+                  </a:extLst>
+                </a:blip>
+                <a:stretch>
+                  <a:fillRect/>
+                </a:stretch>
+              </p:blipFill>
+              <p:spPr>
+                <a:xfrm>
+                  <a:off x="2496553" y="1690622"/>
+                  <a:ext cx="1972308" cy="1105756"/>
+                </a:xfrm>
+                <a:prstGeom prst="rect">
+                  <a:avLst/>
+                </a:prstGeom>
+              </p:spPr>
+            </p:pic>
+          </p:grpSp>
+          <p:sp>
+            <p:nvSpPr>
+              <p:cNvPr id="69" name="TextBox 68">
+                <a:extLst>
+                  <a:ext uri="{FF2B5EF4-FFF2-40B4-BE49-F238E27FC236}">
+                    <a16:creationId xmlns:a16="http://schemas.microsoft.com/office/drawing/2014/main" id="{D4B222FD-2AE9-5090-6600-BB53084CF4DC}"/>
+                  </a:ext>
+                </a:extLst>
+              </p:cNvPr>
+              <p:cNvSpPr txBox="1"/>
+              <p:nvPr/>
+            </p:nvSpPr>
+            <p:spPr>
+              <a:xfrm>
+                <a:off x="1127120" y="743037"/>
+                <a:ext cx="2278536" cy="307777"/>
+              </a:xfrm>
+              <a:prstGeom prst="rect">
+                <a:avLst/>
+              </a:prstGeom>
+              <a:noFill/>
+            </p:spPr>
+            <p:txBody>
+              <a:bodyPr wrap="square" rtlCol="0">
+                <a:spAutoFit/>
+              </a:bodyPr>
+              <a:lstStyle/>
+              <a:p>
+                <a:pPr algn="ctr"/>
+                <a:r>
+                  <a:rPr lang="en-US" sz="1400" dirty="0"/>
+                  <a:t>Molecular representations</a:t>
+                </a:r>
+              </a:p>
+            </p:txBody>
+          </p:sp>
+          <p:sp>
+            <p:nvSpPr>
+              <p:cNvPr id="78" name="TextBox 77">
+                <a:extLst>
+                  <a:ext uri="{FF2B5EF4-FFF2-40B4-BE49-F238E27FC236}">
+                    <a16:creationId xmlns:a16="http://schemas.microsoft.com/office/drawing/2014/main" id="{7B9031DA-0043-88F7-7C95-18CDD0584227}"/>
+                  </a:ext>
+                </a:extLst>
+              </p:cNvPr>
+              <p:cNvSpPr txBox="1"/>
+              <p:nvPr/>
+            </p:nvSpPr>
+            <p:spPr>
+              <a:xfrm>
+                <a:off x="7789691" y="793314"/>
+                <a:ext cx="3219025" cy="307777"/>
+              </a:xfrm>
+              <a:prstGeom prst="rect">
+                <a:avLst/>
+              </a:prstGeom>
+              <a:noFill/>
+            </p:spPr>
+            <p:txBody>
+              <a:bodyPr wrap="square" rtlCol="0">
+                <a:spAutoFit/>
+              </a:bodyPr>
+              <a:lstStyle/>
+              <a:p>
+                <a:pPr algn="ctr"/>
+                <a:r>
+                  <a:rPr lang="en-US" sz="1400" dirty="0"/>
+                  <a:t>Explainable artificial intelligence</a:t>
+                </a:r>
+              </a:p>
+            </p:txBody>
+          </p:sp>
+          <p:pic>
+            <p:nvPicPr>
+              <p:cNvPr id="80" name="Graphic 79" descr="Tools with solid fill">
+                <a:extLst>
+                  <a:ext uri="{FF2B5EF4-FFF2-40B4-BE49-F238E27FC236}">
+                    <a16:creationId xmlns:a16="http://schemas.microsoft.com/office/drawing/2014/main" id="{193B9AB7-7969-856E-04C5-5266CAC9BD92}"/>
+                  </a:ext>
+                </a:extLst>
+              </p:cNvPr>
+              <p:cNvPicPr>
+                <a:picLocks noChangeAspect="1"/>
+              </p:cNvPicPr>
+              <p:nvPr/>
+            </p:nvPicPr>
+            <p:blipFill>
+              <a:blip r:embed="rId8">
+                <a:extLst>
+                  <a:ext uri="{96DAC541-7B7A-43D3-8B79-37D633B846F1}">
+                    <asvg:svgBlip xmlns:asvg="http://schemas.microsoft.com/office/drawing/2016/SVG/main" r:embed="rId9"/>
+                  </a:ext>
+                </a:extLst>
+              </a:blip>
+              <a:stretch>
+                <a:fillRect/>
+              </a:stretch>
+            </p:blipFill>
+            <p:spPr>
+              <a:xfrm>
+                <a:off x="905949" y="719047"/>
+                <a:ext cx="304798" cy="304798"/>
+              </a:xfrm>
+              <a:prstGeom prst="rect">
+                <a:avLst/>
+              </a:prstGeom>
+            </p:spPr>
+          </p:pic>
+          <p:sp>
+            <p:nvSpPr>
+              <p:cNvPr id="81" name="Rectangle: Rounded Corners 80">
+                <a:extLst>
+                  <a:ext uri="{FF2B5EF4-FFF2-40B4-BE49-F238E27FC236}">
+                    <a16:creationId xmlns:a16="http://schemas.microsoft.com/office/drawing/2014/main" id="{412B1C2A-33EB-E6E8-F8CB-CA5D832461C6}"/>
+                  </a:ext>
+                </a:extLst>
+              </p:cNvPr>
+              <p:cNvSpPr/>
+              <p:nvPr/>
+            </p:nvSpPr>
+            <p:spPr>
+              <a:xfrm>
+                <a:off x="85665" y="1082242"/>
+                <a:ext cx="4361446" cy="1527747"/>
+              </a:xfrm>
+              <a:prstGeom prst="roundRect">
+                <a:avLst/>
+              </a:prstGeom>
+              <a:noFill/>
+              <a:ln>
+                <a:solidFill>
+                  <a:schemeClr val="tx1"/>
+                </a:solidFill>
+              </a:ln>
+            </p:spPr>
+            <p:style>
+              <a:lnRef idx="2">
+                <a:schemeClr val="accent1">
+                  <a:shade val="15000"/>
+                </a:schemeClr>
+              </a:lnRef>
+              <a:fillRef idx="1">
+                <a:schemeClr val="accent1"/>
+              </a:fillRef>
+              <a:effectRef idx="0">
+                <a:schemeClr val="accent1"/>
+              </a:effectRef>
+              <a:fontRef idx="minor">
+                <a:schemeClr val="lt1"/>
+              </a:fontRef>
+            </p:style>
+            <p:txBody>
+              <a:bodyPr rtlCol="0" anchor="ctr"/>
+              <a:lstStyle/>
+              <a:p>
+                <a:pPr algn="ctr"/>
+                <a:endParaRPr lang="en-US"/>
+              </a:p>
+            </p:txBody>
+          </p:sp>
+          <p:sp>
+            <p:nvSpPr>
+              <p:cNvPr id="82" name="Rectangle: Rounded Corners 81">
+                <a:extLst>
+                  <a:ext uri="{FF2B5EF4-FFF2-40B4-BE49-F238E27FC236}">
+                    <a16:creationId xmlns:a16="http://schemas.microsoft.com/office/drawing/2014/main" id="{A645FB63-98DA-4E1F-F442-325D00E7C85A}"/>
+                  </a:ext>
+                </a:extLst>
+              </p:cNvPr>
+              <p:cNvSpPr/>
+              <p:nvPr/>
+            </p:nvSpPr>
+            <p:spPr>
+              <a:xfrm>
+                <a:off x="85665" y="3194461"/>
+                <a:ext cx="4361446" cy="1527747"/>
+              </a:xfrm>
+              <a:prstGeom prst="roundRect">
+                <a:avLst/>
+              </a:prstGeom>
+              <a:noFill/>
+              <a:ln>
+                <a:solidFill>
+                  <a:schemeClr val="tx1"/>
+                </a:solidFill>
+              </a:ln>
+            </p:spPr>
+            <p:style>
+              <a:lnRef idx="2">
+                <a:schemeClr val="accent1">
+                  <a:shade val="15000"/>
+                </a:schemeClr>
+              </a:lnRef>
+              <a:fillRef idx="1">
+                <a:schemeClr val="accent1"/>
+              </a:fillRef>
+              <a:effectRef idx="0">
+                <a:schemeClr val="accent1"/>
+              </a:effectRef>
+              <a:fontRef idx="minor">
+                <a:schemeClr val="lt1"/>
+              </a:fontRef>
+            </p:style>
+            <p:txBody>
+              <a:bodyPr rtlCol="0" anchor="ctr"/>
+              <a:lstStyle/>
+              <a:p>
+                <a:pPr algn="ctr"/>
+                <a:endParaRPr lang="en-US"/>
+              </a:p>
+            </p:txBody>
+          </p:sp>
+          <p:pic>
+            <p:nvPicPr>
+              <p:cNvPr id="83" name="Graphic 82" descr="Tools with solid fill">
+                <a:extLst>
+                  <a:ext uri="{FF2B5EF4-FFF2-40B4-BE49-F238E27FC236}">
+                    <a16:creationId xmlns:a16="http://schemas.microsoft.com/office/drawing/2014/main" id="{0BC38390-B918-24F5-9960-807CB7060698}"/>
+                  </a:ext>
+                </a:extLst>
+              </p:cNvPr>
+              <p:cNvPicPr>
+                <a:picLocks noChangeAspect="1"/>
+              </p:cNvPicPr>
+              <p:nvPr/>
+            </p:nvPicPr>
+            <p:blipFill>
+              <a:blip r:embed="rId8">
+                <a:extLst>
+                  <a:ext uri="{96DAC541-7B7A-43D3-8B79-37D633B846F1}">
+                    <asvg:svgBlip xmlns:asvg="http://schemas.microsoft.com/office/drawing/2016/SVG/main" r:embed="rId9"/>
+                  </a:ext>
+                </a:extLst>
+              </a:blip>
+              <a:stretch>
+                <a:fillRect/>
+              </a:stretch>
+            </p:blipFill>
+            <p:spPr>
+              <a:xfrm>
+                <a:off x="1482163" y="2849635"/>
+                <a:ext cx="304798" cy="304798"/>
+              </a:xfrm>
+              <a:prstGeom prst="rect">
+                <a:avLst/>
+              </a:prstGeom>
+            </p:spPr>
+          </p:pic>
+          <p:sp>
+            <p:nvSpPr>
+              <p:cNvPr id="86" name="Rectangle: Rounded Corners 85">
+                <a:extLst>
+                  <a:ext uri="{FF2B5EF4-FFF2-40B4-BE49-F238E27FC236}">
+                    <a16:creationId xmlns:a16="http://schemas.microsoft.com/office/drawing/2014/main" id="{4DE51773-4931-FB10-5E13-BD494E15FA04}"/>
+                  </a:ext>
+                </a:extLst>
+              </p:cNvPr>
+              <p:cNvSpPr/>
+              <p:nvPr/>
+            </p:nvSpPr>
+            <p:spPr>
+              <a:xfrm>
+                <a:off x="5059167" y="439628"/>
+                <a:ext cx="1630426" cy="736581"/>
+              </a:xfrm>
+              <a:prstGeom prst="roundRect">
+                <a:avLst/>
+              </a:prstGeom>
+              <a:noFill/>
+              <a:ln>
+                <a:solidFill>
+                  <a:schemeClr val="tx1"/>
+                </a:solidFill>
+              </a:ln>
+            </p:spPr>
+            <p:style>
+              <a:lnRef idx="2">
+                <a:schemeClr val="accent1">
+                  <a:shade val="15000"/>
+                </a:schemeClr>
+              </a:lnRef>
+              <a:fillRef idx="1">
+                <a:schemeClr val="accent1"/>
+              </a:fillRef>
+              <a:effectRef idx="0">
+                <a:schemeClr val="accent1"/>
+              </a:effectRef>
+              <a:fontRef idx="minor">
+                <a:schemeClr val="lt1"/>
+              </a:fontRef>
+            </p:style>
+            <p:txBody>
+              <a:bodyPr rtlCol="0" anchor="ctr"/>
+              <a:lstStyle/>
+              <a:p>
+                <a:pPr algn="ctr"/>
+                <a:endParaRPr lang="en-US"/>
+              </a:p>
+            </p:txBody>
+          </p:sp>
+          <p:pic>
+            <p:nvPicPr>
+              <p:cNvPr id="87" name="Graphic 86" descr="Tools with solid fill">
+                <a:extLst>
+                  <a:ext uri="{FF2B5EF4-FFF2-40B4-BE49-F238E27FC236}">
+                    <a16:creationId xmlns:a16="http://schemas.microsoft.com/office/drawing/2014/main" id="{12AEA7F0-EE2A-4873-CE5E-5D0B74AB2DD4}"/>
+                  </a:ext>
+                </a:extLst>
+              </p:cNvPr>
+              <p:cNvPicPr>
+                <a:picLocks noChangeAspect="1"/>
+              </p:cNvPicPr>
+              <p:nvPr/>
+            </p:nvPicPr>
+            <p:blipFill>
+              <a:blip r:embed="rId8">
+                <a:extLst>
+                  <a:ext uri="{96DAC541-7B7A-43D3-8B79-37D633B846F1}">
+                    <asvg:svgBlip xmlns:asvg="http://schemas.microsoft.com/office/drawing/2016/SVG/main" r:embed="rId9"/>
+                  </a:ext>
+                </a:extLst>
+              </a:blip>
+              <a:stretch>
+                <a:fillRect/>
+              </a:stretch>
+            </p:blipFill>
+            <p:spPr>
+              <a:xfrm>
+                <a:off x="4818643" y="58758"/>
+                <a:ext cx="304798" cy="304798"/>
+              </a:xfrm>
+              <a:prstGeom prst="rect">
+                <a:avLst/>
+              </a:prstGeom>
+            </p:spPr>
+          </p:pic>
+          <p:sp>
+            <p:nvSpPr>
+              <p:cNvPr id="88" name="Rectangle: Rounded Corners 87">
+                <a:extLst>
+                  <a:ext uri="{FF2B5EF4-FFF2-40B4-BE49-F238E27FC236}">
+                    <a16:creationId xmlns:a16="http://schemas.microsoft.com/office/drawing/2014/main" id="{D0310145-6AB5-47A3-75AD-527C96C4A9B7}"/>
+                  </a:ext>
+                </a:extLst>
+              </p:cNvPr>
+              <p:cNvSpPr/>
+              <p:nvPr/>
+            </p:nvSpPr>
+            <p:spPr>
+              <a:xfrm>
+                <a:off x="7390170" y="1098112"/>
+                <a:ext cx="3959922" cy="3682133"/>
+              </a:xfrm>
+              <a:prstGeom prst="roundRect">
+                <a:avLst/>
+              </a:prstGeom>
+              <a:noFill/>
+              <a:ln>
+                <a:solidFill>
+                  <a:schemeClr val="tx1"/>
+                </a:solidFill>
+              </a:ln>
+            </p:spPr>
+            <p:style>
+              <a:lnRef idx="2">
+                <a:schemeClr val="accent1">
+                  <a:shade val="15000"/>
+                </a:schemeClr>
+              </a:lnRef>
+              <a:fillRef idx="1">
+                <a:schemeClr val="accent1"/>
+              </a:fillRef>
+              <a:effectRef idx="0">
+                <a:schemeClr val="accent1"/>
+              </a:effectRef>
+              <a:fontRef idx="minor">
+                <a:schemeClr val="lt1"/>
+              </a:fontRef>
+            </p:style>
+            <p:txBody>
+              <a:bodyPr rtlCol="0" anchor="ctr"/>
+              <a:lstStyle/>
+              <a:p>
+                <a:pPr algn="ctr"/>
+                <a:endParaRPr lang="en-US" dirty="0"/>
+              </a:p>
+            </p:txBody>
+          </p:sp>
+          <p:cxnSp>
+            <p:nvCxnSpPr>
+              <p:cNvPr id="93" name="Connector: Elbow 92">
+                <a:extLst>
+                  <a:ext uri="{FF2B5EF4-FFF2-40B4-BE49-F238E27FC236}">
+                    <a16:creationId xmlns:a16="http://schemas.microsoft.com/office/drawing/2014/main" id="{C18DE19B-00D0-3255-6751-EB1E1B5AA1E4}"/>
+                  </a:ext>
+                </a:extLst>
+              </p:cNvPr>
+              <p:cNvCxnSpPr>
+                <a:cxnSpLocks/>
+                <a:stCxn id="81" idx="3"/>
+                <a:endCxn id="4" idx="1"/>
+              </p:cNvCxnSpPr>
+              <p:nvPr/>
+            </p:nvCxnSpPr>
+            <p:spPr>
+              <a:xfrm>
+                <a:off x="4447111" y="1846116"/>
+                <a:ext cx="539940" cy="969274"/>
+              </a:xfrm>
+              <a:prstGeom prst="bentConnector3">
+                <a:avLst/>
+              </a:prstGeom>
+              <a:ln>
+                <a:prstDash val="sysDash"/>
+                <a:tailEnd type="triangle"/>
+              </a:ln>
+            </p:spPr>
+            <p:style>
+              <a:lnRef idx="2">
+                <a:schemeClr val="dk1"/>
+              </a:lnRef>
+              <a:fillRef idx="0">
+                <a:schemeClr val="dk1"/>
+              </a:fillRef>
+              <a:effectRef idx="1">
+                <a:schemeClr val="dk1"/>
+              </a:effectRef>
+              <a:fontRef idx="minor">
+                <a:schemeClr val="tx1"/>
+              </a:fontRef>
+            </p:style>
+          </p:cxnSp>
+          <p:cxnSp>
+            <p:nvCxnSpPr>
+              <p:cNvPr id="94" name="Connector: Elbow 93">
+                <a:extLst>
+                  <a:ext uri="{FF2B5EF4-FFF2-40B4-BE49-F238E27FC236}">
+                    <a16:creationId xmlns:a16="http://schemas.microsoft.com/office/drawing/2014/main" id="{80A6894E-3F86-946A-C66A-589AF24D32B4}"/>
+                  </a:ext>
+                </a:extLst>
+              </p:cNvPr>
+              <p:cNvCxnSpPr>
+                <a:cxnSpLocks/>
+                <a:stCxn id="82" idx="3"/>
+                <a:endCxn id="4" idx="1"/>
+              </p:cNvCxnSpPr>
+              <p:nvPr/>
+            </p:nvCxnSpPr>
+            <p:spPr>
+              <a:xfrm flipV="1">
+                <a:off x="4447111" y="2815390"/>
+                <a:ext cx="539940" cy="1142945"/>
+              </a:xfrm>
+              <a:prstGeom prst="bentConnector3">
+                <a:avLst>
+                  <a:gd name="adj1" fmla="val 50000"/>
+                </a:avLst>
+              </a:prstGeom>
+              <a:ln>
+                <a:prstDash val="sysDash"/>
+                <a:tailEnd type="triangle"/>
+              </a:ln>
+            </p:spPr>
+            <p:style>
+              <a:lnRef idx="2">
+                <a:schemeClr val="dk1"/>
+              </a:lnRef>
+              <a:fillRef idx="0">
+                <a:schemeClr val="dk1"/>
+              </a:fillRef>
+              <a:effectRef idx="1">
+                <a:schemeClr val="dk1"/>
+              </a:effectRef>
+              <a:fontRef idx="minor">
+                <a:schemeClr val="tx1"/>
+              </a:fontRef>
+            </p:style>
+          </p:cxnSp>
+          <p:cxnSp>
+            <p:nvCxnSpPr>
+              <p:cNvPr id="101" name="Straight Arrow Connector 100">
+                <a:extLst>
+                  <a:ext uri="{FF2B5EF4-FFF2-40B4-BE49-F238E27FC236}">
+                    <a16:creationId xmlns:a16="http://schemas.microsoft.com/office/drawing/2014/main" id="{F5DCA819-9EE4-88CB-8B3F-0629FC7D5FA1}"/>
+                  </a:ext>
+                </a:extLst>
+              </p:cNvPr>
+              <p:cNvCxnSpPr>
+                <a:cxnSpLocks/>
+              </p:cNvCxnSpPr>
+              <p:nvPr/>
+            </p:nvCxnSpPr>
+            <p:spPr>
+              <a:xfrm>
+                <a:off x="5874380" y="1176209"/>
+                <a:ext cx="0" cy="484149"/>
+              </a:xfrm>
+              <a:prstGeom prst="straightConnector1">
+                <a:avLst/>
+              </a:prstGeom>
+              <a:ln>
+                <a:prstDash val="sysDash"/>
+                <a:tailEnd type="triangle"/>
+              </a:ln>
+            </p:spPr>
+            <p:style>
+              <a:lnRef idx="2">
+                <a:schemeClr val="dk1"/>
+              </a:lnRef>
+              <a:fillRef idx="0">
+                <a:schemeClr val="dk1"/>
+              </a:fillRef>
+              <a:effectRef idx="1">
+                <a:schemeClr val="dk1"/>
+              </a:effectRef>
+              <a:fontRef idx="minor">
+                <a:schemeClr val="tx1"/>
+              </a:fontRef>
+            </p:style>
+          </p:cxnSp>
+          <p:pic>
+            <p:nvPicPr>
+              <p:cNvPr id="102" name="Graphic 101" descr="Tools with solid fill">
+                <a:extLst>
+                  <a:ext uri="{FF2B5EF4-FFF2-40B4-BE49-F238E27FC236}">
+                    <a16:creationId xmlns:a16="http://schemas.microsoft.com/office/drawing/2014/main" id="{CCCB513C-C8D7-ABE5-81B9-2AF2530D892C}"/>
+                  </a:ext>
+                </a:extLst>
+              </p:cNvPr>
+              <p:cNvPicPr>
+                <a:picLocks noChangeAspect="1"/>
+              </p:cNvPicPr>
+              <p:nvPr/>
+            </p:nvPicPr>
+            <p:blipFill>
+              <a:blip r:embed="rId8">
+                <a:extLst>
+                  <a:ext uri="{96DAC541-7B7A-43D3-8B79-37D633B846F1}">
+                    <asvg:svgBlip xmlns:asvg="http://schemas.microsoft.com/office/drawing/2016/SVG/main" r:embed="rId9"/>
+                  </a:ext>
+                </a:extLst>
+              </a:blip>
+              <a:stretch>
+                <a:fillRect/>
+              </a:stretch>
+            </p:blipFill>
+            <p:spPr>
+              <a:xfrm>
+                <a:off x="7805585" y="759229"/>
+                <a:ext cx="304798" cy="304798"/>
+              </a:xfrm>
+              <a:prstGeom prst="rect">
+                <a:avLst/>
+              </a:prstGeom>
+            </p:spPr>
+          </p:pic>
+          <p:cxnSp>
+            <p:nvCxnSpPr>
+              <p:cNvPr id="104" name="Straight Arrow Connector 103">
+                <a:extLst>
+                  <a:ext uri="{FF2B5EF4-FFF2-40B4-BE49-F238E27FC236}">
+                    <a16:creationId xmlns:a16="http://schemas.microsoft.com/office/drawing/2014/main" id="{6B3F3325-FDD8-6A72-2639-464C7F3D7314}"/>
+                  </a:ext>
+                </a:extLst>
+              </p:cNvPr>
+              <p:cNvCxnSpPr>
+                <a:cxnSpLocks/>
+                <a:stCxn id="4" idx="3"/>
+              </p:cNvCxnSpPr>
+              <p:nvPr/>
+            </p:nvCxnSpPr>
+            <p:spPr>
+              <a:xfrm flipV="1">
+                <a:off x="6761709" y="2815389"/>
+                <a:ext cx="624611" cy="1"/>
+              </a:xfrm>
+              <a:prstGeom prst="straightConnector1">
+                <a:avLst/>
+              </a:prstGeom>
+              <a:ln>
+                <a:prstDash val="sysDash"/>
+                <a:tailEnd type="triangle"/>
+              </a:ln>
+            </p:spPr>
+            <p:style>
+              <a:lnRef idx="2">
+                <a:schemeClr val="dk1"/>
+              </a:lnRef>
+              <a:fillRef idx="0">
+                <a:schemeClr val="dk1"/>
+              </a:fillRef>
+              <a:effectRef idx="1">
+                <a:schemeClr val="dk1"/>
+              </a:effectRef>
+              <a:fontRef idx="minor">
+                <a:schemeClr val="tx1"/>
+              </a:fontRef>
+            </p:style>
+          </p:cxnSp>
+          <p:cxnSp>
+            <p:nvCxnSpPr>
+              <p:cNvPr id="118" name="Straight Connector 117">
+                <a:extLst>
+                  <a:ext uri="{FF2B5EF4-FFF2-40B4-BE49-F238E27FC236}">
+                    <a16:creationId xmlns:a16="http://schemas.microsoft.com/office/drawing/2014/main" id="{A2511C1E-D50D-B67C-E30D-211C6B1BC2A0}"/>
+                  </a:ext>
+                </a:extLst>
+              </p:cNvPr>
+              <p:cNvCxnSpPr/>
+              <p:nvPr/>
+            </p:nvCxnSpPr>
+            <p:spPr>
+              <a:xfrm>
+                <a:off x="5460701" y="4690929"/>
+                <a:ext cx="517356" cy="0"/>
+              </a:xfrm>
+              <a:prstGeom prst="line">
+                <a:avLst/>
+              </a:prstGeom>
+              <a:ln>
+                <a:prstDash val="dash"/>
+              </a:ln>
+            </p:spPr>
+            <p:style>
+              <a:lnRef idx="2">
+                <a:schemeClr val="dk1"/>
+              </a:lnRef>
+              <a:fillRef idx="0">
+                <a:schemeClr val="dk1"/>
+              </a:fillRef>
+              <a:effectRef idx="1">
+                <a:schemeClr val="dk1"/>
+              </a:effectRef>
+              <a:fontRef idx="minor">
+                <a:schemeClr val="tx1"/>
+              </a:fontRef>
+            </p:style>
+          </p:cxnSp>
+          <p:sp>
+            <p:nvSpPr>
+              <p:cNvPr id="120" name="TextBox 119">
+                <a:extLst>
+                  <a:ext uri="{FF2B5EF4-FFF2-40B4-BE49-F238E27FC236}">
+                    <a16:creationId xmlns:a16="http://schemas.microsoft.com/office/drawing/2014/main" id="{3BF180E4-DC1E-5A10-CFFC-92CDA30B4A69}"/>
+                  </a:ext>
+                </a:extLst>
+              </p:cNvPr>
+              <p:cNvSpPr txBox="1"/>
+              <p:nvPr/>
+            </p:nvSpPr>
+            <p:spPr>
+              <a:xfrm>
+                <a:off x="1454296" y="2856549"/>
+                <a:ext cx="1774657" cy="307777"/>
+              </a:xfrm>
+              <a:prstGeom prst="rect">
+                <a:avLst/>
+              </a:prstGeom>
+              <a:noFill/>
+            </p:spPr>
+            <p:txBody>
+              <a:bodyPr wrap="square" rtlCol="0">
+                <a:spAutoFit/>
+              </a:bodyPr>
+              <a:lstStyle/>
+              <a:p>
+                <a:pPr algn="ctr"/>
+                <a:r>
+                  <a:rPr lang="en-US" sz="1400" dirty="0"/>
+                  <a:t>ML models</a:t>
+                </a:r>
+              </a:p>
+            </p:txBody>
+          </p:sp>
+          <p:grpSp>
+            <p:nvGrpSpPr>
+              <p:cNvPr id="2" name="Group 1">
+                <a:extLst>
+                  <a:ext uri="{FF2B5EF4-FFF2-40B4-BE49-F238E27FC236}">
+                    <a16:creationId xmlns:a16="http://schemas.microsoft.com/office/drawing/2014/main" id="{29B5869D-89AA-074F-A57C-6183A17CB9BA}"/>
+                  </a:ext>
+                </a:extLst>
+              </p:cNvPr>
+              <p:cNvGrpSpPr/>
+              <p:nvPr/>
+            </p:nvGrpSpPr>
+            <p:grpSpPr>
+              <a:xfrm>
+                <a:off x="7673015" y="1156395"/>
+                <a:ext cx="3293924" cy="2842506"/>
+                <a:chOff x="7673015" y="1156395"/>
+                <a:chExt cx="3293924" cy="2842506"/>
+              </a:xfrm>
+            </p:grpSpPr>
+            <p:grpSp>
+              <p:nvGrpSpPr>
+                <p:cNvPr id="142" name="Group 141">
+                  <a:extLst>
+                    <a:ext uri="{FF2B5EF4-FFF2-40B4-BE49-F238E27FC236}">
+                      <a16:creationId xmlns:a16="http://schemas.microsoft.com/office/drawing/2014/main" id="{10981DF9-3B88-6642-A38A-F557DBD8A271}"/>
+                    </a:ext>
+                  </a:extLst>
+                </p:cNvPr>
+                <p:cNvGrpSpPr/>
+                <p:nvPr/>
+              </p:nvGrpSpPr>
+              <p:grpSpPr>
+                <a:xfrm>
+                  <a:off x="7673015" y="1156395"/>
+                  <a:ext cx="1587496" cy="2817506"/>
+                  <a:chOff x="7673015" y="1156395"/>
+                  <a:chExt cx="1587496" cy="2817506"/>
+                </a:xfrm>
+              </p:grpSpPr>
+              <p:pic>
+                <p:nvPicPr>
+                  <p:cNvPr id="125" name="Graphic 124">
+                    <a:extLst>
+                      <a:ext uri="{FF2B5EF4-FFF2-40B4-BE49-F238E27FC236}">
+                        <a16:creationId xmlns:a16="http://schemas.microsoft.com/office/drawing/2014/main" id="{C79B781B-3EC9-8D56-5649-7E84B7805E5E}"/>
+                      </a:ext>
+                    </a:extLst>
+                  </p:cNvPr>
+                  <p:cNvPicPr>
+                    <a:picLocks noChangeAspect="1"/>
+                  </p:cNvPicPr>
+                  <p:nvPr/>
+                </p:nvPicPr>
+                <p:blipFill>
+                  <a:blip r:embed="rId10">
+                    <a:extLst>
+                      <a:ext uri="{28A0092B-C50C-407E-A947-70E740481C1C}">
+                        <a14:useLocalDpi xmlns:a14="http://schemas.microsoft.com/office/drawing/2010/main" val="0"/>
+                      </a:ext>
+                      <a:ext uri="{96DAC541-7B7A-43D3-8B79-37D633B846F1}">
+                        <asvg:svgBlip xmlns:asvg="http://schemas.microsoft.com/office/drawing/2016/SVG/main" r:embed="rId11"/>
+                      </a:ext>
+                    </a:extLst>
+                  </a:blip>
+                  <a:stretch>
+                    <a:fillRect/>
+                  </a:stretch>
+                </p:blipFill>
+                <p:spPr>
+                  <a:xfrm>
+                    <a:off x="7673015" y="2971047"/>
+                    <a:ext cx="1587496" cy="1002854"/>
+                  </a:xfrm>
+                  <a:prstGeom prst="rect">
+                    <a:avLst/>
+                  </a:prstGeom>
+                </p:spPr>
+              </p:pic>
+              <p:pic>
+                <p:nvPicPr>
+                  <p:cNvPr id="126" name="Picture 125">
+                    <a:extLst>
+                      <a:ext uri="{FF2B5EF4-FFF2-40B4-BE49-F238E27FC236}">
+                        <a16:creationId xmlns:a16="http://schemas.microsoft.com/office/drawing/2014/main" id="{818766DF-CDB2-59A5-14AE-55EEA959C11D}"/>
+                      </a:ext>
+                    </a:extLst>
+                  </p:cNvPr>
+                  <p:cNvPicPr>
+                    <a:picLocks noChangeAspect="1"/>
+                  </p:cNvPicPr>
+                  <p:nvPr/>
+                </p:nvPicPr>
+                <p:blipFill rotWithShape="1">
+                  <a:blip r:embed="rId12">
+                    <a:extLst>
+                      <a:ext uri="{28A0092B-C50C-407E-A947-70E740481C1C}">
+                        <a14:useLocalDpi xmlns:a14="http://schemas.microsoft.com/office/drawing/2010/main" val="0"/>
+                      </a:ext>
+                    </a:extLst>
+                  </a:blip>
+                  <a:srcRect l="11108" t="19807" r="13646" b="22794"/>
+                  <a:stretch/>
+                </p:blipFill>
+                <p:spPr>
+                  <a:xfrm>
+                    <a:off x="7689054" y="1403389"/>
+                    <a:ext cx="1449076" cy="1105371"/>
+                  </a:xfrm>
+                  <a:prstGeom prst="rect">
+                    <a:avLst/>
+                  </a:prstGeom>
+                </p:spPr>
+              </p:pic>
+              <p:sp>
+                <p:nvSpPr>
+                  <p:cNvPr id="131" name="TextBox 130">
+                    <a:extLst>
+                      <a:ext uri="{FF2B5EF4-FFF2-40B4-BE49-F238E27FC236}">
+                        <a16:creationId xmlns:a16="http://schemas.microsoft.com/office/drawing/2014/main" id="{30B447AA-6E7A-E938-36FB-3B18BDD86AA9}"/>
+                      </a:ext>
+                    </a:extLst>
+                  </p:cNvPr>
+                  <p:cNvSpPr txBox="1"/>
+                  <p:nvPr/>
+                </p:nvSpPr>
+                <p:spPr>
+                  <a:xfrm>
+                    <a:off x="8141530" y="1156395"/>
+                    <a:ext cx="737734" cy="307777"/>
+                  </a:xfrm>
+                  <a:prstGeom prst="rect">
+                    <a:avLst/>
+                  </a:prstGeom>
+                  <a:noFill/>
+                </p:spPr>
+                <p:txBody>
+                  <a:bodyPr wrap="square" rtlCol="0">
+                    <a:spAutoFit/>
+                  </a:bodyPr>
+                  <a:lstStyle/>
+                  <a:p>
+                    <a:pPr algn="ctr"/>
+                    <a:r>
+                      <a:rPr lang="en-US" sz="1400" dirty="0"/>
+                      <a:t>SHAP</a:t>
+                    </a:r>
+                  </a:p>
+                </p:txBody>
+              </p:sp>
+              <p:sp>
+                <p:nvSpPr>
+                  <p:cNvPr id="133" name="TextBox 132">
+                    <a:extLst>
+                      <a:ext uri="{FF2B5EF4-FFF2-40B4-BE49-F238E27FC236}">
+                        <a16:creationId xmlns:a16="http://schemas.microsoft.com/office/drawing/2014/main" id="{2EA89C04-883D-8AC3-FC42-C45F07A23A14}"/>
+                      </a:ext>
+                    </a:extLst>
+                  </p:cNvPr>
+                  <p:cNvSpPr txBox="1"/>
+                  <p:nvPr/>
+                </p:nvSpPr>
+                <p:spPr>
+                  <a:xfrm>
+                    <a:off x="7673015" y="2676841"/>
+                    <a:ext cx="1500875" cy="307777"/>
+                  </a:xfrm>
+                  <a:prstGeom prst="rect">
+                    <a:avLst/>
+                  </a:prstGeom>
+                  <a:noFill/>
+                </p:spPr>
+                <p:txBody>
+                  <a:bodyPr wrap="square" rtlCol="0">
+                    <a:spAutoFit/>
+                  </a:bodyPr>
+                  <a:lstStyle/>
+                  <a:p>
+                    <a:pPr algn="ctr"/>
+                    <a:r>
+                      <a:rPr lang="en-US" sz="1400" dirty="0"/>
+                      <a:t>Counterfactuals</a:t>
+                    </a:r>
+                  </a:p>
+                </p:txBody>
+              </p:sp>
+            </p:grpSp>
+            <p:grpSp>
+              <p:nvGrpSpPr>
+                <p:cNvPr id="143" name="Group 142">
+                  <a:extLst>
+                    <a:ext uri="{FF2B5EF4-FFF2-40B4-BE49-F238E27FC236}">
+                      <a16:creationId xmlns:a16="http://schemas.microsoft.com/office/drawing/2014/main" id="{44DF905F-D3A1-4FD5-B979-6E405669B5A0}"/>
+                    </a:ext>
+                  </a:extLst>
+                </p:cNvPr>
+                <p:cNvGrpSpPr/>
+                <p:nvPr/>
+              </p:nvGrpSpPr>
+              <p:grpSpPr>
+                <a:xfrm>
+                  <a:off x="9399204" y="1156395"/>
+                  <a:ext cx="1567735" cy="2842506"/>
+                  <a:chOff x="9399204" y="1156395"/>
+                  <a:chExt cx="1567735" cy="2842506"/>
+                </a:xfrm>
+              </p:grpSpPr>
+              <p:pic>
+                <p:nvPicPr>
+                  <p:cNvPr id="127" name="Graphic 126">
+                    <a:extLst>
+                      <a:ext uri="{FF2B5EF4-FFF2-40B4-BE49-F238E27FC236}">
+                        <a16:creationId xmlns:a16="http://schemas.microsoft.com/office/drawing/2014/main" id="{3FE957ED-4E4C-EFCC-3B97-2B55171D3A8D}"/>
+                      </a:ext>
+                    </a:extLst>
+                  </p:cNvPr>
+                  <p:cNvPicPr>
+                    <a:picLocks noChangeAspect="1"/>
+                  </p:cNvPicPr>
+                  <p:nvPr/>
+                </p:nvPicPr>
+                <p:blipFill rotWithShape="1">
+                  <a:blip r:embed="rId13">
+                    <a:extLst>
+                      <a:ext uri="{28A0092B-C50C-407E-A947-70E740481C1C}">
+                        <a14:useLocalDpi xmlns:a14="http://schemas.microsoft.com/office/drawing/2010/main" val="0"/>
+                      </a:ext>
+                      <a:ext uri="{96DAC541-7B7A-43D3-8B79-37D633B846F1}">
+                        <asvg:svgBlip xmlns:asvg="http://schemas.microsoft.com/office/drawing/2016/SVG/main" r:embed="rId14"/>
+                      </a:ext>
+                    </a:extLst>
+                  </a:blip>
+                  <a:srcRect t="12321" b="13057"/>
+                  <a:stretch/>
+                </p:blipFill>
+                <p:spPr>
+                  <a:xfrm>
+                    <a:off x="9454227" y="1421626"/>
+                    <a:ext cx="1438167" cy="1073198"/>
+                  </a:xfrm>
+                  <a:prstGeom prst="rect">
+                    <a:avLst/>
+                  </a:prstGeom>
+                </p:spPr>
+              </p:pic>
+              <p:sp>
+                <p:nvSpPr>
+                  <p:cNvPr id="132" name="TextBox 131">
+                    <a:extLst>
+                      <a:ext uri="{FF2B5EF4-FFF2-40B4-BE49-F238E27FC236}">
+                        <a16:creationId xmlns:a16="http://schemas.microsoft.com/office/drawing/2014/main" id="{42C94301-9EFA-C916-8445-A8D784F80786}"/>
+                      </a:ext>
+                    </a:extLst>
+                  </p:cNvPr>
+                  <p:cNvSpPr txBox="1"/>
+                  <p:nvPr/>
+                </p:nvSpPr>
+                <p:spPr>
+                  <a:xfrm>
+                    <a:off x="9743895" y="1156395"/>
+                    <a:ext cx="1050987" cy="307777"/>
+                  </a:xfrm>
+                  <a:prstGeom prst="rect">
+                    <a:avLst/>
+                  </a:prstGeom>
+                  <a:noFill/>
+                </p:spPr>
+                <p:txBody>
+                  <a:bodyPr wrap="square" rtlCol="0">
+                    <a:spAutoFit/>
+                  </a:bodyPr>
+                  <a:lstStyle/>
+                  <a:p>
+                    <a:pPr algn="ctr"/>
+                    <a:r>
+                      <a:rPr lang="en-US" sz="1400" dirty="0" err="1"/>
+                      <a:t>MolAnchor</a:t>
+                    </a:r>
+                    <a:endParaRPr lang="en-US" sz="1400" dirty="0"/>
+                  </a:p>
+                </p:txBody>
+              </p:sp>
+              <p:sp>
+                <p:nvSpPr>
+                  <p:cNvPr id="135" name="TextBox 134">
+                    <a:extLst>
+                      <a:ext uri="{FF2B5EF4-FFF2-40B4-BE49-F238E27FC236}">
+                        <a16:creationId xmlns:a16="http://schemas.microsoft.com/office/drawing/2014/main" id="{C4FCF618-49AF-DF82-8B0D-58D9D04FA886}"/>
+                      </a:ext>
+                    </a:extLst>
+                  </p:cNvPr>
+                  <p:cNvSpPr txBox="1"/>
+                  <p:nvPr/>
+                </p:nvSpPr>
+                <p:spPr>
+                  <a:xfrm>
+                    <a:off x="9435847" y="2707027"/>
+                    <a:ext cx="1500875" cy="307777"/>
+                  </a:xfrm>
+                  <a:prstGeom prst="rect">
+                    <a:avLst/>
+                  </a:prstGeom>
+                  <a:noFill/>
+                </p:spPr>
+                <p:txBody>
+                  <a:bodyPr wrap="square" rtlCol="0">
+                    <a:spAutoFit/>
+                  </a:bodyPr>
+                  <a:lstStyle/>
+                  <a:p>
+                    <a:pPr algn="ctr"/>
+                    <a:r>
+                      <a:rPr lang="en-US" sz="1400" dirty="0" err="1"/>
+                      <a:t>MolCE</a:t>
+                    </a:r>
+                    <a:endParaRPr lang="en-US" sz="1400" dirty="0"/>
+                  </a:p>
+                </p:txBody>
+              </p:sp>
+              <p:pic>
+                <p:nvPicPr>
+                  <p:cNvPr id="140" name="Graphic 139">
+                    <a:extLst>
+                      <a:ext uri="{FF2B5EF4-FFF2-40B4-BE49-F238E27FC236}">
+                        <a16:creationId xmlns:a16="http://schemas.microsoft.com/office/drawing/2014/main" id="{A92B0211-A93B-9038-C90D-1361227781BE}"/>
+                      </a:ext>
+                    </a:extLst>
+                  </p:cNvPr>
+                  <p:cNvPicPr>
+                    <a:picLocks noChangeAspect="1"/>
+                  </p:cNvPicPr>
+                  <p:nvPr/>
+                </p:nvPicPr>
+                <p:blipFill>
+                  <a:blip r:embed="rId15">
+                    <a:extLst>
+                      <a:ext uri="{28A0092B-C50C-407E-A947-70E740481C1C}">
+                        <a14:useLocalDpi xmlns:a14="http://schemas.microsoft.com/office/drawing/2010/main" val="0"/>
+                      </a:ext>
+                      <a:ext uri="{96DAC541-7B7A-43D3-8B79-37D633B846F1}">
+                        <asvg:svgBlip xmlns:asvg="http://schemas.microsoft.com/office/drawing/2016/SVG/main" r:embed="rId16"/>
+                      </a:ext>
+                    </a:extLst>
+                  </a:blip>
+                  <a:stretch>
+                    <a:fillRect/>
+                  </a:stretch>
+                </p:blipFill>
+                <p:spPr>
+                  <a:xfrm>
+                    <a:off x="9399204" y="3014804"/>
+                    <a:ext cx="1464062" cy="641095"/>
+                  </a:xfrm>
+                  <a:prstGeom prst="rect">
+                    <a:avLst/>
+                  </a:prstGeom>
+                </p:spPr>
+              </p:pic>
+              <mc:AlternateContent xmlns:mc="http://schemas.openxmlformats.org/markup-compatibility/2006">
+                <mc:Choice xmlns:a14="http://schemas.microsoft.com/office/drawing/2010/main" Requires="a14">
+                  <p:sp>
+                    <p:nvSpPr>
+                      <p:cNvPr id="141" name="TextBox 140">
+                        <a:extLst>
+                          <a:ext uri="{FF2B5EF4-FFF2-40B4-BE49-F238E27FC236}">
+                            <a16:creationId xmlns:a16="http://schemas.microsoft.com/office/drawing/2014/main" id="{2B95AB89-8A8A-1216-8C19-F08323741F34}"/>
+                          </a:ext>
+                        </a:extLst>
+                      </p:cNvPr>
+                      <p:cNvSpPr txBox="1"/>
+                      <p:nvPr/>
+                    </p:nvSpPr>
+                    <p:spPr>
+                      <a:xfrm>
+                        <a:off x="9698491" y="3691124"/>
+                        <a:ext cx="1268448" cy="307777"/>
+                      </a:xfrm>
+                      <a:prstGeom prst="rect">
+                        <a:avLst/>
+                      </a:prstGeom>
+                      <a:noFill/>
+                    </p:spPr>
+                    <p:txBody>
+                      <a:bodyPr wrap="square" rtlCol="0">
+                        <a:spAutoFit/>
+                      </a:bodyPr>
+                      <a:lstStyle/>
+                      <a:p>
+                        <a:pPr algn="ctr"/>
+                        <a14:m>
+                          <m:oMathPara xmlns:m="http://schemas.openxmlformats.org/officeDocument/2006/math">
+                            <m:oMathParaPr>
+                              <m:jc m:val="centerGroup"/>
+                            </m:oMathParaPr>
+                            <m:oMath xmlns:m="http://schemas.openxmlformats.org/officeDocument/2006/math">
+                              <m:sSubSup>
+                                <m:sSubSupPr>
+                                  <m:ctrlPr>
+                                    <a:rPr lang="el-GR" sz="1400" i="1" smtClean="0">
+                                      <a:latin typeface="Cambria Math" panose="02040503050406030204" pitchFamily="18" charset="0"/>
+                                    </a:rPr>
+                                  </m:ctrlPr>
+                                </m:sSubSupPr>
+                                <m:e>
+                                  <m:r>
+                                    <m:rPr>
+                                      <m:nor/>
+                                    </m:rPr>
+                                    <a:rPr lang="el-GR" sz="1400" smtClean="0"/>
+                                    <m:t>δ</m:t>
+                                  </m:r>
+                                </m:e>
+                                <m:sub>
+                                  <m:r>
+                                    <m:rPr>
+                                      <m:nor/>
+                                    </m:rPr>
+                                    <a:rPr lang="en-US" sz="800" dirty="0" smtClean="0"/>
+                                    <m:t> </m:t>
+                                  </m:r>
+                                </m:sub>
+                                <m:sup>
+                                  <m:r>
+                                    <a:rPr lang="en-US" sz="1400" b="0" i="1" smtClean="0">
+                                      <a:latin typeface="Cambria Math" panose="02040503050406030204" pitchFamily="18" charset="0"/>
+                                    </a:rPr>
+                                    <m:t>𝑐𝑜𝑛𝑡𝑟</m:t>
+                                  </m:r>
+                                </m:sup>
+                              </m:sSubSup>
+                            </m:oMath>
+                          </m:oMathPara>
+                        </a14:m>
+                        <a:endParaRPr lang="en-US" sz="1400" dirty="0"/>
+                      </a:p>
+                    </p:txBody>
+                  </p:sp>
+                </mc:Choice>
+                <mc:Fallback>
+                  <p:sp>
+                    <p:nvSpPr>
+                      <p:cNvPr id="141" name="TextBox 140">
+                        <a:extLst>
+                          <a:ext uri="{FF2B5EF4-FFF2-40B4-BE49-F238E27FC236}">
+                            <a16:creationId xmlns:a16="http://schemas.microsoft.com/office/drawing/2014/main" id="{2B95AB89-8A8A-1216-8C19-F08323741F34}"/>
+                          </a:ext>
+                        </a:extLst>
+                      </p:cNvPr>
+                      <p:cNvSpPr txBox="1">
+                        <a:spLocks noRot="1" noChangeAspect="1" noMove="1" noResize="1" noEditPoints="1" noAdjustHandles="1" noChangeArrowheads="1" noChangeShapeType="1" noTextEdit="1"/>
+                      </p:cNvSpPr>
+                      <p:nvPr/>
+                    </p:nvSpPr>
+                    <p:spPr>
+                      <a:xfrm>
+                        <a:off x="9698491" y="3691124"/>
+                        <a:ext cx="1268448" cy="307777"/>
+                      </a:xfrm>
+                      <a:prstGeom prst="rect">
+                        <a:avLst/>
+                      </a:prstGeom>
+                      <a:blipFill>
+                        <a:blip r:embed="rId17"/>
+                        <a:stretch>
+                          <a:fillRect/>
+                        </a:stretch>
+                      </a:blipFill>
+                    </p:spPr>
+                    <p:txBody>
+                      <a:bodyPr/>
+                      <a:lstStyle/>
+                      <a:p>
+                        <a:r>
+                          <a:rPr lang="de-DE">
+                            <a:noFill/>
+                          </a:rPr>
+                          <a:t> </a:t>
+                        </a:r>
+                      </a:p>
+                    </p:txBody>
+                  </p:sp>
+                </mc:Fallback>
+              </mc:AlternateContent>
+            </p:grpSp>
+          </p:grpSp>
+          <p:pic>
+            <p:nvPicPr>
+              <p:cNvPr id="5" name="Picture 4">
+                <a:extLst>
+                  <a:ext uri="{FF2B5EF4-FFF2-40B4-BE49-F238E27FC236}">
+                    <a16:creationId xmlns:a16="http://schemas.microsoft.com/office/drawing/2014/main" id="{6716AA7E-D6D5-43DC-A9E9-105AEBC18DE0}"/>
+                  </a:ext>
+                </a:extLst>
+              </p:cNvPr>
+              <p:cNvPicPr>
+                <a:picLocks noChangeAspect="1"/>
+              </p:cNvPicPr>
+              <p:nvPr/>
+            </p:nvPicPr>
+            <p:blipFill>
+              <a:blip r:embed="rId18"/>
+              <a:stretch>
+                <a:fillRect/>
+              </a:stretch>
+            </p:blipFill>
+            <p:spPr>
+              <a:xfrm>
+                <a:off x="5123441" y="1756561"/>
+                <a:ext cx="1525117" cy="996871"/>
+              </a:xfrm>
+              <a:prstGeom prst="rect">
+                <a:avLst/>
+              </a:prstGeom>
+            </p:spPr>
+          </p:pic>
+        </p:grpSp>
+        <p:pic>
+          <p:nvPicPr>
+            <p:cNvPr id="12" name="Picture 11">
+              <a:extLst>
+                <a:ext uri="{FF2B5EF4-FFF2-40B4-BE49-F238E27FC236}">
+                  <a16:creationId xmlns:a16="http://schemas.microsoft.com/office/drawing/2014/main" id="{488C76C0-4242-4020-844A-12112F9941B0}"/>
+                </a:ext>
+              </a:extLst>
+            </p:cNvPr>
+            <p:cNvPicPr>
+              <a:picLocks noChangeAspect="1"/>
+            </p:cNvPicPr>
+            <p:nvPr/>
+          </p:nvPicPr>
+          <p:blipFill rotWithShape="1">
+            <a:blip r:embed="rId19">
+              <a:extLst>
+                <a:ext uri="{28A0092B-C50C-407E-A947-70E740481C1C}">
+                  <a14:useLocalDpi xmlns:a14="http://schemas.microsoft.com/office/drawing/2010/main" val="0"/>
+                </a:ext>
+              </a:extLst>
+            </a:blip>
+            <a:srcRect l="15107" t="29142" r="12113" b="31110"/>
+            <a:stretch/>
+          </p:blipFill>
+          <p:spPr>
+            <a:xfrm>
+              <a:off x="8260538" y="4119574"/>
+              <a:ext cx="1999946" cy="614383"/>
+            </a:xfrm>
+            <a:prstGeom prst="rect">
+              <a:avLst/>
+            </a:prstGeom>
+          </p:spPr>
+        </p:pic>
+        <p:sp>
+          <p:nvSpPr>
+            <p:cNvPr id="56" name="TextBox 55">
+              <a:extLst>
+                <a:ext uri="{FF2B5EF4-FFF2-40B4-BE49-F238E27FC236}">
+                  <a16:creationId xmlns:a16="http://schemas.microsoft.com/office/drawing/2014/main" id="{ADBDCDA9-B27F-456F-B5FC-D553171D0EF8}"/>
+                </a:ext>
+              </a:extLst>
+            </p:cNvPr>
+            <p:cNvSpPr txBox="1"/>
+            <p:nvPr/>
+          </p:nvSpPr>
+          <p:spPr>
+            <a:xfrm>
+              <a:off x="8537436" y="3923115"/>
+              <a:ext cx="1500875" cy="307777"/>
+            </a:xfrm>
+            <a:prstGeom prst="rect">
+              <a:avLst/>
+            </a:prstGeom>
+            <a:noFill/>
+          </p:spPr>
+          <p:txBody>
+            <a:bodyPr wrap="square" rtlCol="0">
+              <a:spAutoFit/>
+            </a:bodyPr>
+            <a:lstStyle/>
+            <a:p>
+              <a:pPr algn="ctr"/>
+              <a:r>
+                <a:rPr lang="en-US" sz="1400" dirty="0" err="1"/>
+                <a:t>EdgeSHAPer</a:t>
+              </a:r>
+              <a:endParaRPr lang="en-US" sz="1400" dirty="0"/>
+            </a:p>
+          </p:txBody>
+        </p:sp>
+      </p:grpSp>
+    </p:spTree>
+    <p:extLst>
+      <p:ext uri="{BB962C8B-B14F-4D97-AF65-F5344CB8AC3E}">
+        <p14:creationId xmlns:p14="http://schemas.microsoft.com/office/powerpoint/2010/main" val="1345047233"/>
+      </p:ext>
+    </p:extLst>
+  </p:cSld>
+  <p:clrMapOvr>
+    <a:masterClrMapping/>
+  </p:clrMapOvr>
+</p:sld>
+</file>
+
 <file path=ppt/theme/theme1.xml><?xml version="1.0" encoding="utf-8"?>
 <a:theme xmlns:a="http://schemas.openxmlformats.org/drawingml/2006/main" name="Office Theme">
   <a:themeElements>

--- a/slides/figures_AI_agent.pptx
+++ b/slides/figures_AI_agent.pptx
@@ -7,6 +7,9 @@
   <p:sldIdLst>
     <p:sldId id="256" r:id="rId2"/>
     <p:sldId id="257" r:id="rId3"/>
+    <p:sldId id="264" r:id="rId4"/>
+    <p:sldId id="262" r:id="rId5"/>
+    <p:sldId id="265" r:id="rId6"/>
   </p:sldIdLst>
   <p:sldSz cx="12192000" cy="6858000"/>
   <p:notesSz cx="6858000" cy="9144000"/>
@@ -305,7 +308,7 @@
           <a:p>
             <a:fld id="{DA6F0F7C-4BCE-44E3-AC6F-932A28F11178}" type="datetimeFigureOut">
               <a:rPr lang="en-US" smtClean="0"/>
-              <a:t>4/15/2026</a:t>
+              <a:t>4/27/2026</a:t>
             </a:fld>
             <a:endParaRPr lang="en-US"/>
           </a:p>
@@ -503,7 +506,7 @@
           <a:p>
             <a:fld id="{DA6F0F7C-4BCE-44E3-AC6F-932A28F11178}" type="datetimeFigureOut">
               <a:rPr lang="en-US" smtClean="0"/>
-              <a:t>4/15/2026</a:t>
+              <a:t>4/27/2026</a:t>
             </a:fld>
             <a:endParaRPr lang="en-US"/>
           </a:p>
@@ -711,7 +714,7 @@
           <a:p>
             <a:fld id="{DA6F0F7C-4BCE-44E3-AC6F-932A28F11178}" type="datetimeFigureOut">
               <a:rPr lang="en-US" smtClean="0"/>
-              <a:t>4/15/2026</a:t>
+              <a:t>4/27/2026</a:t>
             </a:fld>
             <a:endParaRPr lang="en-US"/>
           </a:p>
@@ -909,7 +912,7 @@
           <a:p>
             <a:fld id="{DA6F0F7C-4BCE-44E3-AC6F-932A28F11178}" type="datetimeFigureOut">
               <a:rPr lang="en-US" smtClean="0"/>
-              <a:t>4/15/2026</a:t>
+              <a:t>4/27/2026</a:t>
             </a:fld>
             <a:endParaRPr lang="en-US"/>
           </a:p>
@@ -1184,7 +1187,7 @@
           <a:p>
             <a:fld id="{DA6F0F7C-4BCE-44E3-AC6F-932A28F11178}" type="datetimeFigureOut">
               <a:rPr lang="en-US" smtClean="0"/>
-              <a:t>4/15/2026</a:t>
+              <a:t>4/27/2026</a:t>
             </a:fld>
             <a:endParaRPr lang="en-US"/>
           </a:p>
@@ -1449,7 +1452,7 @@
           <a:p>
             <a:fld id="{DA6F0F7C-4BCE-44E3-AC6F-932A28F11178}" type="datetimeFigureOut">
               <a:rPr lang="en-US" smtClean="0"/>
-              <a:t>4/15/2026</a:t>
+              <a:t>4/27/2026</a:t>
             </a:fld>
             <a:endParaRPr lang="en-US"/>
           </a:p>
@@ -1861,7 +1864,7 @@
           <a:p>
             <a:fld id="{DA6F0F7C-4BCE-44E3-AC6F-932A28F11178}" type="datetimeFigureOut">
               <a:rPr lang="en-US" smtClean="0"/>
-              <a:t>4/15/2026</a:t>
+              <a:t>4/27/2026</a:t>
             </a:fld>
             <a:endParaRPr lang="en-US"/>
           </a:p>
@@ -2002,7 +2005,7 @@
           <a:p>
             <a:fld id="{DA6F0F7C-4BCE-44E3-AC6F-932A28F11178}" type="datetimeFigureOut">
               <a:rPr lang="en-US" smtClean="0"/>
-              <a:t>4/15/2026</a:t>
+              <a:t>4/27/2026</a:t>
             </a:fld>
             <a:endParaRPr lang="en-US"/>
           </a:p>
@@ -2115,7 +2118,7 @@
           <a:p>
             <a:fld id="{DA6F0F7C-4BCE-44E3-AC6F-932A28F11178}" type="datetimeFigureOut">
               <a:rPr lang="en-US" smtClean="0"/>
-              <a:t>4/15/2026</a:t>
+              <a:t>4/27/2026</a:t>
             </a:fld>
             <a:endParaRPr lang="en-US"/>
           </a:p>
@@ -2426,7 +2429,7 @@
           <a:p>
             <a:fld id="{DA6F0F7C-4BCE-44E3-AC6F-932A28F11178}" type="datetimeFigureOut">
               <a:rPr lang="en-US" smtClean="0"/>
-              <a:t>4/15/2026</a:t>
+              <a:t>4/27/2026</a:t>
             </a:fld>
             <a:endParaRPr lang="en-US"/>
           </a:p>
@@ -2714,7 +2717,7 @@
           <a:p>
             <a:fld id="{DA6F0F7C-4BCE-44E3-AC6F-932A28F11178}" type="datetimeFigureOut">
               <a:rPr lang="en-US" smtClean="0"/>
-              <a:t>4/15/2026</a:t>
+              <a:t>4/27/2026</a:t>
             </a:fld>
             <a:endParaRPr lang="en-US"/>
           </a:p>
@@ -2955,7 +2958,7 @@
           <a:p>
             <a:fld id="{DA6F0F7C-4BCE-44E3-AC6F-932A28F11178}" type="datetimeFigureOut">
               <a:rPr lang="en-US" smtClean="0"/>
-              <a:t>4/15/2026</a:t>
+              <a:t>4/27/2026</a:t>
             </a:fld>
             <a:endParaRPr lang="en-US"/>
           </a:p>
@@ -5440,7 +5443,7 @@
               <a:lstStyle/>
               <a:p>
                 <a:pPr algn="ctr"/>
-                <a:endParaRPr lang="en-US"/>
+                <a:endParaRPr lang="en-US" dirty="0"/>
               </a:p>
             </p:txBody>
           </p:sp>
@@ -7162,8 +7165,8 @@
                   </a:prstGeom>
                 </p:spPr>
               </p:pic>
-              <mc:AlternateContent xmlns:mc="http://schemas.openxmlformats.org/markup-compatibility/2006">
-                <mc:Choice xmlns:a14="http://schemas.microsoft.com/office/drawing/2010/main" Requires="a14">
+              <mc:AlternateContent xmlns:mc="http://schemas.openxmlformats.org/markup-compatibility/2006" xmlns:a14="http://schemas.microsoft.com/office/drawing/2010/main">
+                <mc:Choice Requires="a14">
                   <p:sp>
                     <p:nvSpPr>
                       <p:cNvPr id="141" name="TextBox 140">
@@ -7242,7 +7245,7 @@
                     </p:txBody>
                   </p:sp>
                 </mc:Choice>
-                <mc:Fallback>
+                <mc:Fallback xmlns="">
                   <p:sp>
                     <p:nvSpPr>
                       <p:cNvPr id="141" name="TextBox 140">
@@ -7397,6 +7400,1704 @@
     <p:extLst>
       <p:ext uri="{BB962C8B-B14F-4D97-AF65-F5344CB8AC3E}">
         <p14:creationId xmlns:p14="http://schemas.microsoft.com/office/powerpoint/2010/main" val="1345047233"/>
+      </p:ext>
+    </p:extLst>
+  </p:cSld>
+  <p:clrMapOvr>
+    <a:masterClrMapping/>
+  </p:clrMapOvr>
+</p:sld>
+</file>
+
+<file path=ppt/slides/slide3.xml><?xml version="1.0" encoding="utf-8"?>
+<p:sld xmlns:a="http://schemas.openxmlformats.org/drawingml/2006/main" xmlns:r="http://schemas.openxmlformats.org/officeDocument/2006/relationships" xmlns:p="http://schemas.openxmlformats.org/presentationml/2006/main">
+  <p:cSld>
+    <p:spTree>
+      <p:nvGrpSpPr>
+        <p:cNvPr id="1" name=""/>
+        <p:cNvGrpSpPr/>
+        <p:nvPr/>
+      </p:nvGrpSpPr>
+      <p:grpSpPr>
+        <a:xfrm>
+          <a:off x="0" y="0"/>
+          <a:ext cx="0" cy="0"/>
+          <a:chOff x="0" y="0"/>
+          <a:chExt cx="0" cy="0"/>
+        </a:xfrm>
+      </p:grpSpPr>
+      <p:pic>
+        <p:nvPicPr>
+          <p:cNvPr id="26" name="Picture 25" descr="A black and red molecule&#10;&#10;AI-generated content may be incorrect.">
+            <a:extLst>
+              <a:ext uri="{FF2B5EF4-FFF2-40B4-BE49-F238E27FC236}">
+                <a16:creationId xmlns:a16="http://schemas.microsoft.com/office/drawing/2014/main" id="{8FC2BF9A-F7F8-CCEB-C058-91D5B327DFC3}"/>
+              </a:ext>
+            </a:extLst>
+          </p:cNvPr>
+          <p:cNvPicPr>
+            <a:picLocks noChangeAspect="1"/>
+          </p:cNvPicPr>
+          <p:nvPr/>
+        </p:nvPicPr>
+        <p:blipFill>
+          <a:blip r:embed="rId2">
+            <a:extLst>
+              <a:ext uri="{28A0092B-C50C-407E-A947-70E740481C1C}">
+                <a14:useLocalDpi xmlns:a14="http://schemas.microsoft.com/office/drawing/2010/main" val="0"/>
+              </a:ext>
+            </a:extLst>
+          </a:blip>
+          <a:srcRect r="60368"/>
+          <a:stretch/>
+        </p:blipFill>
+        <p:spPr>
+          <a:xfrm>
+            <a:off x="2992653" y="1923962"/>
+            <a:ext cx="4438368" cy="1959829"/>
+          </a:xfrm>
+          <a:prstGeom prst="rect">
+            <a:avLst/>
+          </a:prstGeom>
+        </p:spPr>
+      </p:pic>
+      <p:sp>
+        <p:nvSpPr>
+          <p:cNvPr id="14" name="Speech Bubble: Rectangle with Corners Rounded 13">
+            <a:extLst>
+              <a:ext uri="{FF2B5EF4-FFF2-40B4-BE49-F238E27FC236}">
+                <a16:creationId xmlns:a16="http://schemas.microsoft.com/office/drawing/2014/main" id="{47BDDA66-D9F4-8B02-9F65-D6099C12712B}"/>
+              </a:ext>
+            </a:extLst>
+          </p:cNvPr>
+          <p:cNvSpPr/>
+          <p:nvPr/>
+        </p:nvSpPr>
+        <p:spPr>
+          <a:xfrm>
+            <a:off x="2708177" y="251329"/>
+            <a:ext cx="6978205" cy="988598"/>
+          </a:xfrm>
+          <a:prstGeom prst="wedgeRoundRectCallout">
+            <a:avLst>
+              <a:gd name="adj1" fmla="val -58761"/>
+              <a:gd name="adj2" fmla="val 158489"/>
+              <a:gd name="adj3" fmla="val 16667"/>
+            </a:avLst>
+          </a:prstGeom>
+        </p:spPr>
+        <p:style>
+          <a:lnRef idx="2">
+            <a:schemeClr val="dk1"/>
+          </a:lnRef>
+          <a:fillRef idx="1">
+            <a:schemeClr val="lt1"/>
+          </a:fillRef>
+          <a:effectRef idx="0">
+            <a:schemeClr val="dk1"/>
+          </a:effectRef>
+          <a:fontRef idx="minor">
+            <a:schemeClr val="dk1"/>
+          </a:fontRef>
+        </p:style>
+        <p:txBody>
+          <a:bodyPr rtlCol="0" anchor="ctr"/>
+          <a:lstStyle/>
+          <a:p>
+            <a:pPr algn="just"/>
+            <a:r>
+              <a:rPr lang="en-US" sz="1200" dirty="0"/>
+              <a:t>You are running a reproducibility study for compound selectivity prediction. The goal is to train a Balanced Random Forest Classifier to distinguish PI3K-delta (</a:t>
+            </a:r>
+            <a:r>
+              <a:rPr lang="en-US" sz="1200" dirty="0" err="1"/>
+              <a:t>UniProt</a:t>
+            </a:r>
+            <a:r>
+              <a:rPr lang="en-US" sz="1200" dirty="0"/>
+              <a:t> O00329) vs PI3K-gamma (</a:t>
+            </a:r>
+            <a:r>
+              <a:rPr lang="en-US" sz="1200" dirty="0" err="1"/>
+              <a:t>UniProt</a:t>
+            </a:r>
+            <a:r>
+              <a:rPr lang="en-US" sz="1200" dirty="0"/>
+              <a:t> P48736) selective compounds, evaluate its performance, and identify recurrent molecular anchor fragments that drive the model's correct predictions for each selective class (class 1 &amp; 2) and discuss the chemical insight gained.</a:t>
+            </a:r>
+          </a:p>
+        </p:txBody>
+      </p:sp>
+      <p:grpSp>
+        <p:nvGrpSpPr>
+          <p:cNvPr id="2" name="Group 1">
+            <a:extLst>
+              <a:ext uri="{FF2B5EF4-FFF2-40B4-BE49-F238E27FC236}">
+                <a16:creationId xmlns:a16="http://schemas.microsoft.com/office/drawing/2014/main" id="{C3474ED7-8B1C-A7CA-4B57-5BD7E484107E}"/>
+              </a:ext>
+            </a:extLst>
+          </p:cNvPr>
+          <p:cNvGrpSpPr/>
+          <p:nvPr/>
+        </p:nvGrpSpPr>
+        <p:grpSpPr>
+          <a:xfrm>
+            <a:off x="306102" y="2273968"/>
+            <a:ext cx="1774658" cy="2310063"/>
+            <a:chOff x="990492" y="2511372"/>
+            <a:chExt cx="1774658" cy="2310063"/>
+          </a:xfrm>
+        </p:grpSpPr>
+        <p:sp>
+          <p:nvSpPr>
+            <p:cNvPr id="22" name="Rectangle 21">
+              <a:extLst>
+                <a:ext uri="{FF2B5EF4-FFF2-40B4-BE49-F238E27FC236}">
+                  <a16:creationId xmlns:a16="http://schemas.microsoft.com/office/drawing/2014/main" id="{67C11FFD-9BC3-9E76-E6A1-CB29619ABACF}"/>
+                </a:ext>
+              </a:extLst>
+            </p:cNvPr>
+            <p:cNvSpPr/>
+            <p:nvPr/>
+          </p:nvSpPr>
+          <p:spPr>
+            <a:xfrm>
+              <a:off x="990492" y="2511372"/>
+              <a:ext cx="1774658" cy="2310063"/>
+            </a:xfrm>
+            <a:prstGeom prst="rect">
+              <a:avLst/>
+            </a:prstGeom>
+            <a:solidFill>
+              <a:schemeClr val="accent1">
+                <a:lumMod val="20000"/>
+                <a:lumOff val="80000"/>
+              </a:schemeClr>
+            </a:solidFill>
+            <a:ln>
+              <a:solidFill>
+                <a:schemeClr val="tx2">
+                  <a:lumMod val="25000"/>
+                  <a:lumOff val="75000"/>
+                </a:schemeClr>
+              </a:solidFill>
+            </a:ln>
+          </p:spPr>
+          <p:style>
+            <a:lnRef idx="2">
+              <a:schemeClr val="accent1">
+                <a:shade val="15000"/>
+              </a:schemeClr>
+            </a:lnRef>
+            <a:fillRef idx="1">
+              <a:schemeClr val="accent1"/>
+            </a:fillRef>
+            <a:effectRef idx="0">
+              <a:schemeClr val="accent1"/>
+            </a:effectRef>
+            <a:fontRef idx="minor">
+              <a:schemeClr val="lt1"/>
+            </a:fontRef>
+          </p:style>
+          <p:txBody>
+            <a:bodyPr rtlCol="0" anchor="ctr"/>
+            <a:lstStyle/>
+            <a:p>
+              <a:pPr algn="ctr"/>
+              <a:endParaRPr lang="en-US" dirty="0"/>
+            </a:p>
+          </p:txBody>
+        </p:sp>
+        <p:pic>
+          <p:nvPicPr>
+            <p:cNvPr id="23" name="Graphic 22" descr="Customer review with solid fill">
+              <a:extLst>
+                <a:ext uri="{FF2B5EF4-FFF2-40B4-BE49-F238E27FC236}">
+                  <a16:creationId xmlns:a16="http://schemas.microsoft.com/office/drawing/2014/main" id="{EF58B09A-9C24-1ECA-3231-0C704AF994F8}"/>
+                </a:ext>
+              </a:extLst>
+            </p:cNvPr>
+            <p:cNvPicPr>
+              <a:picLocks noChangeAspect="1"/>
+            </p:cNvPicPr>
+            <p:nvPr/>
+          </p:nvPicPr>
+          <p:blipFill>
+            <a:blip r:embed="rId3">
+              <a:extLst>
+                <a:ext uri="{96DAC541-7B7A-43D3-8B79-37D633B846F1}">
+                  <asvg:svgBlip xmlns:asvg="http://schemas.microsoft.com/office/drawing/2016/SVG/main" r:embed="rId4"/>
+                </a:ext>
+              </a:extLst>
+            </a:blip>
+            <a:stretch>
+              <a:fillRect/>
+            </a:stretch>
+          </p:blipFill>
+          <p:spPr>
+            <a:xfrm>
+              <a:off x="1400027" y="3700649"/>
+              <a:ext cx="965534" cy="965534"/>
+            </a:xfrm>
+            <a:prstGeom prst="rect">
+              <a:avLst/>
+            </a:prstGeom>
+          </p:spPr>
+        </p:pic>
+        <p:pic>
+          <p:nvPicPr>
+            <p:cNvPr id="24" name="Picture 23">
+              <a:extLst>
+                <a:ext uri="{FF2B5EF4-FFF2-40B4-BE49-F238E27FC236}">
+                  <a16:creationId xmlns:a16="http://schemas.microsoft.com/office/drawing/2014/main" id="{0947EFEA-9CFB-4E92-FC85-01152E5CB9EC}"/>
+                </a:ext>
+              </a:extLst>
+            </p:cNvPr>
+            <p:cNvPicPr>
+              <a:picLocks noChangeAspect="1"/>
+            </p:cNvPicPr>
+            <p:nvPr/>
+          </p:nvPicPr>
+          <p:blipFill>
+            <a:blip r:embed="rId5"/>
+            <a:stretch>
+              <a:fillRect/>
+            </a:stretch>
+          </p:blipFill>
+          <p:spPr>
+            <a:xfrm>
+              <a:off x="1126882" y="2607575"/>
+              <a:ext cx="1525117" cy="996871"/>
+            </a:xfrm>
+            <a:prstGeom prst="rect">
+              <a:avLst/>
+            </a:prstGeom>
+          </p:spPr>
+        </p:pic>
+      </p:grpSp>
+      <p:pic>
+        <p:nvPicPr>
+          <p:cNvPr id="28" name="Picture 27" descr="A black and red molecule&#10;&#10;AI-generated content may be incorrect.">
+            <a:extLst>
+              <a:ext uri="{FF2B5EF4-FFF2-40B4-BE49-F238E27FC236}">
+                <a16:creationId xmlns:a16="http://schemas.microsoft.com/office/drawing/2014/main" id="{0317F5F2-831A-7853-1EEC-DF205C4DAA7A}"/>
+              </a:ext>
+            </a:extLst>
+          </p:cNvPr>
+          <p:cNvPicPr>
+            <a:picLocks noChangeAspect="1"/>
+          </p:cNvPicPr>
+          <p:nvPr/>
+        </p:nvPicPr>
+        <p:blipFill>
+          <a:blip r:embed="rId6">
+            <a:extLst>
+              <a:ext uri="{28A0092B-C50C-407E-A947-70E740481C1C}">
+                <a14:useLocalDpi xmlns:a14="http://schemas.microsoft.com/office/drawing/2010/main" val="0"/>
+              </a:ext>
+            </a:extLst>
+          </a:blip>
+          <a:srcRect r="60304"/>
+          <a:stretch/>
+        </p:blipFill>
+        <p:spPr>
+          <a:xfrm>
+            <a:off x="7322746" y="1924049"/>
+            <a:ext cx="4441990" cy="1958229"/>
+          </a:xfrm>
+          <a:prstGeom prst="rect">
+            <a:avLst/>
+          </a:prstGeom>
+        </p:spPr>
+      </p:pic>
+      <p:sp>
+        <p:nvSpPr>
+          <p:cNvPr id="7" name="Arrow: Right 6">
+            <a:extLst>
+              <a:ext uri="{FF2B5EF4-FFF2-40B4-BE49-F238E27FC236}">
+                <a16:creationId xmlns:a16="http://schemas.microsoft.com/office/drawing/2014/main" id="{253C9BC8-562F-6E75-D860-36BBDA1C4DD5}"/>
+              </a:ext>
+            </a:extLst>
+          </p:cNvPr>
+          <p:cNvSpPr/>
+          <p:nvPr/>
+        </p:nvSpPr>
+        <p:spPr>
+          <a:xfrm>
+            <a:off x="2181397" y="3219061"/>
+            <a:ext cx="666746" cy="374904"/>
+          </a:xfrm>
+          <a:prstGeom prst="rightArrow">
+            <a:avLst/>
+          </a:prstGeom>
+        </p:spPr>
+        <p:style>
+          <a:lnRef idx="2">
+            <a:schemeClr val="accent1">
+              <a:shade val="15000"/>
+            </a:schemeClr>
+          </a:lnRef>
+          <a:fillRef idx="1">
+            <a:schemeClr val="accent1"/>
+          </a:fillRef>
+          <a:effectRef idx="0">
+            <a:schemeClr val="accent1"/>
+          </a:effectRef>
+          <a:fontRef idx="minor">
+            <a:schemeClr val="lt1"/>
+          </a:fontRef>
+        </p:style>
+        <p:txBody>
+          <a:bodyPr rtlCol="0" anchor="ctr"/>
+          <a:lstStyle/>
+          <a:p>
+            <a:pPr algn="ctr"/>
+            <a:endParaRPr lang="en-US"/>
+          </a:p>
+        </p:txBody>
+      </p:sp>
+      <p:sp>
+        <p:nvSpPr>
+          <p:cNvPr id="4" name="TextBox 3">
+            <a:extLst>
+              <a:ext uri="{FF2B5EF4-FFF2-40B4-BE49-F238E27FC236}">
+                <a16:creationId xmlns:a16="http://schemas.microsoft.com/office/drawing/2014/main" id="{D719E08A-F8F7-F1C2-289E-BEE6ADEC6D96}"/>
+              </a:ext>
+            </a:extLst>
+          </p:cNvPr>
+          <p:cNvSpPr txBox="1"/>
+          <p:nvPr/>
+        </p:nvSpPr>
+        <p:spPr>
+          <a:xfrm>
+            <a:off x="3276685" y="3964749"/>
+            <a:ext cx="4154336" cy="1200329"/>
+          </a:xfrm>
+          <a:prstGeom prst="rect">
+            <a:avLst/>
+          </a:prstGeom>
+          <a:noFill/>
+        </p:spPr>
+        <p:txBody>
+          <a:bodyPr wrap="square" rtlCol="0">
+            <a:spAutoFit/>
+          </a:bodyPr>
+          <a:lstStyle/>
+          <a:p>
+            <a:r>
+              <a:rPr lang="en-US" sz="1200" b="1" i="0" dirty="0">
+                <a:solidFill>
+                  <a:srgbClr val="0F0F0F"/>
+                </a:solidFill>
+                <a:effectLst/>
+                <a:latin typeface="ui-sans-serif"/>
+              </a:rPr>
+              <a:t>Class 1 (PI3K-delta Selective):</a:t>
+            </a:r>
+          </a:p>
+          <a:p>
+            <a:r>
+              <a:rPr lang="en-US" sz="1200" dirty="0"/>
+              <a:t>The model identifies cyano-pyrimidine derivatives as key anchors.</a:t>
+            </a:r>
+          </a:p>
+          <a:p>
+            <a:endParaRPr lang="en-US" sz="1200" dirty="0"/>
+          </a:p>
+          <a:p>
+            <a:pPr marL="171450" indent="-171450">
+              <a:buFont typeface="Arial" panose="020B0604020202020204" pitchFamily="34" charset="0"/>
+              <a:buChar char="•"/>
+            </a:pPr>
+            <a:r>
+              <a:rPr lang="en-US" sz="1200" b="1" dirty="0"/>
+              <a:t>Top Fragment: </a:t>
+            </a:r>
+            <a:r>
+              <a:rPr lang="en-US" sz="1200" dirty="0"/>
+              <a:t>[*]c1ncnc(N)c1C#N (2-amino-4-cyanopyrimidine core)</a:t>
+            </a:r>
+          </a:p>
+        </p:txBody>
+      </p:sp>
+      <p:sp>
+        <p:nvSpPr>
+          <p:cNvPr id="6" name="TextBox 5">
+            <a:extLst>
+              <a:ext uri="{FF2B5EF4-FFF2-40B4-BE49-F238E27FC236}">
+                <a16:creationId xmlns:a16="http://schemas.microsoft.com/office/drawing/2014/main" id="{24D10174-F2DB-6196-3F7D-453B201E636A}"/>
+              </a:ext>
+            </a:extLst>
+          </p:cNvPr>
+          <p:cNvSpPr txBox="1"/>
+          <p:nvPr/>
+        </p:nvSpPr>
+        <p:spPr>
+          <a:xfrm>
+            <a:off x="7466573" y="3958812"/>
+            <a:ext cx="4154336" cy="1569660"/>
+          </a:xfrm>
+          <a:prstGeom prst="rect">
+            <a:avLst/>
+          </a:prstGeom>
+          <a:noFill/>
+        </p:spPr>
+        <p:txBody>
+          <a:bodyPr wrap="square" rtlCol="0">
+            <a:spAutoFit/>
+          </a:bodyPr>
+          <a:lstStyle/>
+          <a:p>
+            <a:r>
+              <a:rPr lang="en-US" sz="1200" b="1" i="0" dirty="0">
+                <a:solidFill>
+                  <a:srgbClr val="0F0F0F"/>
+                </a:solidFill>
+                <a:effectLst/>
+                <a:latin typeface="ui-sans-serif"/>
+              </a:rPr>
+              <a:t>Class 1 (gamma Selective):</a:t>
+            </a:r>
+          </a:p>
+          <a:p>
+            <a:r>
+              <a:rPr lang="en-US" sz="1200" dirty="0"/>
+              <a:t>The model identifies purine and tetrahydroisoquinoline-3-one cores as key anchors.</a:t>
+            </a:r>
+          </a:p>
+          <a:p>
+            <a:endParaRPr lang="en-US" sz="1200" dirty="0"/>
+          </a:p>
+          <a:p>
+            <a:pPr marL="171450" indent="-171450">
+              <a:buFont typeface="Arial" panose="020B0604020202020204" pitchFamily="34" charset="0"/>
+              <a:buChar char="•"/>
+            </a:pPr>
+            <a:r>
+              <a:rPr lang="en-US" sz="1200" b="1" dirty="0"/>
+              <a:t>Top Fragments:</a:t>
+            </a:r>
+          </a:p>
+          <a:p>
+            <a:pPr marL="742950" lvl="1" indent="-285750">
+              <a:buFont typeface="Arial" panose="020B0604020202020204" pitchFamily="34" charset="0"/>
+              <a:buChar char="•"/>
+            </a:pPr>
+            <a:r>
+              <a:rPr lang="en-US" sz="1200" dirty="0"/>
+              <a:t>[*]c1ccn2nc(N)c([*])c2n1 (Purine-like core)</a:t>
+            </a:r>
+          </a:p>
+          <a:p>
+            <a:pPr marL="742950" lvl="1" indent="-285750">
+              <a:buFont typeface="Arial" panose="020B0604020202020204" pitchFamily="34" charset="0"/>
+              <a:buChar char="•"/>
+            </a:pPr>
+            <a:r>
+              <a:rPr lang="en-US" sz="1200" dirty="0"/>
+              <a:t>[*]N1Cc2cc([*])cc([*])c2C1=O (Tetrahydroisoquinoline-3-one derivative)</a:t>
+            </a:r>
+          </a:p>
+        </p:txBody>
+      </p:sp>
+      <p:sp>
+        <p:nvSpPr>
+          <p:cNvPr id="9" name="TextBox 8">
+            <a:extLst>
+              <a:ext uri="{FF2B5EF4-FFF2-40B4-BE49-F238E27FC236}">
+                <a16:creationId xmlns:a16="http://schemas.microsoft.com/office/drawing/2014/main" id="{75178BF8-9CBE-7AE5-98D4-55D1FF6F4255}"/>
+              </a:ext>
+            </a:extLst>
+          </p:cNvPr>
+          <p:cNvSpPr txBox="1"/>
+          <p:nvPr/>
+        </p:nvSpPr>
+        <p:spPr>
+          <a:xfrm>
+            <a:off x="3276685" y="5165078"/>
+            <a:ext cx="3886110" cy="1754326"/>
+          </a:xfrm>
+          <a:prstGeom prst="rect">
+            <a:avLst/>
+          </a:prstGeom>
+          <a:noFill/>
+        </p:spPr>
+        <p:txBody>
+          <a:bodyPr wrap="square">
+            <a:spAutoFit/>
+          </a:bodyPr>
+          <a:lstStyle/>
+          <a:p>
+            <a:pPr marL="171450" indent="-171450" algn="just">
+              <a:buFont typeface="Arial" panose="020B0604020202020204" pitchFamily="34" charset="0"/>
+              <a:buChar char="•"/>
+            </a:pPr>
+            <a:r>
+              <a:rPr lang="en-US" sz="1200" b="1" dirty="0"/>
+              <a:t>Insight: </a:t>
+            </a:r>
+            <a:r>
+              <a:rPr lang="en-US" sz="1200" dirty="0"/>
+              <a:t>This motif is highly characteristic of PI3K-delta selective inhibitors. The presence of the </a:t>
+            </a:r>
+            <a:r>
+              <a:rPr lang="en-US" sz="1200" dirty="0" err="1"/>
+              <a:t>cyano</a:t>
+            </a:r>
+            <a:r>
+              <a:rPr lang="en-US" sz="1200" dirty="0"/>
+              <a:t> group (-CN) at the 4-position and an amino group (-NH2) at the 2-position of the pyrimidine ring appears to be a critical pharmacophore for delta selectivity. This aligns with known medicinal chemistry strategies where pyrimidine cores are tuned for PI3K-delta by exploiting specific sub-pocket interactions in the ATP-binding site.</a:t>
+            </a:r>
+          </a:p>
+        </p:txBody>
+      </p:sp>
+      <p:sp>
+        <p:nvSpPr>
+          <p:cNvPr id="10" name="TextBox 9">
+            <a:extLst>
+              <a:ext uri="{FF2B5EF4-FFF2-40B4-BE49-F238E27FC236}">
+                <a16:creationId xmlns:a16="http://schemas.microsoft.com/office/drawing/2014/main" id="{33DCC6E9-EEE6-1DB8-E462-BC37AA80DE8E}"/>
+              </a:ext>
+            </a:extLst>
+          </p:cNvPr>
+          <p:cNvSpPr txBox="1"/>
+          <p:nvPr/>
+        </p:nvSpPr>
+        <p:spPr>
+          <a:xfrm>
+            <a:off x="7466573" y="5541969"/>
+            <a:ext cx="4441989" cy="1200329"/>
+          </a:xfrm>
+          <a:prstGeom prst="rect">
+            <a:avLst/>
+          </a:prstGeom>
+          <a:noFill/>
+        </p:spPr>
+        <p:txBody>
+          <a:bodyPr wrap="square">
+            <a:spAutoFit/>
+          </a:bodyPr>
+          <a:lstStyle/>
+          <a:p>
+            <a:pPr marL="171450" indent="-171450" algn="just">
+              <a:buFont typeface="Arial" panose="020B0604020202020204" pitchFamily="34" charset="0"/>
+              <a:buChar char="•"/>
+            </a:pPr>
+            <a:r>
+              <a:rPr lang="en-US" sz="1200" b="1" dirty="0"/>
+              <a:t>Insight: </a:t>
+            </a:r>
+            <a:r>
+              <a:rPr lang="en-US" sz="1200" dirty="0"/>
+              <a:t>The identification of tetrahydroisoquinoline-3-one scaffolds is particularly interesting. These structures are often found in PI3K-gamma selective inhibitors (e.g., IPI-549 analogues). The purine core also suggests a common heterocyclic motif adapted for gamma selectivity, possibly through extended interactions with the hinge region.</a:t>
+            </a:r>
+          </a:p>
+        </p:txBody>
+      </p:sp>
+    </p:spTree>
+    <p:extLst>
+      <p:ext uri="{BB962C8B-B14F-4D97-AF65-F5344CB8AC3E}">
+        <p14:creationId xmlns:p14="http://schemas.microsoft.com/office/powerpoint/2010/main" val="158870704"/>
+      </p:ext>
+    </p:extLst>
+  </p:cSld>
+  <p:clrMapOvr>
+    <a:masterClrMapping/>
+  </p:clrMapOvr>
+</p:sld>
+</file>
+
+<file path=ppt/slides/slide4.xml><?xml version="1.0" encoding="utf-8"?>
+<p:sld xmlns:a="http://schemas.openxmlformats.org/drawingml/2006/main" xmlns:r="http://schemas.openxmlformats.org/officeDocument/2006/relationships" xmlns:p="http://schemas.openxmlformats.org/presentationml/2006/main">
+  <p:cSld>
+    <p:spTree>
+      <p:nvGrpSpPr>
+        <p:cNvPr id="1" name=""/>
+        <p:cNvGrpSpPr/>
+        <p:nvPr/>
+      </p:nvGrpSpPr>
+      <p:grpSpPr>
+        <a:xfrm>
+          <a:off x="0" y="0"/>
+          <a:ext cx="0" cy="0"/>
+          <a:chOff x="0" y="0"/>
+          <a:chExt cx="0" cy="0"/>
+        </a:xfrm>
+      </p:grpSpPr>
+      <p:pic>
+        <p:nvPicPr>
+          <p:cNvPr id="39" name="Picture 38" descr="A molecule of a chemical structure&#10;&#10;AI-generated content may be incorrect.">
+            <a:extLst>
+              <a:ext uri="{FF2B5EF4-FFF2-40B4-BE49-F238E27FC236}">
+                <a16:creationId xmlns:a16="http://schemas.microsoft.com/office/drawing/2014/main" id="{391CFD35-0761-F05E-873D-E1FD7681F805}"/>
+              </a:ext>
+            </a:extLst>
+          </p:cNvPr>
+          <p:cNvPicPr>
+            <a:picLocks noChangeAspect="1"/>
+          </p:cNvPicPr>
+          <p:nvPr/>
+        </p:nvPicPr>
+        <p:blipFill>
+          <a:blip r:embed="rId2">
+            <a:extLst>
+              <a:ext uri="{28A0092B-C50C-407E-A947-70E740481C1C}">
+                <a14:useLocalDpi xmlns:a14="http://schemas.microsoft.com/office/drawing/2010/main" val="0"/>
+              </a:ext>
+            </a:extLst>
+          </a:blip>
+          <a:srcRect l="4101" t="21936" r="4499" b="21811"/>
+          <a:stretch/>
+        </p:blipFill>
+        <p:spPr>
+          <a:xfrm>
+            <a:off x="4625700" y="1979987"/>
+            <a:ext cx="3342891" cy="2057400"/>
+          </a:xfrm>
+          <a:prstGeom prst="rect">
+            <a:avLst/>
+          </a:prstGeom>
+        </p:spPr>
+      </p:pic>
+      <p:grpSp>
+        <p:nvGrpSpPr>
+          <p:cNvPr id="2" name="Group 1">
+            <a:extLst>
+              <a:ext uri="{FF2B5EF4-FFF2-40B4-BE49-F238E27FC236}">
+                <a16:creationId xmlns:a16="http://schemas.microsoft.com/office/drawing/2014/main" id="{C3474ED7-8B1C-A7CA-4B57-5BD7E484107E}"/>
+              </a:ext>
+            </a:extLst>
+          </p:cNvPr>
+          <p:cNvGrpSpPr/>
+          <p:nvPr/>
+        </p:nvGrpSpPr>
+        <p:grpSpPr>
+          <a:xfrm>
+            <a:off x="829977" y="2273968"/>
+            <a:ext cx="1774658" cy="2310063"/>
+            <a:chOff x="990492" y="2511372"/>
+            <a:chExt cx="1774658" cy="2310063"/>
+          </a:xfrm>
+        </p:grpSpPr>
+        <p:sp>
+          <p:nvSpPr>
+            <p:cNvPr id="22" name="Rectangle 21">
+              <a:extLst>
+                <a:ext uri="{FF2B5EF4-FFF2-40B4-BE49-F238E27FC236}">
+                  <a16:creationId xmlns:a16="http://schemas.microsoft.com/office/drawing/2014/main" id="{67C11FFD-9BC3-9E76-E6A1-CB29619ABACF}"/>
+                </a:ext>
+              </a:extLst>
+            </p:cNvPr>
+            <p:cNvSpPr/>
+            <p:nvPr/>
+          </p:nvSpPr>
+          <p:spPr>
+            <a:xfrm>
+              <a:off x="990492" y="2511372"/>
+              <a:ext cx="1774658" cy="2310063"/>
+            </a:xfrm>
+            <a:prstGeom prst="rect">
+              <a:avLst/>
+            </a:prstGeom>
+            <a:solidFill>
+              <a:schemeClr val="accent1">
+                <a:lumMod val="20000"/>
+                <a:lumOff val="80000"/>
+              </a:schemeClr>
+            </a:solidFill>
+            <a:ln>
+              <a:solidFill>
+                <a:schemeClr val="tx2">
+                  <a:lumMod val="25000"/>
+                  <a:lumOff val="75000"/>
+                </a:schemeClr>
+              </a:solidFill>
+            </a:ln>
+          </p:spPr>
+          <p:style>
+            <a:lnRef idx="2">
+              <a:schemeClr val="accent1">
+                <a:shade val="15000"/>
+              </a:schemeClr>
+            </a:lnRef>
+            <a:fillRef idx="1">
+              <a:schemeClr val="accent1"/>
+            </a:fillRef>
+            <a:effectRef idx="0">
+              <a:schemeClr val="accent1"/>
+            </a:effectRef>
+            <a:fontRef idx="minor">
+              <a:schemeClr val="lt1"/>
+            </a:fontRef>
+          </p:style>
+          <p:txBody>
+            <a:bodyPr rtlCol="0" anchor="ctr"/>
+            <a:lstStyle/>
+            <a:p>
+              <a:pPr algn="ctr"/>
+              <a:endParaRPr lang="en-US" dirty="0"/>
+            </a:p>
+          </p:txBody>
+        </p:sp>
+        <p:pic>
+          <p:nvPicPr>
+            <p:cNvPr id="23" name="Graphic 22" descr="Customer review with solid fill">
+              <a:extLst>
+                <a:ext uri="{FF2B5EF4-FFF2-40B4-BE49-F238E27FC236}">
+                  <a16:creationId xmlns:a16="http://schemas.microsoft.com/office/drawing/2014/main" id="{EF58B09A-9C24-1ECA-3231-0C704AF994F8}"/>
+                </a:ext>
+              </a:extLst>
+            </p:cNvPr>
+            <p:cNvPicPr>
+              <a:picLocks noChangeAspect="1"/>
+            </p:cNvPicPr>
+            <p:nvPr/>
+          </p:nvPicPr>
+          <p:blipFill>
+            <a:blip r:embed="rId3">
+              <a:extLst>
+                <a:ext uri="{96DAC541-7B7A-43D3-8B79-37D633B846F1}">
+                  <asvg:svgBlip xmlns:asvg="http://schemas.microsoft.com/office/drawing/2016/SVG/main" r:embed="rId4"/>
+                </a:ext>
+              </a:extLst>
+            </a:blip>
+            <a:stretch>
+              <a:fillRect/>
+            </a:stretch>
+          </p:blipFill>
+          <p:spPr>
+            <a:xfrm>
+              <a:off x="1400027" y="3700649"/>
+              <a:ext cx="965534" cy="965534"/>
+            </a:xfrm>
+            <a:prstGeom prst="rect">
+              <a:avLst/>
+            </a:prstGeom>
+          </p:spPr>
+        </p:pic>
+        <p:pic>
+          <p:nvPicPr>
+            <p:cNvPr id="24" name="Picture 23">
+              <a:extLst>
+                <a:ext uri="{FF2B5EF4-FFF2-40B4-BE49-F238E27FC236}">
+                  <a16:creationId xmlns:a16="http://schemas.microsoft.com/office/drawing/2014/main" id="{0947EFEA-9CFB-4E92-FC85-01152E5CB9EC}"/>
+                </a:ext>
+              </a:extLst>
+            </p:cNvPr>
+            <p:cNvPicPr>
+              <a:picLocks noChangeAspect="1"/>
+            </p:cNvPicPr>
+            <p:nvPr/>
+          </p:nvPicPr>
+          <p:blipFill>
+            <a:blip r:embed="rId5"/>
+            <a:stretch>
+              <a:fillRect/>
+            </a:stretch>
+          </p:blipFill>
+          <p:spPr>
+            <a:xfrm>
+              <a:off x="1126882" y="2607575"/>
+              <a:ext cx="1525117" cy="996871"/>
+            </a:xfrm>
+            <a:prstGeom prst="rect">
+              <a:avLst/>
+            </a:prstGeom>
+          </p:spPr>
+        </p:pic>
+      </p:grpSp>
+      <p:sp>
+        <p:nvSpPr>
+          <p:cNvPr id="7" name="Arrow: Right 6">
+            <a:extLst>
+              <a:ext uri="{FF2B5EF4-FFF2-40B4-BE49-F238E27FC236}">
+                <a16:creationId xmlns:a16="http://schemas.microsoft.com/office/drawing/2014/main" id="{253C9BC8-562F-6E75-D860-36BBDA1C4DD5}"/>
+              </a:ext>
+            </a:extLst>
+          </p:cNvPr>
+          <p:cNvSpPr/>
+          <p:nvPr/>
+        </p:nvSpPr>
+        <p:spPr>
+          <a:xfrm>
+            <a:off x="3108401" y="3241547"/>
+            <a:ext cx="666746" cy="374904"/>
+          </a:xfrm>
+          <a:prstGeom prst="rightArrow">
+            <a:avLst/>
+          </a:prstGeom>
+        </p:spPr>
+        <p:style>
+          <a:lnRef idx="2">
+            <a:schemeClr val="accent1">
+              <a:shade val="15000"/>
+            </a:schemeClr>
+          </a:lnRef>
+          <a:fillRef idx="1">
+            <a:schemeClr val="accent1"/>
+          </a:fillRef>
+          <a:effectRef idx="0">
+            <a:schemeClr val="accent1"/>
+          </a:effectRef>
+          <a:fontRef idx="minor">
+            <a:schemeClr val="lt1"/>
+          </a:fontRef>
+        </p:style>
+        <p:txBody>
+          <a:bodyPr rtlCol="0" anchor="ctr"/>
+          <a:lstStyle/>
+          <a:p>
+            <a:pPr algn="ctr"/>
+            <a:endParaRPr lang="en-US"/>
+          </a:p>
+        </p:txBody>
+      </p:sp>
+      <p:sp>
+        <p:nvSpPr>
+          <p:cNvPr id="33" name="Speech Bubble: Rectangle with Corners Rounded 32">
+            <a:extLst>
+              <a:ext uri="{FF2B5EF4-FFF2-40B4-BE49-F238E27FC236}">
+                <a16:creationId xmlns:a16="http://schemas.microsoft.com/office/drawing/2014/main" id="{D2717664-5F69-8B93-F9F8-7B5A0DC3C2A2}"/>
+              </a:ext>
+            </a:extLst>
+          </p:cNvPr>
+          <p:cNvSpPr/>
+          <p:nvPr/>
+        </p:nvSpPr>
+        <p:spPr>
+          <a:xfrm>
+            <a:off x="3232053" y="251328"/>
+            <a:ext cx="7426422" cy="1258999"/>
+          </a:xfrm>
+          <a:prstGeom prst="wedgeRoundRectCallout">
+            <a:avLst>
+              <a:gd name="adj1" fmla="val -58761"/>
+              <a:gd name="adj2" fmla="val 158489"/>
+              <a:gd name="adj3" fmla="val 16667"/>
+            </a:avLst>
+          </a:prstGeom>
+        </p:spPr>
+        <p:style>
+          <a:lnRef idx="2">
+            <a:schemeClr val="dk1"/>
+          </a:lnRef>
+          <a:fillRef idx="1">
+            <a:schemeClr val="lt1"/>
+          </a:fillRef>
+          <a:effectRef idx="0">
+            <a:schemeClr val="dk1"/>
+          </a:effectRef>
+          <a:fontRef idx="minor">
+            <a:schemeClr val="dk1"/>
+          </a:fontRef>
+        </p:style>
+        <p:txBody>
+          <a:bodyPr rtlCol="0" anchor="ctr"/>
+          <a:lstStyle/>
+          <a:p>
+            <a:pPr algn="just"/>
+            <a:r>
+              <a:rPr lang="en-US" sz="1200" dirty="0"/>
+              <a:t>You are running an explainability benchmarking study for compound bioactivity prediction. The goal is to train a Deep Neural Network to distinguish compounds active against the D(2) dopamine receptor (</a:t>
+            </a:r>
+            <a:r>
+              <a:rPr lang="en-US" sz="1200" dirty="0" err="1"/>
+              <a:t>UniProt</a:t>
+            </a:r>
+            <a:r>
+              <a:rPr lang="en-US" sz="1200" dirty="0"/>
+              <a:t> P14416) from inactive compounds, evaluate its performance, and then directly compare two pairs of explainability methods on the same on the same correctly predicted active compound:  </a:t>
+            </a:r>
+            <a:r>
+              <a:rPr lang="en-US" sz="1200" dirty="0" err="1"/>
+              <a:t>Molanchor</a:t>
+            </a:r>
+            <a:r>
+              <a:rPr lang="en-US" sz="1200" dirty="0"/>
+              <a:t> vs SHAP and </a:t>
+            </a:r>
+            <a:r>
+              <a:rPr lang="en-US" sz="1200" dirty="0" err="1"/>
+              <a:t>MolCE</a:t>
+            </a:r>
+            <a:r>
+              <a:rPr lang="en-US" sz="1200" dirty="0"/>
+              <a:t> vs Counterfactuals. Summarize where the methods agree on the structural determinants of the predictions and where they disagree.</a:t>
+            </a:r>
+          </a:p>
+        </p:txBody>
+      </p:sp>
+      <p:pic>
+        <p:nvPicPr>
+          <p:cNvPr id="45" name="Picture 44" descr="A structure of a chemical formula&#10;&#10;AI-generated content may be incorrect.">
+            <a:extLst>
+              <a:ext uri="{FF2B5EF4-FFF2-40B4-BE49-F238E27FC236}">
+                <a16:creationId xmlns:a16="http://schemas.microsoft.com/office/drawing/2014/main" id="{558C3E86-A5D2-0697-2A3B-5481E2DDCBAE}"/>
+              </a:ext>
+            </a:extLst>
+          </p:cNvPr>
+          <p:cNvPicPr>
+            <a:picLocks noChangeAspect="1"/>
+          </p:cNvPicPr>
+          <p:nvPr/>
+        </p:nvPicPr>
+        <p:blipFill>
+          <a:blip r:embed="rId6">
+            <a:extLst>
+              <a:ext uri="{28A0092B-C50C-407E-A947-70E740481C1C}">
+                <a14:useLocalDpi xmlns:a14="http://schemas.microsoft.com/office/drawing/2010/main" val="0"/>
+              </a:ext>
+            </a:extLst>
+          </a:blip>
+          <a:srcRect l="11528" t="25207" r="11064" b="25192"/>
+          <a:stretch/>
+        </p:blipFill>
+        <p:spPr>
+          <a:xfrm>
+            <a:off x="8132320" y="1888547"/>
+            <a:ext cx="3353529" cy="2148840"/>
+          </a:xfrm>
+          <a:prstGeom prst="rect">
+            <a:avLst/>
+          </a:prstGeom>
+        </p:spPr>
+      </p:pic>
+      <p:sp>
+        <p:nvSpPr>
+          <p:cNvPr id="46" name="TextBox 45">
+            <a:extLst>
+              <a:ext uri="{FF2B5EF4-FFF2-40B4-BE49-F238E27FC236}">
+                <a16:creationId xmlns:a16="http://schemas.microsoft.com/office/drawing/2014/main" id="{C02F4519-6E55-F26A-E1A3-2105A25F6A50}"/>
+              </a:ext>
+            </a:extLst>
+          </p:cNvPr>
+          <p:cNvSpPr txBox="1"/>
+          <p:nvPr/>
+        </p:nvSpPr>
+        <p:spPr>
+          <a:xfrm>
+            <a:off x="4970063" y="4507047"/>
+            <a:ext cx="6515786" cy="1569660"/>
+          </a:xfrm>
+          <a:prstGeom prst="rect">
+            <a:avLst/>
+          </a:prstGeom>
+          <a:noFill/>
+        </p:spPr>
+        <p:txBody>
+          <a:bodyPr wrap="square">
+            <a:spAutoFit/>
+          </a:bodyPr>
+          <a:lstStyle/>
+          <a:p>
+            <a:pPr marL="171450" indent="-171450" algn="just">
+              <a:buFont typeface="Arial" panose="020B0604020202020204" pitchFamily="34" charset="0"/>
+              <a:buChar char="•"/>
+            </a:pPr>
+            <a:r>
+              <a:rPr lang="en-US" sz="1200" b="1" dirty="0"/>
+              <a:t>Agreement: </a:t>
+            </a:r>
+            <a:r>
+              <a:rPr lang="en-US" sz="1200" dirty="0"/>
+              <a:t>Both methods converge on the morpholine-like ring as the critical pharmacophore. </a:t>
+            </a:r>
+            <a:r>
+              <a:rPr lang="en-US" sz="1200" dirty="0" err="1"/>
+              <a:t>MolAnchor</a:t>
+            </a:r>
+            <a:r>
+              <a:rPr lang="en-US" sz="1200" dirty="0"/>
+              <a:t> identifies the ring as a cohesive unit, while SHAP confirms that the atoms comprising this ring are indeed the most influential.</a:t>
+            </a:r>
+          </a:p>
+          <a:p>
+            <a:pPr algn="just"/>
+            <a:endParaRPr lang="en-US" sz="1200" dirty="0"/>
+          </a:p>
+          <a:p>
+            <a:pPr marL="171450" indent="-171450" algn="just">
+              <a:buFont typeface="Arial" panose="020B0604020202020204" pitchFamily="34" charset="0"/>
+              <a:buChar char="•"/>
+            </a:pPr>
+            <a:r>
+              <a:rPr lang="en-US" sz="1200" b="1" dirty="0"/>
+              <a:t>Disagreement: </a:t>
+            </a:r>
+            <a:r>
+              <a:rPr lang="en-US" sz="1200" dirty="0" err="1"/>
+              <a:t>MolAnchor</a:t>
+            </a:r>
+            <a:r>
+              <a:rPr lang="en-US" sz="1200" dirty="0"/>
+              <a:t> focuses strictly on the highest-precision fragment, potentially downplaying the contribution of the aromatic substituents (benzyl/thiophene) that SHAP would assign non-zero values to. </a:t>
+            </a:r>
+            <a:r>
+              <a:rPr lang="en-US" sz="1200" dirty="0" err="1"/>
+              <a:t>MolAnchor</a:t>
+            </a:r>
+            <a:r>
+              <a:rPr lang="en-US" sz="1200" dirty="0"/>
+              <a:t> is more "binary" (is this fragment present?), while SHAP is more "continuous" (how much does each atom contribute?).</a:t>
+            </a:r>
+          </a:p>
+        </p:txBody>
+      </p:sp>
+    </p:spTree>
+    <p:extLst>
+      <p:ext uri="{BB962C8B-B14F-4D97-AF65-F5344CB8AC3E}">
+        <p14:creationId xmlns:p14="http://schemas.microsoft.com/office/powerpoint/2010/main" val="1804857238"/>
+      </p:ext>
+    </p:extLst>
+  </p:cSld>
+  <p:clrMapOvr>
+    <a:masterClrMapping/>
+  </p:clrMapOvr>
+</p:sld>
+</file>
+
+<file path=ppt/slides/slide5.xml><?xml version="1.0" encoding="utf-8"?>
+<p:sld xmlns:a="http://schemas.openxmlformats.org/drawingml/2006/main" xmlns:r="http://schemas.openxmlformats.org/officeDocument/2006/relationships" xmlns:p="http://schemas.openxmlformats.org/presentationml/2006/main">
+  <p:cSld>
+    <p:spTree>
+      <p:nvGrpSpPr>
+        <p:cNvPr id="1" name=""/>
+        <p:cNvGrpSpPr/>
+        <p:nvPr/>
+      </p:nvGrpSpPr>
+      <p:grpSpPr>
+        <a:xfrm>
+          <a:off x="0" y="0"/>
+          <a:ext cx="0" cy="0"/>
+          <a:chOff x="0" y="0"/>
+          <a:chExt cx="0" cy="0"/>
+        </a:xfrm>
+      </p:grpSpPr>
+      <p:pic>
+        <p:nvPicPr>
+          <p:cNvPr id="10" name="Picture 9" descr="A screenshot of a graph&#10;&#10;AI-generated content may be incorrect.">
+            <a:extLst>
+              <a:ext uri="{FF2B5EF4-FFF2-40B4-BE49-F238E27FC236}">
+                <a16:creationId xmlns:a16="http://schemas.microsoft.com/office/drawing/2014/main" id="{E5CCB7DC-7BE9-E070-5374-2C22E866120E}"/>
+              </a:ext>
+            </a:extLst>
+          </p:cNvPr>
+          <p:cNvPicPr>
+            <a:picLocks noChangeAspect="1"/>
+          </p:cNvPicPr>
+          <p:nvPr/>
+        </p:nvPicPr>
+        <p:blipFill>
+          <a:blip r:embed="rId2">
+            <a:extLst>
+              <a:ext uri="{28A0092B-C50C-407E-A947-70E740481C1C}">
+                <a14:useLocalDpi xmlns:a14="http://schemas.microsoft.com/office/drawing/2010/main" val="0"/>
+              </a:ext>
+            </a:extLst>
+          </a:blip>
+          <a:srcRect l="31035" t="24006" r="53731" b="44988"/>
+          <a:stretch/>
+        </p:blipFill>
+        <p:spPr>
+          <a:xfrm>
+            <a:off x="3436044" y="2054607"/>
+            <a:ext cx="2222549" cy="2392796"/>
+          </a:xfrm>
+          <a:prstGeom prst="rect">
+            <a:avLst/>
+          </a:prstGeom>
+        </p:spPr>
+      </p:pic>
+      <p:sp>
+        <p:nvSpPr>
+          <p:cNvPr id="46" name="TextBox 45">
+            <a:extLst>
+              <a:ext uri="{FF2B5EF4-FFF2-40B4-BE49-F238E27FC236}">
+                <a16:creationId xmlns:a16="http://schemas.microsoft.com/office/drawing/2014/main" id="{C02F4519-6E55-F26A-E1A3-2105A25F6A50}"/>
+              </a:ext>
+            </a:extLst>
+          </p:cNvPr>
+          <p:cNvSpPr txBox="1"/>
+          <p:nvPr/>
+        </p:nvSpPr>
+        <p:spPr>
+          <a:xfrm>
+            <a:off x="3769575" y="5114195"/>
+            <a:ext cx="6515786" cy="1384995"/>
+          </a:xfrm>
+          <a:prstGeom prst="rect">
+            <a:avLst/>
+          </a:prstGeom>
+          <a:noFill/>
+        </p:spPr>
+        <p:txBody>
+          <a:bodyPr wrap="square">
+            <a:spAutoFit/>
+          </a:bodyPr>
+          <a:lstStyle/>
+          <a:p>
+            <a:pPr marL="171450" indent="-171450" algn="just">
+              <a:buFont typeface="Arial" panose="020B0604020202020204" pitchFamily="34" charset="0"/>
+              <a:buChar char="•"/>
+            </a:pPr>
+            <a:r>
+              <a:rPr lang="en-US" sz="1200" b="1" dirty="0"/>
+              <a:t>Agreement: </a:t>
+            </a:r>
+            <a:r>
+              <a:rPr lang="en-US" sz="1200" dirty="0"/>
+              <a:t>Both methods highlight that modifications to the R-groups attached to the morpholine ring are the most sensitive levers for changing bioactivity.</a:t>
+            </a:r>
+          </a:p>
+          <a:p>
+            <a:pPr algn="just"/>
+            <a:endParaRPr lang="en-US" sz="1200" b="1" dirty="0"/>
+          </a:p>
+          <a:p>
+            <a:pPr marL="171450" indent="-171450" algn="just">
+              <a:buFont typeface="Arial" panose="020B0604020202020204" pitchFamily="34" charset="0"/>
+              <a:buChar char="•"/>
+            </a:pPr>
+            <a:r>
+              <a:rPr lang="en-US" sz="1200" b="1" dirty="0"/>
+              <a:t>Disagreement: </a:t>
+            </a:r>
+            <a:r>
+              <a:rPr lang="en-US" sz="1200" dirty="0" err="1"/>
+              <a:t>MolCE</a:t>
+            </a:r>
+            <a:r>
+              <a:rPr lang="en-US" sz="1200" dirty="0"/>
+              <a:t> provides a theoretical contrastive feature (a specific R-group that is "anti-activating"). Counterfactuals provides concrete examples of inactive molecules. </a:t>
+            </a:r>
+            <a:r>
+              <a:rPr lang="en-US" sz="1200" dirty="0" err="1"/>
+              <a:t>MolCE</a:t>
+            </a:r>
+            <a:r>
+              <a:rPr lang="en-US" sz="1200" dirty="0"/>
+              <a:t> might suggest an R-group not present in the immediate neighborhood of the query, whereas Counterfactuals are constrained by the available library of R-groups for substitution.</a:t>
+            </a:r>
+          </a:p>
+        </p:txBody>
+      </p:sp>
+      <p:pic>
+        <p:nvPicPr>
+          <p:cNvPr id="12" name="Picture 11" descr="A screenshot of a graph&#10;&#10;AI-generated content may be incorrect.">
+            <a:extLst>
+              <a:ext uri="{FF2B5EF4-FFF2-40B4-BE49-F238E27FC236}">
+                <a16:creationId xmlns:a16="http://schemas.microsoft.com/office/drawing/2014/main" id="{635294F4-DE55-F52A-0F65-840B513A24A2}"/>
+              </a:ext>
+            </a:extLst>
+          </p:cNvPr>
+          <p:cNvPicPr>
+            <a:picLocks noChangeAspect="1"/>
+          </p:cNvPicPr>
+          <p:nvPr/>
+        </p:nvPicPr>
+        <p:blipFill>
+          <a:blip r:embed="rId2">
+            <a:extLst>
+              <a:ext uri="{28A0092B-C50C-407E-A947-70E740481C1C}">
+                <a14:useLocalDpi xmlns:a14="http://schemas.microsoft.com/office/drawing/2010/main" val="0"/>
+              </a:ext>
+            </a:extLst>
+          </a:blip>
+          <a:srcRect l="56362" t="23416" r="29209" b="43925"/>
+          <a:stretch/>
+        </p:blipFill>
+        <p:spPr>
+          <a:xfrm>
+            <a:off x="5620740" y="1990807"/>
+            <a:ext cx="2105025" cy="2520397"/>
+          </a:xfrm>
+          <a:prstGeom prst="rect">
+            <a:avLst/>
+          </a:prstGeom>
+        </p:spPr>
+      </p:pic>
+      <p:pic>
+        <p:nvPicPr>
+          <p:cNvPr id="13" name="Picture 12" descr="A black and red chemical structure&#10;&#10;AI-generated content may be incorrect.">
+            <a:extLst>
+              <a:ext uri="{FF2B5EF4-FFF2-40B4-BE49-F238E27FC236}">
+                <a16:creationId xmlns:a16="http://schemas.microsoft.com/office/drawing/2014/main" id="{7E80FD93-EC36-7292-D41F-2AB7B9A8674E}"/>
+              </a:ext>
+            </a:extLst>
+          </p:cNvPr>
+          <p:cNvPicPr>
+            <a:picLocks noChangeAspect="1"/>
+          </p:cNvPicPr>
+          <p:nvPr/>
+        </p:nvPicPr>
+        <p:blipFill>
+          <a:blip r:embed="rId3">
+            <a:extLst>
+              <a:ext uri="{28A0092B-C50C-407E-A947-70E740481C1C}">
+                <a14:useLocalDpi xmlns:a14="http://schemas.microsoft.com/office/drawing/2010/main" val="0"/>
+              </a:ext>
+            </a:extLst>
+          </a:blip>
+          <a:srcRect l="51184" t="14586" r="25463" b="34325"/>
+          <a:stretch/>
+        </p:blipFill>
+        <p:spPr>
+          <a:xfrm>
+            <a:off x="7951035" y="3350221"/>
+            <a:ext cx="2894617" cy="1385206"/>
+          </a:xfrm>
+          <a:prstGeom prst="rect">
+            <a:avLst/>
+          </a:prstGeom>
+        </p:spPr>
+      </p:pic>
+      <p:pic>
+        <p:nvPicPr>
+          <p:cNvPr id="15" name="Picture 14" descr="A screenshot of a graph&#10;&#10;AI-generated content may be incorrect.">
+            <a:extLst>
+              <a:ext uri="{FF2B5EF4-FFF2-40B4-BE49-F238E27FC236}">
+                <a16:creationId xmlns:a16="http://schemas.microsoft.com/office/drawing/2014/main" id="{413DC958-3438-AD99-8ED3-9413D987A5AC}"/>
+              </a:ext>
+            </a:extLst>
+          </p:cNvPr>
+          <p:cNvPicPr>
+            <a:picLocks noChangeAspect="1"/>
+          </p:cNvPicPr>
+          <p:nvPr/>
+        </p:nvPicPr>
+        <p:blipFill>
+          <a:blip r:embed="rId2">
+            <a:extLst>
+              <a:ext uri="{28A0092B-C50C-407E-A947-70E740481C1C}">
+                <a14:useLocalDpi xmlns:a14="http://schemas.microsoft.com/office/drawing/2010/main" val="0"/>
+              </a:ext>
+            </a:extLst>
+          </a:blip>
+          <a:srcRect l="31170" t="17838" r="53596" b="76213"/>
+          <a:stretch/>
+        </p:blipFill>
+        <p:spPr>
+          <a:xfrm>
+            <a:off x="3701051" y="4438366"/>
+            <a:ext cx="2222549" cy="459058"/>
+          </a:xfrm>
+          <a:prstGeom prst="rect">
+            <a:avLst/>
+          </a:prstGeom>
+        </p:spPr>
+      </p:pic>
+      <p:pic>
+        <p:nvPicPr>
+          <p:cNvPr id="16" name="Picture 15" descr="A screenshot of a graph&#10;&#10;AI-generated content may be incorrect.">
+            <a:extLst>
+              <a:ext uri="{FF2B5EF4-FFF2-40B4-BE49-F238E27FC236}">
+                <a16:creationId xmlns:a16="http://schemas.microsoft.com/office/drawing/2014/main" id="{65A8E5C2-6215-DED8-8284-904D83645C28}"/>
+              </a:ext>
+            </a:extLst>
+          </p:cNvPr>
+          <p:cNvPicPr>
+            <a:picLocks noChangeAspect="1"/>
+          </p:cNvPicPr>
+          <p:nvPr/>
+        </p:nvPicPr>
+        <p:blipFill>
+          <a:blip r:embed="rId2">
+            <a:extLst>
+              <a:ext uri="{28A0092B-C50C-407E-A947-70E740481C1C}">
+                <a14:useLocalDpi xmlns:a14="http://schemas.microsoft.com/office/drawing/2010/main" val="0"/>
+              </a:ext>
+            </a:extLst>
+          </a:blip>
+          <a:srcRect l="56362" t="18606" r="29209" b="76905"/>
+          <a:stretch/>
+        </p:blipFill>
+        <p:spPr>
+          <a:xfrm>
+            <a:off x="5885795" y="4506979"/>
+            <a:ext cx="2105025" cy="346430"/>
+          </a:xfrm>
+          <a:prstGeom prst="rect">
+            <a:avLst/>
+          </a:prstGeom>
+        </p:spPr>
+      </p:pic>
+      <p:pic>
+        <p:nvPicPr>
+          <p:cNvPr id="4" name="Picture 3" descr="A black and red chemical structure&#10;&#10;AI-generated content may be incorrect.">
+            <a:extLst>
+              <a:ext uri="{FF2B5EF4-FFF2-40B4-BE49-F238E27FC236}">
+                <a16:creationId xmlns:a16="http://schemas.microsoft.com/office/drawing/2014/main" id="{9B8DE2D9-50FB-48E1-3766-F90DC4B43C31}"/>
+              </a:ext>
+            </a:extLst>
+          </p:cNvPr>
+          <p:cNvPicPr>
+            <a:picLocks noChangeAspect="1"/>
+          </p:cNvPicPr>
+          <p:nvPr/>
+        </p:nvPicPr>
+        <p:blipFill>
+          <a:blip r:embed="rId3">
+            <a:extLst>
+              <a:ext uri="{28A0092B-C50C-407E-A947-70E740481C1C}">
+                <a14:useLocalDpi xmlns:a14="http://schemas.microsoft.com/office/drawing/2010/main" val="0"/>
+              </a:ext>
+            </a:extLst>
+          </a:blip>
+          <a:srcRect l="26131" t="13384" r="50592" b="35527"/>
+          <a:stretch/>
+        </p:blipFill>
+        <p:spPr>
+          <a:xfrm>
+            <a:off x="7955797" y="1713756"/>
+            <a:ext cx="2885092" cy="1385205"/>
+          </a:xfrm>
+          <a:prstGeom prst="rect">
+            <a:avLst/>
+          </a:prstGeom>
+        </p:spPr>
+      </p:pic>
+      <p:pic>
+        <p:nvPicPr>
+          <p:cNvPr id="17" name="Picture 16" descr="A black and red chemical structure&#10;&#10;AI-generated content may be incorrect.">
+            <a:extLst>
+              <a:ext uri="{FF2B5EF4-FFF2-40B4-BE49-F238E27FC236}">
+                <a16:creationId xmlns:a16="http://schemas.microsoft.com/office/drawing/2014/main" id="{9A57B164-6AA0-9A5C-969C-361475D72D25}"/>
+              </a:ext>
+            </a:extLst>
+          </p:cNvPr>
+          <p:cNvPicPr>
+            <a:picLocks noChangeAspect="1"/>
+          </p:cNvPicPr>
+          <p:nvPr/>
+        </p:nvPicPr>
+        <p:blipFill>
+          <a:blip r:embed="rId3">
+            <a:extLst>
+              <a:ext uri="{28A0092B-C50C-407E-A947-70E740481C1C}">
+                <a14:useLocalDpi xmlns:a14="http://schemas.microsoft.com/office/drawing/2010/main" val="0"/>
+              </a:ext>
+            </a:extLst>
+          </a:blip>
+          <a:srcRect l="34138" t="87643" r="59329" b="4628"/>
+          <a:stretch/>
+        </p:blipFill>
+        <p:spPr>
+          <a:xfrm>
+            <a:off x="8883993" y="3231955"/>
+            <a:ext cx="1028700" cy="266228"/>
+          </a:xfrm>
+          <a:prstGeom prst="rect">
+            <a:avLst/>
+          </a:prstGeom>
+        </p:spPr>
+      </p:pic>
+      <p:pic>
+        <p:nvPicPr>
+          <p:cNvPr id="18" name="Picture 17" descr="A black and red chemical structure&#10;&#10;AI-generated content may be incorrect.">
+            <a:extLst>
+              <a:ext uri="{FF2B5EF4-FFF2-40B4-BE49-F238E27FC236}">
+                <a16:creationId xmlns:a16="http://schemas.microsoft.com/office/drawing/2014/main" id="{721B14D9-308B-88B5-4785-360A6C506019}"/>
+              </a:ext>
+            </a:extLst>
+          </p:cNvPr>
+          <p:cNvPicPr>
+            <a:picLocks noChangeAspect="1"/>
+          </p:cNvPicPr>
+          <p:nvPr/>
+        </p:nvPicPr>
+        <p:blipFill>
+          <a:blip r:embed="rId3">
+            <a:extLst>
+              <a:ext uri="{28A0092B-C50C-407E-A947-70E740481C1C}">
+                <a14:useLocalDpi xmlns:a14="http://schemas.microsoft.com/office/drawing/2010/main" val="0"/>
+              </a:ext>
+            </a:extLst>
+          </a:blip>
+          <a:srcRect l="59497" t="85098" r="34125" b="3309"/>
+          <a:stretch/>
+        </p:blipFill>
+        <p:spPr>
+          <a:xfrm>
+            <a:off x="8926807" y="4709945"/>
+            <a:ext cx="943073" cy="374957"/>
+          </a:xfrm>
+          <a:prstGeom prst="rect">
+            <a:avLst/>
+          </a:prstGeom>
+        </p:spPr>
+      </p:pic>
+      <p:grpSp>
+        <p:nvGrpSpPr>
+          <p:cNvPr id="19" name="Group 18">
+            <a:extLst>
+              <a:ext uri="{FF2B5EF4-FFF2-40B4-BE49-F238E27FC236}">
+                <a16:creationId xmlns:a16="http://schemas.microsoft.com/office/drawing/2014/main" id="{3E3C0CE0-F9D7-0B88-458B-B30D6DB941D5}"/>
+              </a:ext>
+            </a:extLst>
+          </p:cNvPr>
+          <p:cNvGrpSpPr/>
+          <p:nvPr/>
+        </p:nvGrpSpPr>
+        <p:grpSpPr>
+          <a:xfrm>
+            <a:off x="201327" y="2273968"/>
+            <a:ext cx="1774658" cy="2310063"/>
+            <a:chOff x="990492" y="2511372"/>
+            <a:chExt cx="1774658" cy="2310063"/>
+          </a:xfrm>
+        </p:grpSpPr>
+        <p:sp>
+          <p:nvSpPr>
+            <p:cNvPr id="20" name="Rectangle 19">
+              <a:extLst>
+                <a:ext uri="{FF2B5EF4-FFF2-40B4-BE49-F238E27FC236}">
+                  <a16:creationId xmlns:a16="http://schemas.microsoft.com/office/drawing/2014/main" id="{9E9712B8-35C2-9D0B-5448-8B73757EC2F0}"/>
+                </a:ext>
+              </a:extLst>
+            </p:cNvPr>
+            <p:cNvSpPr/>
+            <p:nvPr/>
+          </p:nvSpPr>
+          <p:spPr>
+            <a:xfrm>
+              <a:off x="990492" y="2511372"/>
+              <a:ext cx="1774658" cy="2310063"/>
+            </a:xfrm>
+            <a:prstGeom prst="rect">
+              <a:avLst/>
+            </a:prstGeom>
+            <a:solidFill>
+              <a:schemeClr val="accent1">
+                <a:lumMod val="20000"/>
+                <a:lumOff val="80000"/>
+              </a:schemeClr>
+            </a:solidFill>
+            <a:ln>
+              <a:solidFill>
+                <a:schemeClr val="tx2">
+                  <a:lumMod val="25000"/>
+                  <a:lumOff val="75000"/>
+                </a:schemeClr>
+              </a:solidFill>
+            </a:ln>
+          </p:spPr>
+          <p:style>
+            <a:lnRef idx="2">
+              <a:schemeClr val="accent1">
+                <a:shade val="15000"/>
+              </a:schemeClr>
+            </a:lnRef>
+            <a:fillRef idx="1">
+              <a:schemeClr val="accent1"/>
+            </a:fillRef>
+            <a:effectRef idx="0">
+              <a:schemeClr val="accent1"/>
+            </a:effectRef>
+            <a:fontRef idx="minor">
+              <a:schemeClr val="lt1"/>
+            </a:fontRef>
+          </p:style>
+          <p:txBody>
+            <a:bodyPr rtlCol="0" anchor="ctr"/>
+            <a:lstStyle/>
+            <a:p>
+              <a:pPr algn="ctr"/>
+              <a:endParaRPr lang="en-US" dirty="0"/>
+            </a:p>
+          </p:txBody>
+        </p:sp>
+        <p:pic>
+          <p:nvPicPr>
+            <p:cNvPr id="21" name="Graphic 20" descr="Customer review with solid fill">
+              <a:extLst>
+                <a:ext uri="{FF2B5EF4-FFF2-40B4-BE49-F238E27FC236}">
+                  <a16:creationId xmlns:a16="http://schemas.microsoft.com/office/drawing/2014/main" id="{F3BE275F-DAC2-8C41-2B3A-FD5002884F56}"/>
+                </a:ext>
+              </a:extLst>
+            </p:cNvPr>
+            <p:cNvPicPr>
+              <a:picLocks noChangeAspect="1"/>
+            </p:cNvPicPr>
+            <p:nvPr/>
+          </p:nvPicPr>
+          <p:blipFill>
+            <a:blip r:embed="rId4">
+              <a:extLst>
+                <a:ext uri="{96DAC541-7B7A-43D3-8B79-37D633B846F1}">
+                  <asvg:svgBlip xmlns:asvg="http://schemas.microsoft.com/office/drawing/2016/SVG/main" r:embed="rId5"/>
+                </a:ext>
+              </a:extLst>
+            </a:blip>
+            <a:stretch>
+              <a:fillRect/>
+            </a:stretch>
+          </p:blipFill>
+          <p:spPr>
+            <a:xfrm>
+              <a:off x="1400027" y="3700649"/>
+              <a:ext cx="965534" cy="965534"/>
+            </a:xfrm>
+            <a:prstGeom prst="rect">
+              <a:avLst/>
+            </a:prstGeom>
+          </p:spPr>
+        </p:pic>
+        <p:pic>
+          <p:nvPicPr>
+            <p:cNvPr id="25" name="Picture 24">
+              <a:extLst>
+                <a:ext uri="{FF2B5EF4-FFF2-40B4-BE49-F238E27FC236}">
+                  <a16:creationId xmlns:a16="http://schemas.microsoft.com/office/drawing/2014/main" id="{FD0F25F4-DE18-9E33-120A-923A478A8BA4}"/>
+                </a:ext>
+              </a:extLst>
+            </p:cNvPr>
+            <p:cNvPicPr>
+              <a:picLocks noChangeAspect="1"/>
+            </p:cNvPicPr>
+            <p:nvPr/>
+          </p:nvPicPr>
+          <p:blipFill>
+            <a:blip r:embed="rId6"/>
+            <a:stretch>
+              <a:fillRect/>
+            </a:stretch>
+          </p:blipFill>
+          <p:spPr>
+            <a:xfrm>
+              <a:off x="1126882" y="2607575"/>
+              <a:ext cx="1525117" cy="996871"/>
+            </a:xfrm>
+            <a:prstGeom prst="rect">
+              <a:avLst/>
+            </a:prstGeom>
+          </p:spPr>
+        </p:pic>
+      </p:grpSp>
+      <p:sp>
+        <p:nvSpPr>
+          <p:cNvPr id="26" name="Arrow: Right 25">
+            <a:extLst>
+              <a:ext uri="{FF2B5EF4-FFF2-40B4-BE49-F238E27FC236}">
+                <a16:creationId xmlns:a16="http://schemas.microsoft.com/office/drawing/2014/main" id="{46EB3E60-57A2-3048-A916-245D3EEE448E}"/>
+              </a:ext>
+            </a:extLst>
+          </p:cNvPr>
+          <p:cNvSpPr/>
+          <p:nvPr/>
+        </p:nvSpPr>
+        <p:spPr>
+          <a:xfrm>
+            <a:off x="2479751" y="3241547"/>
+            <a:ext cx="666746" cy="374904"/>
+          </a:xfrm>
+          <a:prstGeom prst="rightArrow">
+            <a:avLst/>
+          </a:prstGeom>
+        </p:spPr>
+        <p:style>
+          <a:lnRef idx="2">
+            <a:schemeClr val="accent1">
+              <a:shade val="15000"/>
+            </a:schemeClr>
+          </a:lnRef>
+          <a:fillRef idx="1">
+            <a:schemeClr val="accent1"/>
+          </a:fillRef>
+          <a:effectRef idx="0">
+            <a:schemeClr val="accent1"/>
+          </a:effectRef>
+          <a:fontRef idx="minor">
+            <a:schemeClr val="lt1"/>
+          </a:fontRef>
+        </p:style>
+        <p:txBody>
+          <a:bodyPr rtlCol="0" anchor="ctr"/>
+          <a:lstStyle/>
+          <a:p>
+            <a:pPr algn="ctr"/>
+            <a:endParaRPr lang="en-US"/>
+          </a:p>
+        </p:txBody>
+      </p:sp>
+      <p:sp>
+        <p:nvSpPr>
+          <p:cNvPr id="27" name="Speech Bubble: Rectangle with Corners Rounded 26">
+            <a:extLst>
+              <a:ext uri="{FF2B5EF4-FFF2-40B4-BE49-F238E27FC236}">
+                <a16:creationId xmlns:a16="http://schemas.microsoft.com/office/drawing/2014/main" id="{E517CFDC-D9A8-D4E8-460B-065D935D90F7}"/>
+              </a:ext>
+            </a:extLst>
+          </p:cNvPr>
+          <p:cNvSpPr/>
+          <p:nvPr/>
+        </p:nvSpPr>
+        <p:spPr>
+          <a:xfrm>
+            <a:off x="2603403" y="251328"/>
+            <a:ext cx="7426422" cy="1258999"/>
+          </a:xfrm>
+          <a:prstGeom prst="wedgeRoundRectCallout">
+            <a:avLst>
+              <a:gd name="adj1" fmla="val -58761"/>
+              <a:gd name="adj2" fmla="val 158489"/>
+              <a:gd name="adj3" fmla="val 16667"/>
+            </a:avLst>
+          </a:prstGeom>
+        </p:spPr>
+        <p:style>
+          <a:lnRef idx="2">
+            <a:schemeClr val="dk1"/>
+          </a:lnRef>
+          <a:fillRef idx="1">
+            <a:schemeClr val="lt1"/>
+          </a:fillRef>
+          <a:effectRef idx="0">
+            <a:schemeClr val="dk1"/>
+          </a:effectRef>
+          <a:fontRef idx="minor">
+            <a:schemeClr val="dk1"/>
+          </a:fontRef>
+        </p:style>
+        <p:txBody>
+          <a:bodyPr rtlCol="0" anchor="ctr"/>
+          <a:lstStyle/>
+          <a:p>
+            <a:pPr algn="just"/>
+            <a:r>
+              <a:rPr lang="en-US" sz="1200" dirty="0"/>
+              <a:t>You are running an explainability benchmarking study for compound bioactivity prediction. The goal is to train a Deep Neural Network to distinguish compounds active against the D(2) dopamine receptor (</a:t>
+            </a:r>
+            <a:r>
+              <a:rPr lang="en-US" sz="1200" dirty="0" err="1"/>
+              <a:t>UniProt</a:t>
+            </a:r>
+            <a:r>
+              <a:rPr lang="en-US" sz="1200" dirty="0"/>
+              <a:t> P14416) from inactive compounds, evaluate its performance, and then directly compare two pairs of explainability methods on the same on the same correctly predicted active compound:  </a:t>
+            </a:r>
+            <a:r>
+              <a:rPr lang="en-US" sz="1200" dirty="0" err="1"/>
+              <a:t>Molanchor</a:t>
+            </a:r>
+            <a:r>
+              <a:rPr lang="en-US" sz="1200" dirty="0"/>
+              <a:t> vs SHAP and </a:t>
+            </a:r>
+            <a:r>
+              <a:rPr lang="en-US" sz="1200" dirty="0" err="1"/>
+              <a:t>MolCE</a:t>
+            </a:r>
+            <a:r>
+              <a:rPr lang="en-US" sz="1200" dirty="0"/>
+              <a:t> vs Counterfactuals. Summarize where the methods agree on the structural determinants of the predictions and where they disagree.</a:t>
+            </a:r>
+          </a:p>
+        </p:txBody>
+      </p:sp>
+    </p:spTree>
+    <p:extLst>
+      <p:ext uri="{BB962C8B-B14F-4D97-AF65-F5344CB8AC3E}">
+        <p14:creationId xmlns:p14="http://schemas.microsoft.com/office/powerpoint/2010/main" val="3017132667"/>
       </p:ext>
     </p:extLst>
   </p:cSld>

--- a/slides/figures_AI_agent.pptx
+++ b/slides/figures_AI_agent.pptx
@@ -10,6 +10,9 @@
     <p:sldId id="264" r:id="rId4"/>
     <p:sldId id="262" r:id="rId5"/>
     <p:sldId id="265" r:id="rId6"/>
+    <p:sldId id="270" r:id="rId7"/>
+    <p:sldId id="268" r:id="rId8"/>
+    <p:sldId id="266" r:id="rId9"/>
   </p:sldIdLst>
   <p:sldSz cx="12192000" cy="6858000"/>
   <p:notesSz cx="6858000" cy="9144000"/>
@@ -158,6 +161,607 @@
       </pc:sldChg>
     </pc:docChg>
   </pc:docChgLst>
+  <pc:docChgLst>
+    <pc:chgData name="Tiago Janela" userId="ee1a79fe-c79c-4f34-9602-7f6f2f0482b3" providerId="ADAL" clId="{C4759255-AC54-444B-9E29-28A6C409BEE6}"/>
+    <pc:docChg chg="undo custSel addSld delSld modSld sldOrd">
+      <pc:chgData name="Tiago Janela" userId="ee1a79fe-c79c-4f34-9602-7f6f2f0482b3" providerId="ADAL" clId="{C4759255-AC54-444B-9E29-28A6C409BEE6}" dt="2026-04-29T15:21:14.903" v="824" actId="20577"/>
+      <pc:docMkLst>
+        <pc:docMk/>
+      </pc:docMkLst>
+      <pc:sldChg chg="ord">
+        <pc:chgData name="Tiago Janela" userId="ee1a79fe-c79c-4f34-9602-7f6f2f0482b3" providerId="ADAL" clId="{C4759255-AC54-444B-9E29-28A6C409BEE6}" dt="2026-04-29T14:21:47.554" v="570"/>
+        <pc:sldMkLst>
+          <pc:docMk/>
+          <pc:sldMk cId="1804857238" sldId="262"/>
+        </pc:sldMkLst>
+      </pc:sldChg>
+      <pc:sldChg chg="modSp mod">
+        <pc:chgData name="Tiago Janela" userId="ee1a79fe-c79c-4f34-9602-7f6f2f0482b3" providerId="ADAL" clId="{C4759255-AC54-444B-9E29-28A6C409BEE6}" dt="2026-04-29T13:17:21.107" v="1" actId="14100"/>
+        <pc:sldMkLst>
+          <pc:docMk/>
+          <pc:sldMk cId="158870704" sldId="264"/>
+        </pc:sldMkLst>
+        <pc:spChg chg="mod">
+          <ac:chgData name="Tiago Janela" userId="ee1a79fe-c79c-4f34-9602-7f6f2f0482b3" providerId="ADAL" clId="{C4759255-AC54-444B-9E29-28A6C409BEE6}" dt="2026-04-29T13:17:21.107" v="1" actId="14100"/>
+          <ac:spMkLst>
+            <pc:docMk/>
+            <pc:sldMk cId="158870704" sldId="264"/>
+            <ac:spMk id="9" creationId="{75178BF8-9CBE-7AE5-98D4-55D1FF6F4255}"/>
+          </ac:spMkLst>
+        </pc:spChg>
+      </pc:sldChg>
+      <pc:sldChg chg="ord">
+        <pc:chgData name="Tiago Janela" userId="ee1a79fe-c79c-4f34-9602-7f6f2f0482b3" providerId="ADAL" clId="{C4759255-AC54-444B-9E29-28A6C409BEE6}" dt="2026-04-29T14:21:50.130" v="572"/>
+        <pc:sldMkLst>
+          <pc:docMk/>
+          <pc:sldMk cId="3017132667" sldId="265"/>
+        </pc:sldMkLst>
+      </pc:sldChg>
+      <pc:sldChg chg="addSp delSp modSp add mod ord">
+        <pc:chgData name="Tiago Janela" userId="ee1a79fe-c79c-4f34-9602-7f6f2f0482b3" providerId="ADAL" clId="{C4759255-AC54-444B-9E29-28A6C409BEE6}" dt="2026-04-29T14:02:23.074" v="433" actId="404"/>
+        <pc:sldMkLst>
+          <pc:docMk/>
+          <pc:sldMk cId="377492229" sldId="266"/>
+        </pc:sldMkLst>
+        <pc:spChg chg="add mod">
+          <ac:chgData name="Tiago Janela" userId="ee1a79fe-c79c-4f34-9602-7f6f2f0482b3" providerId="ADAL" clId="{C4759255-AC54-444B-9E29-28A6C409BEE6}" dt="2026-04-29T13:26:59.548" v="167" actId="164"/>
+          <ac:spMkLst>
+            <pc:docMk/>
+            <pc:sldMk cId="377492229" sldId="266"/>
+            <ac:spMk id="7" creationId="{2488285A-EC5F-953B-2AA0-843EC3F5127C}"/>
+          </ac:spMkLst>
+        </pc:spChg>
+        <pc:spChg chg="add del mod">
+          <ac:chgData name="Tiago Janela" userId="ee1a79fe-c79c-4f34-9602-7f6f2f0482b3" providerId="ADAL" clId="{C4759255-AC54-444B-9E29-28A6C409BEE6}" dt="2026-04-29T13:25:57.789" v="90" actId="478"/>
+          <ac:spMkLst>
+            <pc:docMk/>
+            <pc:sldMk cId="377492229" sldId="266"/>
+            <ac:spMk id="8" creationId="{766A1B7F-5186-3D95-6D85-C224B4A88DE6}"/>
+          </ac:spMkLst>
+        </pc:spChg>
+        <pc:spChg chg="add mod">
+          <ac:chgData name="Tiago Janela" userId="ee1a79fe-c79c-4f34-9602-7f6f2f0482b3" providerId="ADAL" clId="{C4759255-AC54-444B-9E29-28A6C409BEE6}" dt="2026-04-29T13:27:02.268" v="168" actId="164"/>
+          <ac:spMkLst>
+            <pc:docMk/>
+            <pc:sldMk cId="377492229" sldId="266"/>
+            <ac:spMk id="9" creationId="{641E8493-13A8-D084-AAF5-76892DBCDE12}"/>
+          </ac:spMkLst>
+        </pc:spChg>
+        <pc:spChg chg="add mod">
+          <ac:chgData name="Tiago Janela" userId="ee1a79fe-c79c-4f34-9602-7f6f2f0482b3" providerId="ADAL" clId="{C4759255-AC54-444B-9E29-28A6C409BEE6}" dt="2026-04-29T13:27:52.042" v="174" actId="1076"/>
+          <ac:spMkLst>
+            <pc:docMk/>
+            <pc:sldMk cId="377492229" sldId="266"/>
+            <ac:spMk id="22" creationId="{CC3DB96C-E7DA-1AD3-B9F5-7FDA8BA9B3AD}"/>
+          </ac:spMkLst>
+        </pc:spChg>
+        <pc:spChg chg="mod">
+          <ac:chgData name="Tiago Janela" userId="ee1a79fe-c79c-4f34-9602-7f6f2f0482b3" providerId="ADAL" clId="{C4759255-AC54-444B-9E29-28A6C409BEE6}" dt="2026-04-29T13:22:59.595" v="8" actId="1076"/>
+          <ac:spMkLst>
+            <pc:docMk/>
+            <pc:sldMk cId="377492229" sldId="266"/>
+            <ac:spMk id="26" creationId="{46EB3E60-57A2-3048-A916-245D3EEE448E}"/>
+          </ac:spMkLst>
+        </pc:spChg>
+        <pc:spChg chg="del">
+          <ac:chgData name="Tiago Janela" userId="ee1a79fe-c79c-4f34-9602-7f6f2f0482b3" providerId="ADAL" clId="{C4759255-AC54-444B-9E29-28A6C409BEE6}" dt="2026-04-29T13:18:30.287" v="3" actId="478"/>
+          <ac:spMkLst>
+            <pc:docMk/>
+            <pc:sldMk cId="377492229" sldId="266"/>
+            <ac:spMk id="27" creationId="{E517CFDC-D9A8-D4E8-460B-065D935D90F7}"/>
+          </ac:spMkLst>
+        </pc:spChg>
+        <pc:spChg chg="add mod">
+          <ac:chgData name="Tiago Janela" userId="ee1a79fe-c79c-4f34-9602-7f6f2f0482b3" providerId="ADAL" clId="{C4759255-AC54-444B-9E29-28A6C409BEE6}" dt="2026-04-29T13:45:23.917" v="324" actId="164"/>
+          <ac:spMkLst>
+            <pc:docMk/>
+            <pc:sldMk cId="377492229" sldId="266"/>
+            <ac:spMk id="28" creationId="{5B927D80-0780-203A-8CD6-2AFA89094D43}"/>
+          </ac:spMkLst>
+        </pc:spChg>
+        <pc:spChg chg="add mod">
+          <ac:chgData name="Tiago Janela" userId="ee1a79fe-c79c-4f34-9602-7f6f2f0482b3" providerId="ADAL" clId="{C4759255-AC54-444B-9E29-28A6C409BEE6}" dt="2026-04-29T13:45:26.412" v="325" actId="164"/>
+          <ac:spMkLst>
+            <pc:docMk/>
+            <pc:sldMk cId="377492229" sldId="266"/>
+            <ac:spMk id="30" creationId="{B0D4C90D-2A3D-51FF-63CF-89B19440DDFB}"/>
+          </ac:spMkLst>
+        </pc:spChg>
+        <pc:spChg chg="add del mod">
+          <ac:chgData name="Tiago Janela" userId="ee1a79fe-c79c-4f34-9602-7f6f2f0482b3" providerId="ADAL" clId="{C4759255-AC54-444B-9E29-28A6C409BEE6}" dt="2026-04-29T13:45:12.772" v="322" actId="478"/>
+          <ac:spMkLst>
+            <pc:docMk/>
+            <pc:sldMk cId="377492229" sldId="266"/>
+            <ac:spMk id="35" creationId="{AD912E03-FE84-CB26-D2DF-0C86B47C4A29}"/>
+          </ac:spMkLst>
+        </pc:spChg>
+        <pc:spChg chg="mod">
+          <ac:chgData name="Tiago Janela" userId="ee1a79fe-c79c-4f34-9602-7f6f2f0482b3" providerId="ADAL" clId="{C4759255-AC54-444B-9E29-28A6C409BEE6}" dt="2026-04-29T14:02:23.074" v="433" actId="404"/>
+          <ac:spMkLst>
+            <pc:docMk/>
+            <pc:sldMk cId="377492229" sldId="266"/>
+            <ac:spMk id="46" creationId="{C02F4519-6E55-F26A-E1A3-2105A25F6A50}"/>
+          </ac:spMkLst>
+        </pc:spChg>
+        <pc:grpChg chg="add mod">
+          <ac:chgData name="Tiago Janela" userId="ee1a79fe-c79c-4f34-9602-7f6f2f0482b3" providerId="ADAL" clId="{C4759255-AC54-444B-9E29-28A6C409BEE6}" dt="2026-04-29T13:26:59.548" v="167" actId="164"/>
+          <ac:grpSpMkLst>
+            <pc:docMk/>
+            <pc:sldMk cId="377492229" sldId="266"/>
+            <ac:grpSpMk id="2" creationId="{5C615D10-25D2-1F41-F5FD-4EFD3DB05967}"/>
+          </ac:grpSpMkLst>
+        </pc:grpChg>
+        <pc:grpChg chg="add mod">
+          <ac:chgData name="Tiago Janela" userId="ee1a79fe-c79c-4f34-9602-7f6f2f0482b3" providerId="ADAL" clId="{C4759255-AC54-444B-9E29-28A6C409BEE6}" dt="2026-04-29T13:26:59.548" v="167" actId="164"/>
+          <ac:grpSpMkLst>
+            <pc:docMk/>
+            <pc:sldMk cId="377492229" sldId="266"/>
+            <ac:grpSpMk id="3" creationId="{32A6B30B-7C85-BDCD-D535-21D074298F51}"/>
+          </ac:grpSpMkLst>
+        </pc:grpChg>
+        <pc:grpChg chg="add mod">
+          <ac:chgData name="Tiago Janela" userId="ee1a79fe-c79c-4f34-9602-7f6f2f0482b3" providerId="ADAL" clId="{C4759255-AC54-444B-9E29-28A6C409BEE6}" dt="2026-04-29T13:27:02.268" v="168" actId="164"/>
+          <ac:grpSpMkLst>
+            <pc:docMk/>
+            <pc:sldMk cId="377492229" sldId="266"/>
+            <ac:grpSpMk id="5" creationId="{41B0B536-979D-AF86-E1AA-3EDC1D09F714}"/>
+          </ac:grpSpMkLst>
+        </pc:grpChg>
+        <pc:grpChg chg="add mod">
+          <ac:chgData name="Tiago Janela" userId="ee1a79fe-c79c-4f34-9602-7f6f2f0482b3" providerId="ADAL" clId="{C4759255-AC54-444B-9E29-28A6C409BEE6}" dt="2026-04-29T13:27:02.268" v="168" actId="164"/>
+          <ac:grpSpMkLst>
+            <pc:docMk/>
+            <pc:sldMk cId="377492229" sldId="266"/>
+            <ac:grpSpMk id="6" creationId="{3AA3631B-3F0D-3733-0FDC-BBD18F86BEDB}"/>
+          </ac:grpSpMkLst>
+        </pc:grpChg>
+        <pc:grpChg chg="add mod">
+          <ac:chgData name="Tiago Janela" userId="ee1a79fe-c79c-4f34-9602-7f6f2f0482b3" providerId="ADAL" clId="{C4759255-AC54-444B-9E29-28A6C409BEE6}" dt="2026-04-29T13:27:06.754" v="169" actId="1076"/>
+          <ac:grpSpMkLst>
+            <pc:docMk/>
+            <pc:sldMk cId="377492229" sldId="266"/>
+            <ac:grpSpMk id="11" creationId="{DA01BAF4-359C-BB38-4616-17928143767D}"/>
+          </ac:grpSpMkLst>
+        </pc:grpChg>
+        <pc:grpChg chg="add mod">
+          <ac:chgData name="Tiago Janela" userId="ee1a79fe-c79c-4f34-9602-7f6f2f0482b3" providerId="ADAL" clId="{C4759255-AC54-444B-9E29-28A6C409BEE6}" dt="2026-04-29T13:27:13.674" v="170" actId="1076"/>
+          <ac:grpSpMkLst>
+            <pc:docMk/>
+            <pc:sldMk cId="377492229" sldId="266"/>
+            <ac:grpSpMk id="14" creationId="{CA32F1FE-2AD1-7279-C420-23D2BBBE4114}"/>
+          </ac:grpSpMkLst>
+        </pc:grpChg>
+        <pc:grpChg chg="mod">
+          <ac:chgData name="Tiago Janela" userId="ee1a79fe-c79c-4f34-9602-7f6f2f0482b3" providerId="ADAL" clId="{C4759255-AC54-444B-9E29-28A6C409BEE6}" dt="2026-04-29T13:22:57.283" v="7" actId="1076"/>
+          <ac:grpSpMkLst>
+            <pc:docMk/>
+            <pc:sldMk cId="377492229" sldId="266"/>
+            <ac:grpSpMk id="19" creationId="{3E3C0CE0-F9D7-0B88-458B-B30D6DB941D5}"/>
+          </ac:grpSpMkLst>
+        </pc:grpChg>
+        <pc:grpChg chg="add mod">
+          <ac:chgData name="Tiago Janela" userId="ee1a79fe-c79c-4f34-9602-7f6f2f0482b3" providerId="ADAL" clId="{C4759255-AC54-444B-9E29-28A6C409BEE6}" dt="2026-04-29T13:45:34.604" v="371" actId="1035"/>
+          <ac:grpSpMkLst>
+            <pc:docMk/>
+            <pc:sldMk cId="377492229" sldId="266"/>
+            <ac:grpSpMk id="36" creationId="{9EC2A3B4-5B0E-882B-8458-F75AA108A5E6}"/>
+          </ac:grpSpMkLst>
+        </pc:grpChg>
+        <pc:grpChg chg="add mod">
+          <ac:chgData name="Tiago Janela" userId="ee1a79fe-c79c-4f34-9602-7f6f2f0482b3" providerId="ADAL" clId="{C4759255-AC54-444B-9E29-28A6C409BEE6}" dt="2026-04-29T13:45:34.604" v="371" actId="1035"/>
+          <ac:grpSpMkLst>
+            <pc:docMk/>
+            <pc:sldMk cId="377492229" sldId="266"/>
+            <ac:grpSpMk id="37" creationId="{94E61FAA-489A-631D-A169-A21283220D66}"/>
+          </ac:grpSpMkLst>
+        </pc:grpChg>
+        <pc:picChg chg="mod">
+          <ac:chgData name="Tiago Janela" userId="ee1a79fe-c79c-4f34-9602-7f6f2f0482b3" providerId="ADAL" clId="{C4759255-AC54-444B-9E29-28A6C409BEE6}" dt="2026-04-29T13:23:20.444" v="17" actId="164"/>
+          <ac:picMkLst>
+            <pc:docMk/>
+            <pc:sldMk cId="377492229" sldId="266"/>
+            <ac:picMk id="4" creationId="{9B8DE2D9-50FB-48E1-3766-F90DC4B43C31}"/>
+          </ac:picMkLst>
+        </pc:picChg>
+        <pc:picChg chg="mod">
+          <ac:chgData name="Tiago Janela" userId="ee1a79fe-c79c-4f34-9602-7f6f2f0482b3" providerId="ADAL" clId="{C4759255-AC54-444B-9E29-28A6C409BEE6}" dt="2026-04-29T13:18:50.766" v="5" actId="164"/>
+          <ac:picMkLst>
+            <pc:docMk/>
+            <pc:sldMk cId="377492229" sldId="266"/>
+            <ac:picMk id="10" creationId="{E5CCB7DC-7BE9-E070-5374-2C22E866120E}"/>
+          </ac:picMkLst>
+        </pc:picChg>
+        <pc:picChg chg="mod">
+          <ac:chgData name="Tiago Janela" userId="ee1a79fe-c79c-4f34-9602-7f6f2f0482b3" providerId="ADAL" clId="{C4759255-AC54-444B-9E29-28A6C409BEE6}" dt="2026-04-29T13:18:53.126" v="6" actId="164"/>
+          <ac:picMkLst>
+            <pc:docMk/>
+            <pc:sldMk cId="377492229" sldId="266"/>
+            <ac:picMk id="12" creationId="{635294F4-DE55-F52A-0F65-840B513A24A2}"/>
+          </ac:picMkLst>
+        </pc:picChg>
+        <pc:picChg chg="mod">
+          <ac:chgData name="Tiago Janela" userId="ee1a79fe-c79c-4f34-9602-7f6f2f0482b3" providerId="ADAL" clId="{C4759255-AC54-444B-9E29-28A6C409BEE6}" dt="2026-04-29T13:23:23.485" v="18" actId="164"/>
+          <ac:picMkLst>
+            <pc:docMk/>
+            <pc:sldMk cId="377492229" sldId="266"/>
+            <ac:picMk id="13" creationId="{7E80FD93-EC36-7292-D41F-2AB7B9A8674E}"/>
+          </ac:picMkLst>
+        </pc:picChg>
+        <pc:picChg chg="mod">
+          <ac:chgData name="Tiago Janela" userId="ee1a79fe-c79c-4f34-9602-7f6f2f0482b3" providerId="ADAL" clId="{C4759255-AC54-444B-9E29-28A6C409BEE6}" dt="2026-04-29T13:18:50.766" v="5" actId="164"/>
+          <ac:picMkLst>
+            <pc:docMk/>
+            <pc:sldMk cId="377492229" sldId="266"/>
+            <ac:picMk id="15" creationId="{413DC958-3438-AD99-8ED3-9413D987A5AC}"/>
+          </ac:picMkLst>
+        </pc:picChg>
+        <pc:picChg chg="mod">
+          <ac:chgData name="Tiago Janela" userId="ee1a79fe-c79c-4f34-9602-7f6f2f0482b3" providerId="ADAL" clId="{C4759255-AC54-444B-9E29-28A6C409BEE6}" dt="2026-04-29T13:18:53.126" v="6" actId="164"/>
+          <ac:picMkLst>
+            <pc:docMk/>
+            <pc:sldMk cId="377492229" sldId="266"/>
+            <ac:picMk id="16" creationId="{65A8E5C2-6215-DED8-8284-904D83645C28}"/>
+          </ac:picMkLst>
+        </pc:picChg>
+        <pc:picChg chg="mod">
+          <ac:chgData name="Tiago Janela" userId="ee1a79fe-c79c-4f34-9602-7f6f2f0482b3" providerId="ADAL" clId="{C4759255-AC54-444B-9E29-28A6C409BEE6}" dt="2026-04-29T13:23:20.444" v="17" actId="164"/>
+          <ac:picMkLst>
+            <pc:docMk/>
+            <pc:sldMk cId="377492229" sldId="266"/>
+            <ac:picMk id="17" creationId="{9A57B164-6AA0-9A5C-969C-361475D72D25}"/>
+          </ac:picMkLst>
+        </pc:picChg>
+        <pc:picChg chg="mod">
+          <ac:chgData name="Tiago Janela" userId="ee1a79fe-c79c-4f34-9602-7f6f2f0482b3" providerId="ADAL" clId="{C4759255-AC54-444B-9E29-28A6C409BEE6}" dt="2026-04-29T13:23:23.485" v="18" actId="164"/>
+          <ac:picMkLst>
+            <pc:docMk/>
+            <pc:sldMk cId="377492229" sldId="266"/>
+            <ac:picMk id="18" creationId="{721B14D9-308B-88B5-4785-360A6C506019}"/>
+          </ac:picMkLst>
+        </pc:picChg>
+        <pc:cxnChg chg="add mod">
+          <ac:chgData name="Tiago Janela" userId="ee1a79fe-c79c-4f34-9602-7f6f2f0482b3" providerId="ADAL" clId="{C4759255-AC54-444B-9E29-28A6C409BEE6}" dt="2026-04-29T13:45:23.917" v="324" actId="164"/>
+          <ac:cxnSpMkLst>
+            <pc:docMk/>
+            <pc:sldMk cId="377492229" sldId="266"/>
+            <ac:cxnSpMk id="24" creationId="{FFDCAFC5-B9FC-083C-56A5-5CB45102C9FB}"/>
+          </ac:cxnSpMkLst>
+        </pc:cxnChg>
+        <pc:cxnChg chg="add mod">
+          <ac:chgData name="Tiago Janela" userId="ee1a79fe-c79c-4f34-9602-7f6f2f0482b3" providerId="ADAL" clId="{C4759255-AC54-444B-9E29-28A6C409BEE6}" dt="2026-04-29T13:45:26.412" v="325" actId="164"/>
+          <ac:cxnSpMkLst>
+            <pc:docMk/>
+            <pc:sldMk cId="377492229" sldId="266"/>
+            <ac:cxnSpMk id="29" creationId="{6BA7A5D6-C7CD-4C58-39DD-3212C8919ED5}"/>
+          </ac:cxnSpMkLst>
+        </pc:cxnChg>
+      </pc:sldChg>
+      <pc:sldChg chg="add del">
+        <pc:chgData name="Tiago Janela" userId="ee1a79fe-c79c-4f34-9602-7f6f2f0482b3" providerId="ADAL" clId="{C4759255-AC54-444B-9E29-28A6C409BEE6}" dt="2026-04-29T13:46:21.941" v="376" actId="47"/>
+        <pc:sldMkLst>
+          <pc:docMk/>
+          <pc:sldMk cId="2714856768" sldId="267"/>
+        </pc:sldMkLst>
+      </pc:sldChg>
+      <pc:sldChg chg="addSp delSp modSp add mod ord">
+        <pc:chgData name="Tiago Janela" userId="ee1a79fe-c79c-4f34-9602-7f6f2f0482b3" providerId="ADAL" clId="{C4759255-AC54-444B-9E29-28A6C409BEE6}" dt="2026-04-29T14:36:01.445" v="805" actId="20577"/>
+        <pc:sldMkLst>
+          <pc:docMk/>
+          <pc:sldMk cId="909832984" sldId="268"/>
+        </pc:sldMkLst>
+        <pc:spChg chg="mod topLvl">
+          <ac:chgData name="Tiago Janela" userId="ee1a79fe-c79c-4f34-9602-7f6f2f0482b3" providerId="ADAL" clId="{C4759255-AC54-444B-9E29-28A6C409BEE6}" dt="2026-04-29T13:47:03.978" v="411" actId="20577"/>
+          <ac:spMkLst>
+            <pc:docMk/>
+            <pc:sldMk cId="909832984" sldId="268"/>
+            <ac:spMk id="7" creationId="{2488285A-EC5F-953B-2AA0-843EC3F5127C}"/>
+          </ac:spMkLst>
+        </pc:spChg>
+        <pc:spChg chg="mod topLvl">
+          <ac:chgData name="Tiago Janela" userId="ee1a79fe-c79c-4f34-9602-7f6f2f0482b3" providerId="ADAL" clId="{C4759255-AC54-444B-9E29-28A6C409BEE6}" dt="2026-04-29T13:47:13.946" v="418" actId="20577"/>
+          <ac:spMkLst>
+            <pc:docMk/>
+            <pc:sldMk cId="909832984" sldId="268"/>
+            <ac:spMk id="9" creationId="{641E8493-13A8-D084-AAF5-76892DBCDE12}"/>
+          </ac:spMkLst>
+        </pc:spChg>
+        <pc:spChg chg="mod">
+          <ac:chgData name="Tiago Janela" userId="ee1a79fe-c79c-4f34-9602-7f6f2f0482b3" providerId="ADAL" clId="{C4759255-AC54-444B-9E29-28A6C409BEE6}" dt="2026-04-29T14:05:21.202" v="479" actId="20577"/>
+          <ac:spMkLst>
+            <pc:docMk/>
+            <pc:sldMk cId="909832984" sldId="268"/>
+            <ac:spMk id="28" creationId="{5B927D80-0780-203A-8CD6-2AFA89094D43}"/>
+          </ac:spMkLst>
+        </pc:spChg>
+        <pc:spChg chg="mod">
+          <ac:chgData name="Tiago Janela" userId="ee1a79fe-c79c-4f34-9602-7f6f2f0482b3" providerId="ADAL" clId="{C4759255-AC54-444B-9E29-28A6C409BEE6}" dt="2026-04-29T14:36:01.445" v="805" actId="20577"/>
+          <ac:spMkLst>
+            <pc:docMk/>
+            <pc:sldMk cId="909832984" sldId="268"/>
+            <ac:spMk id="30" creationId="{B0D4C90D-2A3D-51FF-63CF-89B19440DDFB}"/>
+          </ac:spMkLst>
+        </pc:spChg>
+        <pc:spChg chg="mod">
+          <ac:chgData name="Tiago Janela" userId="ee1a79fe-c79c-4f34-9602-7f6f2f0482b3" providerId="ADAL" clId="{C4759255-AC54-444B-9E29-28A6C409BEE6}" dt="2026-04-29T14:02:28.082" v="434" actId="404"/>
+          <ac:spMkLst>
+            <pc:docMk/>
+            <pc:sldMk cId="909832984" sldId="268"/>
+            <ac:spMk id="46" creationId="{C02F4519-6E55-F26A-E1A3-2105A25F6A50}"/>
+          </ac:spMkLst>
+        </pc:spChg>
+        <pc:grpChg chg="del">
+          <ac:chgData name="Tiago Janela" userId="ee1a79fe-c79c-4f34-9602-7f6f2f0482b3" providerId="ADAL" clId="{C4759255-AC54-444B-9E29-28A6C409BEE6}" dt="2026-04-29T13:46:35.395" v="379" actId="478"/>
+          <ac:grpSpMkLst>
+            <pc:docMk/>
+            <pc:sldMk cId="909832984" sldId="268"/>
+            <ac:grpSpMk id="2" creationId="{5C615D10-25D2-1F41-F5FD-4EFD3DB05967}"/>
+          </ac:grpSpMkLst>
+        </pc:grpChg>
+        <pc:grpChg chg="del">
+          <ac:chgData name="Tiago Janela" userId="ee1a79fe-c79c-4f34-9602-7f6f2f0482b3" providerId="ADAL" clId="{C4759255-AC54-444B-9E29-28A6C409BEE6}" dt="2026-04-29T13:46:32.323" v="377" actId="478"/>
+          <ac:grpSpMkLst>
+            <pc:docMk/>
+            <pc:sldMk cId="909832984" sldId="268"/>
+            <ac:grpSpMk id="3" creationId="{32A6B30B-7C85-BDCD-D535-21D074298F51}"/>
+          </ac:grpSpMkLst>
+        </pc:grpChg>
+        <pc:grpChg chg="del">
+          <ac:chgData name="Tiago Janela" userId="ee1a79fe-c79c-4f34-9602-7f6f2f0482b3" providerId="ADAL" clId="{C4759255-AC54-444B-9E29-28A6C409BEE6}" dt="2026-04-29T13:46:38.563" v="381" actId="478"/>
+          <ac:grpSpMkLst>
+            <pc:docMk/>
+            <pc:sldMk cId="909832984" sldId="268"/>
+            <ac:grpSpMk id="5" creationId="{41B0B536-979D-AF86-E1AA-3EDC1D09F714}"/>
+          </ac:grpSpMkLst>
+        </pc:grpChg>
+        <pc:grpChg chg="del">
+          <ac:chgData name="Tiago Janela" userId="ee1a79fe-c79c-4f34-9602-7f6f2f0482b3" providerId="ADAL" clId="{C4759255-AC54-444B-9E29-28A6C409BEE6}" dt="2026-04-29T13:46:40.795" v="383" actId="478"/>
+          <ac:grpSpMkLst>
+            <pc:docMk/>
+            <pc:sldMk cId="909832984" sldId="268"/>
+            <ac:grpSpMk id="6" creationId="{3AA3631B-3F0D-3733-0FDC-BBD18F86BEDB}"/>
+          </ac:grpSpMkLst>
+        </pc:grpChg>
+        <pc:grpChg chg="del">
+          <ac:chgData name="Tiago Janela" userId="ee1a79fe-c79c-4f34-9602-7f6f2f0482b3" providerId="ADAL" clId="{C4759255-AC54-444B-9E29-28A6C409BEE6}" dt="2026-04-29T13:46:37.026" v="380" actId="478"/>
+          <ac:grpSpMkLst>
+            <pc:docMk/>
+            <pc:sldMk cId="909832984" sldId="268"/>
+            <ac:grpSpMk id="11" creationId="{DA01BAF4-359C-BB38-4616-17928143767D}"/>
+          </ac:grpSpMkLst>
+        </pc:grpChg>
+        <pc:grpChg chg="del">
+          <ac:chgData name="Tiago Janela" userId="ee1a79fe-c79c-4f34-9602-7f6f2f0482b3" providerId="ADAL" clId="{C4759255-AC54-444B-9E29-28A6C409BEE6}" dt="2026-04-29T13:46:41.763" v="384" actId="478"/>
+          <ac:grpSpMkLst>
+            <pc:docMk/>
+            <pc:sldMk cId="909832984" sldId="268"/>
+            <ac:grpSpMk id="14" creationId="{CA32F1FE-2AD1-7279-C420-23D2BBBE4114}"/>
+          </ac:grpSpMkLst>
+        </pc:grpChg>
+        <pc:picChg chg="del">
+          <ac:chgData name="Tiago Janela" userId="ee1a79fe-c79c-4f34-9602-7f6f2f0482b3" providerId="ADAL" clId="{C4759255-AC54-444B-9E29-28A6C409BEE6}" dt="2026-04-29T13:46:38.563" v="381" actId="478"/>
+          <ac:picMkLst>
+            <pc:docMk/>
+            <pc:sldMk cId="909832984" sldId="268"/>
+            <ac:picMk id="4" creationId="{9B8DE2D9-50FB-48E1-3766-F90DC4B43C31}"/>
+          </ac:picMkLst>
+        </pc:picChg>
+        <pc:picChg chg="add mod">
+          <ac:chgData name="Tiago Janela" userId="ee1a79fe-c79c-4f34-9602-7f6f2f0482b3" providerId="ADAL" clId="{C4759255-AC54-444B-9E29-28A6C409BEE6}" dt="2026-04-29T13:48:31.386" v="427" actId="1076"/>
+          <ac:picMkLst>
+            <pc:docMk/>
+            <pc:sldMk cId="909832984" sldId="268"/>
+            <ac:picMk id="8" creationId="{A34E11FB-A19D-87A2-8358-029E83B1B393}"/>
+          </ac:picMkLst>
+        </pc:picChg>
+        <pc:picChg chg="del topLvl">
+          <ac:chgData name="Tiago Janela" userId="ee1a79fe-c79c-4f34-9602-7f6f2f0482b3" providerId="ADAL" clId="{C4759255-AC54-444B-9E29-28A6C409BEE6}" dt="2026-04-29T13:46:37.026" v="380" actId="478"/>
+          <ac:picMkLst>
+            <pc:docMk/>
+            <pc:sldMk cId="909832984" sldId="268"/>
+            <ac:picMk id="10" creationId="{E5CCB7DC-7BE9-E070-5374-2C22E866120E}"/>
+          </ac:picMkLst>
+        </pc:picChg>
+        <pc:picChg chg="del">
+          <ac:chgData name="Tiago Janela" userId="ee1a79fe-c79c-4f34-9602-7f6f2f0482b3" providerId="ADAL" clId="{C4759255-AC54-444B-9E29-28A6C409BEE6}" dt="2026-04-29T13:46:32.323" v="377" actId="478"/>
+          <ac:picMkLst>
+            <pc:docMk/>
+            <pc:sldMk cId="909832984" sldId="268"/>
+            <ac:picMk id="12" creationId="{635294F4-DE55-F52A-0F65-840B513A24A2}"/>
+          </ac:picMkLst>
+        </pc:picChg>
+        <pc:picChg chg="del">
+          <ac:chgData name="Tiago Janela" userId="ee1a79fe-c79c-4f34-9602-7f6f2f0482b3" providerId="ADAL" clId="{C4759255-AC54-444B-9E29-28A6C409BEE6}" dt="2026-04-29T13:46:40.795" v="383" actId="478"/>
+          <ac:picMkLst>
+            <pc:docMk/>
+            <pc:sldMk cId="909832984" sldId="268"/>
+            <ac:picMk id="13" creationId="{7E80FD93-EC36-7292-D41F-2AB7B9A8674E}"/>
+          </ac:picMkLst>
+        </pc:picChg>
+        <pc:picChg chg="del">
+          <ac:chgData name="Tiago Janela" userId="ee1a79fe-c79c-4f34-9602-7f6f2f0482b3" providerId="ADAL" clId="{C4759255-AC54-444B-9E29-28A6C409BEE6}" dt="2026-04-29T13:46:35.395" v="379" actId="478"/>
+          <ac:picMkLst>
+            <pc:docMk/>
+            <pc:sldMk cId="909832984" sldId="268"/>
+            <ac:picMk id="15" creationId="{413DC958-3438-AD99-8ED3-9413D987A5AC}"/>
+          </ac:picMkLst>
+        </pc:picChg>
+        <pc:picChg chg="del">
+          <ac:chgData name="Tiago Janela" userId="ee1a79fe-c79c-4f34-9602-7f6f2f0482b3" providerId="ADAL" clId="{C4759255-AC54-444B-9E29-28A6C409BEE6}" dt="2026-04-29T13:46:34.002" v="378" actId="478"/>
+          <ac:picMkLst>
+            <pc:docMk/>
+            <pc:sldMk cId="909832984" sldId="268"/>
+            <ac:picMk id="16" creationId="{65A8E5C2-6215-DED8-8284-904D83645C28}"/>
+          </ac:picMkLst>
+        </pc:picChg>
+        <pc:picChg chg="del">
+          <ac:chgData name="Tiago Janela" userId="ee1a79fe-c79c-4f34-9602-7f6f2f0482b3" providerId="ADAL" clId="{C4759255-AC54-444B-9E29-28A6C409BEE6}" dt="2026-04-29T13:46:39.875" v="382" actId="478"/>
+          <ac:picMkLst>
+            <pc:docMk/>
+            <pc:sldMk cId="909832984" sldId="268"/>
+            <ac:picMk id="17" creationId="{9A57B164-6AA0-9A5C-969C-361475D72D25}"/>
+          </ac:picMkLst>
+        </pc:picChg>
+        <pc:picChg chg="del topLvl">
+          <ac:chgData name="Tiago Janela" userId="ee1a79fe-c79c-4f34-9602-7f6f2f0482b3" providerId="ADAL" clId="{C4759255-AC54-444B-9E29-28A6C409BEE6}" dt="2026-04-29T13:46:41.763" v="384" actId="478"/>
+          <ac:picMkLst>
+            <pc:docMk/>
+            <pc:sldMk cId="909832984" sldId="268"/>
+            <ac:picMk id="18" creationId="{721B14D9-308B-88B5-4785-360A6C506019}"/>
+          </ac:picMkLst>
+        </pc:picChg>
+        <pc:picChg chg="add mod">
+          <ac:chgData name="Tiago Janela" userId="ee1a79fe-c79c-4f34-9602-7f6f2f0482b3" providerId="ADAL" clId="{C4759255-AC54-444B-9E29-28A6C409BEE6}" dt="2026-04-29T13:48:22.033" v="426" actId="1076"/>
+          <ac:picMkLst>
+            <pc:docMk/>
+            <pc:sldMk cId="909832984" sldId="268"/>
+            <ac:picMk id="23" creationId="{A2289CF0-0B79-FB00-8B39-2130F1B1729D}"/>
+          </ac:picMkLst>
+        </pc:picChg>
+      </pc:sldChg>
+      <pc:sldChg chg="delSp add del mod">
+        <pc:chgData name="Tiago Janela" userId="ee1a79fe-c79c-4f34-9602-7f6f2f0482b3" providerId="ADAL" clId="{C4759255-AC54-444B-9E29-28A6C409BEE6}" dt="2026-04-29T14:24:27.016" v="605" actId="47"/>
+        <pc:sldMkLst>
+          <pc:docMk/>
+          <pc:sldMk cId="4081018538" sldId="269"/>
+        </pc:sldMkLst>
+        <pc:spChg chg="del">
+          <ac:chgData name="Tiago Janela" userId="ee1a79fe-c79c-4f34-9602-7f6f2f0482b3" providerId="ADAL" clId="{C4759255-AC54-444B-9E29-28A6C409BEE6}" dt="2026-04-29T14:21:43.222" v="568" actId="478"/>
+          <ac:spMkLst>
+            <pc:docMk/>
+            <pc:sldMk cId="4081018538" sldId="269"/>
+            <ac:spMk id="14" creationId="{47BDDA66-D9F4-8B02-9F65-D6099C12712B}"/>
+          </ac:spMkLst>
+        </pc:spChg>
+      </pc:sldChg>
+      <pc:sldChg chg="addSp delSp modSp add mod ord">
+        <pc:chgData name="Tiago Janela" userId="ee1a79fe-c79c-4f34-9602-7f6f2f0482b3" providerId="ADAL" clId="{C4759255-AC54-444B-9E29-28A6C409BEE6}" dt="2026-04-29T15:21:14.903" v="824" actId="20577"/>
+        <pc:sldMkLst>
+          <pc:docMk/>
+          <pc:sldMk cId="2910313481" sldId="270"/>
+        </pc:sldMkLst>
+        <pc:spChg chg="add mod">
+          <ac:chgData name="Tiago Janela" userId="ee1a79fe-c79c-4f34-9602-7f6f2f0482b3" providerId="ADAL" clId="{C4759255-AC54-444B-9E29-28A6C409BEE6}" dt="2026-04-29T15:21:14.903" v="824" actId="20577"/>
+          <ac:spMkLst>
+            <pc:docMk/>
+            <pc:sldMk cId="2910313481" sldId="270"/>
+            <ac:spMk id="4" creationId="{EE404A95-E54E-B3BB-3960-2906EAA6D7A6}"/>
+          </ac:spMkLst>
+        </pc:spChg>
+        <pc:spChg chg="add del mod">
+          <ac:chgData name="Tiago Janela" userId="ee1a79fe-c79c-4f34-9602-7f6f2f0482b3" providerId="ADAL" clId="{C4759255-AC54-444B-9E29-28A6C409BEE6}" dt="2026-04-29T14:25:25.507" v="613" actId="478"/>
+          <ac:spMkLst>
+            <pc:docMk/>
+            <pc:sldMk cId="2910313481" sldId="270"/>
+            <ac:spMk id="5" creationId="{FF64500E-C08A-13B9-327B-EFEB2A9223B5}"/>
+          </ac:spMkLst>
+        </pc:spChg>
+        <pc:spChg chg="add mod">
+          <ac:chgData name="Tiago Janela" userId="ee1a79fe-c79c-4f34-9602-7f6f2f0482b3" providerId="ADAL" clId="{C4759255-AC54-444B-9E29-28A6C409BEE6}" dt="2026-04-29T15:21:13.941" v="823" actId="1076"/>
+          <ac:spMkLst>
+            <pc:docMk/>
+            <pc:sldMk cId="2910313481" sldId="270"/>
+            <ac:spMk id="6" creationId="{E5CD7569-CE35-8372-955F-0E824345FF03}"/>
+          </ac:spMkLst>
+        </pc:spChg>
+        <pc:spChg chg="mod">
+          <ac:chgData name="Tiago Janela" userId="ee1a79fe-c79c-4f34-9602-7f6f2f0482b3" providerId="ADAL" clId="{C4759255-AC54-444B-9E29-28A6C409BEE6}" dt="2026-04-29T15:17:59.422" v="811" actId="1076"/>
+          <ac:spMkLst>
+            <pc:docMk/>
+            <pc:sldMk cId="2910313481" sldId="270"/>
+            <ac:spMk id="7" creationId="{2488285A-EC5F-953B-2AA0-843EC3F5127C}"/>
+          </ac:spMkLst>
+        </pc:spChg>
+        <pc:spChg chg="mod">
+          <ac:chgData name="Tiago Janela" userId="ee1a79fe-c79c-4f34-9602-7f6f2f0482b3" providerId="ADAL" clId="{C4759255-AC54-444B-9E29-28A6C409BEE6}" dt="2026-04-29T14:23:44.860" v="604" actId="20577"/>
+          <ac:spMkLst>
+            <pc:docMk/>
+            <pc:sldMk cId="2910313481" sldId="270"/>
+            <ac:spMk id="9" creationId="{641E8493-13A8-D084-AAF5-76892DBCDE12}"/>
+          </ac:spMkLst>
+        </pc:spChg>
+        <pc:spChg chg="add del mod">
+          <ac:chgData name="Tiago Janela" userId="ee1a79fe-c79c-4f34-9602-7f6f2f0482b3" providerId="ADAL" clId="{C4759255-AC54-444B-9E29-28A6C409BEE6}" dt="2026-04-29T14:26:28.866" v="623" actId="478"/>
+          <ac:spMkLst>
+            <pc:docMk/>
+            <pc:sldMk cId="2910313481" sldId="270"/>
+            <ac:spMk id="10" creationId="{A9057894-F82C-A25C-01EF-BB3247BEEE34}"/>
+          </ac:spMkLst>
+        </pc:spChg>
+        <pc:spChg chg="add del mod">
+          <ac:chgData name="Tiago Janela" userId="ee1a79fe-c79c-4f34-9602-7f6f2f0482b3" providerId="ADAL" clId="{C4759255-AC54-444B-9E29-28A6C409BEE6}" dt="2026-04-29T14:48:36.099" v="810" actId="478"/>
+          <ac:spMkLst>
+            <pc:docMk/>
+            <pc:sldMk cId="2910313481" sldId="270"/>
+            <ac:spMk id="11" creationId="{07CBABF2-01C0-57B0-8AFF-348C67525ABC}"/>
+          </ac:spMkLst>
+        </pc:spChg>
+        <pc:spChg chg="del">
+          <ac:chgData name="Tiago Janela" userId="ee1a79fe-c79c-4f34-9602-7f6f2f0482b3" providerId="ADAL" clId="{C4759255-AC54-444B-9E29-28A6C409BEE6}" dt="2026-04-29T14:48:18.499" v="806" actId="478"/>
+          <ac:spMkLst>
+            <pc:docMk/>
+            <pc:sldMk cId="2910313481" sldId="270"/>
+            <ac:spMk id="22" creationId="{CC3DB96C-E7DA-1AD3-B9F5-7FDA8BA9B3AD}"/>
+          </ac:spMkLst>
+        </pc:spChg>
+        <pc:spChg chg="del">
+          <ac:chgData name="Tiago Janela" userId="ee1a79fe-c79c-4f34-9602-7f6f2f0482b3" providerId="ADAL" clId="{C4759255-AC54-444B-9E29-28A6C409BEE6}" dt="2026-04-29T14:24:41.579" v="606" actId="478"/>
+          <ac:spMkLst>
+            <pc:docMk/>
+            <pc:sldMk cId="2910313481" sldId="270"/>
+            <ac:spMk id="46" creationId="{C02F4519-6E55-F26A-E1A3-2105A25F6A50}"/>
+          </ac:spMkLst>
+        </pc:spChg>
+        <pc:grpChg chg="del">
+          <ac:chgData name="Tiago Janela" userId="ee1a79fe-c79c-4f34-9602-7f6f2f0482b3" providerId="ADAL" clId="{C4759255-AC54-444B-9E29-28A6C409BEE6}" dt="2026-04-29T14:24:42.634" v="607" actId="478"/>
+          <ac:grpSpMkLst>
+            <pc:docMk/>
+            <pc:sldMk cId="2910313481" sldId="270"/>
+            <ac:grpSpMk id="36" creationId="{9EC2A3B4-5B0E-882B-8458-F75AA108A5E6}"/>
+          </ac:grpSpMkLst>
+        </pc:grpChg>
+        <pc:grpChg chg="del">
+          <ac:chgData name="Tiago Janela" userId="ee1a79fe-c79c-4f34-9602-7f6f2f0482b3" providerId="ADAL" clId="{C4759255-AC54-444B-9E29-28A6C409BEE6}" dt="2026-04-29T14:24:43.466" v="608" actId="478"/>
+          <ac:grpSpMkLst>
+            <pc:docMk/>
+            <pc:sldMk cId="2910313481" sldId="270"/>
+            <ac:grpSpMk id="37" creationId="{94E61FAA-489A-631D-A169-A21283220D66}"/>
+          </ac:grpSpMkLst>
+        </pc:grpChg>
+        <pc:picChg chg="add mod">
+          <ac:chgData name="Tiago Janela" userId="ee1a79fe-c79c-4f34-9602-7f6f2f0482b3" providerId="ADAL" clId="{C4759255-AC54-444B-9E29-28A6C409BEE6}" dt="2026-04-29T14:22:46.076" v="587" actId="1076"/>
+          <ac:picMkLst>
+            <pc:docMk/>
+            <pc:sldMk cId="2910313481" sldId="270"/>
+            <ac:picMk id="2" creationId="{009BB816-3CB1-11F0-349B-5754B7DE95DB}"/>
+          </ac:picMkLst>
+        </pc:picChg>
+        <pc:picChg chg="add mod">
+          <ac:chgData name="Tiago Janela" userId="ee1a79fe-c79c-4f34-9602-7f6f2f0482b3" providerId="ADAL" clId="{C4759255-AC54-444B-9E29-28A6C409BEE6}" dt="2026-04-29T14:23:22.044" v="594" actId="1076"/>
+          <ac:picMkLst>
+            <pc:docMk/>
+            <pc:sldMk cId="2910313481" sldId="270"/>
+            <ac:picMk id="3" creationId="{8D7B2186-999B-65D7-929D-2E963456D958}"/>
+          </ac:picMkLst>
+        </pc:picChg>
+        <pc:picChg chg="del">
+          <ac:chgData name="Tiago Janela" userId="ee1a79fe-c79c-4f34-9602-7f6f2f0482b3" providerId="ADAL" clId="{C4759255-AC54-444B-9E29-28A6C409BEE6}" dt="2026-04-29T14:22:25.716" v="576" actId="478"/>
+          <ac:picMkLst>
+            <pc:docMk/>
+            <pc:sldMk cId="2910313481" sldId="270"/>
+            <ac:picMk id="8" creationId="{A34E11FB-A19D-87A2-8358-029E83B1B393}"/>
+          </ac:picMkLst>
+        </pc:picChg>
+        <pc:picChg chg="del">
+          <ac:chgData name="Tiago Janela" userId="ee1a79fe-c79c-4f34-9602-7f6f2f0482b3" providerId="ADAL" clId="{C4759255-AC54-444B-9E29-28A6C409BEE6}" dt="2026-04-29T14:22:25.716" v="576" actId="478"/>
+          <ac:picMkLst>
+            <pc:docMk/>
+            <pc:sldMk cId="2910313481" sldId="270"/>
+            <ac:picMk id="23" creationId="{A2289CF0-0B79-FB00-8B39-2130F1B1729D}"/>
+          </ac:picMkLst>
+        </pc:picChg>
+      </pc:sldChg>
+    </pc:docChg>
+  </pc:docChgLst>
 </pc:chgInfo>
 </file>
 
@@ -308,7 +912,7 @@
           <a:p>
             <a:fld id="{DA6F0F7C-4BCE-44E3-AC6F-932A28F11178}" type="datetimeFigureOut">
               <a:rPr lang="en-US" smtClean="0"/>
-              <a:t>4/27/2026</a:t>
+              <a:t>4/29/2026</a:t>
             </a:fld>
             <a:endParaRPr lang="en-US"/>
           </a:p>
@@ -506,7 +1110,7 @@
           <a:p>
             <a:fld id="{DA6F0F7C-4BCE-44E3-AC6F-932A28F11178}" type="datetimeFigureOut">
               <a:rPr lang="en-US" smtClean="0"/>
-              <a:t>4/27/2026</a:t>
+              <a:t>4/29/2026</a:t>
             </a:fld>
             <a:endParaRPr lang="en-US"/>
           </a:p>
@@ -714,7 +1318,7 @@
           <a:p>
             <a:fld id="{DA6F0F7C-4BCE-44E3-AC6F-932A28F11178}" type="datetimeFigureOut">
               <a:rPr lang="en-US" smtClean="0"/>
-              <a:t>4/27/2026</a:t>
+              <a:t>4/29/2026</a:t>
             </a:fld>
             <a:endParaRPr lang="en-US"/>
           </a:p>
@@ -912,7 +1516,7 @@
           <a:p>
             <a:fld id="{DA6F0F7C-4BCE-44E3-AC6F-932A28F11178}" type="datetimeFigureOut">
               <a:rPr lang="en-US" smtClean="0"/>
-              <a:t>4/27/2026</a:t>
+              <a:t>4/29/2026</a:t>
             </a:fld>
             <a:endParaRPr lang="en-US"/>
           </a:p>
@@ -1187,7 +1791,7 @@
           <a:p>
             <a:fld id="{DA6F0F7C-4BCE-44E3-AC6F-932A28F11178}" type="datetimeFigureOut">
               <a:rPr lang="en-US" smtClean="0"/>
-              <a:t>4/27/2026</a:t>
+              <a:t>4/29/2026</a:t>
             </a:fld>
             <a:endParaRPr lang="en-US"/>
           </a:p>
@@ -1452,7 +2056,7 @@
           <a:p>
             <a:fld id="{DA6F0F7C-4BCE-44E3-AC6F-932A28F11178}" type="datetimeFigureOut">
               <a:rPr lang="en-US" smtClean="0"/>
-              <a:t>4/27/2026</a:t>
+              <a:t>4/29/2026</a:t>
             </a:fld>
             <a:endParaRPr lang="en-US"/>
           </a:p>
@@ -1864,7 +2468,7 @@
           <a:p>
             <a:fld id="{DA6F0F7C-4BCE-44E3-AC6F-932A28F11178}" type="datetimeFigureOut">
               <a:rPr lang="en-US" smtClean="0"/>
-              <a:t>4/27/2026</a:t>
+              <a:t>4/29/2026</a:t>
             </a:fld>
             <a:endParaRPr lang="en-US"/>
           </a:p>
@@ -2005,7 +2609,7 @@
           <a:p>
             <a:fld id="{DA6F0F7C-4BCE-44E3-AC6F-932A28F11178}" type="datetimeFigureOut">
               <a:rPr lang="en-US" smtClean="0"/>
-              <a:t>4/27/2026</a:t>
+              <a:t>4/29/2026</a:t>
             </a:fld>
             <a:endParaRPr lang="en-US"/>
           </a:p>
@@ -2118,7 +2722,7 @@
           <a:p>
             <a:fld id="{DA6F0F7C-4BCE-44E3-AC6F-932A28F11178}" type="datetimeFigureOut">
               <a:rPr lang="en-US" smtClean="0"/>
-              <a:t>4/27/2026</a:t>
+              <a:t>4/29/2026</a:t>
             </a:fld>
             <a:endParaRPr lang="en-US"/>
           </a:p>
@@ -2429,7 +3033,7 @@
           <a:p>
             <a:fld id="{DA6F0F7C-4BCE-44E3-AC6F-932A28F11178}" type="datetimeFigureOut">
               <a:rPr lang="en-US" smtClean="0"/>
-              <a:t>4/27/2026</a:t>
+              <a:t>4/29/2026</a:t>
             </a:fld>
             <a:endParaRPr lang="en-US"/>
           </a:p>
@@ -2717,7 +3321,7 @@
           <a:p>
             <a:fld id="{DA6F0F7C-4BCE-44E3-AC6F-932A28F11178}" type="datetimeFigureOut">
               <a:rPr lang="en-US" smtClean="0"/>
-              <a:t>4/27/2026</a:t>
+              <a:t>4/29/2026</a:t>
             </a:fld>
             <a:endParaRPr lang="en-US"/>
           </a:p>
@@ -2958,7 +3562,7 @@
           <a:p>
             <a:fld id="{DA6F0F7C-4BCE-44E3-AC6F-932A28F11178}" type="datetimeFigureOut">
               <a:rPr lang="en-US" smtClean="0"/>
-              <a:t>4/27/2026</a:t>
+              <a:t>4/29/2026</a:t>
             </a:fld>
             <a:endParaRPr lang="en-US"/>
           </a:p>
@@ -9107,6 +9711,2548 @@
 </p:sld>
 </file>
 
+<file path=ppt/slides/slide6.xml><?xml version="1.0" encoding="utf-8"?>
+<p:sld xmlns:a="http://schemas.openxmlformats.org/drawingml/2006/main" xmlns:r="http://schemas.openxmlformats.org/officeDocument/2006/relationships" xmlns:p="http://schemas.openxmlformats.org/presentationml/2006/main">
+  <p:cSld>
+    <p:spTree>
+      <p:nvGrpSpPr>
+        <p:cNvPr id="1" name=""/>
+        <p:cNvGrpSpPr/>
+        <p:nvPr/>
+      </p:nvGrpSpPr>
+      <p:grpSpPr>
+        <a:xfrm>
+          <a:off x="0" y="0"/>
+          <a:ext cx="0" cy="0"/>
+          <a:chOff x="0" y="0"/>
+          <a:chExt cx="0" cy="0"/>
+        </a:xfrm>
+      </p:grpSpPr>
+      <p:grpSp>
+        <p:nvGrpSpPr>
+          <p:cNvPr id="19" name="Group 18">
+            <a:extLst>
+              <a:ext uri="{FF2B5EF4-FFF2-40B4-BE49-F238E27FC236}">
+                <a16:creationId xmlns:a16="http://schemas.microsoft.com/office/drawing/2014/main" id="{3E3C0CE0-F9D7-0B88-458B-B30D6DB941D5}"/>
+              </a:ext>
+            </a:extLst>
+          </p:cNvPr>
+          <p:cNvGrpSpPr/>
+          <p:nvPr/>
+        </p:nvGrpSpPr>
+        <p:grpSpPr>
+          <a:xfrm>
+            <a:off x="232995" y="835775"/>
+            <a:ext cx="1774658" cy="2310063"/>
+            <a:chOff x="990492" y="2511372"/>
+            <a:chExt cx="1774658" cy="2310063"/>
+          </a:xfrm>
+        </p:grpSpPr>
+        <p:sp>
+          <p:nvSpPr>
+            <p:cNvPr id="20" name="Rectangle 19">
+              <a:extLst>
+                <a:ext uri="{FF2B5EF4-FFF2-40B4-BE49-F238E27FC236}">
+                  <a16:creationId xmlns:a16="http://schemas.microsoft.com/office/drawing/2014/main" id="{9E9712B8-35C2-9D0B-5448-8B73757EC2F0}"/>
+                </a:ext>
+              </a:extLst>
+            </p:cNvPr>
+            <p:cNvSpPr/>
+            <p:nvPr/>
+          </p:nvSpPr>
+          <p:spPr>
+            <a:xfrm>
+              <a:off x="990492" y="2511372"/>
+              <a:ext cx="1774658" cy="2310063"/>
+            </a:xfrm>
+            <a:prstGeom prst="rect">
+              <a:avLst/>
+            </a:prstGeom>
+            <a:solidFill>
+              <a:schemeClr val="accent1">
+                <a:lumMod val="20000"/>
+                <a:lumOff val="80000"/>
+              </a:schemeClr>
+            </a:solidFill>
+            <a:ln>
+              <a:solidFill>
+                <a:schemeClr val="tx2">
+                  <a:lumMod val="25000"/>
+                  <a:lumOff val="75000"/>
+                </a:schemeClr>
+              </a:solidFill>
+            </a:ln>
+          </p:spPr>
+          <p:style>
+            <a:lnRef idx="2">
+              <a:schemeClr val="accent1">
+                <a:shade val="15000"/>
+              </a:schemeClr>
+            </a:lnRef>
+            <a:fillRef idx="1">
+              <a:schemeClr val="accent1"/>
+            </a:fillRef>
+            <a:effectRef idx="0">
+              <a:schemeClr val="accent1"/>
+            </a:effectRef>
+            <a:fontRef idx="minor">
+              <a:schemeClr val="lt1"/>
+            </a:fontRef>
+          </p:style>
+          <p:txBody>
+            <a:bodyPr rtlCol="0" anchor="ctr"/>
+            <a:lstStyle/>
+            <a:p>
+              <a:pPr algn="ctr"/>
+              <a:endParaRPr lang="en-US" dirty="0"/>
+            </a:p>
+          </p:txBody>
+        </p:sp>
+        <p:pic>
+          <p:nvPicPr>
+            <p:cNvPr id="21" name="Graphic 20" descr="Customer review with solid fill">
+              <a:extLst>
+                <a:ext uri="{FF2B5EF4-FFF2-40B4-BE49-F238E27FC236}">
+                  <a16:creationId xmlns:a16="http://schemas.microsoft.com/office/drawing/2014/main" id="{F3BE275F-DAC2-8C41-2B3A-FD5002884F56}"/>
+                </a:ext>
+              </a:extLst>
+            </p:cNvPr>
+            <p:cNvPicPr>
+              <a:picLocks noChangeAspect="1"/>
+            </p:cNvPicPr>
+            <p:nvPr/>
+          </p:nvPicPr>
+          <p:blipFill>
+            <a:blip r:embed="rId2">
+              <a:extLst>
+                <a:ext uri="{96DAC541-7B7A-43D3-8B79-37D633B846F1}">
+                  <asvg:svgBlip xmlns:asvg="http://schemas.microsoft.com/office/drawing/2016/SVG/main" r:embed="rId3"/>
+                </a:ext>
+              </a:extLst>
+            </a:blip>
+            <a:stretch>
+              <a:fillRect/>
+            </a:stretch>
+          </p:blipFill>
+          <p:spPr>
+            <a:xfrm>
+              <a:off x="1400027" y="3700649"/>
+              <a:ext cx="965534" cy="965534"/>
+            </a:xfrm>
+            <a:prstGeom prst="rect">
+              <a:avLst/>
+            </a:prstGeom>
+          </p:spPr>
+        </p:pic>
+        <p:pic>
+          <p:nvPicPr>
+            <p:cNvPr id="25" name="Picture 24">
+              <a:extLst>
+                <a:ext uri="{FF2B5EF4-FFF2-40B4-BE49-F238E27FC236}">
+                  <a16:creationId xmlns:a16="http://schemas.microsoft.com/office/drawing/2014/main" id="{FD0F25F4-DE18-9E33-120A-923A478A8BA4}"/>
+                </a:ext>
+              </a:extLst>
+            </p:cNvPr>
+            <p:cNvPicPr>
+              <a:picLocks noChangeAspect="1"/>
+            </p:cNvPicPr>
+            <p:nvPr/>
+          </p:nvPicPr>
+          <p:blipFill>
+            <a:blip r:embed="rId4"/>
+            <a:stretch>
+              <a:fillRect/>
+            </a:stretch>
+          </p:blipFill>
+          <p:spPr>
+            <a:xfrm>
+              <a:off x="1126882" y="2607575"/>
+              <a:ext cx="1525117" cy="996871"/>
+            </a:xfrm>
+            <a:prstGeom prst="rect">
+              <a:avLst/>
+            </a:prstGeom>
+          </p:spPr>
+        </p:pic>
+      </p:grpSp>
+      <p:sp>
+        <p:nvSpPr>
+          <p:cNvPr id="26" name="Arrow: Right 25">
+            <a:extLst>
+              <a:ext uri="{FF2B5EF4-FFF2-40B4-BE49-F238E27FC236}">
+                <a16:creationId xmlns:a16="http://schemas.microsoft.com/office/drawing/2014/main" id="{46EB3E60-57A2-3048-A916-245D3EEE448E}"/>
+              </a:ext>
+            </a:extLst>
+          </p:cNvPr>
+          <p:cNvSpPr/>
+          <p:nvPr/>
+        </p:nvSpPr>
+        <p:spPr>
+          <a:xfrm>
+            <a:off x="2327498" y="1803354"/>
+            <a:ext cx="666746" cy="374904"/>
+          </a:xfrm>
+          <a:prstGeom prst="rightArrow">
+            <a:avLst/>
+          </a:prstGeom>
+        </p:spPr>
+        <p:style>
+          <a:lnRef idx="2">
+            <a:schemeClr val="accent1">
+              <a:shade val="15000"/>
+            </a:schemeClr>
+          </a:lnRef>
+          <a:fillRef idx="1">
+            <a:schemeClr val="accent1"/>
+          </a:fillRef>
+          <a:effectRef idx="0">
+            <a:schemeClr val="accent1"/>
+          </a:effectRef>
+          <a:fontRef idx="minor">
+            <a:schemeClr val="lt1"/>
+          </a:fontRef>
+        </p:style>
+        <p:txBody>
+          <a:bodyPr rtlCol="0" anchor="ctr"/>
+          <a:lstStyle/>
+          <a:p>
+            <a:pPr algn="ctr"/>
+            <a:endParaRPr lang="en-US"/>
+          </a:p>
+        </p:txBody>
+      </p:sp>
+      <p:sp>
+        <p:nvSpPr>
+          <p:cNvPr id="7" name="TextBox 6">
+            <a:extLst>
+              <a:ext uri="{FF2B5EF4-FFF2-40B4-BE49-F238E27FC236}">
+                <a16:creationId xmlns:a16="http://schemas.microsoft.com/office/drawing/2014/main" id="{2488285A-EC5F-953B-2AA0-843EC3F5127C}"/>
+              </a:ext>
+            </a:extLst>
+          </p:cNvPr>
+          <p:cNvSpPr txBox="1"/>
+          <p:nvPr/>
+        </p:nvSpPr>
+        <p:spPr>
+          <a:xfrm>
+            <a:off x="3983351" y="406630"/>
+            <a:ext cx="2789481" cy="369332"/>
+          </a:xfrm>
+          <a:prstGeom prst="rect">
+            <a:avLst/>
+          </a:prstGeom>
+          <a:noFill/>
+        </p:spPr>
+        <p:txBody>
+          <a:bodyPr wrap="square" rtlCol="0">
+            <a:spAutoFit/>
+          </a:bodyPr>
+          <a:lstStyle/>
+          <a:p>
+            <a:pPr algn="ctr"/>
+            <a:r>
+              <a:rPr lang="en-US" b="1" dirty="0"/>
+              <a:t>Class </a:t>
+            </a:r>
+            <a:r>
+              <a:rPr lang="en-US" sz="1800" b="1" i="0" dirty="0">
+                <a:solidFill>
+                  <a:srgbClr val="0F0F0F"/>
+                </a:solidFill>
+                <a:effectLst/>
+                <a:latin typeface="ui-sans-serif"/>
+              </a:rPr>
+              <a:t>PI3K-delta</a:t>
+            </a:r>
+            <a:endParaRPr lang="de-DE" b="1" dirty="0"/>
+          </a:p>
+        </p:txBody>
+      </p:sp>
+      <p:sp>
+        <p:nvSpPr>
+          <p:cNvPr id="9" name="TextBox 8">
+            <a:extLst>
+              <a:ext uri="{FF2B5EF4-FFF2-40B4-BE49-F238E27FC236}">
+                <a16:creationId xmlns:a16="http://schemas.microsoft.com/office/drawing/2014/main" id="{641E8493-13A8-D084-AAF5-76892DBCDE12}"/>
+              </a:ext>
+            </a:extLst>
+          </p:cNvPr>
+          <p:cNvSpPr txBox="1"/>
+          <p:nvPr/>
+        </p:nvSpPr>
+        <p:spPr>
+          <a:xfrm>
+            <a:off x="8311383" y="406630"/>
+            <a:ext cx="2444839" cy="369332"/>
+          </a:xfrm>
+          <a:prstGeom prst="rect">
+            <a:avLst/>
+          </a:prstGeom>
+          <a:noFill/>
+        </p:spPr>
+        <p:txBody>
+          <a:bodyPr wrap="square" rtlCol="0">
+            <a:spAutoFit/>
+          </a:bodyPr>
+          <a:lstStyle/>
+          <a:p>
+            <a:pPr algn="ctr"/>
+            <a:r>
+              <a:rPr lang="en-US" b="1" dirty="0"/>
+              <a:t>Class </a:t>
+            </a:r>
+            <a:r>
+              <a:rPr lang="en-US" sz="1800" b="1" i="0" dirty="0">
+                <a:solidFill>
+                  <a:srgbClr val="0F0F0F"/>
+                </a:solidFill>
+                <a:effectLst/>
+                <a:latin typeface="ui-sans-serif"/>
+              </a:rPr>
+              <a:t>PI3K-gamma</a:t>
+            </a:r>
+            <a:endParaRPr lang="de-DE" b="1" dirty="0"/>
+          </a:p>
+        </p:txBody>
+      </p:sp>
+      <p:pic>
+        <p:nvPicPr>
+          <p:cNvPr id="2" name="Picture 1" descr="A black and red molecule&#10;&#10;AI-generated content may be incorrect.">
+            <a:extLst>
+              <a:ext uri="{FF2B5EF4-FFF2-40B4-BE49-F238E27FC236}">
+                <a16:creationId xmlns:a16="http://schemas.microsoft.com/office/drawing/2014/main" id="{009BB816-3CB1-11F0-349B-5754B7DE95DB}"/>
+              </a:ext>
+            </a:extLst>
+          </p:cNvPr>
+          <p:cNvPicPr>
+            <a:picLocks noChangeAspect="1"/>
+          </p:cNvPicPr>
+          <p:nvPr/>
+        </p:nvPicPr>
+        <p:blipFill>
+          <a:blip r:embed="rId5">
+            <a:extLst>
+              <a:ext uri="{28A0092B-C50C-407E-A947-70E740481C1C}">
+                <a14:useLocalDpi xmlns:a14="http://schemas.microsoft.com/office/drawing/2010/main" val="0"/>
+              </a:ext>
+            </a:extLst>
+          </a:blip>
+          <a:srcRect r="60368"/>
+          <a:stretch/>
+        </p:blipFill>
+        <p:spPr>
+          <a:xfrm>
+            <a:off x="3158908" y="1172606"/>
+            <a:ext cx="4438368" cy="1959829"/>
+          </a:xfrm>
+          <a:prstGeom prst="rect">
+            <a:avLst/>
+          </a:prstGeom>
+        </p:spPr>
+      </p:pic>
+      <p:pic>
+        <p:nvPicPr>
+          <p:cNvPr id="3" name="Picture 2" descr="A black and red molecule&#10;&#10;AI-generated content may be incorrect.">
+            <a:extLst>
+              <a:ext uri="{FF2B5EF4-FFF2-40B4-BE49-F238E27FC236}">
+                <a16:creationId xmlns:a16="http://schemas.microsoft.com/office/drawing/2014/main" id="{8D7B2186-999B-65D7-929D-2E963456D958}"/>
+              </a:ext>
+            </a:extLst>
+          </p:cNvPr>
+          <p:cNvPicPr>
+            <a:picLocks noChangeAspect="1"/>
+          </p:cNvPicPr>
+          <p:nvPr/>
+        </p:nvPicPr>
+        <p:blipFill>
+          <a:blip r:embed="rId6">
+            <a:extLst>
+              <a:ext uri="{28A0092B-C50C-407E-A947-70E740481C1C}">
+                <a14:useLocalDpi xmlns:a14="http://schemas.microsoft.com/office/drawing/2010/main" val="0"/>
+              </a:ext>
+            </a:extLst>
+          </a:blip>
+          <a:srcRect r="60304"/>
+          <a:stretch/>
+        </p:blipFill>
+        <p:spPr>
+          <a:xfrm>
+            <a:off x="7643507" y="1172606"/>
+            <a:ext cx="4441990" cy="1958229"/>
+          </a:xfrm>
+          <a:prstGeom prst="rect">
+            <a:avLst/>
+          </a:prstGeom>
+        </p:spPr>
+      </p:pic>
+      <p:sp>
+        <p:nvSpPr>
+          <p:cNvPr id="4" name="TextBox 3">
+            <a:extLst>
+              <a:ext uri="{FF2B5EF4-FFF2-40B4-BE49-F238E27FC236}">
+                <a16:creationId xmlns:a16="http://schemas.microsoft.com/office/drawing/2014/main" id="{EE404A95-E54E-B3BB-3960-2906EAA6D7A6}"/>
+              </a:ext>
+            </a:extLst>
+          </p:cNvPr>
+          <p:cNvSpPr txBox="1"/>
+          <p:nvPr/>
+        </p:nvSpPr>
+        <p:spPr>
+          <a:xfrm>
+            <a:off x="3077296" y="3322926"/>
+            <a:ext cx="4603033" cy="2292935"/>
+          </a:xfrm>
+          <a:prstGeom prst="rect">
+            <a:avLst/>
+          </a:prstGeom>
+          <a:noFill/>
+        </p:spPr>
+        <p:txBody>
+          <a:bodyPr wrap="square" rtlCol="0">
+            <a:spAutoFit/>
+          </a:bodyPr>
+          <a:lstStyle/>
+          <a:p>
+            <a:r>
+              <a:rPr lang="en-US" sz="1100" dirty="0"/>
+              <a:t>The model identifies </a:t>
+            </a:r>
+            <a:r>
+              <a:rPr lang="en-US" sz="1100" b="1" dirty="0"/>
+              <a:t>cyano-pyrimidine</a:t>
+            </a:r>
+            <a:r>
+              <a:rPr lang="en-US" sz="1100" dirty="0"/>
+              <a:t> derivatives as key anchors.</a:t>
+            </a:r>
+          </a:p>
+          <a:p>
+            <a:endParaRPr lang="en-US" sz="1100" dirty="0"/>
+          </a:p>
+          <a:p>
+            <a:endParaRPr lang="en-US" sz="1100" dirty="0"/>
+          </a:p>
+          <a:p>
+            <a:pPr marL="171450" indent="-171450">
+              <a:spcBef>
+                <a:spcPts val="600"/>
+              </a:spcBef>
+              <a:buFont typeface="Arial" panose="020B0604020202020204" pitchFamily="34" charset="0"/>
+              <a:buChar char="•"/>
+            </a:pPr>
+            <a:r>
+              <a:rPr lang="en-US" sz="1100" b="1" dirty="0"/>
+              <a:t>Top Fragment: </a:t>
+            </a:r>
+            <a:r>
+              <a:rPr lang="en-US" sz="1100" dirty="0"/>
+              <a:t>[*]c1ncnc(N)c1C#N (2-amino-4-cyanopyrimidine core)</a:t>
+            </a:r>
+          </a:p>
+          <a:p>
+            <a:pPr marL="171450" indent="-171450">
+              <a:spcBef>
+                <a:spcPts val="600"/>
+              </a:spcBef>
+              <a:buFont typeface="Arial" panose="020B0604020202020204" pitchFamily="34" charset="0"/>
+              <a:buChar char="•"/>
+            </a:pPr>
+            <a:r>
+              <a:rPr lang="en-US" sz="1100" b="1" dirty="0"/>
+              <a:t>Insight: </a:t>
+            </a:r>
+            <a:r>
+              <a:rPr lang="en-US" sz="1100" dirty="0"/>
+              <a:t>This motif is highly characteristic of PI3K-delta selective inhibitors. The presence of the </a:t>
+            </a:r>
+            <a:r>
+              <a:rPr lang="en-US" sz="1100" dirty="0" err="1"/>
+              <a:t>cyano</a:t>
+            </a:r>
+            <a:r>
+              <a:rPr lang="en-US" sz="1100" dirty="0"/>
+              <a:t> group (-CN) at the 4-position and an amino group (-NH2) at the 2-position of the pyrimidine ring appears to be a critical pharmacophore for delta selectivity. This aligns with known medicinal chemistry strategies where pyrimidine cores are tuned for PI3K-delta by exploiting specific sub-pocket interactions in the ATP-binding site.</a:t>
+            </a:r>
+          </a:p>
+          <a:p>
+            <a:pPr marL="171450" indent="-171450">
+              <a:buFont typeface="Arial" panose="020B0604020202020204" pitchFamily="34" charset="0"/>
+              <a:buChar char="•"/>
+            </a:pPr>
+            <a:endParaRPr lang="en-US" sz="1200" dirty="0"/>
+          </a:p>
+        </p:txBody>
+      </p:sp>
+      <p:sp>
+        <p:nvSpPr>
+          <p:cNvPr id="6" name="TextBox 5">
+            <a:extLst>
+              <a:ext uri="{FF2B5EF4-FFF2-40B4-BE49-F238E27FC236}">
+                <a16:creationId xmlns:a16="http://schemas.microsoft.com/office/drawing/2014/main" id="{E5CD7569-CE35-8372-955F-0E824345FF03}"/>
+              </a:ext>
+            </a:extLst>
+          </p:cNvPr>
+          <p:cNvSpPr txBox="1"/>
+          <p:nvPr/>
+        </p:nvSpPr>
+        <p:spPr>
+          <a:xfrm>
+            <a:off x="7898633" y="3316803"/>
+            <a:ext cx="4154336" cy="2970044"/>
+          </a:xfrm>
+          <a:prstGeom prst="rect">
+            <a:avLst/>
+          </a:prstGeom>
+          <a:noFill/>
+        </p:spPr>
+        <p:txBody>
+          <a:bodyPr wrap="square" rtlCol="0">
+            <a:spAutoFit/>
+          </a:bodyPr>
+          <a:lstStyle/>
+          <a:p>
+            <a:r>
+              <a:rPr lang="en-US" sz="1100" dirty="0"/>
+              <a:t>The model identifies </a:t>
+            </a:r>
+            <a:r>
+              <a:rPr lang="en-US" sz="1100" b="1" dirty="0"/>
+              <a:t>purine</a:t>
+            </a:r>
+            <a:r>
+              <a:rPr lang="en-US" sz="1100" dirty="0"/>
+              <a:t> and </a:t>
+            </a:r>
+            <a:r>
+              <a:rPr lang="en-US" sz="1100" b="1" dirty="0"/>
+              <a:t>tetrahydroisoquinoline-3-one</a:t>
+            </a:r>
+            <a:r>
+              <a:rPr lang="en-US" sz="1100" dirty="0"/>
+              <a:t> cores as key anchors.</a:t>
+            </a:r>
+          </a:p>
+          <a:p>
+            <a:endParaRPr lang="en-US" sz="1100" dirty="0"/>
+          </a:p>
+          <a:p>
+            <a:pPr marL="171450" indent="-171450">
+              <a:spcBef>
+                <a:spcPts val="600"/>
+              </a:spcBef>
+              <a:buFont typeface="Arial" panose="020B0604020202020204" pitchFamily="34" charset="0"/>
+              <a:buChar char="•"/>
+            </a:pPr>
+            <a:r>
+              <a:rPr lang="en-US" sz="1100" b="1" dirty="0"/>
+              <a:t>Top Fragments:</a:t>
+            </a:r>
+          </a:p>
+          <a:p>
+            <a:pPr marL="742950" lvl="1" indent="-285750">
+              <a:spcBef>
+                <a:spcPts val="600"/>
+              </a:spcBef>
+              <a:buFont typeface="Arial" panose="020B0604020202020204" pitchFamily="34" charset="0"/>
+              <a:buChar char="•"/>
+            </a:pPr>
+            <a:r>
+              <a:rPr lang="en-US" sz="1100" dirty="0"/>
+              <a:t>[*]c1ccn2nc(N)c([*])c2n1 (Purine-like core)</a:t>
+            </a:r>
+          </a:p>
+          <a:p>
+            <a:pPr marL="742950" lvl="1" indent="-285750">
+              <a:spcBef>
+                <a:spcPts val="600"/>
+              </a:spcBef>
+              <a:buFont typeface="Arial" panose="020B0604020202020204" pitchFamily="34" charset="0"/>
+              <a:buChar char="•"/>
+            </a:pPr>
+            <a:r>
+              <a:rPr lang="en-US" sz="1100" dirty="0"/>
+              <a:t>[*]N1Cc2cc([*])cc([*])c2C1=O (Tetrahydroisoquinoline-3-one derivative)</a:t>
+            </a:r>
+          </a:p>
+          <a:p>
+            <a:pPr marL="285750" indent="-285750">
+              <a:spcBef>
+                <a:spcPts val="600"/>
+              </a:spcBef>
+              <a:buFont typeface="Arial" panose="020B0604020202020204" pitchFamily="34" charset="0"/>
+              <a:buChar char="•"/>
+            </a:pPr>
+            <a:r>
+              <a:rPr lang="en-US" sz="1100" b="1" dirty="0"/>
+              <a:t>Insight: </a:t>
+            </a:r>
+            <a:r>
+              <a:rPr lang="en-US" sz="1100" dirty="0"/>
+              <a:t>The identification of tetrahydroisoquinoline-3-one scaffolds is particularly interesting. These structures are often found in PI3K-gamma selective inhibitors (e.g., IPI-549 analogues). The purine core also suggests a common heterocyclic motif adapted for gamma selectivity, possibly through extended interactions with the hinge region.</a:t>
+            </a:r>
+          </a:p>
+          <a:p>
+            <a:pPr marL="285750" indent="-285750">
+              <a:buFont typeface="Arial" panose="020B0604020202020204" pitchFamily="34" charset="0"/>
+              <a:buChar char="•"/>
+            </a:pPr>
+            <a:endParaRPr lang="en-US" sz="1200" dirty="0"/>
+          </a:p>
+          <a:p>
+            <a:pPr marL="285750" indent="-285750">
+              <a:buFont typeface="Arial" panose="020B0604020202020204" pitchFamily="34" charset="0"/>
+              <a:buChar char="•"/>
+            </a:pPr>
+            <a:endParaRPr lang="en-US" sz="1200" dirty="0"/>
+          </a:p>
+        </p:txBody>
+      </p:sp>
+    </p:spTree>
+    <p:extLst>
+      <p:ext uri="{BB962C8B-B14F-4D97-AF65-F5344CB8AC3E}">
+        <p14:creationId xmlns:p14="http://schemas.microsoft.com/office/powerpoint/2010/main" val="2910313481"/>
+      </p:ext>
+    </p:extLst>
+  </p:cSld>
+  <p:clrMapOvr>
+    <a:masterClrMapping/>
+  </p:clrMapOvr>
+</p:sld>
+</file>
+
+<file path=ppt/slides/slide7.xml><?xml version="1.0" encoding="utf-8"?>
+<p:sld xmlns:a="http://schemas.openxmlformats.org/drawingml/2006/main" xmlns:r="http://schemas.openxmlformats.org/officeDocument/2006/relationships" xmlns:p="http://schemas.openxmlformats.org/presentationml/2006/main">
+  <p:cSld>
+    <p:spTree>
+      <p:nvGrpSpPr>
+        <p:cNvPr id="1" name=""/>
+        <p:cNvGrpSpPr/>
+        <p:nvPr/>
+      </p:nvGrpSpPr>
+      <p:grpSpPr>
+        <a:xfrm>
+          <a:off x="0" y="0"/>
+          <a:ext cx="0" cy="0"/>
+          <a:chOff x="0" y="0"/>
+          <a:chExt cx="0" cy="0"/>
+        </a:xfrm>
+      </p:grpSpPr>
+      <p:sp>
+        <p:nvSpPr>
+          <p:cNvPr id="46" name="TextBox 45">
+            <a:extLst>
+              <a:ext uri="{FF2B5EF4-FFF2-40B4-BE49-F238E27FC236}">
+                <a16:creationId xmlns:a16="http://schemas.microsoft.com/office/drawing/2014/main" id="{C02F4519-6E55-F26A-E1A3-2105A25F6A50}"/>
+              </a:ext>
+            </a:extLst>
+          </p:cNvPr>
+          <p:cNvSpPr txBox="1"/>
+          <p:nvPr/>
+        </p:nvSpPr>
+        <p:spPr>
+          <a:xfrm>
+            <a:off x="232995" y="4144987"/>
+            <a:ext cx="4168792" cy="2385268"/>
+          </a:xfrm>
+          <a:prstGeom prst="rect">
+            <a:avLst/>
+          </a:prstGeom>
+          <a:noFill/>
+        </p:spPr>
+        <p:txBody>
+          <a:bodyPr wrap="square">
+            <a:spAutoFit/>
+          </a:bodyPr>
+          <a:lstStyle/>
+          <a:p>
+            <a:pPr algn="just"/>
+            <a:r>
+              <a:rPr lang="en-US" sz="1600" b="1" dirty="0"/>
+              <a:t>Comparing XAI methods</a:t>
+            </a:r>
+          </a:p>
+          <a:p>
+            <a:pPr marL="171450" indent="-171450" algn="just">
+              <a:buFont typeface="Arial" panose="020B0604020202020204" pitchFamily="34" charset="0"/>
+              <a:buChar char="•"/>
+            </a:pPr>
+            <a:endParaRPr lang="en-US" sz="1200" b="1" dirty="0"/>
+          </a:p>
+          <a:p>
+            <a:pPr marL="171450" indent="-171450" algn="just">
+              <a:buFont typeface="Arial" panose="020B0604020202020204" pitchFamily="34" charset="0"/>
+              <a:buChar char="•"/>
+            </a:pPr>
+            <a:r>
+              <a:rPr lang="en-US" sz="1100" b="1" dirty="0"/>
+              <a:t>Agreement: </a:t>
+            </a:r>
+            <a:r>
+              <a:rPr lang="en-US" sz="1100" dirty="0"/>
+              <a:t>Both methods converge on the morpholine-like ring as the critical pharmacophore. </a:t>
+            </a:r>
+            <a:r>
+              <a:rPr lang="en-US" sz="1100" dirty="0" err="1"/>
+              <a:t>MolAnchor</a:t>
+            </a:r>
+            <a:r>
+              <a:rPr lang="en-US" sz="1100" dirty="0"/>
+              <a:t> identifies the ring as a cohesive unit, while SHAP confirms that the atoms comprising this ring are indeed the most influential.</a:t>
+            </a:r>
+          </a:p>
+          <a:p>
+            <a:pPr algn="just"/>
+            <a:endParaRPr lang="en-US" sz="1100" dirty="0"/>
+          </a:p>
+          <a:p>
+            <a:pPr marL="171450" indent="-171450" algn="just">
+              <a:buFont typeface="Arial" panose="020B0604020202020204" pitchFamily="34" charset="0"/>
+              <a:buChar char="•"/>
+            </a:pPr>
+            <a:r>
+              <a:rPr lang="en-US" sz="1100" b="1" dirty="0"/>
+              <a:t>Disagreement: </a:t>
+            </a:r>
+            <a:r>
+              <a:rPr lang="en-US" sz="1100" dirty="0" err="1"/>
+              <a:t>MolAnchor</a:t>
+            </a:r>
+            <a:r>
+              <a:rPr lang="en-US" sz="1100" dirty="0"/>
+              <a:t> focuses strictly on the highest-precision fragment, potentially downplaying the contribution of the aromatic substituents (benzyl/thiophene) that SHAP would assign non-zero values to. </a:t>
+            </a:r>
+            <a:r>
+              <a:rPr lang="en-US" sz="1100" dirty="0" err="1"/>
+              <a:t>MolAnchor</a:t>
+            </a:r>
+            <a:r>
+              <a:rPr lang="en-US" sz="1100" dirty="0"/>
+              <a:t> is more "binary" (is this fragment present?), while SHAP is more "continuous" (how much does each atom contribute?).</a:t>
+            </a:r>
+          </a:p>
+        </p:txBody>
+      </p:sp>
+      <p:grpSp>
+        <p:nvGrpSpPr>
+          <p:cNvPr id="19" name="Group 18">
+            <a:extLst>
+              <a:ext uri="{FF2B5EF4-FFF2-40B4-BE49-F238E27FC236}">
+                <a16:creationId xmlns:a16="http://schemas.microsoft.com/office/drawing/2014/main" id="{3E3C0CE0-F9D7-0B88-458B-B30D6DB941D5}"/>
+              </a:ext>
+            </a:extLst>
+          </p:cNvPr>
+          <p:cNvGrpSpPr/>
+          <p:nvPr/>
+        </p:nvGrpSpPr>
+        <p:grpSpPr>
+          <a:xfrm>
+            <a:off x="232995" y="835775"/>
+            <a:ext cx="1774658" cy="2310063"/>
+            <a:chOff x="990492" y="2511372"/>
+            <a:chExt cx="1774658" cy="2310063"/>
+          </a:xfrm>
+        </p:grpSpPr>
+        <p:sp>
+          <p:nvSpPr>
+            <p:cNvPr id="20" name="Rectangle 19">
+              <a:extLst>
+                <a:ext uri="{FF2B5EF4-FFF2-40B4-BE49-F238E27FC236}">
+                  <a16:creationId xmlns:a16="http://schemas.microsoft.com/office/drawing/2014/main" id="{9E9712B8-35C2-9D0B-5448-8B73757EC2F0}"/>
+                </a:ext>
+              </a:extLst>
+            </p:cNvPr>
+            <p:cNvSpPr/>
+            <p:nvPr/>
+          </p:nvSpPr>
+          <p:spPr>
+            <a:xfrm>
+              <a:off x="990492" y="2511372"/>
+              <a:ext cx="1774658" cy="2310063"/>
+            </a:xfrm>
+            <a:prstGeom prst="rect">
+              <a:avLst/>
+            </a:prstGeom>
+            <a:solidFill>
+              <a:schemeClr val="accent1">
+                <a:lumMod val="20000"/>
+                <a:lumOff val="80000"/>
+              </a:schemeClr>
+            </a:solidFill>
+            <a:ln>
+              <a:solidFill>
+                <a:schemeClr val="tx2">
+                  <a:lumMod val="25000"/>
+                  <a:lumOff val="75000"/>
+                </a:schemeClr>
+              </a:solidFill>
+            </a:ln>
+          </p:spPr>
+          <p:style>
+            <a:lnRef idx="2">
+              <a:schemeClr val="accent1">
+                <a:shade val="15000"/>
+              </a:schemeClr>
+            </a:lnRef>
+            <a:fillRef idx="1">
+              <a:schemeClr val="accent1"/>
+            </a:fillRef>
+            <a:effectRef idx="0">
+              <a:schemeClr val="accent1"/>
+            </a:effectRef>
+            <a:fontRef idx="minor">
+              <a:schemeClr val="lt1"/>
+            </a:fontRef>
+          </p:style>
+          <p:txBody>
+            <a:bodyPr rtlCol="0" anchor="ctr"/>
+            <a:lstStyle/>
+            <a:p>
+              <a:pPr algn="ctr"/>
+              <a:endParaRPr lang="en-US" dirty="0"/>
+            </a:p>
+          </p:txBody>
+        </p:sp>
+        <p:pic>
+          <p:nvPicPr>
+            <p:cNvPr id="21" name="Graphic 20" descr="Customer review with solid fill">
+              <a:extLst>
+                <a:ext uri="{FF2B5EF4-FFF2-40B4-BE49-F238E27FC236}">
+                  <a16:creationId xmlns:a16="http://schemas.microsoft.com/office/drawing/2014/main" id="{F3BE275F-DAC2-8C41-2B3A-FD5002884F56}"/>
+                </a:ext>
+              </a:extLst>
+            </p:cNvPr>
+            <p:cNvPicPr>
+              <a:picLocks noChangeAspect="1"/>
+            </p:cNvPicPr>
+            <p:nvPr/>
+          </p:nvPicPr>
+          <p:blipFill>
+            <a:blip r:embed="rId2">
+              <a:extLst>
+                <a:ext uri="{96DAC541-7B7A-43D3-8B79-37D633B846F1}">
+                  <asvg:svgBlip xmlns:asvg="http://schemas.microsoft.com/office/drawing/2016/SVG/main" r:embed="rId3"/>
+                </a:ext>
+              </a:extLst>
+            </a:blip>
+            <a:stretch>
+              <a:fillRect/>
+            </a:stretch>
+          </p:blipFill>
+          <p:spPr>
+            <a:xfrm>
+              <a:off x="1400027" y="3700649"/>
+              <a:ext cx="965534" cy="965534"/>
+            </a:xfrm>
+            <a:prstGeom prst="rect">
+              <a:avLst/>
+            </a:prstGeom>
+          </p:spPr>
+        </p:pic>
+        <p:pic>
+          <p:nvPicPr>
+            <p:cNvPr id="25" name="Picture 24">
+              <a:extLst>
+                <a:ext uri="{FF2B5EF4-FFF2-40B4-BE49-F238E27FC236}">
+                  <a16:creationId xmlns:a16="http://schemas.microsoft.com/office/drawing/2014/main" id="{FD0F25F4-DE18-9E33-120A-923A478A8BA4}"/>
+                </a:ext>
+              </a:extLst>
+            </p:cNvPr>
+            <p:cNvPicPr>
+              <a:picLocks noChangeAspect="1"/>
+            </p:cNvPicPr>
+            <p:nvPr/>
+          </p:nvPicPr>
+          <p:blipFill>
+            <a:blip r:embed="rId4"/>
+            <a:stretch>
+              <a:fillRect/>
+            </a:stretch>
+          </p:blipFill>
+          <p:spPr>
+            <a:xfrm>
+              <a:off x="1126882" y="2607575"/>
+              <a:ext cx="1525117" cy="996871"/>
+            </a:xfrm>
+            <a:prstGeom prst="rect">
+              <a:avLst/>
+            </a:prstGeom>
+          </p:spPr>
+        </p:pic>
+      </p:grpSp>
+      <p:sp>
+        <p:nvSpPr>
+          <p:cNvPr id="26" name="Arrow: Right 25">
+            <a:extLst>
+              <a:ext uri="{FF2B5EF4-FFF2-40B4-BE49-F238E27FC236}">
+                <a16:creationId xmlns:a16="http://schemas.microsoft.com/office/drawing/2014/main" id="{46EB3E60-57A2-3048-A916-245D3EEE448E}"/>
+              </a:ext>
+            </a:extLst>
+          </p:cNvPr>
+          <p:cNvSpPr/>
+          <p:nvPr/>
+        </p:nvSpPr>
+        <p:spPr>
+          <a:xfrm>
+            <a:off x="2327498" y="1803354"/>
+            <a:ext cx="666746" cy="374904"/>
+          </a:xfrm>
+          <a:prstGeom prst="rightArrow">
+            <a:avLst/>
+          </a:prstGeom>
+        </p:spPr>
+        <p:style>
+          <a:lnRef idx="2">
+            <a:schemeClr val="accent1">
+              <a:shade val="15000"/>
+            </a:schemeClr>
+          </a:lnRef>
+          <a:fillRef idx="1">
+            <a:schemeClr val="accent1"/>
+          </a:fillRef>
+          <a:effectRef idx="0">
+            <a:schemeClr val="accent1"/>
+          </a:effectRef>
+          <a:fontRef idx="minor">
+            <a:schemeClr val="lt1"/>
+          </a:fontRef>
+        </p:style>
+        <p:txBody>
+          <a:bodyPr rtlCol="0" anchor="ctr"/>
+          <a:lstStyle/>
+          <a:p>
+            <a:pPr algn="ctr"/>
+            <a:endParaRPr lang="en-US"/>
+          </a:p>
+        </p:txBody>
+      </p:sp>
+      <p:sp>
+        <p:nvSpPr>
+          <p:cNvPr id="7" name="TextBox 6">
+            <a:extLst>
+              <a:ext uri="{FF2B5EF4-FFF2-40B4-BE49-F238E27FC236}">
+                <a16:creationId xmlns:a16="http://schemas.microsoft.com/office/drawing/2014/main" id="{2488285A-EC5F-953B-2AA0-843EC3F5127C}"/>
+              </a:ext>
+            </a:extLst>
+          </p:cNvPr>
+          <p:cNvSpPr txBox="1"/>
+          <p:nvPr/>
+        </p:nvSpPr>
+        <p:spPr>
+          <a:xfrm>
+            <a:off x="4038831" y="406630"/>
+            <a:ext cx="2444839" cy="369332"/>
+          </a:xfrm>
+          <a:prstGeom prst="rect">
+            <a:avLst/>
+          </a:prstGeom>
+          <a:noFill/>
+        </p:spPr>
+        <p:txBody>
+          <a:bodyPr wrap="square" rtlCol="0">
+            <a:spAutoFit/>
+          </a:bodyPr>
+          <a:lstStyle/>
+          <a:p>
+            <a:pPr algn="ctr"/>
+            <a:r>
+              <a:rPr lang="en-US" b="1" dirty="0" err="1"/>
+              <a:t>MolAnchor</a:t>
+            </a:r>
+            <a:endParaRPr lang="de-DE" b="1" dirty="0"/>
+          </a:p>
+        </p:txBody>
+      </p:sp>
+      <p:sp>
+        <p:nvSpPr>
+          <p:cNvPr id="9" name="TextBox 8">
+            <a:extLst>
+              <a:ext uri="{FF2B5EF4-FFF2-40B4-BE49-F238E27FC236}">
+                <a16:creationId xmlns:a16="http://schemas.microsoft.com/office/drawing/2014/main" id="{641E8493-13A8-D084-AAF5-76892DBCDE12}"/>
+              </a:ext>
+            </a:extLst>
+          </p:cNvPr>
+          <p:cNvSpPr txBox="1"/>
+          <p:nvPr/>
+        </p:nvSpPr>
+        <p:spPr>
+          <a:xfrm>
+            <a:off x="8311383" y="406630"/>
+            <a:ext cx="2444839" cy="369332"/>
+          </a:xfrm>
+          <a:prstGeom prst="rect">
+            <a:avLst/>
+          </a:prstGeom>
+          <a:noFill/>
+        </p:spPr>
+        <p:txBody>
+          <a:bodyPr wrap="square" rtlCol="0">
+            <a:spAutoFit/>
+          </a:bodyPr>
+          <a:lstStyle/>
+          <a:p>
+            <a:pPr algn="ctr"/>
+            <a:r>
+              <a:rPr lang="en-US" sz="1800" b="1" dirty="0"/>
+              <a:t>SHAP</a:t>
+            </a:r>
+            <a:endParaRPr lang="de-DE" b="1" dirty="0"/>
+          </a:p>
+        </p:txBody>
+      </p:sp>
+      <p:sp>
+        <p:nvSpPr>
+          <p:cNvPr id="22" name="Arrow: Right 21">
+            <a:extLst>
+              <a:ext uri="{FF2B5EF4-FFF2-40B4-BE49-F238E27FC236}">
+                <a16:creationId xmlns:a16="http://schemas.microsoft.com/office/drawing/2014/main" id="{CC3DB96C-E7DA-1AD3-B9F5-7FDA8BA9B3AD}"/>
+              </a:ext>
+            </a:extLst>
+          </p:cNvPr>
+          <p:cNvSpPr/>
+          <p:nvPr/>
+        </p:nvSpPr>
+        <p:spPr>
+          <a:xfrm rot="5400000">
+            <a:off x="786951" y="3558887"/>
+            <a:ext cx="666746" cy="374904"/>
+          </a:xfrm>
+          <a:prstGeom prst="rightArrow">
+            <a:avLst/>
+          </a:prstGeom>
+        </p:spPr>
+        <p:style>
+          <a:lnRef idx="2">
+            <a:schemeClr val="accent1">
+              <a:shade val="15000"/>
+            </a:schemeClr>
+          </a:lnRef>
+          <a:fillRef idx="1">
+            <a:schemeClr val="accent1"/>
+          </a:fillRef>
+          <a:effectRef idx="0">
+            <a:schemeClr val="accent1"/>
+          </a:effectRef>
+          <a:fontRef idx="minor">
+            <a:schemeClr val="lt1"/>
+          </a:fontRef>
+        </p:style>
+        <p:txBody>
+          <a:bodyPr rtlCol="0" anchor="ctr"/>
+          <a:lstStyle/>
+          <a:p>
+            <a:pPr algn="ctr"/>
+            <a:endParaRPr lang="en-US"/>
+          </a:p>
+        </p:txBody>
+      </p:sp>
+      <p:grpSp>
+        <p:nvGrpSpPr>
+          <p:cNvPr id="36" name="Group 35">
+            <a:extLst>
+              <a:ext uri="{FF2B5EF4-FFF2-40B4-BE49-F238E27FC236}">
+                <a16:creationId xmlns:a16="http://schemas.microsoft.com/office/drawing/2014/main" id="{9EC2A3B4-5B0E-882B-8458-F75AA108A5E6}"/>
+              </a:ext>
+            </a:extLst>
+          </p:cNvPr>
+          <p:cNvGrpSpPr/>
+          <p:nvPr/>
+        </p:nvGrpSpPr>
+        <p:grpSpPr>
+          <a:xfrm>
+            <a:off x="4841173" y="4522527"/>
+            <a:ext cx="6165816" cy="573974"/>
+            <a:chOff x="4841173" y="4193969"/>
+            <a:chExt cx="6165816" cy="573974"/>
+          </a:xfrm>
+        </p:grpSpPr>
+        <p:cxnSp>
+          <p:nvCxnSpPr>
+            <p:cNvPr id="24" name="Straight Arrow Connector 23">
+              <a:extLst>
+                <a:ext uri="{FF2B5EF4-FFF2-40B4-BE49-F238E27FC236}">
+                  <a16:creationId xmlns:a16="http://schemas.microsoft.com/office/drawing/2014/main" id="{FFDCAFC5-B9FC-083C-56A5-5CB45102C9FB}"/>
+                </a:ext>
+              </a:extLst>
+            </p:cNvPr>
+            <p:cNvCxnSpPr>
+              <a:cxnSpLocks/>
+            </p:cNvCxnSpPr>
+            <p:nvPr/>
+          </p:nvCxnSpPr>
+          <p:spPr>
+            <a:xfrm>
+              <a:off x="4841173" y="4480956"/>
+              <a:ext cx="1800000" cy="0"/>
+            </a:xfrm>
+            <a:prstGeom prst="straightConnector1">
+              <a:avLst/>
+            </a:prstGeom>
+            <a:ln>
+              <a:tailEnd type="triangle"/>
+            </a:ln>
+          </p:spPr>
+          <p:style>
+            <a:lnRef idx="2">
+              <a:schemeClr val="accent1"/>
+            </a:lnRef>
+            <a:fillRef idx="0">
+              <a:schemeClr val="accent1"/>
+            </a:fillRef>
+            <a:effectRef idx="1">
+              <a:schemeClr val="accent1"/>
+            </a:effectRef>
+            <a:fontRef idx="minor">
+              <a:schemeClr val="tx1"/>
+            </a:fontRef>
+          </p:style>
+        </p:cxnSp>
+        <p:sp>
+          <p:nvSpPr>
+            <p:cNvPr id="28" name="Rectangle: Rounded Corners 27">
+              <a:extLst>
+                <a:ext uri="{FF2B5EF4-FFF2-40B4-BE49-F238E27FC236}">
+                  <a16:creationId xmlns:a16="http://schemas.microsoft.com/office/drawing/2014/main" id="{5B927D80-0780-203A-8CD6-2AFA89094D43}"/>
+                </a:ext>
+              </a:extLst>
+            </p:cNvPr>
+            <p:cNvSpPr/>
+            <p:nvPr/>
+          </p:nvSpPr>
+          <p:spPr>
+            <a:xfrm>
+              <a:off x="7278137" y="4193969"/>
+              <a:ext cx="3728852" cy="573974"/>
+            </a:xfrm>
+            <a:prstGeom prst="roundRect">
+              <a:avLst/>
+            </a:prstGeom>
+            <a:solidFill>
+              <a:schemeClr val="bg1"/>
+            </a:solidFill>
+          </p:spPr>
+          <p:style>
+            <a:lnRef idx="2">
+              <a:schemeClr val="accent4">
+                <a:shade val="15000"/>
+              </a:schemeClr>
+            </a:lnRef>
+            <a:fillRef idx="1">
+              <a:schemeClr val="accent4"/>
+            </a:fillRef>
+            <a:effectRef idx="0">
+              <a:schemeClr val="accent4"/>
+            </a:effectRef>
+            <a:fontRef idx="minor">
+              <a:schemeClr val="lt1"/>
+            </a:fontRef>
+          </p:style>
+          <p:txBody>
+            <a:bodyPr rtlCol="0" anchor="ctr"/>
+            <a:lstStyle/>
+            <a:p>
+              <a:pPr algn="ctr"/>
+              <a:r>
+                <a:rPr lang="en-US" sz="1400" dirty="0">
+                  <a:solidFill>
+                    <a:schemeClr val="tx1"/>
+                  </a:solidFill>
+                </a:rPr>
+                <a:t>Morpholine-like ring as the critical pharmacophore </a:t>
+              </a:r>
+              <a:endParaRPr lang="de-DE" sz="1400" dirty="0">
+                <a:solidFill>
+                  <a:schemeClr val="tx1"/>
+                </a:solidFill>
+              </a:endParaRPr>
+            </a:p>
+          </p:txBody>
+        </p:sp>
+      </p:grpSp>
+      <p:grpSp>
+        <p:nvGrpSpPr>
+          <p:cNvPr id="37" name="Group 36">
+            <a:extLst>
+              <a:ext uri="{FF2B5EF4-FFF2-40B4-BE49-F238E27FC236}">
+                <a16:creationId xmlns:a16="http://schemas.microsoft.com/office/drawing/2014/main" id="{94E61FAA-489A-631D-A169-A21283220D66}"/>
+              </a:ext>
+            </a:extLst>
+          </p:cNvPr>
+          <p:cNvGrpSpPr/>
+          <p:nvPr/>
+        </p:nvGrpSpPr>
+        <p:grpSpPr>
+          <a:xfrm>
+            <a:off x="4841173" y="5396256"/>
+            <a:ext cx="6165816" cy="1111401"/>
+            <a:chOff x="4841173" y="5067698"/>
+            <a:chExt cx="6165816" cy="1111401"/>
+          </a:xfrm>
+        </p:grpSpPr>
+        <p:cxnSp>
+          <p:nvCxnSpPr>
+            <p:cNvPr id="29" name="Straight Arrow Connector 28">
+              <a:extLst>
+                <a:ext uri="{FF2B5EF4-FFF2-40B4-BE49-F238E27FC236}">
+                  <a16:creationId xmlns:a16="http://schemas.microsoft.com/office/drawing/2014/main" id="{6BA7A5D6-C7CD-4C58-39DD-3212C8919ED5}"/>
+                </a:ext>
+              </a:extLst>
+            </p:cNvPr>
+            <p:cNvCxnSpPr>
+              <a:cxnSpLocks/>
+            </p:cNvCxnSpPr>
+            <p:nvPr/>
+          </p:nvCxnSpPr>
+          <p:spPr>
+            <a:xfrm>
+              <a:off x="4841173" y="5623398"/>
+              <a:ext cx="1800000" cy="0"/>
+            </a:xfrm>
+            <a:prstGeom prst="straightConnector1">
+              <a:avLst/>
+            </a:prstGeom>
+            <a:ln>
+              <a:tailEnd type="triangle"/>
+            </a:ln>
+          </p:spPr>
+          <p:style>
+            <a:lnRef idx="2">
+              <a:schemeClr val="accent1"/>
+            </a:lnRef>
+            <a:fillRef idx="0">
+              <a:schemeClr val="accent1"/>
+            </a:fillRef>
+            <a:effectRef idx="1">
+              <a:schemeClr val="accent1"/>
+            </a:effectRef>
+            <a:fontRef idx="minor">
+              <a:schemeClr val="tx1"/>
+            </a:fontRef>
+          </p:style>
+        </p:cxnSp>
+        <p:sp>
+          <p:nvSpPr>
+            <p:cNvPr id="30" name="Rectangle: Rounded Corners 29">
+              <a:extLst>
+                <a:ext uri="{FF2B5EF4-FFF2-40B4-BE49-F238E27FC236}">
+                  <a16:creationId xmlns:a16="http://schemas.microsoft.com/office/drawing/2014/main" id="{B0D4C90D-2A3D-51FF-63CF-89B19440DDFB}"/>
+                </a:ext>
+              </a:extLst>
+            </p:cNvPr>
+            <p:cNvSpPr/>
+            <p:nvPr/>
+          </p:nvSpPr>
+          <p:spPr>
+            <a:xfrm>
+              <a:off x="7278137" y="5067698"/>
+              <a:ext cx="3728852" cy="1111401"/>
+            </a:xfrm>
+            <a:prstGeom prst="roundRect">
+              <a:avLst/>
+            </a:prstGeom>
+            <a:solidFill>
+              <a:schemeClr val="bg1"/>
+            </a:solidFill>
+          </p:spPr>
+          <p:style>
+            <a:lnRef idx="2">
+              <a:schemeClr val="accent4">
+                <a:shade val="15000"/>
+              </a:schemeClr>
+            </a:lnRef>
+            <a:fillRef idx="1">
+              <a:schemeClr val="accent4"/>
+            </a:fillRef>
+            <a:effectRef idx="0">
+              <a:schemeClr val="accent4"/>
+            </a:effectRef>
+            <a:fontRef idx="minor">
+              <a:schemeClr val="lt1"/>
+            </a:fontRef>
+          </p:style>
+          <p:txBody>
+            <a:bodyPr rtlCol="0" anchor="ctr"/>
+            <a:lstStyle/>
+            <a:p>
+              <a:r>
+                <a:rPr lang="en-US" sz="1400" b="1" dirty="0" err="1">
+                  <a:solidFill>
+                    <a:schemeClr val="tx1"/>
+                  </a:solidFill>
+                </a:rPr>
+                <a:t>MolAnchor</a:t>
+              </a:r>
+              <a:r>
+                <a:rPr lang="en-US" sz="1400" b="1" dirty="0">
+                  <a:solidFill>
+                    <a:schemeClr val="tx1"/>
+                  </a:solidFill>
+                </a:rPr>
+                <a:t> </a:t>
+              </a:r>
+              <a:r>
+                <a:rPr lang="en-US" sz="1400" dirty="0">
+                  <a:solidFill>
+                    <a:schemeClr val="tx1"/>
+                  </a:solidFill>
+                </a:rPr>
+                <a:t>- focus on the highest-precision fragment</a:t>
+              </a:r>
+            </a:p>
+            <a:p>
+              <a:endParaRPr lang="en-US" sz="1400" dirty="0">
+                <a:solidFill>
+                  <a:schemeClr val="tx1"/>
+                </a:solidFill>
+              </a:endParaRPr>
+            </a:p>
+            <a:p>
+              <a:r>
+                <a:rPr lang="en-US" sz="1400" b="1" dirty="0">
+                  <a:solidFill>
+                    <a:schemeClr val="tx1"/>
+                  </a:solidFill>
+                </a:rPr>
+                <a:t>SHAP</a:t>
+              </a:r>
+              <a:r>
+                <a:rPr lang="en-US" sz="1400" dirty="0">
+                  <a:solidFill>
+                    <a:schemeClr val="tx1"/>
+                  </a:solidFill>
+                </a:rPr>
+                <a:t> – focus on atom contribution</a:t>
+              </a:r>
+              <a:endParaRPr lang="de-DE" sz="1400" dirty="0">
+                <a:solidFill>
+                  <a:schemeClr val="tx1"/>
+                </a:solidFill>
+              </a:endParaRPr>
+            </a:p>
+          </p:txBody>
+        </p:sp>
+      </p:grpSp>
+      <p:pic>
+        <p:nvPicPr>
+          <p:cNvPr id="8" name="Picture 7" descr="A molecule of a chemical structure&#10;&#10;AI-generated content may be incorrect.">
+            <a:extLst>
+              <a:ext uri="{FF2B5EF4-FFF2-40B4-BE49-F238E27FC236}">
+                <a16:creationId xmlns:a16="http://schemas.microsoft.com/office/drawing/2014/main" id="{A34E11FB-A19D-87A2-8358-029E83B1B393}"/>
+              </a:ext>
+            </a:extLst>
+          </p:cNvPr>
+          <p:cNvPicPr>
+            <a:picLocks noChangeAspect="1"/>
+          </p:cNvPicPr>
+          <p:nvPr/>
+        </p:nvPicPr>
+        <p:blipFill>
+          <a:blip r:embed="rId5">
+            <a:extLst>
+              <a:ext uri="{28A0092B-C50C-407E-A947-70E740481C1C}">
+                <a14:useLocalDpi xmlns:a14="http://schemas.microsoft.com/office/drawing/2010/main" val="0"/>
+              </a:ext>
+            </a:extLst>
+          </a:blip>
+          <a:srcRect l="4101" t="21936" r="4499" b="21811"/>
+          <a:stretch/>
+        </p:blipFill>
+        <p:spPr>
+          <a:xfrm>
+            <a:off x="3605250" y="1065529"/>
+            <a:ext cx="3312000" cy="2038388"/>
+          </a:xfrm>
+          <a:prstGeom prst="rect">
+            <a:avLst/>
+          </a:prstGeom>
+        </p:spPr>
+      </p:pic>
+      <p:pic>
+        <p:nvPicPr>
+          <p:cNvPr id="23" name="Picture 22" descr="A structure of a chemical formula&#10;&#10;AI-generated content may be incorrect.">
+            <a:extLst>
+              <a:ext uri="{FF2B5EF4-FFF2-40B4-BE49-F238E27FC236}">
+                <a16:creationId xmlns:a16="http://schemas.microsoft.com/office/drawing/2014/main" id="{A2289CF0-0B79-FB00-8B39-2130F1B1729D}"/>
+              </a:ext>
+            </a:extLst>
+          </p:cNvPr>
+          <p:cNvPicPr>
+            <a:picLocks noChangeAspect="1"/>
+          </p:cNvPicPr>
+          <p:nvPr/>
+        </p:nvPicPr>
+        <p:blipFill>
+          <a:blip r:embed="rId6">
+            <a:extLst>
+              <a:ext uri="{28A0092B-C50C-407E-A947-70E740481C1C}">
+                <a14:useLocalDpi xmlns:a14="http://schemas.microsoft.com/office/drawing/2010/main" val="0"/>
+              </a:ext>
+            </a:extLst>
+          </a:blip>
+          <a:srcRect l="11528" t="25207" r="11064" b="25192"/>
+          <a:stretch/>
+        </p:blipFill>
+        <p:spPr>
+          <a:xfrm>
+            <a:off x="7877802" y="1023609"/>
+            <a:ext cx="3312000" cy="2122229"/>
+          </a:xfrm>
+          <a:prstGeom prst="rect">
+            <a:avLst/>
+          </a:prstGeom>
+        </p:spPr>
+      </p:pic>
+    </p:spTree>
+    <p:extLst>
+      <p:ext uri="{BB962C8B-B14F-4D97-AF65-F5344CB8AC3E}">
+        <p14:creationId xmlns:p14="http://schemas.microsoft.com/office/powerpoint/2010/main" val="909832984"/>
+      </p:ext>
+    </p:extLst>
+  </p:cSld>
+  <p:clrMapOvr>
+    <a:masterClrMapping/>
+  </p:clrMapOvr>
+</p:sld>
+</file>
+
+<file path=ppt/slides/slide8.xml><?xml version="1.0" encoding="utf-8"?>
+<p:sld xmlns:a="http://schemas.openxmlformats.org/drawingml/2006/main" xmlns:r="http://schemas.openxmlformats.org/officeDocument/2006/relationships" xmlns:p="http://schemas.openxmlformats.org/presentationml/2006/main">
+  <p:cSld>
+    <p:spTree>
+      <p:nvGrpSpPr>
+        <p:cNvPr id="1" name=""/>
+        <p:cNvGrpSpPr/>
+        <p:nvPr/>
+      </p:nvGrpSpPr>
+      <p:grpSpPr>
+        <a:xfrm>
+          <a:off x="0" y="0"/>
+          <a:ext cx="0" cy="0"/>
+          <a:chOff x="0" y="0"/>
+          <a:chExt cx="0" cy="0"/>
+        </a:xfrm>
+      </p:grpSpPr>
+      <p:sp>
+        <p:nvSpPr>
+          <p:cNvPr id="46" name="TextBox 45">
+            <a:extLst>
+              <a:ext uri="{FF2B5EF4-FFF2-40B4-BE49-F238E27FC236}">
+                <a16:creationId xmlns:a16="http://schemas.microsoft.com/office/drawing/2014/main" id="{C02F4519-6E55-F26A-E1A3-2105A25F6A50}"/>
+              </a:ext>
+            </a:extLst>
+          </p:cNvPr>
+          <p:cNvSpPr txBox="1"/>
+          <p:nvPr/>
+        </p:nvSpPr>
+        <p:spPr>
+          <a:xfrm>
+            <a:off x="232995" y="4144987"/>
+            <a:ext cx="4168792" cy="2385268"/>
+          </a:xfrm>
+          <a:prstGeom prst="rect">
+            <a:avLst/>
+          </a:prstGeom>
+          <a:noFill/>
+        </p:spPr>
+        <p:txBody>
+          <a:bodyPr wrap="square">
+            <a:spAutoFit/>
+          </a:bodyPr>
+          <a:lstStyle/>
+          <a:p>
+            <a:pPr algn="just"/>
+            <a:r>
+              <a:rPr lang="en-US" sz="1600" b="1" dirty="0"/>
+              <a:t>Comparing XAI methods</a:t>
+            </a:r>
+          </a:p>
+          <a:p>
+            <a:pPr marL="171450" indent="-171450" algn="just">
+              <a:buFont typeface="Arial" panose="020B0604020202020204" pitchFamily="34" charset="0"/>
+              <a:buChar char="•"/>
+            </a:pPr>
+            <a:endParaRPr lang="en-US" sz="1200" b="1" dirty="0"/>
+          </a:p>
+          <a:p>
+            <a:pPr marL="171450" indent="-171450" algn="just">
+              <a:buFont typeface="Arial" panose="020B0604020202020204" pitchFamily="34" charset="0"/>
+              <a:buChar char="•"/>
+            </a:pPr>
+            <a:r>
+              <a:rPr lang="en-US" sz="1100" b="1" dirty="0"/>
+              <a:t>Agreement: </a:t>
+            </a:r>
+            <a:r>
+              <a:rPr lang="en-US" sz="1100" dirty="0"/>
+              <a:t>Both methods highlight that modifications to the R-groups attached to the morpholine ring are the most sensitive levers for changing bioactivity.</a:t>
+            </a:r>
+          </a:p>
+          <a:p>
+            <a:pPr algn="just"/>
+            <a:endParaRPr lang="en-US" sz="1100" b="1" dirty="0"/>
+          </a:p>
+          <a:p>
+            <a:pPr marL="171450" indent="-171450" algn="just">
+              <a:buFont typeface="Arial" panose="020B0604020202020204" pitchFamily="34" charset="0"/>
+              <a:buChar char="•"/>
+            </a:pPr>
+            <a:r>
+              <a:rPr lang="en-US" sz="1100" b="1" dirty="0"/>
+              <a:t>Disagreement: </a:t>
+            </a:r>
+            <a:r>
+              <a:rPr lang="en-US" sz="1100" dirty="0" err="1"/>
+              <a:t>MolCE</a:t>
+            </a:r>
+            <a:r>
+              <a:rPr lang="en-US" sz="1100" dirty="0"/>
+              <a:t> provides a theoretical contrastive feature (a specific R-group that is "anti-activating"). Counterfactuals provides concrete examples of inactive molecules. </a:t>
+            </a:r>
+            <a:r>
+              <a:rPr lang="en-US" sz="1100" dirty="0" err="1"/>
+              <a:t>MolCE</a:t>
+            </a:r>
+            <a:r>
+              <a:rPr lang="en-US" sz="1100" dirty="0"/>
+              <a:t> might suggest an R-group not present in the immediate neighborhood of the query, whereas Counterfactuals are constrained by the available library of R-groups for substitution.</a:t>
+            </a:r>
+          </a:p>
+        </p:txBody>
+      </p:sp>
+      <p:grpSp>
+        <p:nvGrpSpPr>
+          <p:cNvPr id="19" name="Group 18">
+            <a:extLst>
+              <a:ext uri="{FF2B5EF4-FFF2-40B4-BE49-F238E27FC236}">
+                <a16:creationId xmlns:a16="http://schemas.microsoft.com/office/drawing/2014/main" id="{3E3C0CE0-F9D7-0B88-458B-B30D6DB941D5}"/>
+              </a:ext>
+            </a:extLst>
+          </p:cNvPr>
+          <p:cNvGrpSpPr/>
+          <p:nvPr/>
+        </p:nvGrpSpPr>
+        <p:grpSpPr>
+          <a:xfrm>
+            <a:off x="232995" y="835775"/>
+            <a:ext cx="1774658" cy="2310063"/>
+            <a:chOff x="990492" y="2511372"/>
+            <a:chExt cx="1774658" cy="2310063"/>
+          </a:xfrm>
+        </p:grpSpPr>
+        <p:sp>
+          <p:nvSpPr>
+            <p:cNvPr id="20" name="Rectangle 19">
+              <a:extLst>
+                <a:ext uri="{FF2B5EF4-FFF2-40B4-BE49-F238E27FC236}">
+                  <a16:creationId xmlns:a16="http://schemas.microsoft.com/office/drawing/2014/main" id="{9E9712B8-35C2-9D0B-5448-8B73757EC2F0}"/>
+                </a:ext>
+              </a:extLst>
+            </p:cNvPr>
+            <p:cNvSpPr/>
+            <p:nvPr/>
+          </p:nvSpPr>
+          <p:spPr>
+            <a:xfrm>
+              <a:off x="990492" y="2511372"/>
+              <a:ext cx="1774658" cy="2310063"/>
+            </a:xfrm>
+            <a:prstGeom prst="rect">
+              <a:avLst/>
+            </a:prstGeom>
+            <a:solidFill>
+              <a:schemeClr val="accent1">
+                <a:lumMod val="20000"/>
+                <a:lumOff val="80000"/>
+              </a:schemeClr>
+            </a:solidFill>
+            <a:ln>
+              <a:solidFill>
+                <a:schemeClr val="tx2">
+                  <a:lumMod val="25000"/>
+                  <a:lumOff val="75000"/>
+                </a:schemeClr>
+              </a:solidFill>
+            </a:ln>
+          </p:spPr>
+          <p:style>
+            <a:lnRef idx="2">
+              <a:schemeClr val="accent1">
+                <a:shade val="15000"/>
+              </a:schemeClr>
+            </a:lnRef>
+            <a:fillRef idx="1">
+              <a:schemeClr val="accent1"/>
+            </a:fillRef>
+            <a:effectRef idx="0">
+              <a:schemeClr val="accent1"/>
+            </a:effectRef>
+            <a:fontRef idx="minor">
+              <a:schemeClr val="lt1"/>
+            </a:fontRef>
+          </p:style>
+          <p:txBody>
+            <a:bodyPr rtlCol="0" anchor="ctr"/>
+            <a:lstStyle/>
+            <a:p>
+              <a:pPr algn="ctr"/>
+              <a:endParaRPr lang="en-US" dirty="0"/>
+            </a:p>
+          </p:txBody>
+        </p:sp>
+        <p:pic>
+          <p:nvPicPr>
+            <p:cNvPr id="21" name="Graphic 20" descr="Customer review with solid fill">
+              <a:extLst>
+                <a:ext uri="{FF2B5EF4-FFF2-40B4-BE49-F238E27FC236}">
+                  <a16:creationId xmlns:a16="http://schemas.microsoft.com/office/drawing/2014/main" id="{F3BE275F-DAC2-8C41-2B3A-FD5002884F56}"/>
+                </a:ext>
+              </a:extLst>
+            </p:cNvPr>
+            <p:cNvPicPr>
+              <a:picLocks noChangeAspect="1"/>
+            </p:cNvPicPr>
+            <p:nvPr/>
+          </p:nvPicPr>
+          <p:blipFill>
+            <a:blip r:embed="rId2">
+              <a:extLst>
+                <a:ext uri="{96DAC541-7B7A-43D3-8B79-37D633B846F1}">
+                  <asvg:svgBlip xmlns:asvg="http://schemas.microsoft.com/office/drawing/2016/SVG/main" r:embed="rId3"/>
+                </a:ext>
+              </a:extLst>
+            </a:blip>
+            <a:stretch>
+              <a:fillRect/>
+            </a:stretch>
+          </p:blipFill>
+          <p:spPr>
+            <a:xfrm>
+              <a:off x="1400027" y="3700649"/>
+              <a:ext cx="965534" cy="965534"/>
+            </a:xfrm>
+            <a:prstGeom prst="rect">
+              <a:avLst/>
+            </a:prstGeom>
+          </p:spPr>
+        </p:pic>
+        <p:pic>
+          <p:nvPicPr>
+            <p:cNvPr id="25" name="Picture 24">
+              <a:extLst>
+                <a:ext uri="{FF2B5EF4-FFF2-40B4-BE49-F238E27FC236}">
+                  <a16:creationId xmlns:a16="http://schemas.microsoft.com/office/drawing/2014/main" id="{FD0F25F4-DE18-9E33-120A-923A478A8BA4}"/>
+                </a:ext>
+              </a:extLst>
+            </p:cNvPr>
+            <p:cNvPicPr>
+              <a:picLocks noChangeAspect="1"/>
+            </p:cNvPicPr>
+            <p:nvPr/>
+          </p:nvPicPr>
+          <p:blipFill>
+            <a:blip r:embed="rId4"/>
+            <a:stretch>
+              <a:fillRect/>
+            </a:stretch>
+          </p:blipFill>
+          <p:spPr>
+            <a:xfrm>
+              <a:off x="1126882" y="2607575"/>
+              <a:ext cx="1525117" cy="996871"/>
+            </a:xfrm>
+            <a:prstGeom prst="rect">
+              <a:avLst/>
+            </a:prstGeom>
+          </p:spPr>
+        </p:pic>
+      </p:grpSp>
+      <p:sp>
+        <p:nvSpPr>
+          <p:cNvPr id="26" name="Arrow: Right 25">
+            <a:extLst>
+              <a:ext uri="{FF2B5EF4-FFF2-40B4-BE49-F238E27FC236}">
+                <a16:creationId xmlns:a16="http://schemas.microsoft.com/office/drawing/2014/main" id="{46EB3E60-57A2-3048-A916-245D3EEE448E}"/>
+              </a:ext>
+            </a:extLst>
+          </p:cNvPr>
+          <p:cNvSpPr/>
+          <p:nvPr/>
+        </p:nvSpPr>
+        <p:spPr>
+          <a:xfrm>
+            <a:off x="2327498" y="1803354"/>
+            <a:ext cx="666746" cy="374904"/>
+          </a:xfrm>
+          <a:prstGeom prst="rightArrow">
+            <a:avLst/>
+          </a:prstGeom>
+        </p:spPr>
+        <p:style>
+          <a:lnRef idx="2">
+            <a:schemeClr val="accent1">
+              <a:shade val="15000"/>
+            </a:schemeClr>
+          </a:lnRef>
+          <a:fillRef idx="1">
+            <a:schemeClr val="accent1"/>
+          </a:fillRef>
+          <a:effectRef idx="0">
+            <a:schemeClr val="accent1"/>
+          </a:effectRef>
+          <a:fontRef idx="minor">
+            <a:schemeClr val="lt1"/>
+          </a:fontRef>
+        </p:style>
+        <p:txBody>
+          <a:bodyPr rtlCol="0" anchor="ctr"/>
+          <a:lstStyle/>
+          <a:p>
+            <a:pPr algn="ctr"/>
+            <a:endParaRPr lang="en-US"/>
+          </a:p>
+        </p:txBody>
+      </p:sp>
+      <p:grpSp>
+        <p:nvGrpSpPr>
+          <p:cNvPr id="11" name="Group 10">
+            <a:extLst>
+              <a:ext uri="{FF2B5EF4-FFF2-40B4-BE49-F238E27FC236}">
+                <a16:creationId xmlns:a16="http://schemas.microsoft.com/office/drawing/2014/main" id="{DA01BAF4-359C-BB38-4616-17928143767D}"/>
+              </a:ext>
+            </a:extLst>
+          </p:cNvPr>
+          <p:cNvGrpSpPr/>
+          <p:nvPr/>
+        </p:nvGrpSpPr>
+        <p:grpSpPr>
+          <a:xfrm>
+            <a:off x="3100852" y="406630"/>
+            <a:ext cx="4177285" cy="3044438"/>
+            <a:chOff x="2837001" y="180836"/>
+            <a:chExt cx="4177285" cy="3044438"/>
+          </a:xfrm>
+        </p:grpSpPr>
+        <p:grpSp>
+          <p:nvGrpSpPr>
+            <p:cNvPr id="2" name="Group 1">
+              <a:extLst>
+                <a:ext uri="{FF2B5EF4-FFF2-40B4-BE49-F238E27FC236}">
+                  <a16:creationId xmlns:a16="http://schemas.microsoft.com/office/drawing/2014/main" id="{5C615D10-25D2-1F41-F5FD-4EFD3DB05967}"/>
+                </a:ext>
+              </a:extLst>
+            </p:cNvPr>
+            <p:cNvGrpSpPr>
+              <a:grpSpLocks noChangeAspect="1"/>
+            </p:cNvGrpSpPr>
+            <p:nvPr/>
+          </p:nvGrpSpPr>
+          <p:grpSpPr>
+            <a:xfrm>
+              <a:off x="2837001" y="756337"/>
+              <a:ext cx="2160399" cy="2468937"/>
+              <a:chOff x="3436044" y="2054607"/>
+              <a:chExt cx="2487556" cy="2842817"/>
+            </a:xfrm>
+          </p:grpSpPr>
+          <p:pic>
+            <p:nvPicPr>
+              <p:cNvPr id="10" name="Picture 9" descr="A screenshot of a graph&#10;&#10;AI-generated content may be incorrect.">
+                <a:extLst>
+                  <a:ext uri="{FF2B5EF4-FFF2-40B4-BE49-F238E27FC236}">
+                    <a16:creationId xmlns:a16="http://schemas.microsoft.com/office/drawing/2014/main" id="{E5CCB7DC-7BE9-E070-5374-2C22E866120E}"/>
+                  </a:ext>
+                </a:extLst>
+              </p:cNvPr>
+              <p:cNvPicPr>
+                <a:picLocks noChangeAspect="1"/>
+              </p:cNvPicPr>
+              <p:nvPr/>
+            </p:nvPicPr>
+            <p:blipFill>
+              <a:blip r:embed="rId5">
+                <a:extLst>
+                  <a:ext uri="{28A0092B-C50C-407E-A947-70E740481C1C}">
+                    <a14:useLocalDpi xmlns:a14="http://schemas.microsoft.com/office/drawing/2010/main" val="0"/>
+                  </a:ext>
+                </a:extLst>
+              </a:blip>
+              <a:srcRect l="31035" t="24006" r="53731" b="44988"/>
+              <a:stretch/>
+            </p:blipFill>
+            <p:spPr>
+              <a:xfrm>
+                <a:off x="3436044" y="2054607"/>
+                <a:ext cx="2222549" cy="2392796"/>
+              </a:xfrm>
+              <a:prstGeom prst="rect">
+                <a:avLst/>
+              </a:prstGeom>
+            </p:spPr>
+          </p:pic>
+          <p:pic>
+            <p:nvPicPr>
+              <p:cNvPr id="15" name="Picture 14" descr="A screenshot of a graph&#10;&#10;AI-generated content may be incorrect.">
+                <a:extLst>
+                  <a:ext uri="{FF2B5EF4-FFF2-40B4-BE49-F238E27FC236}">
+                    <a16:creationId xmlns:a16="http://schemas.microsoft.com/office/drawing/2014/main" id="{413DC958-3438-AD99-8ED3-9413D987A5AC}"/>
+                  </a:ext>
+                </a:extLst>
+              </p:cNvPr>
+              <p:cNvPicPr>
+                <a:picLocks noChangeAspect="1"/>
+              </p:cNvPicPr>
+              <p:nvPr/>
+            </p:nvPicPr>
+            <p:blipFill>
+              <a:blip r:embed="rId5">
+                <a:extLst>
+                  <a:ext uri="{28A0092B-C50C-407E-A947-70E740481C1C}">
+                    <a14:useLocalDpi xmlns:a14="http://schemas.microsoft.com/office/drawing/2010/main" val="0"/>
+                  </a:ext>
+                </a:extLst>
+              </a:blip>
+              <a:srcRect l="31170" t="17838" r="53596" b="76213"/>
+              <a:stretch/>
+            </p:blipFill>
+            <p:spPr>
+              <a:xfrm>
+                <a:off x="3701051" y="4438366"/>
+                <a:ext cx="2222549" cy="459058"/>
+              </a:xfrm>
+              <a:prstGeom prst="rect">
+                <a:avLst/>
+              </a:prstGeom>
+            </p:spPr>
+          </p:pic>
+        </p:grpSp>
+        <p:grpSp>
+          <p:nvGrpSpPr>
+            <p:cNvPr id="3" name="Group 2">
+              <a:extLst>
+                <a:ext uri="{FF2B5EF4-FFF2-40B4-BE49-F238E27FC236}">
+                  <a16:creationId xmlns:a16="http://schemas.microsoft.com/office/drawing/2014/main" id="{32A6B30B-7C85-BDCD-D535-21D074298F51}"/>
+                </a:ext>
+              </a:extLst>
+            </p:cNvPr>
+            <p:cNvGrpSpPr>
+              <a:grpSpLocks noChangeAspect="1"/>
+            </p:cNvGrpSpPr>
+            <p:nvPr/>
+          </p:nvGrpSpPr>
+          <p:grpSpPr>
+            <a:xfrm>
+              <a:off x="5025516" y="794440"/>
+              <a:ext cx="1988770" cy="2392732"/>
+              <a:chOff x="5620740" y="1990807"/>
+              <a:chExt cx="2369090" cy="2850303"/>
+            </a:xfrm>
+          </p:grpSpPr>
+          <p:pic>
+            <p:nvPicPr>
+              <p:cNvPr id="12" name="Picture 11" descr="A screenshot of a graph&#10;&#10;AI-generated content may be incorrect.">
+                <a:extLst>
+                  <a:ext uri="{FF2B5EF4-FFF2-40B4-BE49-F238E27FC236}">
+                    <a16:creationId xmlns:a16="http://schemas.microsoft.com/office/drawing/2014/main" id="{635294F4-DE55-F52A-0F65-840B513A24A2}"/>
+                  </a:ext>
+                </a:extLst>
+              </p:cNvPr>
+              <p:cNvPicPr>
+                <a:picLocks noChangeAspect="1"/>
+              </p:cNvPicPr>
+              <p:nvPr/>
+            </p:nvPicPr>
+            <p:blipFill>
+              <a:blip r:embed="rId5">
+                <a:extLst>
+                  <a:ext uri="{28A0092B-C50C-407E-A947-70E740481C1C}">
+                    <a14:useLocalDpi xmlns:a14="http://schemas.microsoft.com/office/drawing/2010/main" val="0"/>
+                  </a:ext>
+                </a:extLst>
+              </a:blip>
+              <a:srcRect l="56362" t="23416" r="29209" b="43925"/>
+              <a:stretch/>
+            </p:blipFill>
+            <p:spPr>
+              <a:xfrm>
+                <a:off x="5620740" y="1990807"/>
+                <a:ext cx="2105025" cy="2520397"/>
+              </a:xfrm>
+              <a:prstGeom prst="rect">
+                <a:avLst/>
+              </a:prstGeom>
+            </p:spPr>
+          </p:pic>
+          <p:pic>
+            <p:nvPicPr>
+              <p:cNvPr id="16" name="Picture 15" descr="A screenshot of a graph&#10;&#10;AI-generated content may be incorrect.">
+                <a:extLst>
+                  <a:ext uri="{FF2B5EF4-FFF2-40B4-BE49-F238E27FC236}">
+                    <a16:creationId xmlns:a16="http://schemas.microsoft.com/office/drawing/2014/main" id="{65A8E5C2-6215-DED8-8284-904D83645C28}"/>
+                  </a:ext>
+                </a:extLst>
+              </p:cNvPr>
+              <p:cNvPicPr>
+                <a:picLocks noChangeAspect="1"/>
+              </p:cNvPicPr>
+              <p:nvPr/>
+            </p:nvPicPr>
+            <p:blipFill>
+              <a:blip r:embed="rId5">
+                <a:extLst>
+                  <a:ext uri="{28A0092B-C50C-407E-A947-70E740481C1C}">
+                    <a14:useLocalDpi xmlns:a14="http://schemas.microsoft.com/office/drawing/2010/main" val="0"/>
+                  </a:ext>
+                </a:extLst>
+              </a:blip>
+              <a:srcRect l="56362" t="18606" r="29209" b="76905"/>
+              <a:stretch/>
+            </p:blipFill>
+            <p:spPr>
+              <a:xfrm>
+                <a:off x="5884805" y="4494680"/>
+                <a:ext cx="2105025" cy="346430"/>
+              </a:xfrm>
+              <a:prstGeom prst="rect">
+                <a:avLst/>
+              </a:prstGeom>
+            </p:spPr>
+          </p:pic>
+        </p:grpSp>
+        <p:sp>
+          <p:nvSpPr>
+            <p:cNvPr id="7" name="TextBox 6">
+              <a:extLst>
+                <a:ext uri="{FF2B5EF4-FFF2-40B4-BE49-F238E27FC236}">
+                  <a16:creationId xmlns:a16="http://schemas.microsoft.com/office/drawing/2014/main" id="{2488285A-EC5F-953B-2AA0-843EC3F5127C}"/>
+                </a:ext>
+              </a:extLst>
+            </p:cNvPr>
+            <p:cNvSpPr txBox="1"/>
+            <p:nvPr/>
+          </p:nvSpPr>
+          <p:spPr>
+            <a:xfrm>
+              <a:off x="3774980" y="180836"/>
+              <a:ext cx="2444839" cy="369332"/>
+            </a:xfrm>
+            <a:prstGeom prst="rect">
+              <a:avLst/>
+            </a:prstGeom>
+            <a:noFill/>
+          </p:spPr>
+          <p:txBody>
+            <a:bodyPr wrap="square" rtlCol="0">
+              <a:spAutoFit/>
+            </a:bodyPr>
+            <a:lstStyle/>
+            <a:p>
+              <a:pPr algn="ctr"/>
+              <a:r>
+                <a:rPr lang="en-US" b="1" dirty="0"/>
+                <a:t>Counterfactuals</a:t>
+              </a:r>
+              <a:endParaRPr lang="de-DE" b="1" dirty="0"/>
+            </a:p>
+          </p:txBody>
+        </p:sp>
+      </p:grpSp>
+      <p:grpSp>
+        <p:nvGrpSpPr>
+          <p:cNvPr id="14" name="Group 13">
+            <a:extLst>
+              <a:ext uri="{FF2B5EF4-FFF2-40B4-BE49-F238E27FC236}">
+                <a16:creationId xmlns:a16="http://schemas.microsoft.com/office/drawing/2014/main" id="{CA32F1FE-2AD1-7279-C420-23D2BBBE4114}"/>
+              </a:ext>
+            </a:extLst>
+          </p:cNvPr>
+          <p:cNvGrpSpPr/>
+          <p:nvPr/>
+        </p:nvGrpSpPr>
+        <p:grpSpPr>
+          <a:xfrm>
+            <a:off x="7476422" y="406630"/>
+            <a:ext cx="4305800" cy="2445525"/>
+            <a:chOff x="7484339" y="181744"/>
+            <a:chExt cx="4305800" cy="2445525"/>
+          </a:xfrm>
+        </p:grpSpPr>
+        <p:grpSp>
+          <p:nvGrpSpPr>
+            <p:cNvPr id="5" name="Group 4">
+              <a:extLst>
+                <a:ext uri="{FF2B5EF4-FFF2-40B4-BE49-F238E27FC236}">
+                  <a16:creationId xmlns:a16="http://schemas.microsoft.com/office/drawing/2014/main" id="{41B0B536-979D-AF86-E1AA-3EDC1D09F714}"/>
+                </a:ext>
+              </a:extLst>
+            </p:cNvPr>
+            <p:cNvGrpSpPr>
+              <a:grpSpLocks noChangeAspect="1"/>
+            </p:cNvGrpSpPr>
+            <p:nvPr/>
+          </p:nvGrpSpPr>
+          <p:grpSpPr>
+            <a:xfrm>
+              <a:off x="7484339" y="1329135"/>
+              <a:ext cx="2052000" cy="1269160"/>
+              <a:chOff x="7955797" y="1713756"/>
+              <a:chExt cx="2885092" cy="1784427"/>
+            </a:xfrm>
+          </p:grpSpPr>
+          <p:pic>
+            <p:nvPicPr>
+              <p:cNvPr id="4" name="Picture 3" descr="A black and red chemical structure&#10;&#10;AI-generated content may be incorrect.">
+                <a:extLst>
+                  <a:ext uri="{FF2B5EF4-FFF2-40B4-BE49-F238E27FC236}">
+                    <a16:creationId xmlns:a16="http://schemas.microsoft.com/office/drawing/2014/main" id="{9B8DE2D9-50FB-48E1-3766-F90DC4B43C31}"/>
+                  </a:ext>
+                </a:extLst>
+              </p:cNvPr>
+              <p:cNvPicPr>
+                <a:picLocks noChangeAspect="1"/>
+              </p:cNvPicPr>
+              <p:nvPr/>
+            </p:nvPicPr>
+            <p:blipFill>
+              <a:blip r:embed="rId6">
+                <a:extLst>
+                  <a:ext uri="{28A0092B-C50C-407E-A947-70E740481C1C}">
+                    <a14:useLocalDpi xmlns:a14="http://schemas.microsoft.com/office/drawing/2010/main" val="0"/>
+                  </a:ext>
+                </a:extLst>
+              </a:blip>
+              <a:srcRect l="26131" t="13384" r="50592" b="35527"/>
+              <a:stretch/>
+            </p:blipFill>
+            <p:spPr>
+              <a:xfrm>
+                <a:off x="7955797" y="1713756"/>
+                <a:ext cx="2885092" cy="1385205"/>
+              </a:xfrm>
+              <a:prstGeom prst="rect">
+                <a:avLst/>
+              </a:prstGeom>
+            </p:spPr>
+          </p:pic>
+          <p:pic>
+            <p:nvPicPr>
+              <p:cNvPr id="17" name="Picture 16" descr="A black and red chemical structure&#10;&#10;AI-generated content may be incorrect.">
+                <a:extLst>
+                  <a:ext uri="{FF2B5EF4-FFF2-40B4-BE49-F238E27FC236}">
+                    <a16:creationId xmlns:a16="http://schemas.microsoft.com/office/drawing/2014/main" id="{9A57B164-6AA0-9A5C-969C-361475D72D25}"/>
+                  </a:ext>
+                </a:extLst>
+              </p:cNvPr>
+              <p:cNvPicPr>
+                <a:picLocks noChangeAspect="1"/>
+              </p:cNvPicPr>
+              <p:nvPr/>
+            </p:nvPicPr>
+            <p:blipFill>
+              <a:blip r:embed="rId6">
+                <a:extLst>
+                  <a:ext uri="{28A0092B-C50C-407E-A947-70E740481C1C}">
+                    <a14:useLocalDpi xmlns:a14="http://schemas.microsoft.com/office/drawing/2010/main" val="0"/>
+                  </a:ext>
+                </a:extLst>
+              </a:blip>
+              <a:srcRect l="34138" t="87643" r="59329" b="4628"/>
+              <a:stretch/>
+            </p:blipFill>
+            <p:spPr>
+              <a:xfrm>
+                <a:off x="8883993" y="3231955"/>
+                <a:ext cx="1028700" cy="266228"/>
+              </a:xfrm>
+              <a:prstGeom prst="rect">
+                <a:avLst/>
+              </a:prstGeom>
+            </p:spPr>
+          </p:pic>
+        </p:grpSp>
+        <p:grpSp>
+          <p:nvGrpSpPr>
+            <p:cNvPr id="6" name="Group 5">
+              <a:extLst>
+                <a:ext uri="{FF2B5EF4-FFF2-40B4-BE49-F238E27FC236}">
+                  <a16:creationId xmlns:a16="http://schemas.microsoft.com/office/drawing/2014/main" id="{3AA3631B-3F0D-3733-0FDC-BBD18F86BEDB}"/>
+                </a:ext>
+              </a:extLst>
+            </p:cNvPr>
+            <p:cNvGrpSpPr>
+              <a:grpSpLocks noChangeAspect="1"/>
+            </p:cNvGrpSpPr>
+            <p:nvPr/>
+          </p:nvGrpSpPr>
+          <p:grpSpPr>
+            <a:xfrm>
+              <a:off x="9738139" y="1397550"/>
+              <a:ext cx="2052000" cy="1229719"/>
+              <a:chOff x="7951035" y="3350221"/>
+              <a:chExt cx="2894617" cy="1734681"/>
+            </a:xfrm>
+          </p:grpSpPr>
+          <p:pic>
+            <p:nvPicPr>
+              <p:cNvPr id="13" name="Picture 12" descr="A black and red chemical structure&#10;&#10;AI-generated content may be incorrect.">
+                <a:extLst>
+                  <a:ext uri="{FF2B5EF4-FFF2-40B4-BE49-F238E27FC236}">
+                    <a16:creationId xmlns:a16="http://schemas.microsoft.com/office/drawing/2014/main" id="{7E80FD93-EC36-7292-D41F-2AB7B9A8674E}"/>
+                  </a:ext>
+                </a:extLst>
+              </p:cNvPr>
+              <p:cNvPicPr>
+                <a:picLocks noChangeAspect="1"/>
+              </p:cNvPicPr>
+              <p:nvPr/>
+            </p:nvPicPr>
+            <p:blipFill>
+              <a:blip r:embed="rId6">
+                <a:extLst>
+                  <a:ext uri="{28A0092B-C50C-407E-A947-70E740481C1C}">
+                    <a14:useLocalDpi xmlns:a14="http://schemas.microsoft.com/office/drawing/2010/main" val="0"/>
+                  </a:ext>
+                </a:extLst>
+              </a:blip>
+              <a:srcRect l="51184" t="14586" r="25463" b="34325"/>
+              <a:stretch/>
+            </p:blipFill>
+            <p:spPr>
+              <a:xfrm>
+                <a:off x="7951035" y="3350221"/>
+                <a:ext cx="2894617" cy="1385206"/>
+              </a:xfrm>
+              <a:prstGeom prst="rect">
+                <a:avLst/>
+              </a:prstGeom>
+            </p:spPr>
+          </p:pic>
+          <p:pic>
+            <p:nvPicPr>
+              <p:cNvPr id="18" name="Picture 17" descr="A black and red chemical structure&#10;&#10;AI-generated content may be incorrect.">
+                <a:extLst>
+                  <a:ext uri="{FF2B5EF4-FFF2-40B4-BE49-F238E27FC236}">
+                    <a16:creationId xmlns:a16="http://schemas.microsoft.com/office/drawing/2014/main" id="{721B14D9-308B-88B5-4785-360A6C506019}"/>
+                  </a:ext>
+                </a:extLst>
+              </p:cNvPr>
+              <p:cNvPicPr>
+                <a:picLocks noChangeAspect="1"/>
+              </p:cNvPicPr>
+              <p:nvPr/>
+            </p:nvPicPr>
+            <p:blipFill>
+              <a:blip r:embed="rId6">
+                <a:extLst>
+                  <a:ext uri="{28A0092B-C50C-407E-A947-70E740481C1C}">
+                    <a14:useLocalDpi xmlns:a14="http://schemas.microsoft.com/office/drawing/2010/main" val="0"/>
+                  </a:ext>
+                </a:extLst>
+              </a:blip>
+              <a:srcRect l="59497" t="85098" r="34125" b="3309"/>
+              <a:stretch/>
+            </p:blipFill>
+            <p:spPr>
+              <a:xfrm>
+                <a:off x="8926807" y="4709945"/>
+                <a:ext cx="943073" cy="374957"/>
+              </a:xfrm>
+              <a:prstGeom prst="rect">
+                <a:avLst/>
+              </a:prstGeom>
+            </p:spPr>
+          </p:pic>
+        </p:grpSp>
+        <p:sp>
+          <p:nvSpPr>
+            <p:cNvPr id="9" name="TextBox 8">
+              <a:extLst>
+                <a:ext uri="{FF2B5EF4-FFF2-40B4-BE49-F238E27FC236}">
+                  <a16:creationId xmlns:a16="http://schemas.microsoft.com/office/drawing/2014/main" id="{641E8493-13A8-D084-AAF5-76892DBCDE12}"/>
+                </a:ext>
+              </a:extLst>
+            </p:cNvPr>
+            <p:cNvSpPr txBox="1"/>
+            <p:nvPr/>
+          </p:nvSpPr>
+          <p:spPr>
+            <a:xfrm>
+              <a:off x="8319300" y="181744"/>
+              <a:ext cx="2444839" cy="369332"/>
+            </a:xfrm>
+            <a:prstGeom prst="rect">
+              <a:avLst/>
+            </a:prstGeom>
+            <a:noFill/>
+          </p:spPr>
+          <p:txBody>
+            <a:bodyPr wrap="square" rtlCol="0">
+              <a:spAutoFit/>
+            </a:bodyPr>
+            <a:lstStyle/>
+            <a:p>
+              <a:pPr algn="ctr"/>
+              <a:r>
+                <a:rPr lang="en-US" sz="1800" b="1" dirty="0" err="1"/>
+                <a:t>MolCE</a:t>
+              </a:r>
+              <a:endParaRPr lang="de-DE" b="1" dirty="0"/>
+            </a:p>
+          </p:txBody>
+        </p:sp>
+      </p:grpSp>
+      <p:sp>
+        <p:nvSpPr>
+          <p:cNvPr id="22" name="Arrow: Right 21">
+            <a:extLst>
+              <a:ext uri="{FF2B5EF4-FFF2-40B4-BE49-F238E27FC236}">
+                <a16:creationId xmlns:a16="http://schemas.microsoft.com/office/drawing/2014/main" id="{CC3DB96C-E7DA-1AD3-B9F5-7FDA8BA9B3AD}"/>
+              </a:ext>
+            </a:extLst>
+          </p:cNvPr>
+          <p:cNvSpPr/>
+          <p:nvPr/>
+        </p:nvSpPr>
+        <p:spPr>
+          <a:xfrm rot="5400000">
+            <a:off x="786951" y="3558887"/>
+            <a:ext cx="666746" cy="374904"/>
+          </a:xfrm>
+          <a:prstGeom prst="rightArrow">
+            <a:avLst/>
+          </a:prstGeom>
+        </p:spPr>
+        <p:style>
+          <a:lnRef idx="2">
+            <a:schemeClr val="accent1">
+              <a:shade val="15000"/>
+            </a:schemeClr>
+          </a:lnRef>
+          <a:fillRef idx="1">
+            <a:schemeClr val="accent1"/>
+          </a:fillRef>
+          <a:effectRef idx="0">
+            <a:schemeClr val="accent1"/>
+          </a:effectRef>
+          <a:fontRef idx="minor">
+            <a:schemeClr val="lt1"/>
+          </a:fontRef>
+        </p:style>
+        <p:txBody>
+          <a:bodyPr rtlCol="0" anchor="ctr"/>
+          <a:lstStyle/>
+          <a:p>
+            <a:pPr algn="ctr"/>
+            <a:endParaRPr lang="en-US"/>
+          </a:p>
+        </p:txBody>
+      </p:sp>
+      <p:grpSp>
+        <p:nvGrpSpPr>
+          <p:cNvPr id="36" name="Group 35">
+            <a:extLst>
+              <a:ext uri="{FF2B5EF4-FFF2-40B4-BE49-F238E27FC236}">
+                <a16:creationId xmlns:a16="http://schemas.microsoft.com/office/drawing/2014/main" id="{9EC2A3B4-5B0E-882B-8458-F75AA108A5E6}"/>
+              </a:ext>
+            </a:extLst>
+          </p:cNvPr>
+          <p:cNvGrpSpPr/>
+          <p:nvPr/>
+        </p:nvGrpSpPr>
+        <p:grpSpPr>
+          <a:xfrm>
+            <a:off x="4841173" y="4522527"/>
+            <a:ext cx="6165816" cy="573974"/>
+            <a:chOff x="4841173" y="4193969"/>
+            <a:chExt cx="6165816" cy="573974"/>
+          </a:xfrm>
+        </p:grpSpPr>
+        <p:cxnSp>
+          <p:nvCxnSpPr>
+            <p:cNvPr id="24" name="Straight Arrow Connector 23">
+              <a:extLst>
+                <a:ext uri="{FF2B5EF4-FFF2-40B4-BE49-F238E27FC236}">
+                  <a16:creationId xmlns:a16="http://schemas.microsoft.com/office/drawing/2014/main" id="{FFDCAFC5-B9FC-083C-56A5-5CB45102C9FB}"/>
+                </a:ext>
+              </a:extLst>
+            </p:cNvPr>
+            <p:cNvCxnSpPr>
+              <a:cxnSpLocks/>
+            </p:cNvCxnSpPr>
+            <p:nvPr/>
+          </p:nvCxnSpPr>
+          <p:spPr>
+            <a:xfrm>
+              <a:off x="4841173" y="4480956"/>
+              <a:ext cx="1800000" cy="0"/>
+            </a:xfrm>
+            <a:prstGeom prst="straightConnector1">
+              <a:avLst/>
+            </a:prstGeom>
+            <a:ln>
+              <a:tailEnd type="triangle"/>
+            </a:ln>
+          </p:spPr>
+          <p:style>
+            <a:lnRef idx="2">
+              <a:schemeClr val="accent1"/>
+            </a:lnRef>
+            <a:fillRef idx="0">
+              <a:schemeClr val="accent1"/>
+            </a:fillRef>
+            <a:effectRef idx="1">
+              <a:schemeClr val="accent1"/>
+            </a:effectRef>
+            <a:fontRef idx="minor">
+              <a:schemeClr val="tx1"/>
+            </a:fontRef>
+          </p:style>
+        </p:cxnSp>
+        <p:sp>
+          <p:nvSpPr>
+            <p:cNvPr id="28" name="Rectangle: Rounded Corners 27">
+              <a:extLst>
+                <a:ext uri="{FF2B5EF4-FFF2-40B4-BE49-F238E27FC236}">
+                  <a16:creationId xmlns:a16="http://schemas.microsoft.com/office/drawing/2014/main" id="{5B927D80-0780-203A-8CD6-2AFA89094D43}"/>
+                </a:ext>
+              </a:extLst>
+            </p:cNvPr>
+            <p:cNvSpPr/>
+            <p:nvPr/>
+          </p:nvSpPr>
+          <p:spPr>
+            <a:xfrm>
+              <a:off x="7278137" y="4193969"/>
+              <a:ext cx="3728852" cy="573974"/>
+            </a:xfrm>
+            <a:prstGeom prst="roundRect">
+              <a:avLst/>
+            </a:prstGeom>
+            <a:solidFill>
+              <a:schemeClr val="bg1"/>
+            </a:solidFill>
+          </p:spPr>
+          <p:style>
+            <a:lnRef idx="2">
+              <a:schemeClr val="accent4">
+                <a:shade val="15000"/>
+              </a:schemeClr>
+            </a:lnRef>
+            <a:fillRef idx="1">
+              <a:schemeClr val="accent4"/>
+            </a:fillRef>
+            <a:effectRef idx="0">
+              <a:schemeClr val="accent4"/>
+            </a:effectRef>
+            <a:fontRef idx="minor">
+              <a:schemeClr val="lt1"/>
+            </a:fontRef>
+          </p:style>
+          <p:txBody>
+            <a:bodyPr rtlCol="0" anchor="ctr"/>
+            <a:lstStyle/>
+            <a:p>
+              <a:pPr algn="ctr"/>
+              <a:r>
+                <a:rPr lang="en-US" sz="1400" dirty="0">
+                  <a:solidFill>
+                    <a:schemeClr val="tx1"/>
+                  </a:solidFill>
+                </a:rPr>
+                <a:t>R-groups attached to the morpholine ring </a:t>
+              </a:r>
+              <a:endParaRPr lang="de-DE" sz="1400" dirty="0">
+                <a:solidFill>
+                  <a:schemeClr val="tx1"/>
+                </a:solidFill>
+              </a:endParaRPr>
+            </a:p>
+          </p:txBody>
+        </p:sp>
+      </p:grpSp>
+      <p:grpSp>
+        <p:nvGrpSpPr>
+          <p:cNvPr id="37" name="Group 36">
+            <a:extLst>
+              <a:ext uri="{FF2B5EF4-FFF2-40B4-BE49-F238E27FC236}">
+                <a16:creationId xmlns:a16="http://schemas.microsoft.com/office/drawing/2014/main" id="{94E61FAA-489A-631D-A169-A21283220D66}"/>
+              </a:ext>
+            </a:extLst>
+          </p:cNvPr>
+          <p:cNvGrpSpPr/>
+          <p:nvPr/>
+        </p:nvGrpSpPr>
+        <p:grpSpPr>
+          <a:xfrm>
+            <a:off x="4841173" y="5396256"/>
+            <a:ext cx="6165816" cy="1111401"/>
+            <a:chOff x="4841173" y="5067698"/>
+            <a:chExt cx="6165816" cy="1111401"/>
+          </a:xfrm>
+        </p:grpSpPr>
+        <p:cxnSp>
+          <p:nvCxnSpPr>
+            <p:cNvPr id="29" name="Straight Arrow Connector 28">
+              <a:extLst>
+                <a:ext uri="{FF2B5EF4-FFF2-40B4-BE49-F238E27FC236}">
+                  <a16:creationId xmlns:a16="http://schemas.microsoft.com/office/drawing/2014/main" id="{6BA7A5D6-C7CD-4C58-39DD-3212C8919ED5}"/>
+                </a:ext>
+              </a:extLst>
+            </p:cNvPr>
+            <p:cNvCxnSpPr>
+              <a:cxnSpLocks/>
+            </p:cNvCxnSpPr>
+            <p:nvPr/>
+          </p:nvCxnSpPr>
+          <p:spPr>
+            <a:xfrm>
+              <a:off x="4841173" y="5623398"/>
+              <a:ext cx="1800000" cy="0"/>
+            </a:xfrm>
+            <a:prstGeom prst="straightConnector1">
+              <a:avLst/>
+            </a:prstGeom>
+            <a:ln>
+              <a:tailEnd type="triangle"/>
+            </a:ln>
+          </p:spPr>
+          <p:style>
+            <a:lnRef idx="2">
+              <a:schemeClr val="accent1"/>
+            </a:lnRef>
+            <a:fillRef idx="0">
+              <a:schemeClr val="accent1"/>
+            </a:fillRef>
+            <a:effectRef idx="1">
+              <a:schemeClr val="accent1"/>
+            </a:effectRef>
+            <a:fontRef idx="minor">
+              <a:schemeClr val="tx1"/>
+            </a:fontRef>
+          </p:style>
+        </p:cxnSp>
+        <p:sp>
+          <p:nvSpPr>
+            <p:cNvPr id="30" name="Rectangle: Rounded Corners 29">
+              <a:extLst>
+                <a:ext uri="{FF2B5EF4-FFF2-40B4-BE49-F238E27FC236}">
+                  <a16:creationId xmlns:a16="http://schemas.microsoft.com/office/drawing/2014/main" id="{B0D4C90D-2A3D-51FF-63CF-89B19440DDFB}"/>
+                </a:ext>
+              </a:extLst>
+            </p:cNvPr>
+            <p:cNvSpPr/>
+            <p:nvPr/>
+          </p:nvSpPr>
+          <p:spPr>
+            <a:xfrm>
+              <a:off x="7278137" y="5067698"/>
+              <a:ext cx="3728852" cy="1111401"/>
+            </a:xfrm>
+            <a:prstGeom prst="roundRect">
+              <a:avLst/>
+            </a:prstGeom>
+            <a:solidFill>
+              <a:schemeClr val="bg1"/>
+            </a:solidFill>
+          </p:spPr>
+          <p:style>
+            <a:lnRef idx="2">
+              <a:schemeClr val="accent4">
+                <a:shade val="15000"/>
+              </a:schemeClr>
+            </a:lnRef>
+            <a:fillRef idx="1">
+              <a:schemeClr val="accent4"/>
+            </a:fillRef>
+            <a:effectRef idx="0">
+              <a:schemeClr val="accent4"/>
+            </a:effectRef>
+            <a:fontRef idx="minor">
+              <a:schemeClr val="lt1"/>
+            </a:fontRef>
+          </p:style>
+          <p:txBody>
+            <a:bodyPr rtlCol="0" anchor="ctr"/>
+            <a:lstStyle/>
+            <a:p>
+              <a:endParaRPr lang="en-US" sz="1400" dirty="0">
+                <a:solidFill>
+                  <a:schemeClr val="tx1"/>
+                </a:solidFill>
+              </a:endParaRPr>
+            </a:p>
+            <a:p>
+              <a:r>
+                <a:rPr lang="en-US" sz="1400" b="1" dirty="0" err="1">
+                  <a:solidFill>
+                    <a:schemeClr val="tx1"/>
+                  </a:solidFill>
+                </a:rPr>
+                <a:t>MolCE</a:t>
+              </a:r>
+              <a:r>
+                <a:rPr lang="en-US" sz="1400" dirty="0">
+                  <a:solidFill>
+                    <a:schemeClr val="tx1"/>
+                  </a:solidFill>
+                </a:rPr>
+                <a:t> - R-group that is “anti-activating”</a:t>
+              </a:r>
+            </a:p>
+            <a:p>
+              <a:endParaRPr lang="en-US" sz="1400" dirty="0">
+                <a:solidFill>
+                  <a:schemeClr val="tx1"/>
+                </a:solidFill>
+              </a:endParaRPr>
+            </a:p>
+            <a:p>
+              <a:r>
+                <a:rPr lang="en-US" sz="1400" b="1" dirty="0">
+                  <a:solidFill>
+                    <a:schemeClr val="tx1"/>
+                  </a:solidFill>
+                </a:rPr>
+                <a:t>Counterfactuals</a:t>
+              </a:r>
+              <a:r>
+                <a:rPr lang="en-US" sz="1400" dirty="0">
+                  <a:solidFill>
+                    <a:schemeClr val="tx1"/>
+                  </a:solidFill>
+                </a:rPr>
+                <a:t> - concrete examples of inactive molecules</a:t>
+              </a:r>
+            </a:p>
+            <a:p>
+              <a:r>
+                <a:rPr lang="en-US" sz="1400" dirty="0">
+                  <a:solidFill>
+                    <a:schemeClr val="tx1"/>
+                  </a:solidFill>
+                </a:rPr>
+                <a:t>   </a:t>
+              </a:r>
+              <a:endParaRPr lang="de-DE" sz="1400" dirty="0">
+                <a:solidFill>
+                  <a:schemeClr val="tx1"/>
+                </a:solidFill>
+              </a:endParaRPr>
+            </a:p>
+          </p:txBody>
+        </p:sp>
+      </p:grpSp>
+    </p:spTree>
+    <p:extLst>
+      <p:ext uri="{BB962C8B-B14F-4D97-AF65-F5344CB8AC3E}">
+        <p14:creationId xmlns:p14="http://schemas.microsoft.com/office/powerpoint/2010/main" val="377492229"/>
+      </p:ext>
+    </p:extLst>
+  </p:cSld>
+  <p:clrMapOvr>
+    <a:masterClrMapping/>
+  </p:clrMapOvr>
+</p:sld>
+</file>
+
 <file path=ppt/theme/theme1.xml><?xml version="1.0" encoding="utf-8"?>
 <a:theme xmlns:a="http://schemas.openxmlformats.org/drawingml/2006/main" name="Office Theme">
   <a:themeElements>

--- a/slides/figures_AI_agent.pptx
+++ b/slides/figures_AI_agent.pptx
@@ -11,8 +11,10 @@
     <p:sldId id="262" r:id="rId5"/>
     <p:sldId id="265" r:id="rId6"/>
     <p:sldId id="270" r:id="rId7"/>
-    <p:sldId id="268" r:id="rId8"/>
-    <p:sldId id="266" r:id="rId9"/>
+    <p:sldId id="271" r:id="rId8"/>
+    <p:sldId id="267" r:id="rId9"/>
+    <p:sldId id="268" r:id="rId10"/>
+    <p:sldId id="266" r:id="rId11"/>
   </p:sldIdLst>
   <p:sldSz cx="12192000" cy="6858000"/>
   <p:notesSz cx="6858000" cy="9144000"/>
@@ -912,7 +914,7 @@
           <a:p>
             <a:fld id="{DA6F0F7C-4BCE-44E3-AC6F-932A28F11178}" type="datetimeFigureOut">
               <a:rPr lang="en-US" smtClean="0"/>
-              <a:t>4/29/2026</a:t>
+              <a:t>5/4/2026</a:t>
             </a:fld>
             <a:endParaRPr lang="en-US"/>
           </a:p>
@@ -1110,7 +1112,7 @@
           <a:p>
             <a:fld id="{DA6F0F7C-4BCE-44E3-AC6F-932A28F11178}" type="datetimeFigureOut">
               <a:rPr lang="en-US" smtClean="0"/>
-              <a:t>4/29/2026</a:t>
+              <a:t>5/4/2026</a:t>
             </a:fld>
             <a:endParaRPr lang="en-US"/>
           </a:p>
@@ -1318,7 +1320,7 @@
           <a:p>
             <a:fld id="{DA6F0F7C-4BCE-44E3-AC6F-932A28F11178}" type="datetimeFigureOut">
               <a:rPr lang="en-US" smtClean="0"/>
-              <a:t>4/29/2026</a:t>
+              <a:t>5/4/2026</a:t>
             </a:fld>
             <a:endParaRPr lang="en-US"/>
           </a:p>
@@ -1516,7 +1518,7 @@
           <a:p>
             <a:fld id="{DA6F0F7C-4BCE-44E3-AC6F-932A28F11178}" type="datetimeFigureOut">
               <a:rPr lang="en-US" smtClean="0"/>
-              <a:t>4/29/2026</a:t>
+              <a:t>5/4/2026</a:t>
             </a:fld>
             <a:endParaRPr lang="en-US"/>
           </a:p>
@@ -1791,7 +1793,7 @@
           <a:p>
             <a:fld id="{DA6F0F7C-4BCE-44E3-AC6F-932A28F11178}" type="datetimeFigureOut">
               <a:rPr lang="en-US" smtClean="0"/>
-              <a:t>4/29/2026</a:t>
+              <a:t>5/4/2026</a:t>
             </a:fld>
             <a:endParaRPr lang="en-US"/>
           </a:p>
@@ -2056,7 +2058,7 @@
           <a:p>
             <a:fld id="{DA6F0F7C-4BCE-44E3-AC6F-932A28F11178}" type="datetimeFigureOut">
               <a:rPr lang="en-US" smtClean="0"/>
-              <a:t>4/29/2026</a:t>
+              <a:t>5/4/2026</a:t>
             </a:fld>
             <a:endParaRPr lang="en-US"/>
           </a:p>
@@ -2468,7 +2470,7 @@
           <a:p>
             <a:fld id="{DA6F0F7C-4BCE-44E3-AC6F-932A28F11178}" type="datetimeFigureOut">
               <a:rPr lang="en-US" smtClean="0"/>
-              <a:t>4/29/2026</a:t>
+              <a:t>5/4/2026</a:t>
             </a:fld>
             <a:endParaRPr lang="en-US"/>
           </a:p>
@@ -2609,7 +2611,7 @@
           <a:p>
             <a:fld id="{DA6F0F7C-4BCE-44E3-AC6F-932A28F11178}" type="datetimeFigureOut">
               <a:rPr lang="en-US" smtClean="0"/>
-              <a:t>4/29/2026</a:t>
+              <a:t>5/4/2026</a:t>
             </a:fld>
             <a:endParaRPr lang="en-US"/>
           </a:p>
@@ -2722,7 +2724,7 @@
           <a:p>
             <a:fld id="{DA6F0F7C-4BCE-44E3-AC6F-932A28F11178}" type="datetimeFigureOut">
               <a:rPr lang="en-US" smtClean="0"/>
-              <a:t>4/29/2026</a:t>
+              <a:t>5/4/2026</a:t>
             </a:fld>
             <a:endParaRPr lang="en-US"/>
           </a:p>
@@ -3033,7 +3035,7 @@
           <a:p>
             <a:fld id="{DA6F0F7C-4BCE-44E3-AC6F-932A28F11178}" type="datetimeFigureOut">
               <a:rPr lang="en-US" smtClean="0"/>
-              <a:t>4/29/2026</a:t>
+              <a:t>5/4/2026</a:t>
             </a:fld>
             <a:endParaRPr lang="en-US"/>
           </a:p>
@@ -3321,7 +3323,7 @@
           <a:p>
             <a:fld id="{DA6F0F7C-4BCE-44E3-AC6F-932A28F11178}" type="datetimeFigureOut">
               <a:rPr lang="en-US" smtClean="0"/>
-              <a:t>4/29/2026</a:t>
+              <a:t>5/4/2026</a:t>
             </a:fld>
             <a:endParaRPr lang="en-US"/>
           </a:p>
@@ -3562,7 +3564,7 @@
           <a:p>
             <a:fld id="{DA6F0F7C-4BCE-44E3-AC6F-932A28F11178}" type="datetimeFigureOut">
               <a:rPr lang="en-US" smtClean="0"/>
-              <a:t>4/29/2026</a:t>
+              <a:t>5/4/2026</a:t>
             </a:fld>
             <a:endParaRPr lang="en-US"/>
           </a:p>
@@ -5925,6 +5927,1145 @@
     <p:extLst>
       <p:ext uri="{BB962C8B-B14F-4D97-AF65-F5344CB8AC3E}">
         <p14:creationId xmlns:p14="http://schemas.microsoft.com/office/powerpoint/2010/main" val="3157379607"/>
+      </p:ext>
+    </p:extLst>
+  </p:cSld>
+  <p:clrMapOvr>
+    <a:masterClrMapping/>
+  </p:clrMapOvr>
+</p:sld>
+</file>
+
+<file path=ppt/slides/slide10.xml><?xml version="1.0" encoding="utf-8"?>
+<p:sld xmlns:a="http://schemas.openxmlformats.org/drawingml/2006/main" xmlns:r="http://schemas.openxmlformats.org/officeDocument/2006/relationships" xmlns:p="http://schemas.openxmlformats.org/presentationml/2006/main">
+  <p:cSld>
+    <p:spTree>
+      <p:nvGrpSpPr>
+        <p:cNvPr id="1" name=""/>
+        <p:cNvGrpSpPr/>
+        <p:nvPr/>
+      </p:nvGrpSpPr>
+      <p:grpSpPr>
+        <a:xfrm>
+          <a:off x="0" y="0"/>
+          <a:ext cx="0" cy="0"/>
+          <a:chOff x="0" y="0"/>
+          <a:chExt cx="0" cy="0"/>
+        </a:xfrm>
+      </p:grpSpPr>
+      <p:sp>
+        <p:nvSpPr>
+          <p:cNvPr id="46" name="TextBox 45">
+            <a:extLst>
+              <a:ext uri="{FF2B5EF4-FFF2-40B4-BE49-F238E27FC236}">
+                <a16:creationId xmlns:a16="http://schemas.microsoft.com/office/drawing/2014/main" id="{C02F4519-6E55-F26A-E1A3-2105A25F6A50}"/>
+              </a:ext>
+            </a:extLst>
+          </p:cNvPr>
+          <p:cNvSpPr txBox="1"/>
+          <p:nvPr/>
+        </p:nvSpPr>
+        <p:spPr>
+          <a:xfrm>
+            <a:off x="232995" y="4144987"/>
+            <a:ext cx="4168792" cy="2385268"/>
+          </a:xfrm>
+          <a:prstGeom prst="rect">
+            <a:avLst/>
+          </a:prstGeom>
+          <a:noFill/>
+        </p:spPr>
+        <p:txBody>
+          <a:bodyPr wrap="square">
+            <a:spAutoFit/>
+          </a:bodyPr>
+          <a:lstStyle/>
+          <a:p>
+            <a:pPr algn="just"/>
+            <a:r>
+              <a:rPr lang="en-US" sz="1600" b="1" dirty="0"/>
+              <a:t>Comparing XAI methods</a:t>
+            </a:r>
+          </a:p>
+          <a:p>
+            <a:pPr marL="171450" indent="-171450" algn="just">
+              <a:buFont typeface="Arial" panose="020B0604020202020204" pitchFamily="34" charset="0"/>
+              <a:buChar char="•"/>
+            </a:pPr>
+            <a:endParaRPr lang="en-US" sz="1200" b="1" dirty="0"/>
+          </a:p>
+          <a:p>
+            <a:pPr marL="171450" indent="-171450" algn="just">
+              <a:buFont typeface="Arial" panose="020B0604020202020204" pitchFamily="34" charset="0"/>
+              <a:buChar char="•"/>
+            </a:pPr>
+            <a:r>
+              <a:rPr lang="en-US" sz="1100" b="1" dirty="0"/>
+              <a:t>Agreement: </a:t>
+            </a:r>
+            <a:r>
+              <a:rPr lang="en-US" sz="1100" dirty="0"/>
+              <a:t>Both methods highlight that modifications to the R-groups attached to the morpholine ring are the most sensitive levers for changing bioactivity.</a:t>
+            </a:r>
+          </a:p>
+          <a:p>
+            <a:pPr algn="just"/>
+            <a:endParaRPr lang="en-US" sz="1100" b="1" dirty="0"/>
+          </a:p>
+          <a:p>
+            <a:pPr marL="171450" indent="-171450" algn="just">
+              <a:buFont typeface="Arial" panose="020B0604020202020204" pitchFamily="34" charset="0"/>
+              <a:buChar char="•"/>
+            </a:pPr>
+            <a:r>
+              <a:rPr lang="en-US" sz="1100" b="1" dirty="0"/>
+              <a:t>Disagreement: </a:t>
+            </a:r>
+            <a:r>
+              <a:rPr lang="en-US" sz="1100" dirty="0" err="1"/>
+              <a:t>MolCE</a:t>
+            </a:r>
+            <a:r>
+              <a:rPr lang="en-US" sz="1100" dirty="0"/>
+              <a:t> provides a theoretical contrastive feature (a specific R-group that is "anti-activating"). Counterfactuals provides concrete examples of inactive molecules. </a:t>
+            </a:r>
+            <a:r>
+              <a:rPr lang="en-US" sz="1100" dirty="0" err="1"/>
+              <a:t>MolCE</a:t>
+            </a:r>
+            <a:r>
+              <a:rPr lang="en-US" sz="1100" dirty="0"/>
+              <a:t> might suggest an R-group not present in the immediate neighborhood of the query, whereas Counterfactuals are constrained by the available library of R-groups for substitution.</a:t>
+            </a:r>
+          </a:p>
+        </p:txBody>
+      </p:sp>
+      <p:grpSp>
+        <p:nvGrpSpPr>
+          <p:cNvPr id="19" name="Group 18">
+            <a:extLst>
+              <a:ext uri="{FF2B5EF4-FFF2-40B4-BE49-F238E27FC236}">
+                <a16:creationId xmlns:a16="http://schemas.microsoft.com/office/drawing/2014/main" id="{3E3C0CE0-F9D7-0B88-458B-B30D6DB941D5}"/>
+              </a:ext>
+            </a:extLst>
+          </p:cNvPr>
+          <p:cNvGrpSpPr/>
+          <p:nvPr/>
+        </p:nvGrpSpPr>
+        <p:grpSpPr>
+          <a:xfrm>
+            <a:off x="232995" y="835775"/>
+            <a:ext cx="1774658" cy="2310063"/>
+            <a:chOff x="990492" y="2511372"/>
+            <a:chExt cx="1774658" cy="2310063"/>
+          </a:xfrm>
+        </p:grpSpPr>
+        <p:sp>
+          <p:nvSpPr>
+            <p:cNvPr id="20" name="Rectangle 19">
+              <a:extLst>
+                <a:ext uri="{FF2B5EF4-FFF2-40B4-BE49-F238E27FC236}">
+                  <a16:creationId xmlns:a16="http://schemas.microsoft.com/office/drawing/2014/main" id="{9E9712B8-35C2-9D0B-5448-8B73757EC2F0}"/>
+                </a:ext>
+              </a:extLst>
+            </p:cNvPr>
+            <p:cNvSpPr/>
+            <p:nvPr/>
+          </p:nvSpPr>
+          <p:spPr>
+            <a:xfrm>
+              <a:off x="990492" y="2511372"/>
+              <a:ext cx="1774658" cy="2310063"/>
+            </a:xfrm>
+            <a:prstGeom prst="rect">
+              <a:avLst/>
+            </a:prstGeom>
+            <a:solidFill>
+              <a:schemeClr val="accent1">
+                <a:lumMod val="20000"/>
+                <a:lumOff val="80000"/>
+              </a:schemeClr>
+            </a:solidFill>
+            <a:ln>
+              <a:solidFill>
+                <a:schemeClr val="tx2">
+                  <a:lumMod val="25000"/>
+                  <a:lumOff val="75000"/>
+                </a:schemeClr>
+              </a:solidFill>
+            </a:ln>
+          </p:spPr>
+          <p:style>
+            <a:lnRef idx="2">
+              <a:schemeClr val="accent1">
+                <a:shade val="15000"/>
+              </a:schemeClr>
+            </a:lnRef>
+            <a:fillRef idx="1">
+              <a:schemeClr val="accent1"/>
+            </a:fillRef>
+            <a:effectRef idx="0">
+              <a:schemeClr val="accent1"/>
+            </a:effectRef>
+            <a:fontRef idx="minor">
+              <a:schemeClr val="lt1"/>
+            </a:fontRef>
+          </p:style>
+          <p:txBody>
+            <a:bodyPr rtlCol="0" anchor="ctr"/>
+            <a:lstStyle/>
+            <a:p>
+              <a:pPr algn="ctr"/>
+              <a:endParaRPr lang="en-US" dirty="0"/>
+            </a:p>
+          </p:txBody>
+        </p:sp>
+        <p:pic>
+          <p:nvPicPr>
+            <p:cNvPr id="21" name="Graphic 20" descr="Customer review with solid fill">
+              <a:extLst>
+                <a:ext uri="{FF2B5EF4-FFF2-40B4-BE49-F238E27FC236}">
+                  <a16:creationId xmlns:a16="http://schemas.microsoft.com/office/drawing/2014/main" id="{F3BE275F-DAC2-8C41-2B3A-FD5002884F56}"/>
+                </a:ext>
+              </a:extLst>
+            </p:cNvPr>
+            <p:cNvPicPr>
+              <a:picLocks noChangeAspect="1"/>
+            </p:cNvPicPr>
+            <p:nvPr/>
+          </p:nvPicPr>
+          <p:blipFill>
+            <a:blip r:embed="rId2">
+              <a:extLst>
+                <a:ext uri="{96DAC541-7B7A-43D3-8B79-37D633B846F1}">
+                  <asvg:svgBlip xmlns:asvg="http://schemas.microsoft.com/office/drawing/2016/SVG/main" r:embed="rId3"/>
+                </a:ext>
+              </a:extLst>
+            </a:blip>
+            <a:stretch>
+              <a:fillRect/>
+            </a:stretch>
+          </p:blipFill>
+          <p:spPr>
+            <a:xfrm>
+              <a:off x="1400027" y="3700649"/>
+              <a:ext cx="965534" cy="965534"/>
+            </a:xfrm>
+            <a:prstGeom prst="rect">
+              <a:avLst/>
+            </a:prstGeom>
+          </p:spPr>
+        </p:pic>
+        <p:pic>
+          <p:nvPicPr>
+            <p:cNvPr id="25" name="Picture 24">
+              <a:extLst>
+                <a:ext uri="{FF2B5EF4-FFF2-40B4-BE49-F238E27FC236}">
+                  <a16:creationId xmlns:a16="http://schemas.microsoft.com/office/drawing/2014/main" id="{FD0F25F4-DE18-9E33-120A-923A478A8BA4}"/>
+                </a:ext>
+              </a:extLst>
+            </p:cNvPr>
+            <p:cNvPicPr>
+              <a:picLocks noChangeAspect="1"/>
+            </p:cNvPicPr>
+            <p:nvPr/>
+          </p:nvPicPr>
+          <p:blipFill>
+            <a:blip r:embed="rId4"/>
+            <a:stretch>
+              <a:fillRect/>
+            </a:stretch>
+          </p:blipFill>
+          <p:spPr>
+            <a:xfrm>
+              <a:off x="1126882" y="2607575"/>
+              <a:ext cx="1525117" cy="996871"/>
+            </a:xfrm>
+            <a:prstGeom prst="rect">
+              <a:avLst/>
+            </a:prstGeom>
+          </p:spPr>
+        </p:pic>
+      </p:grpSp>
+      <p:sp>
+        <p:nvSpPr>
+          <p:cNvPr id="26" name="Arrow: Right 25">
+            <a:extLst>
+              <a:ext uri="{FF2B5EF4-FFF2-40B4-BE49-F238E27FC236}">
+                <a16:creationId xmlns:a16="http://schemas.microsoft.com/office/drawing/2014/main" id="{46EB3E60-57A2-3048-A916-245D3EEE448E}"/>
+              </a:ext>
+            </a:extLst>
+          </p:cNvPr>
+          <p:cNvSpPr/>
+          <p:nvPr/>
+        </p:nvSpPr>
+        <p:spPr>
+          <a:xfrm>
+            <a:off x="2327498" y="1803354"/>
+            <a:ext cx="666746" cy="374904"/>
+          </a:xfrm>
+          <a:prstGeom prst="rightArrow">
+            <a:avLst/>
+          </a:prstGeom>
+        </p:spPr>
+        <p:style>
+          <a:lnRef idx="2">
+            <a:schemeClr val="accent1">
+              <a:shade val="15000"/>
+            </a:schemeClr>
+          </a:lnRef>
+          <a:fillRef idx="1">
+            <a:schemeClr val="accent1"/>
+          </a:fillRef>
+          <a:effectRef idx="0">
+            <a:schemeClr val="accent1"/>
+          </a:effectRef>
+          <a:fontRef idx="minor">
+            <a:schemeClr val="lt1"/>
+          </a:fontRef>
+        </p:style>
+        <p:txBody>
+          <a:bodyPr rtlCol="0" anchor="ctr"/>
+          <a:lstStyle/>
+          <a:p>
+            <a:pPr algn="ctr"/>
+            <a:endParaRPr lang="en-US"/>
+          </a:p>
+        </p:txBody>
+      </p:sp>
+      <p:grpSp>
+        <p:nvGrpSpPr>
+          <p:cNvPr id="11" name="Group 10">
+            <a:extLst>
+              <a:ext uri="{FF2B5EF4-FFF2-40B4-BE49-F238E27FC236}">
+                <a16:creationId xmlns:a16="http://schemas.microsoft.com/office/drawing/2014/main" id="{DA01BAF4-359C-BB38-4616-17928143767D}"/>
+              </a:ext>
+            </a:extLst>
+          </p:cNvPr>
+          <p:cNvGrpSpPr/>
+          <p:nvPr/>
+        </p:nvGrpSpPr>
+        <p:grpSpPr>
+          <a:xfrm>
+            <a:off x="3100852" y="406630"/>
+            <a:ext cx="4177285" cy="3044438"/>
+            <a:chOff x="2837001" y="180836"/>
+            <a:chExt cx="4177285" cy="3044438"/>
+          </a:xfrm>
+        </p:grpSpPr>
+        <p:grpSp>
+          <p:nvGrpSpPr>
+            <p:cNvPr id="2" name="Group 1">
+              <a:extLst>
+                <a:ext uri="{FF2B5EF4-FFF2-40B4-BE49-F238E27FC236}">
+                  <a16:creationId xmlns:a16="http://schemas.microsoft.com/office/drawing/2014/main" id="{5C615D10-25D2-1F41-F5FD-4EFD3DB05967}"/>
+                </a:ext>
+              </a:extLst>
+            </p:cNvPr>
+            <p:cNvGrpSpPr>
+              <a:grpSpLocks noChangeAspect="1"/>
+            </p:cNvGrpSpPr>
+            <p:nvPr/>
+          </p:nvGrpSpPr>
+          <p:grpSpPr>
+            <a:xfrm>
+              <a:off x="2837001" y="756337"/>
+              <a:ext cx="2160399" cy="2468937"/>
+              <a:chOff x="3436044" y="2054607"/>
+              <a:chExt cx="2487556" cy="2842817"/>
+            </a:xfrm>
+          </p:grpSpPr>
+          <p:pic>
+            <p:nvPicPr>
+              <p:cNvPr id="10" name="Picture 9" descr="A screenshot of a graph&#10;&#10;AI-generated content may be incorrect.">
+                <a:extLst>
+                  <a:ext uri="{FF2B5EF4-FFF2-40B4-BE49-F238E27FC236}">
+                    <a16:creationId xmlns:a16="http://schemas.microsoft.com/office/drawing/2014/main" id="{E5CCB7DC-7BE9-E070-5374-2C22E866120E}"/>
+                  </a:ext>
+                </a:extLst>
+              </p:cNvPr>
+              <p:cNvPicPr>
+                <a:picLocks noChangeAspect="1"/>
+              </p:cNvPicPr>
+              <p:nvPr/>
+            </p:nvPicPr>
+            <p:blipFill>
+              <a:blip r:embed="rId5">
+                <a:extLst>
+                  <a:ext uri="{28A0092B-C50C-407E-A947-70E740481C1C}">
+                    <a14:useLocalDpi xmlns:a14="http://schemas.microsoft.com/office/drawing/2010/main" val="0"/>
+                  </a:ext>
+                </a:extLst>
+              </a:blip>
+              <a:srcRect l="31035" t="24006" r="53731" b="44988"/>
+              <a:stretch/>
+            </p:blipFill>
+            <p:spPr>
+              <a:xfrm>
+                <a:off x="3436044" y="2054607"/>
+                <a:ext cx="2222549" cy="2392796"/>
+              </a:xfrm>
+              <a:prstGeom prst="rect">
+                <a:avLst/>
+              </a:prstGeom>
+            </p:spPr>
+          </p:pic>
+          <p:pic>
+            <p:nvPicPr>
+              <p:cNvPr id="15" name="Picture 14" descr="A screenshot of a graph&#10;&#10;AI-generated content may be incorrect.">
+                <a:extLst>
+                  <a:ext uri="{FF2B5EF4-FFF2-40B4-BE49-F238E27FC236}">
+                    <a16:creationId xmlns:a16="http://schemas.microsoft.com/office/drawing/2014/main" id="{413DC958-3438-AD99-8ED3-9413D987A5AC}"/>
+                  </a:ext>
+                </a:extLst>
+              </p:cNvPr>
+              <p:cNvPicPr>
+                <a:picLocks noChangeAspect="1"/>
+              </p:cNvPicPr>
+              <p:nvPr/>
+            </p:nvPicPr>
+            <p:blipFill>
+              <a:blip r:embed="rId5">
+                <a:extLst>
+                  <a:ext uri="{28A0092B-C50C-407E-A947-70E740481C1C}">
+                    <a14:useLocalDpi xmlns:a14="http://schemas.microsoft.com/office/drawing/2010/main" val="0"/>
+                  </a:ext>
+                </a:extLst>
+              </a:blip>
+              <a:srcRect l="31170" t="17838" r="53596" b="76213"/>
+              <a:stretch/>
+            </p:blipFill>
+            <p:spPr>
+              <a:xfrm>
+                <a:off x="3701051" y="4438366"/>
+                <a:ext cx="2222549" cy="459058"/>
+              </a:xfrm>
+              <a:prstGeom prst="rect">
+                <a:avLst/>
+              </a:prstGeom>
+            </p:spPr>
+          </p:pic>
+        </p:grpSp>
+        <p:grpSp>
+          <p:nvGrpSpPr>
+            <p:cNvPr id="3" name="Group 2">
+              <a:extLst>
+                <a:ext uri="{FF2B5EF4-FFF2-40B4-BE49-F238E27FC236}">
+                  <a16:creationId xmlns:a16="http://schemas.microsoft.com/office/drawing/2014/main" id="{32A6B30B-7C85-BDCD-D535-21D074298F51}"/>
+                </a:ext>
+              </a:extLst>
+            </p:cNvPr>
+            <p:cNvGrpSpPr>
+              <a:grpSpLocks noChangeAspect="1"/>
+            </p:cNvGrpSpPr>
+            <p:nvPr/>
+          </p:nvGrpSpPr>
+          <p:grpSpPr>
+            <a:xfrm>
+              <a:off x="5025516" y="794440"/>
+              <a:ext cx="1988770" cy="2392732"/>
+              <a:chOff x="5620740" y="1990807"/>
+              <a:chExt cx="2369090" cy="2850303"/>
+            </a:xfrm>
+          </p:grpSpPr>
+          <p:pic>
+            <p:nvPicPr>
+              <p:cNvPr id="12" name="Picture 11" descr="A screenshot of a graph&#10;&#10;AI-generated content may be incorrect.">
+                <a:extLst>
+                  <a:ext uri="{FF2B5EF4-FFF2-40B4-BE49-F238E27FC236}">
+                    <a16:creationId xmlns:a16="http://schemas.microsoft.com/office/drawing/2014/main" id="{635294F4-DE55-F52A-0F65-840B513A24A2}"/>
+                  </a:ext>
+                </a:extLst>
+              </p:cNvPr>
+              <p:cNvPicPr>
+                <a:picLocks noChangeAspect="1"/>
+              </p:cNvPicPr>
+              <p:nvPr/>
+            </p:nvPicPr>
+            <p:blipFill>
+              <a:blip r:embed="rId5">
+                <a:extLst>
+                  <a:ext uri="{28A0092B-C50C-407E-A947-70E740481C1C}">
+                    <a14:useLocalDpi xmlns:a14="http://schemas.microsoft.com/office/drawing/2010/main" val="0"/>
+                  </a:ext>
+                </a:extLst>
+              </a:blip>
+              <a:srcRect l="56362" t="23416" r="29209" b="43925"/>
+              <a:stretch/>
+            </p:blipFill>
+            <p:spPr>
+              <a:xfrm>
+                <a:off x="5620740" y="1990807"/>
+                <a:ext cx="2105025" cy="2520397"/>
+              </a:xfrm>
+              <a:prstGeom prst="rect">
+                <a:avLst/>
+              </a:prstGeom>
+            </p:spPr>
+          </p:pic>
+          <p:pic>
+            <p:nvPicPr>
+              <p:cNvPr id="16" name="Picture 15" descr="A screenshot of a graph&#10;&#10;AI-generated content may be incorrect.">
+                <a:extLst>
+                  <a:ext uri="{FF2B5EF4-FFF2-40B4-BE49-F238E27FC236}">
+                    <a16:creationId xmlns:a16="http://schemas.microsoft.com/office/drawing/2014/main" id="{65A8E5C2-6215-DED8-8284-904D83645C28}"/>
+                  </a:ext>
+                </a:extLst>
+              </p:cNvPr>
+              <p:cNvPicPr>
+                <a:picLocks noChangeAspect="1"/>
+              </p:cNvPicPr>
+              <p:nvPr/>
+            </p:nvPicPr>
+            <p:blipFill>
+              <a:blip r:embed="rId5">
+                <a:extLst>
+                  <a:ext uri="{28A0092B-C50C-407E-A947-70E740481C1C}">
+                    <a14:useLocalDpi xmlns:a14="http://schemas.microsoft.com/office/drawing/2010/main" val="0"/>
+                  </a:ext>
+                </a:extLst>
+              </a:blip>
+              <a:srcRect l="56362" t="18606" r="29209" b="76905"/>
+              <a:stretch/>
+            </p:blipFill>
+            <p:spPr>
+              <a:xfrm>
+                <a:off x="5884805" y="4494680"/>
+                <a:ext cx="2105025" cy="346430"/>
+              </a:xfrm>
+              <a:prstGeom prst="rect">
+                <a:avLst/>
+              </a:prstGeom>
+            </p:spPr>
+          </p:pic>
+        </p:grpSp>
+        <p:sp>
+          <p:nvSpPr>
+            <p:cNvPr id="7" name="TextBox 6">
+              <a:extLst>
+                <a:ext uri="{FF2B5EF4-FFF2-40B4-BE49-F238E27FC236}">
+                  <a16:creationId xmlns:a16="http://schemas.microsoft.com/office/drawing/2014/main" id="{2488285A-EC5F-953B-2AA0-843EC3F5127C}"/>
+                </a:ext>
+              </a:extLst>
+            </p:cNvPr>
+            <p:cNvSpPr txBox="1"/>
+            <p:nvPr/>
+          </p:nvSpPr>
+          <p:spPr>
+            <a:xfrm>
+              <a:off x="3774980" y="180836"/>
+              <a:ext cx="2444839" cy="369332"/>
+            </a:xfrm>
+            <a:prstGeom prst="rect">
+              <a:avLst/>
+            </a:prstGeom>
+            <a:noFill/>
+          </p:spPr>
+          <p:txBody>
+            <a:bodyPr wrap="square" rtlCol="0">
+              <a:spAutoFit/>
+            </a:bodyPr>
+            <a:lstStyle/>
+            <a:p>
+              <a:pPr algn="ctr"/>
+              <a:r>
+                <a:rPr lang="en-US" b="1" dirty="0"/>
+                <a:t>Counterfactuals</a:t>
+              </a:r>
+              <a:endParaRPr lang="de-DE" b="1" dirty="0"/>
+            </a:p>
+          </p:txBody>
+        </p:sp>
+      </p:grpSp>
+      <p:grpSp>
+        <p:nvGrpSpPr>
+          <p:cNvPr id="14" name="Group 13">
+            <a:extLst>
+              <a:ext uri="{FF2B5EF4-FFF2-40B4-BE49-F238E27FC236}">
+                <a16:creationId xmlns:a16="http://schemas.microsoft.com/office/drawing/2014/main" id="{CA32F1FE-2AD1-7279-C420-23D2BBBE4114}"/>
+              </a:ext>
+            </a:extLst>
+          </p:cNvPr>
+          <p:cNvGrpSpPr/>
+          <p:nvPr/>
+        </p:nvGrpSpPr>
+        <p:grpSpPr>
+          <a:xfrm>
+            <a:off x="7476422" y="406630"/>
+            <a:ext cx="4305800" cy="2445525"/>
+            <a:chOff x="7484339" y="181744"/>
+            <a:chExt cx="4305800" cy="2445525"/>
+          </a:xfrm>
+        </p:grpSpPr>
+        <p:grpSp>
+          <p:nvGrpSpPr>
+            <p:cNvPr id="5" name="Group 4">
+              <a:extLst>
+                <a:ext uri="{FF2B5EF4-FFF2-40B4-BE49-F238E27FC236}">
+                  <a16:creationId xmlns:a16="http://schemas.microsoft.com/office/drawing/2014/main" id="{41B0B536-979D-AF86-E1AA-3EDC1D09F714}"/>
+                </a:ext>
+              </a:extLst>
+            </p:cNvPr>
+            <p:cNvGrpSpPr>
+              <a:grpSpLocks noChangeAspect="1"/>
+            </p:cNvGrpSpPr>
+            <p:nvPr/>
+          </p:nvGrpSpPr>
+          <p:grpSpPr>
+            <a:xfrm>
+              <a:off x="7484339" y="1329135"/>
+              <a:ext cx="2052000" cy="1269160"/>
+              <a:chOff x="7955797" y="1713756"/>
+              <a:chExt cx="2885092" cy="1784427"/>
+            </a:xfrm>
+          </p:grpSpPr>
+          <p:pic>
+            <p:nvPicPr>
+              <p:cNvPr id="4" name="Picture 3" descr="A black and red chemical structure&#10;&#10;AI-generated content may be incorrect.">
+                <a:extLst>
+                  <a:ext uri="{FF2B5EF4-FFF2-40B4-BE49-F238E27FC236}">
+                    <a16:creationId xmlns:a16="http://schemas.microsoft.com/office/drawing/2014/main" id="{9B8DE2D9-50FB-48E1-3766-F90DC4B43C31}"/>
+                  </a:ext>
+                </a:extLst>
+              </p:cNvPr>
+              <p:cNvPicPr>
+                <a:picLocks noChangeAspect="1"/>
+              </p:cNvPicPr>
+              <p:nvPr/>
+            </p:nvPicPr>
+            <p:blipFill>
+              <a:blip r:embed="rId6">
+                <a:extLst>
+                  <a:ext uri="{28A0092B-C50C-407E-A947-70E740481C1C}">
+                    <a14:useLocalDpi xmlns:a14="http://schemas.microsoft.com/office/drawing/2010/main" val="0"/>
+                  </a:ext>
+                </a:extLst>
+              </a:blip>
+              <a:srcRect l="26131" t="13384" r="50592" b="35527"/>
+              <a:stretch/>
+            </p:blipFill>
+            <p:spPr>
+              <a:xfrm>
+                <a:off x="7955797" y="1713756"/>
+                <a:ext cx="2885092" cy="1385205"/>
+              </a:xfrm>
+              <a:prstGeom prst="rect">
+                <a:avLst/>
+              </a:prstGeom>
+            </p:spPr>
+          </p:pic>
+          <p:pic>
+            <p:nvPicPr>
+              <p:cNvPr id="17" name="Picture 16" descr="A black and red chemical structure&#10;&#10;AI-generated content may be incorrect.">
+                <a:extLst>
+                  <a:ext uri="{FF2B5EF4-FFF2-40B4-BE49-F238E27FC236}">
+                    <a16:creationId xmlns:a16="http://schemas.microsoft.com/office/drawing/2014/main" id="{9A57B164-6AA0-9A5C-969C-361475D72D25}"/>
+                  </a:ext>
+                </a:extLst>
+              </p:cNvPr>
+              <p:cNvPicPr>
+                <a:picLocks noChangeAspect="1"/>
+              </p:cNvPicPr>
+              <p:nvPr/>
+            </p:nvPicPr>
+            <p:blipFill>
+              <a:blip r:embed="rId6">
+                <a:extLst>
+                  <a:ext uri="{28A0092B-C50C-407E-A947-70E740481C1C}">
+                    <a14:useLocalDpi xmlns:a14="http://schemas.microsoft.com/office/drawing/2010/main" val="0"/>
+                  </a:ext>
+                </a:extLst>
+              </a:blip>
+              <a:srcRect l="34138" t="87643" r="59329" b="4628"/>
+              <a:stretch/>
+            </p:blipFill>
+            <p:spPr>
+              <a:xfrm>
+                <a:off x="8883993" y="3231955"/>
+                <a:ext cx="1028700" cy="266228"/>
+              </a:xfrm>
+              <a:prstGeom prst="rect">
+                <a:avLst/>
+              </a:prstGeom>
+            </p:spPr>
+          </p:pic>
+        </p:grpSp>
+        <p:grpSp>
+          <p:nvGrpSpPr>
+            <p:cNvPr id="6" name="Group 5">
+              <a:extLst>
+                <a:ext uri="{FF2B5EF4-FFF2-40B4-BE49-F238E27FC236}">
+                  <a16:creationId xmlns:a16="http://schemas.microsoft.com/office/drawing/2014/main" id="{3AA3631B-3F0D-3733-0FDC-BBD18F86BEDB}"/>
+                </a:ext>
+              </a:extLst>
+            </p:cNvPr>
+            <p:cNvGrpSpPr>
+              <a:grpSpLocks noChangeAspect="1"/>
+            </p:cNvGrpSpPr>
+            <p:nvPr/>
+          </p:nvGrpSpPr>
+          <p:grpSpPr>
+            <a:xfrm>
+              <a:off x="9738139" y="1397550"/>
+              <a:ext cx="2052000" cy="1229719"/>
+              <a:chOff x="7951035" y="3350221"/>
+              <a:chExt cx="2894617" cy="1734681"/>
+            </a:xfrm>
+          </p:grpSpPr>
+          <p:pic>
+            <p:nvPicPr>
+              <p:cNvPr id="13" name="Picture 12" descr="A black and red chemical structure&#10;&#10;AI-generated content may be incorrect.">
+                <a:extLst>
+                  <a:ext uri="{FF2B5EF4-FFF2-40B4-BE49-F238E27FC236}">
+                    <a16:creationId xmlns:a16="http://schemas.microsoft.com/office/drawing/2014/main" id="{7E80FD93-EC36-7292-D41F-2AB7B9A8674E}"/>
+                  </a:ext>
+                </a:extLst>
+              </p:cNvPr>
+              <p:cNvPicPr>
+                <a:picLocks noChangeAspect="1"/>
+              </p:cNvPicPr>
+              <p:nvPr/>
+            </p:nvPicPr>
+            <p:blipFill>
+              <a:blip r:embed="rId6">
+                <a:extLst>
+                  <a:ext uri="{28A0092B-C50C-407E-A947-70E740481C1C}">
+                    <a14:useLocalDpi xmlns:a14="http://schemas.microsoft.com/office/drawing/2010/main" val="0"/>
+                  </a:ext>
+                </a:extLst>
+              </a:blip>
+              <a:srcRect l="51184" t="14586" r="25463" b="34325"/>
+              <a:stretch/>
+            </p:blipFill>
+            <p:spPr>
+              <a:xfrm>
+                <a:off x="7951035" y="3350221"/>
+                <a:ext cx="2894617" cy="1385206"/>
+              </a:xfrm>
+              <a:prstGeom prst="rect">
+                <a:avLst/>
+              </a:prstGeom>
+            </p:spPr>
+          </p:pic>
+          <p:pic>
+            <p:nvPicPr>
+              <p:cNvPr id="18" name="Picture 17" descr="A black and red chemical structure&#10;&#10;AI-generated content may be incorrect.">
+                <a:extLst>
+                  <a:ext uri="{FF2B5EF4-FFF2-40B4-BE49-F238E27FC236}">
+                    <a16:creationId xmlns:a16="http://schemas.microsoft.com/office/drawing/2014/main" id="{721B14D9-308B-88B5-4785-360A6C506019}"/>
+                  </a:ext>
+                </a:extLst>
+              </p:cNvPr>
+              <p:cNvPicPr>
+                <a:picLocks noChangeAspect="1"/>
+              </p:cNvPicPr>
+              <p:nvPr/>
+            </p:nvPicPr>
+            <p:blipFill>
+              <a:blip r:embed="rId6">
+                <a:extLst>
+                  <a:ext uri="{28A0092B-C50C-407E-A947-70E740481C1C}">
+                    <a14:useLocalDpi xmlns:a14="http://schemas.microsoft.com/office/drawing/2010/main" val="0"/>
+                  </a:ext>
+                </a:extLst>
+              </a:blip>
+              <a:srcRect l="59497" t="85098" r="34125" b="3309"/>
+              <a:stretch/>
+            </p:blipFill>
+            <p:spPr>
+              <a:xfrm>
+                <a:off x="8926807" y="4709945"/>
+                <a:ext cx="943073" cy="374957"/>
+              </a:xfrm>
+              <a:prstGeom prst="rect">
+                <a:avLst/>
+              </a:prstGeom>
+            </p:spPr>
+          </p:pic>
+        </p:grpSp>
+        <p:sp>
+          <p:nvSpPr>
+            <p:cNvPr id="9" name="TextBox 8">
+              <a:extLst>
+                <a:ext uri="{FF2B5EF4-FFF2-40B4-BE49-F238E27FC236}">
+                  <a16:creationId xmlns:a16="http://schemas.microsoft.com/office/drawing/2014/main" id="{641E8493-13A8-D084-AAF5-76892DBCDE12}"/>
+                </a:ext>
+              </a:extLst>
+            </p:cNvPr>
+            <p:cNvSpPr txBox="1"/>
+            <p:nvPr/>
+          </p:nvSpPr>
+          <p:spPr>
+            <a:xfrm>
+              <a:off x="8319300" y="181744"/>
+              <a:ext cx="2444839" cy="369332"/>
+            </a:xfrm>
+            <a:prstGeom prst="rect">
+              <a:avLst/>
+            </a:prstGeom>
+            <a:noFill/>
+          </p:spPr>
+          <p:txBody>
+            <a:bodyPr wrap="square" rtlCol="0">
+              <a:spAutoFit/>
+            </a:bodyPr>
+            <a:lstStyle/>
+            <a:p>
+              <a:pPr algn="ctr"/>
+              <a:r>
+                <a:rPr lang="en-US" sz="1800" b="1" dirty="0" err="1"/>
+                <a:t>MolCE</a:t>
+              </a:r>
+              <a:endParaRPr lang="de-DE" b="1" dirty="0"/>
+            </a:p>
+          </p:txBody>
+        </p:sp>
+      </p:grpSp>
+      <p:sp>
+        <p:nvSpPr>
+          <p:cNvPr id="22" name="Arrow: Right 21">
+            <a:extLst>
+              <a:ext uri="{FF2B5EF4-FFF2-40B4-BE49-F238E27FC236}">
+                <a16:creationId xmlns:a16="http://schemas.microsoft.com/office/drawing/2014/main" id="{CC3DB96C-E7DA-1AD3-B9F5-7FDA8BA9B3AD}"/>
+              </a:ext>
+            </a:extLst>
+          </p:cNvPr>
+          <p:cNvSpPr/>
+          <p:nvPr/>
+        </p:nvSpPr>
+        <p:spPr>
+          <a:xfrm rot="5400000">
+            <a:off x="786951" y="3558887"/>
+            <a:ext cx="666746" cy="374904"/>
+          </a:xfrm>
+          <a:prstGeom prst="rightArrow">
+            <a:avLst/>
+          </a:prstGeom>
+        </p:spPr>
+        <p:style>
+          <a:lnRef idx="2">
+            <a:schemeClr val="accent1">
+              <a:shade val="15000"/>
+            </a:schemeClr>
+          </a:lnRef>
+          <a:fillRef idx="1">
+            <a:schemeClr val="accent1"/>
+          </a:fillRef>
+          <a:effectRef idx="0">
+            <a:schemeClr val="accent1"/>
+          </a:effectRef>
+          <a:fontRef idx="minor">
+            <a:schemeClr val="lt1"/>
+          </a:fontRef>
+        </p:style>
+        <p:txBody>
+          <a:bodyPr rtlCol="0" anchor="ctr"/>
+          <a:lstStyle/>
+          <a:p>
+            <a:pPr algn="ctr"/>
+            <a:endParaRPr lang="en-US"/>
+          </a:p>
+        </p:txBody>
+      </p:sp>
+      <p:grpSp>
+        <p:nvGrpSpPr>
+          <p:cNvPr id="36" name="Group 35">
+            <a:extLst>
+              <a:ext uri="{FF2B5EF4-FFF2-40B4-BE49-F238E27FC236}">
+                <a16:creationId xmlns:a16="http://schemas.microsoft.com/office/drawing/2014/main" id="{9EC2A3B4-5B0E-882B-8458-F75AA108A5E6}"/>
+              </a:ext>
+            </a:extLst>
+          </p:cNvPr>
+          <p:cNvGrpSpPr/>
+          <p:nvPr/>
+        </p:nvGrpSpPr>
+        <p:grpSpPr>
+          <a:xfrm>
+            <a:off x="4841173" y="4522527"/>
+            <a:ext cx="6165816" cy="573974"/>
+            <a:chOff x="4841173" y="4193969"/>
+            <a:chExt cx="6165816" cy="573974"/>
+          </a:xfrm>
+        </p:grpSpPr>
+        <p:cxnSp>
+          <p:nvCxnSpPr>
+            <p:cNvPr id="24" name="Straight Arrow Connector 23">
+              <a:extLst>
+                <a:ext uri="{FF2B5EF4-FFF2-40B4-BE49-F238E27FC236}">
+                  <a16:creationId xmlns:a16="http://schemas.microsoft.com/office/drawing/2014/main" id="{FFDCAFC5-B9FC-083C-56A5-5CB45102C9FB}"/>
+                </a:ext>
+              </a:extLst>
+            </p:cNvPr>
+            <p:cNvCxnSpPr>
+              <a:cxnSpLocks/>
+            </p:cNvCxnSpPr>
+            <p:nvPr/>
+          </p:nvCxnSpPr>
+          <p:spPr>
+            <a:xfrm>
+              <a:off x="4841173" y="4480956"/>
+              <a:ext cx="1800000" cy="0"/>
+            </a:xfrm>
+            <a:prstGeom prst="straightConnector1">
+              <a:avLst/>
+            </a:prstGeom>
+            <a:ln>
+              <a:tailEnd type="triangle"/>
+            </a:ln>
+          </p:spPr>
+          <p:style>
+            <a:lnRef idx="2">
+              <a:schemeClr val="accent1"/>
+            </a:lnRef>
+            <a:fillRef idx="0">
+              <a:schemeClr val="accent1"/>
+            </a:fillRef>
+            <a:effectRef idx="1">
+              <a:schemeClr val="accent1"/>
+            </a:effectRef>
+            <a:fontRef idx="minor">
+              <a:schemeClr val="tx1"/>
+            </a:fontRef>
+          </p:style>
+        </p:cxnSp>
+        <p:sp>
+          <p:nvSpPr>
+            <p:cNvPr id="28" name="Rectangle: Rounded Corners 27">
+              <a:extLst>
+                <a:ext uri="{FF2B5EF4-FFF2-40B4-BE49-F238E27FC236}">
+                  <a16:creationId xmlns:a16="http://schemas.microsoft.com/office/drawing/2014/main" id="{5B927D80-0780-203A-8CD6-2AFA89094D43}"/>
+                </a:ext>
+              </a:extLst>
+            </p:cNvPr>
+            <p:cNvSpPr/>
+            <p:nvPr/>
+          </p:nvSpPr>
+          <p:spPr>
+            <a:xfrm>
+              <a:off x="7278137" y="4193969"/>
+              <a:ext cx="3728852" cy="573974"/>
+            </a:xfrm>
+            <a:prstGeom prst="roundRect">
+              <a:avLst/>
+            </a:prstGeom>
+            <a:solidFill>
+              <a:schemeClr val="bg1"/>
+            </a:solidFill>
+          </p:spPr>
+          <p:style>
+            <a:lnRef idx="2">
+              <a:schemeClr val="accent4">
+                <a:shade val="15000"/>
+              </a:schemeClr>
+            </a:lnRef>
+            <a:fillRef idx="1">
+              <a:schemeClr val="accent4"/>
+            </a:fillRef>
+            <a:effectRef idx="0">
+              <a:schemeClr val="accent4"/>
+            </a:effectRef>
+            <a:fontRef idx="minor">
+              <a:schemeClr val="lt1"/>
+            </a:fontRef>
+          </p:style>
+          <p:txBody>
+            <a:bodyPr rtlCol="0" anchor="ctr"/>
+            <a:lstStyle/>
+            <a:p>
+              <a:pPr algn="ctr"/>
+              <a:r>
+                <a:rPr lang="en-US" sz="1400" dirty="0">
+                  <a:solidFill>
+                    <a:schemeClr val="tx1"/>
+                  </a:solidFill>
+                </a:rPr>
+                <a:t>R-groups attached to the morpholine ring </a:t>
+              </a:r>
+              <a:endParaRPr lang="de-DE" sz="1400" dirty="0">
+                <a:solidFill>
+                  <a:schemeClr val="tx1"/>
+                </a:solidFill>
+              </a:endParaRPr>
+            </a:p>
+          </p:txBody>
+        </p:sp>
+      </p:grpSp>
+      <p:grpSp>
+        <p:nvGrpSpPr>
+          <p:cNvPr id="37" name="Group 36">
+            <a:extLst>
+              <a:ext uri="{FF2B5EF4-FFF2-40B4-BE49-F238E27FC236}">
+                <a16:creationId xmlns:a16="http://schemas.microsoft.com/office/drawing/2014/main" id="{94E61FAA-489A-631D-A169-A21283220D66}"/>
+              </a:ext>
+            </a:extLst>
+          </p:cNvPr>
+          <p:cNvGrpSpPr/>
+          <p:nvPr/>
+        </p:nvGrpSpPr>
+        <p:grpSpPr>
+          <a:xfrm>
+            <a:off x="4841173" y="5396256"/>
+            <a:ext cx="6165816" cy="1111401"/>
+            <a:chOff x="4841173" y="5067698"/>
+            <a:chExt cx="6165816" cy="1111401"/>
+          </a:xfrm>
+        </p:grpSpPr>
+        <p:cxnSp>
+          <p:nvCxnSpPr>
+            <p:cNvPr id="29" name="Straight Arrow Connector 28">
+              <a:extLst>
+                <a:ext uri="{FF2B5EF4-FFF2-40B4-BE49-F238E27FC236}">
+                  <a16:creationId xmlns:a16="http://schemas.microsoft.com/office/drawing/2014/main" id="{6BA7A5D6-C7CD-4C58-39DD-3212C8919ED5}"/>
+                </a:ext>
+              </a:extLst>
+            </p:cNvPr>
+            <p:cNvCxnSpPr>
+              <a:cxnSpLocks/>
+            </p:cNvCxnSpPr>
+            <p:nvPr/>
+          </p:nvCxnSpPr>
+          <p:spPr>
+            <a:xfrm>
+              <a:off x="4841173" y="5623398"/>
+              <a:ext cx="1800000" cy="0"/>
+            </a:xfrm>
+            <a:prstGeom prst="straightConnector1">
+              <a:avLst/>
+            </a:prstGeom>
+            <a:ln>
+              <a:tailEnd type="triangle"/>
+            </a:ln>
+          </p:spPr>
+          <p:style>
+            <a:lnRef idx="2">
+              <a:schemeClr val="accent1"/>
+            </a:lnRef>
+            <a:fillRef idx="0">
+              <a:schemeClr val="accent1"/>
+            </a:fillRef>
+            <a:effectRef idx="1">
+              <a:schemeClr val="accent1"/>
+            </a:effectRef>
+            <a:fontRef idx="minor">
+              <a:schemeClr val="tx1"/>
+            </a:fontRef>
+          </p:style>
+        </p:cxnSp>
+        <p:sp>
+          <p:nvSpPr>
+            <p:cNvPr id="30" name="Rectangle: Rounded Corners 29">
+              <a:extLst>
+                <a:ext uri="{FF2B5EF4-FFF2-40B4-BE49-F238E27FC236}">
+                  <a16:creationId xmlns:a16="http://schemas.microsoft.com/office/drawing/2014/main" id="{B0D4C90D-2A3D-51FF-63CF-89B19440DDFB}"/>
+                </a:ext>
+              </a:extLst>
+            </p:cNvPr>
+            <p:cNvSpPr/>
+            <p:nvPr/>
+          </p:nvSpPr>
+          <p:spPr>
+            <a:xfrm>
+              <a:off x="7278137" y="5067698"/>
+              <a:ext cx="3728852" cy="1111401"/>
+            </a:xfrm>
+            <a:prstGeom prst="roundRect">
+              <a:avLst/>
+            </a:prstGeom>
+            <a:solidFill>
+              <a:schemeClr val="bg1"/>
+            </a:solidFill>
+          </p:spPr>
+          <p:style>
+            <a:lnRef idx="2">
+              <a:schemeClr val="accent4">
+                <a:shade val="15000"/>
+              </a:schemeClr>
+            </a:lnRef>
+            <a:fillRef idx="1">
+              <a:schemeClr val="accent4"/>
+            </a:fillRef>
+            <a:effectRef idx="0">
+              <a:schemeClr val="accent4"/>
+            </a:effectRef>
+            <a:fontRef idx="minor">
+              <a:schemeClr val="lt1"/>
+            </a:fontRef>
+          </p:style>
+          <p:txBody>
+            <a:bodyPr rtlCol="0" anchor="ctr"/>
+            <a:lstStyle/>
+            <a:p>
+              <a:endParaRPr lang="en-US" sz="1400" dirty="0">
+                <a:solidFill>
+                  <a:schemeClr val="tx1"/>
+                </a:solidFill>
+              </a:endParaRPr>
+            </a:p>
+            <a:p>
+              <a:r>
+                <a:rPr lang="en-US" sz="1400" b="1" dirty="0" err="1">
+                  <a:solidFill>
+                    <a:schemeClr val="tx1"/>
+                  </a:solidFill>
+                </a:rPr>
+                <a:t>MolCE</a:t>
+              </a:r>
+              <a:r>
+                <a:rPr lang="en-US" sz="1400" dirty="0">
+                  <a:solidFill>
+                    <a:schemeClr val="tx1"/>
+                  </a:solidFill>
+                </a:rPr>
+                <a:t> - R-group that is “anti-activating”</a:t>
+              </a:r>
+            </a:p>
+            <a:p>
+              <a:endParaRPr lang="en-US" sz="1400" dirty="0">
+                <a:solidFill>
+                  <a:schemeClr val="tx1"/>
+                </a:solidFill>
+              </a:endParaRPr>
+            </a:p>
+            <a:p>
+              <a:r>
+                <a:rPr lang="en-US" sz="1400" b="1" dirty="0">
+                  <a:solidFill>
+                    <a:schemeClr val="tx1"/>
+                  </a:solidFill>
+                </a:rPr>
+                <a:t>Counterfactuals</a:t>
+              </a:r>
+              <a:r>
+                <a:rPr lang="en-US" sz="1400" dirty="0">
+                  <a:solidFill>
+                    <a:schemeClr val="tx1"/>
+                  </a:solidFill>
+                </a:rPr>
+                <a:t> - concrete examples of inactive molecules</a:t>
+              </a:r>
+            </a:p>
+            <a:p>
+              <a:r>
+                <a:rPr lang="en-US" sz="1400" dirty="0">
+                  <a:solidFill>
+                    <a:schemeClr val="tx1"/>
+                  </a:solidFill>
+                </a:rPr>
+                <a:t>   </a:t>
+              </a:r>
+              <a:endParaRPr lang="de-DE" sz="1400" dirty="0">
+                <a:solidFill>
+                  <a:schemeClr val="tx1"/>
+                </a:solidFill>
+              </a:endParaRPr>
+            </a:p>
+          </p:txBody>
+        </p:sp>
+      </p:grpSp>
+    </p:spTree>
+    <p:extLst>
+      <p:ext uri="{BB962C8B-B14F-4D97-AF65-F5344CB8AC3E}">
+        <p14:creationId xmlns:p14="http://schemas.microsoft.com/office/powerpoint/2010/main" val="377492229"/>
       </p:ext>
     </p:extLst>
   </p:cSld>
@@ -9099,13 +10240,13 @@
               </a:ext>
             </a:extLst>
           </a:blip>
-          <a:srcRect l="31035" t="24006" r="53731" b="44988"/>
+          <a:srcRect l="34461" t="24006" r="57359" b="46060"/>
           <a:stretch/>
         </p:blipFill>
         <p:spPr>
           <a:xfrm>
-            <a:off x="3436044" y="2054607"/>
-            <a:ext cx="2222549" cy="2392796"/>
+            <a:off x="4095410" y="2054607"/>
+            <a:ext cx="1193416" cy="2310063"/>
           </a:xfrm>
           <a:prstGeom prst="rect">
             <a:avLst/>
@@ -9212,8 +10353,8 @@
         </p:blipFill>
         <p:spPr>
           <a:xfrm>
-            <a:off x="5620740" y="1990807"/>
-            <a:ext cx="2105025" cy="2520397"/>
+            <a:off x="5759533" y="2152273"/>
+            <a:ext cx="1753787" cy="2099851"/>
           </a:xfrm>
           <a:prstGeom prst="rect">
             <a:avLst/>
@@ -9257,76 +10398,6 @@
       </p:pic>
       <p:pic>
         <p:nvPicPr>
-          <p:cNvPr id="15" name="Picture 14" descr="A screenshot of a graph&#10;&#10;AI-generated content may be incorrect.">
-            <a:extLst>
-              <a:ext uri="{FF2B5EF4-FFF2-40B4-BE49-F238E27FC236}">
-                <a16:creationId xmlns:a16="http://schemas.microsoft.com/office/drawing/2014/main" id="{413DC958-3438-AD99-8ED3-9413D987A5AC}"/>
-              </a:ext>
-            </a:extLst>
-          </p:cNvPr>
-          <p:cNvPicPr>
-            <a:picLocks noChangeAspect="1"/>
-          </p:cNvPicPr>
-          <p:nvPr/>
-        </p:nvPicPr>
-        <p:blipFill>
-          <a:blip r:embed="rId2">
-            <a:extLst>
-              <a:ext uri="{28A0092B-C50C-407E-A947-70E740481C1C}">
-                <a14:useLocalDpi xmlns:a14="http://schemas.microsoft.com/office/drawing/2010/main" val="0"/>
-              </a:ext>
-            </a:extLst>
-          </a:blip>
-          <a:srcRect l="31170" t="17838" r="53596" b="76213"/>
-          <a:stretch/>
-        </p:blipFill>
-        <p:spPr>
-          <a:xfrm>
-            <a:off x="3701051" y="4438366"/>
-            <a:ext cx="2222549" cy="459058"/>
-          </a:xfrm>
-          <a:prstGeom prst="rect">
-            <a:avLst/>
-          </a:prstGeom>
-        </p:spPr>
-      </p:pic>
-      <p:pic>
-        <p:nvPicPr>
-          <p:cNvPr id="16" name="Picture 15" descr="A screenshot of a graph&#10;&#10;AI-generated content may be incorrect.">
-            <a:extLst>
-              <a:ext uri="{FF2B5EF4-FFF2-40B4-BE49-F238E27FC236}">
-                <a16:creationId xmlns:a16="http://schemas.microsoft.com/office/drawing/2014/main" id="{65A8E5C2-6215-DED8-8284-904D83645C28}"/>
-              </a:ext>
-            </a:extLst>
-          </p:cNvPr>
-          <p:cNvPicPr>
-            <a:picLocks noChangeAspect="1"/>
-          </p:cNvPicPr>
-          <p:nvPr/>
-        </p:nvPicPr>
-        <p:blipFill>
-          <a:blip r:embed="rId2">
-            <a:extLst>
-              <a:ext uri="{28A0092B-C50C-407E-A947-70E740481C1C}">
-                <a14:useLocalDpi xmlns:a14="http://schemas.microsoft.com/office/drawing/2010/main" val="0"/>
-              </a:ext>
-            </a:extLst>
-          </a:blip>
-          <a:srcRect l="56362" t="18606" r="29209" b="76905"/>
-          <a:stretch/>
-        </p:blipFill>
-        <p:spPr>
-          <a:xfrm>
-            <a:off x="5885795" y="4506979"/>
-            <a:ext cx="2105025" cy="346430"/>
-          </a:xfrm>
-          <a:prstGeom prst="rect">
-            <a:avLst/>
-          </a:prstGeom>
-        </p:spPr>
-      </p:pic>
-      <p:pic>
-        <p:nvPicPr>
           <p:cNvPr id="4" name="Picture 3" descr="A black and red chemical structure&#10;&#10;AI-generated content may be incorrect.">
             <a:extLst>
               <a:ext uri="{FF2B5EF4-FFF2-40B4-BE49-F238E27FC236}">
@@ -9354,76 +10425,6 @@
           <a:xfrm>
             <a:off x="7955797" y="1713756"/>
             <a:ext cx="2885092" cy="1385205"/>
-          </a:xfrm>
-          <a:prstGeom prst="rect">
-            <a:avLst/>
-          </a:prstGeom>
-        </p:spPr>
-      </p:pic>
-      <p:pic>
-        <p:nvPicPr>
-          <p:cNvPr id="17" name="Picture 16" descr="A black and red chemical structure&#10;&#10;AI-generated content may be incorrect.">
-            <a:extLst>
-              <a:ext uri="{FF2B5EF4-FFF2-40B4-BE49-F238E27FC236}">
-                <a16:creationId xmlns:a16="http://schemas.microsoft.com/office/drawing/2014/main" id="{9A57B164-6AA0-9A5C-969C-361475D72D25}"/>
-              </a:ext>
-            </a:extLst>
-          </p:cNvPr>
-          <p:cNvPicPr>
-            <a:picLocks noChangeAspect="1"/>
-          </p:cNvPicPr>
-          <p:nvPr/>
-        </p:nvPicPr>
-        <p:blipFill>
-          <a:blip r:embed="rId3">
-            <a:extLst>
-              <a:ext uri="{28A0092B-C50C-407E-A947-70E740481C1C}">
-                <a14:useLocalDpi xmlns:a14="http://schemas.microsoft.com/office/drawing/2010/main" val="0"/>
-              </a:ext>
-            </a:extLst>
-          </a:blip>
-          <a:srcRect l="34138" t="87643" r="59329" b="4628"/>
-          <a:stretch/>
-        </p:blipFill>
-        <p:spPr>
-          <a:xfrm>
-            <a:off x="8883993" y="3231955"/>
-            <a:ext cx="1028700" cy="266228"/>
-          </a:xfrm>
-          <a:prstGeom prst="rect">
-            <a:avLst/>
-          </a:prstGeom>
-        </p:spPr>
-      </p:pic>
-      <p:pic>
-        <p:nvPicPr>
-          <p:cNvPr id="18" name="Picture 17" descr="A black and red chemical structure&#10;&#10;AI-generated content may be incorrect.">
-            <a:extLst>
-              <a:ext uri="{FF2B5EF4-FFF2-40B4-BE49-F238E27FC236}">
-                <a16:creationId xmlns:a16="http://schemas.microsoft.com/office/drawing/2014/main" id="{721B14D9-308B-88B5-4785-360A6C506019}"/>
-              </a:ext>
-            </a:extLst>
-          </p:cNvPr>
-          <p:cNvPicPr>
-            <a:picLocks noChangeAspect="1"/>
-          </p:cNvPicPr>
-          <p:nvPr/>
-        </p:nvPicPr>
-        <p:blipFill>
-          <a:blip r:embed="rId3">
-            <a:extLst>
-              <a:ext uri="{28A0092B-C50C-407E-A947-70E740481C1C}">
-                <a14:useLocalDpi xmlns:a14="http://schemas.microsoft.com/office/drawing/2010/main" val="0"/>
-              </a:ext>
-            </a:extLst>
-          </a:blip>
-          <a:srcRect l="59497" t="85098" r="34125" b="3309"/>
-          <a:stretch/>
-        </p:blipFill>
-        <p:spPr>
-          <a:xfrm>
-            <a:off x="8926807" y="4709945"/>
-            <a:ext cx="943073" cy="374957"/>
           </a:xfrm>
           <a:prstGeom prst="rect">
             <a:avLst/>
@@ -9698,6 +10699,320 @@
           </a:p>
         </p:txBody>
       </p:sp>
+      <p:sp>
+        <p:nvSpPr>
+          <p:cNvPr id="14" name="TextBox 13">
+            <a:extLst>
+              <a:ext uri="{FF2B5EF4-FFF2-40B4-BE49-F238E27FC236}">
+                <a16:creationId xmlns:a16="http://schemas.microsoft.com/office/drawing/2014/main" id="{19ABD7B2-8157-4F97-A7A1-AEA0F2532064}"/>
+              </a:ext>
+            </a:extLst>
+          </p:cNvPr>
+          <p:cNvSpPr txBox="1"/>
+          <p:nvPr/>
+        </p:nvSpPr>
+        <p:spPr>
+          <a:xfrm>
+            <a:off x="3576033" y="4315061"/>
+            <a:ext cx="2232171" cy="415498"/>
+          </a:xfrm>
+          <a:prstGeom prst="rect">
+            <a:avLst/>
+          </a:prstGeom>
+          <a:noFill/>
+        </p:spPr>
+        <p:txBody>
+          <a:bodyPr wrap="square" rtlCol="0">
+            <a:spAutoFit/>
+          </a:bodyPr>
+          <a:lstStyle/>
+          <a:p>
+            <a:pPr algn="ctr"/>
+            <a:r>
+              <a:rPr lang="en-US" sz="1050" b="1" i="0" dirty="0">
+                <a:solidFill>
+                  <a:srgbClr val="0F0F0F"/>
+                </a:solidFill>
+                <a:effectLst/>
+                <a:latin typeface="ui-sans-serif"/>
+              </a:rPr>
+              <a:t>CF #1 (substituent)</a:t>
+            </a:r>
+          </a:p>
+          <a:p>
+            <a:pPr algn="ctr"/>
+            <a:r>
+              <a:rPr lang="en-US" sz="1050" b="1" i="0" dirty="0">
+                <a:solidFill>
+                  <a:srgbClr val="0F0F0F"/>
+                </a:solidFill>
+                <a:effectLst/>
+                <a:latin typeface="ui-sans-serif"/>
+              </a:rPr>
+              <a:t>Predicted class: 0 | Similarity: 0.68</a:t>
+            </a:r>
+          </a:p>
+        </p:txBody>
+      </p:sp>
+      <p:sp>
+        <p:nvSpPr>
+          <p:cNvPr id="23" name="TextBox 22">
+            <a:extLst>
+              <a:ext uri="{FF2B5EF4-FFF2-40B4-BE49-F238E27FC236}">
+                <a16:creationId xmlns:a16="http://schemas.microsoft.com/office/drawing/2014/main" id="{CA663BFA-8E8B-7F69-63C0-E0D19EE3C9A3}"/>
+              </a:ext>
+            </a:extLst>
+          </p:cNvPr>
+          <p:cNvSpPr txBox="1"/>
+          <p:nvPr/>
+        </p:nvSpPr>
+        <p:spPr>
+          <a:xfrm>
+            <a:off x="8282258" y="3144053"/>
+            <a:ext cx="2232171" cy="415498"/>
+          </a:xfrm>
+          <a:prstGeom prst="rect">
+            <a:avLst/>
+          </a:prstGeom>
+          <a:noFill/>
+        </p:spPr>
+        <p:txBody>
+          <a:bodyPr wrap="square" rtlCol="0">
+            <a:spAutoFit/>
+          </a:bodyPr>
+          <a:lstStyle/>
+          <a:p>
+            <a:pPr algn="ctr"/>
+            <a:r>
+              <a:rPr lang="en-US" sz="1050" b="1" i="0" dirty="0">
+                <a:solidFill>
+                  <a:srgbClr val="0F0F0F"/>
+                </a:solidFill>
+                <a:effectLst/>
+                <a:latin typeface="ui-sans-serif"/>
+              </a:rPr>
+              <a:t>Rank 1 |</a:t>
+            </a:r>
+            <a:r>
+              <a:rPr lang="en-US" sz="1050" i="0" dirty="0">
+                <a:solidFill>
+                  <a:srgbClr val="0F0F0F"/>
+                </a:solidFill>
+                <a:effectLst/>
+                <a:latin typeface="ui-sans-serif"/>
+              </a:rPr>
+              <a:t> </a:t>
+            </a:r>
+            <a:r>
+              <a:rPr lang="en-US" sz="1050" b="1" dirty="0">
+                <a:solidFill>
+                  <a:srgbClr val="0F0F0F"/>
+                </a:solidFill>
+                <a:latin typeface="ui-sans-serif"/>
+              </a:rPr>
+              <a:t>S</a:t>
+            </a:r>
+            <a:r>
+              <a:rPr lang="en-US" sz="1050" b="1" i="0" dirty="0">
+                <a:solidFill>
+                  <a:srgbClr val="0F0F0F"/>
+                </a:solidFill>
+                <a:effectLst/>
+                <a:latin typeface="ui-sans-serif"/>
+              </a:rPr>
+              <a:t>ite 1</a:t>
+            </a:r>
+          </a:p>
+          <a:p>
+            <a:pPr algn="ctr"/>
+            <a:r>
+              <a:rPr lang="en-US" sz="1050" b="1" dirty="0">
+                <a:solidFill>
+                  <a:srgbClr val="0F0F0F"/>
+                </a:solidFill>
+                <a:latin typeface="ui-sans-serif"/>
+              </a:rPr>
+              <a:t>Contrast=1.000</a:t>
+            </a:r>
+          </a:p>
+        </p:txBody>
+      </p:sp>
+      <p:sp>
+        <p:nvSpPr>
+          <p:cNvPr id="28" name="TextBox 27">
+            <a:extLst>
+              <a:ext uri="{FF2B5EF4-FFF2-40B4-BE49-F238E27FC236}">
+                <a16:creationId xmlns:a16="http://schemas.microsoft.com/office/drawing/2014/main" id="{F7627D14-7209-3B49-CEB9-EE4601EF1E11}"/>
+              </a:ext>
+            </a:extLst>
+          </p:cNvPr>
+          <p:cNvSpPr txBox="1"/>
+          <p:nvPr/>
+        </p:nvSpPr>
+        <p:spPr>
+          <a:xfrm>
+            <a:off x="5695960" y="4315061"/>
+            <a:ext cx="2232171" cy="415498"/>
+          </a:xfrm>
+          <a:prstGeom prst="rect">
+            <a:avLst/>
+          </a:prstGeom>
+          <a:noFill/>
+        </p:spPr>
+        <p:txBody>
+          <a:bodyPr wrap="square" rtlCol="0">
+            <a:spAutoFit/>
+          </a:bodyPr>
+          <a:lstStyle/>
+          <a:p>
+            <a:pPr algn="ctr"/>
+            <a:r>
+              <a:rPr lang="en-US" sz="1050" b="1" i="0" dirty="0">
+                <a:solidFill>
+                  <a:srgbClr val="0F0F0F"/>
+                </a:solidFill>
+                <a:effectLst/>
+                <a:latin typeface="ui-sans-serif"/>
+              </a:rPr>
+              <a:t>CF #</a:t>
+            </a:r>
+            <a:r>
+              <a:rPr lang="en-US" sz="1050" b="1" dirty="0">
+                <a:solidFill>
+                  <a:srgbClr val="0F0F0F"/>
+                </a:solidFill>
+                <a:latin typeface="ui-sans-serif"/>
+              </a:rPr>
+              <a:t>2</a:t>
+            </a:r>
+            <a:r>
+              <a:rPr lang="en-US" sz="1050" b="1" i="0" dirty="0">
+                <a:solidFill>
+                  <a:srgbClr val="0F0F0F"/>
+                </a:solidFill>
+                <a:effectLst/>
+                <a:latin typeface="ui-sans-serif"/>
+              </a:rPr>
+              <a:t> (substituent)</a:t>
+            </a:r>
+          </a:p>
+          <a:p>
+            <a:pPr algn="ctr"/>
+            <a:r>
+              <a:rPr lang="en-US" sz="1050" b="1" i="0" dirty="0">
+                <a:solidFill>
+                  <a:srgbClr val="0F0F0F"/>
+                </a:solidFill>
+                <a:effectLst/>
+                <a:latin typeface="ui-sans-serif"/>
+              </a:rPr>
+              <a:t>Predicted class: 0 | Similarity: 0.68</a:t>
+            </a:r>
+          </a:p>
+        </p:txBody>
+      </p:sp>
+      <p:sp>
+        <p:nvSpPr>
+          <p:cNvPr id="29" name="TextBox 28">
+            <a:extLst>
+              <a:ext uri="{FF2B5EF4-FFF2-40B4-BE49-F238E27FC236}">
+                <a16:creationId xmlns:a16="http://schemas.microsoft.com/office/drawing/2014/main" id="{6366E646-EC2F-3FBD-FB62-577F699A0BC9}"/>
+              </a:ext>
+            </a:extLst>
+          </p:cNvPr>
+          <p:cNvSpPr txBox="1"/>
+          <p:nvPr/>
+        </p:nvSpPr>
+        <p:spPr>
+          <a:xfrm>
+            <a:off x="8282258" y="4698661"/>
+            <a:ext cx="2232171" cy="415498"/>
+          </a:xfrm>
+          <a:prstGeom prst="rect">
+            <a:avLst/>
+          </a:prstGeom>
+          <a:noFill/>
+        </p:spPr>
+        <p:txBody>
+          <a:bodyPr wrap="square" rtlCol="0">
+            <a:spAutoFit/>
+          </a:bodyPr>
+          <a:lstStyle/>
+          <a:p>
+            <a:pPr algn="ctr"/>
+            <a:r>
+              <a:rPr lang="en-US" sz="1050" b="1" i="0" dirty="0">
+                <a:solidFill>
+                  <a:srgbClr val="0F0F0F"/>
+                </a:solidFill>
+                <a:effectLst/>
+                <a:latin typeface="ui-sans-serif"/>
+              </a:rPr>
+              <a:t>Rank </a:t>
+            </a:r>
+            <a:r>
+              <a:rPr lang="en-US" sz="1050" b="1" dirty="0">
+                <a:solidFill>
+                  <a:srgbClr val="0F0F0F"/>
+                </a:solidFill>
+                <a:latin typeface="ui-sans-serif"/>
+              </a:rPr>
+              <a:t>2</a:t>
+            </a:r>
+            <a:r>
+              <a:rPr lang="en-US" sz="1050" b="1" i="0" dirty="0">
+                <a:solidFill>
+                  <a:srgbClr val="0F0F0F"/>
+                </a:solidFill>
+                <a:effectLst/>
+                <a:latin typeface="ui-sans-serif"/>
+              </a:rPr>
+              <a:t> |</a:t>
+            </a:r>
+            <a:r>
+              <a:rPr lang="en-US" sz="1050" i="0" dirty="0">
+                <a:solidFill>
+                  <a:srgbClr val="0F0F0F"/>
+                </a:solidFill>
+                <a:effectLst/>
+                <a:latin typeface="ui-sans-serif"/>
+              </a:rPr>
+              <a:t> </a:t>
+            </a:r>
+            <a:r>
+              <a:rPr lang="en-US" sz="1050" b="1" dirty="0">
+                <a:solidFill>
+                  <a:srgbClr val="0F0F0F"/>
+                </a:solidFill>
+                <a:latin typeface="ui-sans-serif"/>
+              </a:rPr>
+              <a:t>S</a:t>
+            </a:r>
+            <a:r>
+              <a:rPr lang="en-US" sz="1050" b="1" i="0" dirty="0">
+                <a:solidFill>
+                  <a:srgbClr val="0F0F0F"/>
+                </a:solidFill>
+                <a:effectLst/>
+                <a:latin typeface="ui-sans-serif"/>
+              </a:rPr>
+              <a:t>ite 1</a:t>
+            </a:r>
+          </a:p>
+          <a:p>
+            <a:pPr algn="ctr"/>
+            <a:r>
+              <a:rPr lang="en-US" sz="1050" b="1" dirty="0">
+                <a:solidFill>
+                  <a:srgbClr val="0F0F0F"/>
+                </a:solidFill>
+                <a:latin typeface="ui-sans-serif"/>
+              </a:rPr>
+              <a:t>Contrast=1.000</a:t>
+            </a:r>
+          </a:p>
+        </p:txBody>
+      </p:sp>
     </p:spTree>
     <p:extLst>
       <p:ext uri="{BB962C8B-B14F-4D97-AF65-F5344CB8AC3E}">
@@ -9712,7 +11027,7 @@
 </file>
 
 <file path=ppt/slides/slide6.xml><?xml version="1.0" encoding="utf-8"?>
-<p:sld xmlns:a="http://schemas.openxmlformats.org/drawingml/2006/main" xmlns:r="http://schemas.openxmlformats.org/officeDocument/2006/relationships" xmlns:p="http://schemas.openxmlformats.org/presentationml/2006/main">
+<p:sld xmlns:a="http://schemas.openxmlformats.org/drawingml/2006/main" xmlns:r="http://schemas.openxmlformats.org/officeDocument/2006/relationships" xmlns:p="http://schemas.openxmlformats.org/presentationml/2006/main" show="0">
   <p:cSld>
     <p:spTree>
       <p:nvGrpSpPr>
@@ -10321,6 +11636,1739 @@
 </file>
 
 <file path=ppt/slides/slide7.xml><?xml version="1.0" encoding="utf-8"?>
+<p:sld xmlns:a="http://schemas.openxmlformats.org/drawingml/2006/main" xmlns:r="http://schemas.openxmlformats.org/officeDocument/2006/relationships" xmlns:p="http://schemas.openxmlformats.org/presentationml/2006/main">
+  <p:cSld>
+    <p:spTree>
+      <p:nvGrpSpPr>
+        <p:cNvPr id="1" name=""/>
+        <p:cNvGrpSpPr/>
+        <p:nvPr/>
+      </p:nvGrpSpPr>
+      <p:grpSpPr>
+        <a:xfrm>
+          <a:off x="0" y="0"/>
+          <a:ext cx="0" cy="0"/>
+          <a:chOff x="0" y="0"/>
+          <a:chExt cx="0" cy="0"/>
+        </a:xfrm>
+      </p:grpSpPr>
+      <p:pic>
+        <p:nvPicPr>
+          <p:cNvPr id="11" name="Picture 10" descr="A black and red hexagons&#10;&#10;AI-generated content may be incorrect.">
+            <a:extLst>
+              <a:ext uri="{FF2B5EF4-FFF2-40B4-BE49-F238E27FC236}">
+                <a16:creationId xmlns:a16="http://schemas.microsoft.com/office/drawing/2014/main" id="{D10BBB06-6F22-7DB6-F8CF-B785343E44D8}"/>
+              </a:ext>
+            </a:extLst>
+          </p:cNvPr>
+          <p:cNvPicPr>
+            <a:picLocks noChangeAspect="1"/>
+          </p:cNvPicPr>
+          <p:nvPr/>
+        </p:nvPicPr>
+        <p:blipFill>
+          <a:blip r:embed="rId2">
+            <a:extLst>
+              <a:ext uri="{28A0092B-C50C-407E-A947-70E740481C1C}">
+                <a14:useLocalDpi xmlns:a14="http://schemas.microsoft.com/office/drawing/2010/main" val="0"/>
+              </a:ext>
+            </a:extLst>
+          </a:blip>
+          <a:srcRect r="60622" b="25829"/>
+          <a:stretch/>
+        </p:blipFill>
+        <p:spPr>
+          <a:xfrm>
+            <a:off x="2948780" y="1828082"/>
+            <a:ext cx="4320818" cy="1492081"/>
+          </a:xfrm>
+          <a:prstGeom prst="rect">
+            <a:avLst/>
+          </a:prstGeom>
+        </p:spPr>
+      </p:pic>
+      <p:grpSp>
+        <p:nvGrpSpPr>
+          <p:cNvPr id="2" name="Group 1">
+            <a:extLst>
+              <a:ext uri="{FF2B5EF4-FFF2-40B4-BE49-F238E27FC236}">
+                <a16:creationId xmlns:a16="http://schemas.microsoft.com/office/drawing/2014/main" id="{C3474ED7-8B1C-A7CA-4B57-5BD7E484107E}"/>
+              </a:ext>
+            </a:extLst>
+          </p:cNvPr>
+          <p:cNvGrpSpPr/>
+          <p:nvPr/>
+        </p:nvGrpSpPr>
+        <p:grpSpPr>
+          <a:xfrm>
+            <a:off x="306102" y="2273968"/>
+            <a:ext cx="1774658" cy="2310063"/>
+            <a:chOff x="990492" y="2511372"/>
+            <a:chExt cx="1774658" cy="2310063"/>
+          </a:xfrm>
+        </p:grpSpPr>
+        <p:sp>
+          <p:nvSpPr>
+            <p:cNvPr id="22" name="Rectangle 21">
+              <a:extLst>
+                <a:ext uri="{FF2B5EF4-FFF2-40B4-BE49-F238E27FC236}">
+                  <a16:creationId xmlns:a16="http://schemas.microsoft.com/office/drawing/2014/main" id="{67C11FFD-9BC3-9E76-E6A1-CB29619ABACF}"/>
+                </a:ext>
+              </a:extLst>
+            </p:cNvPr>
+            <p:cNvSpPr/>
+            <p:nvPr/>
+          </p:nvSpPr>
+          <p:spPr>
+            <a:xfrm>
+              <a:off x="990492" y="2511372"/>
+              <a:ext cx="1774658" cy="2310063"/>
+            </a:xfrm>
+            <a:prstGeom prst="rect">
+              <a:avLst/>
+            </a:prstGeom>
+            <a:solidFill>
+              <a:schemeClr val="accent1">
+                <a:lumMod val="20000"/>
+                <a:lumOff val="80000"/>
+              </a:schemeClr>
+            </a:solidFill>
+            <a:ln>
+              <a:solidFill>
+                <a:schemeClr val="tx2">
+                  <a:lumMod val="25000"/>
+                  <a:lumOff val="75000"/>
+                </a:schemeClr>
+              </a:solidFill>
+            </a:ln>
+          </p:spPr>
+          <p:style>
+            <a:lnRef idx="2">
+              <a:schemeClr val="accent1">
+                <a:shade val="15000"/>
+              </a:schemeClr>
+            </a:lnRef>
+            <a:fillRef idx="1">
+              <a:schemeClr val="accent1"/>
+            </a:fillRef>
+            <a:effectRef idx="0">
+              <a:schemeClr val="accent1"/>
+            </a:effectRef>
+            <a:fontRef idx="minor">
+              <a:schemeClr val="lt1"/>
+            </a:fontRef>
+          </p:style>
+          <p:txBody>
+            <a:bodyPr rtlCol="0" anchor="ctr"/>
+            <a:lstStyle/>
+            <a:p>
+              <a:pPr algn="ctr"/>
+              <a:endParaRPr lang="en-US" dirty="0"/>
+            </a:p>
+          </p:txBody>
+        </p:sp>
+        <p:pic>
+          <p:nvPicPr>
+            <p:cNvPr id="23" name="Graphic 22" descr="Customer review with solid fill">
+              <a:extLst>
+                <a:ext uri="{FF2B5EF4-FFF2-40B4-BE49-F238E27FC236}">
+                  <a16:creationId xmlns:a16="http://schemas.microsoft.com/office/drawing/2014/main" id="{EF58B09A-9C24-1ECA-3231-0C704AF994F8}"/>
+                </a:ext>
+              </a:extLst>
+            </p:cNvPr>
+            <p:cNvPicPr>
+              <a:picLocks noChangeAspect="1"/>
+            </p:cNvPicPr>
+            <p:nvPr/>
+          </p:nvPicPr>
+          <p:blipFill>
+            <a:blip r:embed="rId3">
+              <a:extLst>
+                <a:ext uri="{96DAC541-7B7A-43D3-8B79-37D633B846F1}">
+                  <asvg:svgBlip xmlns:asvg="http://schemas.microsoft.com/office/drawing/2016/SVG/main" r:embed="rId4"/>
+                </a:ext>
+              </a:extLst>
+            </a:blip>
+            <a:stretch>
+              <a:fillRect/>
+            </a:stretch>
+          </p:blipFill>
+          <p:spPr>
+            <a:xfrm>
+              <a:off x="1400027" y="3700649"/>
+              <a:ext cx="965534" cy="965534"/>
+            </a:xfrm>
+            <a:prstGeom prst="rect">
+              <a:avLst/>
+            </a:prstGeom>
+          </p:spPr>
+        </p:pic>
+        <p:pic>
+          <p:nvPicPr>
+            <p:cNvPr id="24" name="Picture 23">
+              <a:extLst>
+                <a:ext uri="{FF2B5EF4-FFF2-40B4-BE49-F238E27FC236}">
+                  <a16:creationId xmlns:a16="http://schemas.microsoft.com/office/drawing/2014/main" id="{0947EFEA-9CFB-4E92-FC85-01152E5CB9EC}"/>
+                </a:ext>
+              </a:extLst>
+            </p:cNvPr>
+            <p:cNvPicPr>
+              <a:picLocks noChangeAspect="1"/>
+            </p:cNvPicPr>
+            <p:nvPr/>
+          </p:nvPicPr>
+          <p:blipFill>
+            <a:blip r:embed="rId5"/>
+            <a:stretch>
+              <a:fillRect/>
+            </a:stretch>
+          </p:blipFill>
+          <p:spPr>
+            <a:xfrm>
+              <a:off x="1126882" y="2607575"/>
+              <a:ext cx="1525117" cy="996871"/>
+            </a:xfrm>
+            <a:prstGeom prst="rect">
+              <a:avLst/>
+            </a:prstGeom>
+          </p:spPr>
+        </p:pic>
+      </p:grpSp>
+      <p:sp>
+        <p:nvSpPr>
+          <p:cNvPr id="7" name="Arrow: Right 6">
+            <a:extLst>
+              <a:ext uri="{FF2B5EF4-FFF2-40B4-BE49-F238E27FC236}">
+                <a16:creationId xmlns:a16="http://schemas.microsoft.com/office/drawing/2014/main" id="{253C9BC8-562F-6E75-D860-36BBDA1C4DD5}"/>
+              </a:ext>
+            </a:extLst>
+          </p:cNvPr>
+          <p:cNvSpPr/>
+          <p:nvPr/>
+        </p:nvSpPr>
+        <p:spPr>
+          <a:xfrm>
+            <a:off x="2181397" y="3219061"/>
+            <a:ext cx="666746" cy="374904"/>
+          </a:xfrm>
+          <a:prstGeom prst="rightArrow">
+            <a:avLst/>
+          </a:prstGeom>
+        </p:spPr>
+        <p:style>
+          <a:lnRef idx="2">
+            <a:schemeClr val="accent1">
+              <a:shade val="15000"/>
+            </a:schemeClr>
+          </a:lnRef>
+          <a:fillRef idx="1">
+            <a:schemeClr val="accent1"/>
+          </a:fillRef>
+          <a:effectRef idx="0">
+            <a:schemeClr val="accent1"/>
+          </a:effectRef>
+          <a:fontRef idx="minor">
+            <a:schemeClr val="lt1"/>
+          </a:fontRef>
+        </p:style>
+        <p:txBody>
+          <a:bodyPr rtlCol="0" anchor="ctr"/>
+          <a:lstStyle/>
+          <a:p>
+            <a:pPr algn="ctr"/>
+            <a:endParaRPr lang="en-US"/>
+          </a:p>
+        </p:txBody>
+      </p:sp>
+      <p:sp>
+        <p:nvSpPr>
+          <p:cNvPr id="4" name="TextBox 3">
+            <a:extLst>
+              <a:ext uri="{FF2B5EF4-FFF2-40B4-BE49-F238E27FC236}">
+                <a16:creationId xmlns:a16="http://schemas.microsoft.com/office/drawing/2014/main" id="{D719E08A-F8F7-F1C2-289E-BEE6ADEC6D96}"/>
+              </a:ext>
+            </a:extLst>
+          </p:cNvPr>
+          <p:cNvSpPr txBox="1"/>
+          <p:nvPr/>
+        </p:nvSpPr>
+        <p:spPr>
+          <a:xfrm>
+            <a:off x="2911012" y="3418140"/>
+            <a:ext cx="2232171" cy="577081"/>
+          </a:xfrm>
+          <a:prstGeom prst="rect">
+            <a:avLst/>
+          </a:prstGeom>
+          <a:noFill/>
+        </p:spPr>
+        <p:txBody>
+          <a:bodyPr wrap="square" rtlCol="0">
+            <a:spAutoFit/>
+          </a:bodyPr>
+          <a:lstStyle/>
+          <a:p>
+            <a:pPr algn="ctr"/>
+            <a:r>
+              <a:rPr lang="en-US" sz="1050" b="1" i="0" dirty="0">
+                <a:solidFill>
+                  <a:srgbClr val="0F0F0F"/>
+                </a:solidFill>
+                <a:effectLst/>
+                <a:latin typeface="ui-sans-serif"/>
+              </a:rPr>
+              <a:t>Rank 1</a:t>
+            </a:r>
+          </a:p>
+          <a:p>
+            <a:pPr algn="ctr"/>
+            <a:r>
+              <a:rPr lang="en-US" sz="1050" b="1" dirty="0">
+                <a:solidFill>
+                  <a:srgbClr val="0F0F0F"/>
+                </a:solidFill>
+                <a:latin typeface="ui-sans-serif"/>
+              </a:rPr>
+              <a:t>Anchor occurrence: 0.26</a:t>
+            </a:r>
+          </a:p>
+          <a:p>
+            <a:pPr algn="ctr"/>
+            <a:r>
+              <a:rPr lang="en-US" sz="1050" b="1" dirty="0">
+                <a:solidFill>
+                  <a:srgbClr val="0F0F0F"/>
+                </a:solidFill>
+                <a:latin typeface="ui-sans-serif"/>
+              </a:rPr>
+              <a:t>Substructure occurrence: 0.26</a:t>
+            </a:r>
+            <a:endParaRPr lang="en-US" sz="1050" dirty="0"/>
+          </a:p>
+        </p:txBody>
+      </p:sp>
+      <p:sp>
+        <p:nvSpPr>
+          <p:cNvPr id="6" name="TextBox 5">
+            <a:extLst>
+              <a:ext uri="{FF2B5EF4-FFF2-40B4-BE49-F238E27FC236}">
+                <a16:creationId xmlns:a16="http://schemas.microsoft.com/office/drawing/2014/main" id="{24D10174-F2DB-6196-3F7D-453B201E636A}"/>
+              </a:ext>
+            </a:extLst>
+          </p:cNvPr>
+          <p:cNvSpPr txBox="1"/>
+          <p:nvPr/>
+        </p:nvSpPr>
+        <p:spPr>
+          <a:xfrm>
+            <a:off x="7599034" y="4093085"/>
+            <a:ext cx="4154336" cy="1384995"/>
+          </a:xfrm>
+          <a:prstGeom prst="rect">
+            <a:avLst/>
+          </a:prstGeom>
+          <a:noFill/>
+        </p:spPr>
+        <p:txBody>
+          <a:bodyPr wrap="square" rtlCol="0">
+            <a:spAutoFit/>
+          </a:bodyPr>
+          <a:lstStyle/>
+          <a:p>
+            <a:pPr marL="228600" indent="-228600" algn="just">
+              <a:buFont typeface="+mj-lt"/>
+              <a:buAutoNum type="arabicPeriod"/>
+            </a:pPr>
+            <a:r>
+              <a:rPr lang="en-US" sz="1200" dirty="0"/>
+              <a:t>[*]c1ccn2nc(N)c([*])c2n1: Occurs in 36.4% of anchors. A </a:t>
+            </a:r>
+            <a:r>
+              <a:rPr lang="en-US" sz="1200" b="1" dirty="0"/>
+              <a:t>substituted </a:t>
+            </a:r>
+            <a:r>
+              <a:rPr lang="en-US" sz="1200" b="1" dirty="0" err="1"/>
+              <a:t>isoquinoline</a:t>
+            </a:r>
+            <a:r>
+              <a:rPr lang="en-US" sz="1200" b="1" dirty="0"/>
+              <a:t>/pyrazolo-pyridine core</a:t>
+            </a:r>
+            <a:r>
+              <a:rPr lang="en-US" sz="1200" dirty="0"/>
+              <a:t>, highly characteristic of PI3K-gamma selective inhibitors.</a:t>
+            </a:r>
+          </a:p>
+          <a:p>
+            <a:pPr marL="228600" indent="-228600" algn="just">
+              <a:buFont typeface="+mj-lt"/>
+              <a:buAutoNum type="arabicPeriod"/>
+            </a:pPr>
+            <a:endParaRPr lang="en-US" sz="1200" dirty="0"/>
+          </a:p>
+          <a:p>
+            <a:pPr marL="228600" indent="-228600" algn="just">
+              <a:buFont typeface="+mj-lt"/>
+              <a:buAutoNum type="arabicPeriod"/>
+            </a:pPr>
+            <a:r>
+              <a:rPr lang="en-US" sz="1200" dirty="0"/>
+              <a:t>[*]N1Cc2cc([*])cc([*])c2C1=O</a:t>
+            </a:r>
+            <a:r>
+              <a:rPr lang="en-US" sz="1200" b="1" dirty="0"/>
+              <a:t>: </a:t>
+            </a:r>
+            <a:r>
+              <a:rPr lang="en-US" sz="1200" b="1" dirty="0" err="1"/>
+              <a:t>Dihydroisoquinolinone</a:t>
+            </a:r>
+            <a:r>
+              <a:rPr lang="en-US" sz="1200" b="1" dirty="0"/>
+              <a:t> derivatives</a:t>
+            </a:r>
+            <a:r>
+              <a:rPr lang="en-US" sz="1200" dirty="0"/>
+              <a:t>, frequently appearing in gamma-selective chemotypes.</a:t>
+            </a:r>
+          </a:p>
+        </p:txBody>
+      </p:sp>
+      <p:pic>
+        <p:nvPicPr>
+          <p:cNvPr id="16" name="Picture 15" descr="A red and black molecule&#10;&#10;AI-generated content may be incorrect.">
+            <a:extLst>
+              <a:ext uri="{FF2B5EF4-FFF2-40B4-BE49-F238E27FC236}">
+                <a16:creationId xmlns:a16="http://schemas.microsoft.com/office/drawing/2014/main" id="{7A6EA1F8-C9F6-7489-198E-5B4BE93F13C9}"/>
+              </a:ext>
+            </a:extLst>
+          </p:cNvPr>
+          <p:cNvPicPr>
+            <a:picLocks noChangeAspect="1"/>
+          </p:cNvPicPr>
+          <p:nvPr/>
+        </p:nvPicPr>
+        <p:blipFill>
+          <a:blip r:embed="rId6">
+            <a:extLst>
+              <a:ext uri="{28A0092B-C50C-407E-A947-70E740481C1C}">
+                <a14:useLocalDpi xmlns:a14="http://schemas.microsoft.com/office/drawing/2010/main" val="0"/>
+              </a:ext>
+            </a:extLst>
+          </a:blip>
+          <a:srcRect t="9899" r="60477" b="34643"/>
+          <a:stretch/>
+        </p:blipFill>
+        <p:spPr>
+          <a:xfrm>
+            <a:off x="7269598" y="2036913"/>
+            <a:ext cx="4813209" cy="1238203"/>
+          </a:xfrm>
+          <a:prstGeom prst="rect">
+            <a:avLst/>
+          </a:prstGeom>
+        </p:spPr>
+      </p:pic>
+      <p:sp>
+        <p:nvSpPr>
+          <p:cNvPr id="17" name="TextBox 16">
+            <a:extLst>
+              <a:ext uri="{FF2B5EF4-FFF2-40B4-BE49-F238E27FC236}">
+                <a16:creationId xmlns:a16="http://schemas.microsoft.com/office/drawing/2014/main" id="{3CE7757E-34D3-0C51-2D88-66D6E1BE7068}"/>
+              </a:ext>
+            </a:extLst>
+          </p:cNvPr>
+          <p:cNvSpPr txBox="1"/>
+          <p:nvPr/>
+        </p:nvSpPr>
+        <p:spPr>
+          <a:xfrm>
+            <a:off x="3265132" y="4093085"/>
+            <a:ext cx="4154336" cy="1569660"/>
+          </a:xfrm>
+          <a:prstGeom prst="rect">
+            <a:avLst/>
+          </a:prstGeom>
+          <a:noFill/>
+        </p:spPr>
+        <p:txBody>
+          <a:bodyPr wrap="square" rtlCol="0">
+            <a:spAutoFit/>
+          </a:bodyPr>
+          <a:lstStyle/>
+          <a:p>
+            <a:pPr marL="228600" indent="-228600" algn="just">
+              <a:buFont typeface="+mj-lt"/>
+              <a:buAutoNum type="arabicPeriod"/>
+            </a:pPr>
+            <a:r>
+              <a:rPr lang="en-US" sz="1200" dirty="0"/>
+              <a:t>[*]c1ncnc(N)c1C#N: Occurs in 26.4% of correctly predicted Class 1 compounds. This </a:t>
+            </a:r>
+            <a:r>
+              <a:rPr lang="en-US" sz="1200" b="1" dirty="0"/>
+              <a:t>cyano-substituted pyrimidine</a:t>
+            </a:r>
+            <a:r>
+              <a:rPr lang="en-US" sz="1200" dirty="0"/>
+              <a:t> motif is a classic </a:t>
+            </a:r>
+            <a:r>
+              <a:rPr lang="en-US" sz="1200" b="1" dirty="0"/>
+              <a:t>kinase hinge-binder</a:t>
+            </a:r>
+            <a:r>
+              <a:rPr lang="en-US" sz="1200" dirty="0"/>
+              <a:t>.</a:t>
+            </a:r>
+          </a:p>
+          <a:p>
+            <a:pPr marL="228600" indent="-228600" algn="just">
+              <a:buFont typeface="+mj-lt"/>
+              <a:buAutoNum type="arabicPeriod"/>
+            </a:pPr>
+            <a:endParaRPr lang="en-US" sz="1200" dirty="0"/>
+          </a:p>
+          <a:p>
+            <a:pPr marL="228600" indent="-228600" algn="just">
+              <a:buFont typeface="+mj-lt"/>
+              <a:buAutoNum type="arabicPeriod"/>
+            </a:pPr>
+            <a:r>
+              <a:rPr lang="en-US" sz="1200" dirty="0"/>
+              <a:t>[*]c1nc(N)</a:t>
+            </a:r>
+            <a:r>
+              <a:rPr lang="en-US" sz="1200" dirty="0" err="1"/>
+              <a:t>nc</a:t>
+            </a:r>
+            <a:r>
+              <a:rPr lang="en-US" sz="1200" dirty="0"/>
+              <a:t>(N)c1C#N: Occurs in 25.0% of cases. A </a:t>
+            </a:r>
+            <a:r>
+              <a:rPr lang="en-US" sz="1200" b="1" dirty="0"/>
+              <a:t>diamino-</a:t>
+            </a:r>
+            <a:r>
+              <a:rPr lang="en-US" sz="1200" b="1" dirty="0" err="1"/>
+              <a:t>cyano</a:t>
+            </a:r>
+            <a:r>
+              <a:rPr lang="en-US" sz="1200" b="1" dirty="0"/>
+              <a:t> pyrimidine derivative</a:t>
+            </a:r>
+            <a:r>
+              <a:rPr lang="en-US" sz="1200" dirty="0"/>
+              <a:t>, strongly indicating </a:t>
+            </a:r>
+            <a:r>
+              <a:rPr lang="en-US" sz="1200" b="1" dirty="0"/>
+              <a:t>hydrogen-bonding interactions </a:t>
+            </a:r>
+            <a:r>
+              <a:rPr lang="en-US" sz="1200" dirty="0"/>
+              <a:t>with the </a:t>
+            </a:r>
+            <a:r>
+              <a:rPr lang="en-US" sz="1200" b="1" dirty="0"/>
+              <a:t>hinge region</a:t>
+            </a:r>
+            <a:r>
+              <a:rPr lang="en-US" sz="1200" dirty="0"/>
+              <a:t>.</a:t>
+            </a:r>
+          </a:p>
+        </p:txBody>
+      </p:sp>
+      <p:sp>
+        <p:nvSpPr>
+          <p:cNvPr id="19" name="TextBox 18">
+            <a:extLst>
+              <a:ext uri="{FF2B5EF4-FFF2-40B4-BE49-F238E27FC236}">
+                <a16:creationId xmlns:a16="http://schemas.microsoft.com/office/drawing/2014/main" id="{4FDDA57B-3CA5-02A8-41D4-276E54B845EE}"/>
+              </a:ext>
+            </a:extLst>
+          </p:cNvPr>
+          <p:cNvSpPr txBox="1"/>
+          <p:nvPr/>
+        </p:nvSpPr>
+        <p:spPr>
+          <a:xfrm>
+            <a:off x="5143183" y="3418140"/>
+            <a:ext cx="2232171" cy="577081"/>
+          </a:xfrm>
+          <a:prstGeom prst="rect">
+            <a:avLst/>
+          </a:prstGeom>
+          <a:noFill/>
+        </p:spPr>
+        <p:txBody>
+          <a:bodyPr wrap="square" rtlCol="0">
+            <a:spAutoFit/>
+          </a:bodyPr>
+          <a:lstStyle/>
+          <a:p>
+            <a:pPr algn="ctr"/>
+            <a:r>
+              <a:rPr lang="en-US" sz="1050" b="1" i="0" dirty="0">
+                <a:solidFill>
+                  <a:srgbClr val="0F0F0F"/>
+                </a:solidFill>
+                <a:effectLst/>
+                <a:latin typeface="ui-sans-serif"/>
+              </a:rPr>
+              <a:t>Rank 2</a:t>
+            </a:r>
+          </a:p>
+          <a:p>
+            <a:pPr algn="ctr"/>
+            <a:r>
+              <a:rPr lang="en-US" sz="1050" b="1" dirty="0">
+                <a:solidFill>
+                  <a:srgbClr val="0F0F0F"/>
+                </a:solidFill>
+                <a:latin typeface="ui-sans-serif"/>
+              </a:rPr>
+              <a:t>Anchor occurrence: 0.25</a:t>
+            </a:r>
+          </a:p>
+          <a:p>
+            <a:pPr algn="ctr"/>
+            <a:r>
+              <a:rPr lang="en-US" sz="1050" b="1" dirty="0">
+                <a:solidFill>
+                  <a:srgbClr val="0F0F0F"/>
+                </a:solidFill>
+                <a:latin typeface="ui-sans-serif"/>
+              </a:rPr>
+              <a:t>Substructure occurrence: 0.25</a:t>
+            </a:r>
+            <a:endParaRPr lang="en-US" sz="1050" dirty="0"/>
+          </a:p>
+        </p:txBody>
+      </p:sp>
+      <p:sp>
+        <p:nvSpPr>
+          <p:cNvPr id="20" name="TextBox 19">
+            <a:extLst>
+              <a:ext uri="{FF2B5EF4-FFF2-40B4-BE49-F238E27FC236}">
+                <a16:creationId xmlns:a16="http://schemas.microsoft.com/office/drawing/2014/main" id="{8E0BA8E5-F525-3DC3-8F8E-9E9A3DEEAC67}"/>
+              </a:ext>
+            </a:extLst>
+          </p:cNvPr>
+          <p:cNvSpPr txBox="1"/>
+          <p:nvPr/>
+        </p:nvSpPr>
+        <p:spPr>
+          <a:xfrm>
+            <a:off x="7357147" y="3418140"/>
+            <a:ext cx="2232171" cy="577081"/>
+          </a:xfrm>
+          <a:prstGeom prst="rect">
+            <a:avLst/>
+          </a:prstGeom>
+          <a:noFill/>
+        </p:spPr>
+        <p:txBody>
+          <a:bodyPr wrap="square" rtlCol="0">
+            <a:spAutoFit/>
+          </a:bodyPr>
+          <a:lstStyle/>
+          <a:p>
+            <a:pPr algn="ctr"/>
+            <a:r>
+              <a:rPr lang="en-US" sz="1050" b="1" i="0" dirty="0">
+                <a:solidFill>
+                  <a:srgbClr val="0F0F0F"/>
+                </a:solidFill>
+                <a:effectLst/>
+                <a:latin typeface="ui-sans-serif"/>
+              </a:rPr>
+              <a:t>Rank 1</a:t>
+            </a:r>
+          </a:p>
+          <a:p>
+            <a:pPr algn="ctr"/>
+            <a:r>
+              <a:rPr lang="en-US" sz="1050" b="1" dirty="0">
+                <a:solidFill>
+                  <a:srgbClr val="0F0F0F"/>
+                </a:solidFill>
+                <a:latin typeface="ui-sans-serif"/>
+              </a:rPr>
+              <a:t>Anchor occurrence: 0.36</a:t>
+            </a:r>
+          </a:p>
+          <a:p>
+            <a:pPr algn="ctr"/>
+            <a:r>
+              <a:rPr lang="en-US" sz="1050" b="1" dirty="0">
+                <a:solidFill>
+                  <a:srgbClr val="0F0F0F"/>
+                </a:solidFill>
+                <a:latin typeface="ui-sans-serif"/>
+              </a:rPr>
+              <a:t>Substructure occurrence: 0.82</a:t>
+            </a:r>
+            <a:endParaRPr lang="en-US" sz="1050" dirty="0"/>
+          </a:p>
+        </p:txBody>
+      </p:sp>
+      <p:sp>
+        <p:nvSpPr>
+          <p:cNvPr id="21" name="TextBox 20">
+            <a:extLst>
+              <a:ext uri="{FF2B5EF4-FFF2-40B4-BE49-F238E27FC236}">
+                <a16:creationId xmlns:a16="http://schemas.microsoft.com/office/drawing/2014/main" id="{E26CE380-E98F-1DB3-D9CD-42E386112AE0}"/>
+              </a:ext>
+            </a:extLst>
+          </p:cNvPr>
+          <p:cNvSpPr txBox="1"/>
+          <p:nvPr/>
+        </p:nvSpPr>
+        <p:spPr>
+          <a:xfrm>
+            <a:off x="9686382" y="3418140"/>
+            <a:ext cx="2232171" cy="577081"/>
+          </a:xfrm>
+          <a:prstGeom prst="rect">
+            <a:avLst/>
+          </a:prstGeom>
+          <a:noFill/>
+        </p:spPr>
+        <p:txBody>
+          <a:bodyPr wrap="square" rtlCol="0">
+            <a:spAutoFit/>
+          </a:bodyPr>
+          <a:lstStyle/>
+          <a:p>
+            <a:pPr algn="ctr"/>
+            <a:r>
+              <a:rPr lang="en-US" sz="1050" b="1" i="0" dirty="0">
+                <a:solidFill>
+                  <a:srgbClr val="0F0F0F"/>
+                </a:solidFill>
+                <a:effectLst/>
+                <a:latin typeface="ui-sans-serif"/>
+              </a:rPr>
+              <a:t>Rank 2</a:t>
+            </a:r>
+          </a:p>
+          <a:p>
+            <a:pPr algn="ctr"/>
+            <a:r>
+              <a:rPr lang="en-US" sz="1050" b="1" dirty="0">
+                <a:solidFill>
+                  <a:srgbClr val="0F0F0F"/>
+                </a:solidFill>
+                <a:latin typeface="ui-sans-serif"/>
+              </a:rPr>
+              <a:t>Anchor occurrence: 0.18</a:t>
+            </a:r>
+          </a:p>
+          <a:p>
+            <a:pPr algn="ctr"/>
+            <a:r>
+              <a:rPr lang="en-US" sz="1050" b="1" dirty="0">
+                <a:solidFill>
+                  <a:srgbClr val="0F0F0F"/>
+                </a:solidFill>
+                <a:latin typeface="ui-sans-serif"/>
+              </a:rPr>
+              <a:t>Substructure occurrence: 0.36</a:t>
+            </a:r>
+            <a:endParaRPr lang="en-US" sz="1050" dirty="0"/>
+          </a:p>
+        </p:txBody>
+      </p:sp>
+      <p:sp>
+        <p:nvSpPr>
+          <p:cNvPr id="3" name="TextBox 2">
+            <a:extLst>
+              <a:ext uri="{FF2B5EF4-FFF2-40B4-BE49-F238E27FC236}">
+                <a16:creationId xmlns:a16="http://schemas.microsoft.com/office/drawing/2014/main" id="{0FC3C2A0-BFA4-6A46-97A7-E46747922FFE}"/>
+              </a:ext>
+            </a:extLst>
+          </p:cNvPr>
+          <p:cNvSpPr txBox="1"/>
+          <p:nvPr/>
+        </p:nvSpPr>
+        <p:spPr>
+          <a:xfrm>
+            <a:off x="3748442" y="1342290"/>
+            <a:ext cx="2789481" cy="369332"/>
+          </a:xfrm>
+          <a:prstGeom prst="rect">
+            <a:avLst/>
+          </a:prstGeom>
+          <a:noFill/>
+        </p:spPr>
+        <p:txBody>
+          <a:bodyPr wrap="square" rtlCol="0">
+            <a:spAutoFit/>
+          </a:bodyPr>
+          <a:lstStyle/>
+          <a:p>
+            <a:pPr algn="ctr"/>
+            <a:r>
+              <a:rPr lang="en-US" b="1" dirty="0"/>
+              <a:t>Class </a:t>
+            </a:r>
+            <a:r>
+              <a:rPr lang="en-US" sz="1800" b="1" i="0" dirty="0">
+                <a:solidFill>
+                  <a:srgbClr val="0F0F0F"/>
+                </a:solidFill>
+                <a:effectLst/>
+                <a:latin typeface="ui-sans-serif"/>
+              </a:rPr>
+              <a:t>PI3K-delta</a:t>
+            </a:r>
+            <a:endParaRPr lang="de-DE" b="1" dirty="0"/>
+          </a:p>
+        </p:txBody>
+      </p:sp>
+      <p:sp>
+        <p:nvSpPr>
+          <p:cNvPr id="5" name="TextBox 4">
+            <a:extLst>
+              <a:ext uri="{FF2B5EF4-FFF2-40B4-BE49-F238E27FC236}">
+                <a16:creationId xmlns:a16="http://schemas.microsoft.com/office/drawing/2014/main" id="{57501753-775E-EF18-278A-55912562F8D1}"/>
+              </a:ext>
+            </a:extLst>
+          </p:cNvPr>
+          <p:cNvSpPr txBox="1"/>
+          <p:nvPr/>
+        </p:nvSpPr>
+        <p:spPr>
+          <a:xfrm>
+            <a:off x="8366898" y="1342290"/>
+            <a:ext cx="2444839" cy="369332"/>
+          </a:xfrm>
+          <a:prstGeom prst="rect">
+            <a:avLst/>
+          </a:prstGeom>
+          <a:noFill/>
+        </p:spPr>
+        <p:txBody>
+          <a:bodyPr wrap="square" rtlCol="0">
+            <a:spAutoFit/>
+          </a:bodyPr>
+          <a:lstStyle/>
+          <a:p>
+            <a:pPr algn="ctr"/>
+            <a:r>
+              <a:rPr lang="en-US" b="1" dirty="0"/>
+              <a:t>Class </a:t>
+            </a:r>
+            <a:r>
+              <a:rPr lang="en-US" sz="1800" b="1" i="0" dirty="0">
+                <a:solidFill>
+                  <a:srgbClr val="0F0F0F"/>
+                </a:solidFill>
+                <a:effectLst/>
+                <a:latin typeface="ui-sans-serif"/>
+              </a:rPr>
+              <a:t>PI3K-gamma</a:t>
+            </a:r>
+            <a:endParaRPr lang="de-DE" b="1" dirty="0"/>
+          </a:p>
+        </p:txBody>
+      </p:sp>
+    </p:spTree>
+    <p:extLst>
+      <p:ext uri="{BB962C8B-B14F-4D97-AF65-F5344CB8AC3E}">
+        <p14:creationId xmlns:p14="http://schemas.microsoft.com/office/powerpoint/2010/main" val="4138368784"/>
+      </p:ext>
+    </p:extLst>
+  </p:cSld>
+  <p:clrMapOvr>
+    <a:masterClrMapping/>
+  </p:clrMapOvr>
+</p:sld>
+</file>
+
+<file path=ppt/slides/slide8.xml><?xml version="1.0" encoding="utf-8"?>
+<p:sld xmlns:a="http://schemas.openxmlformats.org/drawingml/2006/main" xmlns:r="http://schemas.openxmlformats.org/officeDocument/2006/relationships" xmlns:p="http://schemas.openxmlformats.org/presentationml/2006/main">
+  <p:cSld>
+    <p:spTree>
+      <p:nvGrpSpPr>
+        <p:cNvPr id="1" name=""/>
+        <p:cNvGrpSpPr/>
+        <p:nvPr/>
+      </p:nvGrpSpPr>
+      <p:grpSpPr>
+        <a:xfrm>
+          <a:off x="0" y="0"/>
+          <a:ext cx="0" cy="0"/>
+          <a:chOff x="0" y="0"/>
+          <a:chExt cx="0" cy="0"/>
+        </a:xfrm>
+      </p:grpSpPr>
+      <p:pic>
+        <p:nvPicPr>
+          <p:cNvPr id="8" name="Picture 7" descr="A black and red hexagons&#10;&#10;AI-generated content may be incorrect.">
+            <a:extLst>
+              <a:ext uri="{FF2B5EF4-FFF2-40B4-BE49-F238E27FC236}">
+                <a16:creationId xmlns:a16="http://schemas.microsoft.com/office/drawing/2014/main" id="{D5E784C3-4FB3-CAF3-1C6B-20761F65B853}"/>
+              </a:ext>
+            </a:extLst>
+          </p:cNvPr>
+          <p:cNvPicPr>
+            <a:picLocks noChangeAspect="1"/>
+          </p:cNvPicPr>
+          <p:nvPr/>
+        </p:nvPicPr>
+        <p:blipFill>
+          <a:blip r:embed="rId2">
+            <a:extLst>
+              <a:ext uri="{28A0092B-C50C-407E-A947-70E740481C1C}">
+                <a14:useLocalDpi xmlns:a14="http://schemas.microsoft.com/office/drawing/2010/main" val="0"/>
+              </a:ext>
+            </a:extLst>
+          </a:blip>
+          <a:srcRect r="60622" b="25829"/>
+          <a:stretch/>
+        </p:blipFill>
+        <p:spPr>
+          <a:xfrm>
+            <a:off x="2948780" y="1828082"/>
+            <a:ext cx="4320818" cy="1492081"/>
+          </a:xfrm>
+          <a:prstGeom prst="rect">
+            <a:avLst/>
+          </a:prstGeom>
+        </p:spPr>
+      </p:pic>
+      <p:grpSp>
+        <p:nvGrpSpPr>
+          <p:cNvPr id="2" name="Group 1">
+            <a:extLst>
+              <a:ext uri="{FF2B5EF4-FFF2-40B4-BE49-F238E27FC236}">
+                <a16:creationId xmlns:a16="http://schemas.microsoft.com/office/drawing/2014/main" id="{C3474ED7-8B1C-A7CA-4B57-5BD7E484107E}"/>
+              </a:ext>
+            </a:extLst>
+          </p:cNvPr>
+          <p:cNvGrpSpPr/>
+          <p:nvPr/>
+        </p:nvGrpSpPr>
+        <p:grpSpPr>
+          <a:xfrm>
+            <a:off x="306102" y="2273968"/>
+            <a:ext cx="1774658" cy="2310063"/>
+            <a:chOff x="990492" y="2511372"/>
+            <a:chExt cx="1774658" cy="2310063"/>
+          </a:xfrm>
+        </p:grpSpPr>
+        <p:sp>
+          <p:nvSpPr>
+            <p:cNvPr id="22" name="Rectangle 21">
+              <a:extLst>
+                <a:ext uri="{FF2B5EF4-FFF2-40B4-BE49-F238E27FC236}">
+                  <a16:creationId xmlns:a16="http://schemas.microsoft.com/office/drawing/2014/main" id="{67C11FFD-9BC3-9E76-E6A1-CB29619ABACF}"/>
+                </a:ext>
+              </a:extLst>
+            </p:cNvPr>
+            <p:cNvSpPr/>
+            <p:nvPr/>
+          </p:nvSpPr>
+          <p:spPr>
+            <a:xfrm>
+              <a:off x="990492" y="2511372"/>
+              <a:ext cx="1774658" cy="2310063"/>
+            </a:xfrm>
+            <a:prstGeom prst="rect">
+              <a:avLst/>
+            </a:prstGeom>
+            <a:solidFill>
+              <a:schemeClr val="accent1">
+                <a:lumMod val="20000"/>
+                <a:lumOff val="80000"/>
+              </a:schemeClr>
+            </a:solidFill>
+            <a:ln>
+              <a:solidFill>
+                <a:schemeClr val="tx2">
+                  <a:lumMod val="25000"/>
+                  <a:lumOff val="75000"/>
+                </a:schemeClr>
+              </a:solidFill>
+            </a:ln>
+          </p:spPr>
+          <p:style>
+            <a:lnRef idx="2">
+              <a:schemeClr val="accent1">
+                <a:shade val="15000"/>
+              </a:schemeClr>
+            </a:lnRef>
+            <a:fillRef idx="1">
+              <a:schemeClr val="accent1"/>
+            </a:fillRef>
+            <a:effectRef idx="0">
+              <a:schemeClr val="accent1"/>
+            </a:effectRef>
+            <a:fontRef idx="minor">
+              <a:schemeClr val="lt1"/>
+            </a:fontRef>
+          </p:style>
+          <p:txBody>
+            <a:bodyPr rtlCol="0" anchor="ctr"/>
+            <a:lstStyle/>
+            <a:p>
+              <a:pPr algn="ctr"/>
+              <a:endParaRPr lang="en-US" dirty="0"/>
+            </a:p>
+          </p:txBody>
+        </p:sp>
+        <p:pic>
+          <p:nvPicPr>
+            <p:cNvPr id="23" name="Graphic 22" descr="Customer review with solid fill">
+              <a:extLst>
+                <a:ext uri="{FF2B5EF4-FFF2-40B4-BE49-F238E27FC236}">
+                  <a16:creationId xmlns:a16="http://schemas.microsoft.com/office/drawing/2014/main" id="{EF58B09A-9C24-1ECA-3231-0C704AF994F8}"/>
+                </a:ext>
+              </a:extLst>
+            </p:cNvPr>
+            <p:cNvPicPr>
+              <a:picLocks noChangeAspect="1"/>
+            </p:cNvPicPr>
+            <p:nvPr/>
+          </p:nvPicPr>
+          <p:blipFill>
+            <a:blip r:embed="rId3">
+              <a:extLst>
+                <a:ext uri="{96DAC541-7B7A-43D3-8B79-37D633B846F1}">
+                  <asvg:svgBlip xmlns:asvg="http://schemas.microsoft.com/office/drawing/2016/SVG/main" r:embed="rId4"/>
+                </a:ext>
+              </a:extLst>
+            </a:blip>
+            <a:stretch>
+              <a:fillRect/>
+            </a:stretch>
+          </p:blipFill>
+          <p:spPr>
+            <a:xfrm>
+              <a:off x="1400027" y="3700649"/>
+              <a:ext cx="965534" cy="965534"/>
+            </a:xfrm>
+            <a:prstGeom prst="rect">
+              <a:avLst/>
+            </a:prstGeom>
+          </p:spPr>
+        </p:pic>
+        <p:pic>
+          <p:nvPicPr>
+            <p:cNvPr id="24" name="Picture 23">
+              <a:extLst>
+                <a:ext uri="{FF2B5EF4-FFF2-40B4-BE49-F238E27FC236}">
+                  <a16:creationId xmlns:a16="http://schemas.microsoft.com/office/drawing/2014/main" id="{0947EFEA-9CFB-4E92-FC85-01152E5CB9EC}"/>
+                </a:ext>
+              </a:extLst>
+            </p:cNvPr>
+            <p:cNvPicPr>
+              <a:picLocks noChangeAspect="1"/>
+            </p:cNvPicPr>
+            <p:nvPr/>
+          </p:nvPicPr>
+          <p:blipFill>
+            <a:blip r:embed="rId5"/>
+            <a:stretch>
+              <a:fillRect/>
+            </a:stretch>
+          </p:blipFill>
+          <p:spPr>
+            <a:xfrm>
+              <a:off x="1126882" y="2607575"/>
+              <a:ext cx="1525117" cy="996871"/>
+            </a:xfrm>
+            <a:prstGeom prst="rect">
+              <a:avLst/>
+            </a:prstGeom>
+          </p:spPr>
+        </p:pic>
+      </p:grpSp>
+      <p:sp>
+        <p:nvSpPr>
+          <p:cNvPr id="7" name="Arrow: Right 6">
+            <a:extLst>
+              <a:ext uri="{FF2B5EF4-FFF2-40B4-BE49-F238E27FC236}">
+                <a16:creationId xmlns:a16="http://schemas.microsoft.com/office/drawing/2014/main" id="{253C9BC8-562F-6E75-D860-36BBDA1C4DD5}"/>
+              </a:ext>
+            </a:extLst>
+          </p:cNvPr>
+          <p:cNvSpPr/>
+          <p:nvPr/>
+        </p:nvSpPr>
+        <p:spPr>
+          <a:xfrm>
+            <a:off x="2181397" y="3219061"/>
+            <a:ext cx="666746" cy="374904"/>
+          </a:xfrm>
+          <a:prstGeom prst="rightArrow">
+            <a:avLst/>
+          </a:prstGeom>
+        </p:spPr>
+        <p:style>
+          <a:lnRef idx="2">
+            <a:schemeClr val="accent1">
+              <a:shade val="15000"/>
+            </a:schemeClr>
+          </a:lnRef>
+          <a:fillRef idx="1">
+            <a:schemeClr val="accent1"/>
+          </a:fillRef>
+          <a:effectRef idx="0">
+            <a:schemeClr val="accent1"/>
+          </a:effectRef>
+          <a:fontRef idx="minor">
+            <a:schemeClr val="lt1"/>
+          </a:fontRef>
+        </p:style>
+        <p:txBody>
+          <a:bodyPr rtlCol="0" anchor="ctr"/>
+          <a:lstStyle/>
+          <a:p>
+            <a:pPr algn="ctr"/>
+            <a:endParaRPr lang="en-US"/>
+          </a:p>
+        </p:txBody>
+      </p:sp>
+      <p:sp>
+        <p:nvSpPr>
+          <p:cNvPr id="4" name="TextBox 3">
+            <a:extLst>
+              <a:ext uri="{FF2B5EF4-FFF2-40B4-BE49-F238E27FC236}">
+                <a16:creationId xmlns:a16="http://schemas.microsoft.com/office/drawing/2014/main" id="{D719E08A-F8F7-F1C2-289E-BEE6ADEC6D96}"/>
+              </a:ext>
+            </a:extLst>
+          </p:cNvPr>
+          <p:cNvSpPr txBox="1"/>
+          <p:nvPr/>
+        </p:nvSpPr>
+        <p:spPr>
+          <a:xfrm>
+            <a:off x="2848143" y="4162940"/>
+            <a:ext cx="8670673" cy="2308324"/>
+          </a:xfrm>
+          <a:prstGeom prst="rect">
+            <a:avLst/>
+          </a:prstGeom>
+          <a:noFill/>
+        </p:spPr>
+        <p:txBody>
+          <a:bodyPr wrap="square" rtlCol="0">
+            <a:spAutoFit/>
+          </a:bodyPr>
+          <a:lstStyle/>
+          <a:p>
+            <a:r>
+              <a:rPr lang="en-US" sz="1200" b="1" i="0" dirty="0">
+                <a:solidFill>
+                  <a:srgbClr val="0F0F0F"/>
+                </a:solidFill>
+                <a:effectLst/>
+                <a:latin typeface="ui-sans-serif"/>
+              </a:rPr>
+              <a:t>Chemical Insights &amp; Discussion</a:t>
+            </a:r>
+          </a:p>
+          <a:p>
+            <a:endParaRPr lang="en-US" sz="1200" b="1" i="0" dirty="0">
+              <a:solidFill>
+                <a:srgbClr val="0F0F0F"/>
+              </a:solidFill>
+              <a:effectLst/>
+              <a:latin typeface="ui-sans-serif"/>
+            </a:endParaRPr>
+          </a:p>
+          <a:p>
+            <a:pPr marL="228600" indent="-228600">
+              <a:buFont typeface="+mj-lt"/>
+              <a:buAutoNum type="arabicPeriod"/>
+            </a:pPr>
+            <a:r>
+              <a:rPr lang="en-US" sz="1200" b="1" i="0" dirty="0">
+                <a:solidFill>
+                  <a:srgbClr val="0F0F0F"/>
+                </a:solidFill>
+                <a:effectLst/>
+                <a:latin typeface="ui-sans-serif"/>
+              </a:rPr>
+              <a:t>Distinct </a:t>
+            </a:r>
+            <a:r>
+              <a:rPr lang="en-US" sz="1200" i="0" dirty="0">
+                <a:solidFill>
+                  <a:srgbClr val="0F0F0F"/>
+                </a:solidFill>
+                <a:effectLst/>
+                <a:latin typeface="ui-sans-serif"/>
+              </a:rPr>
+              <a:t>Chemotypes for Selectivity: The recurrent anchors clearly separate the two selective classes. Class 1 (delta) is driven by cyano-pyrimidine </a:t>
+            </a:r>
+            <a:r>
+              <a:rPr lang="en-US" sz="1200" b="1" i="0" dirty="0">
+                <a:solidFill>
+                  <a:srgbClr val="0F0F0F"/>
+                </a:solidFill>
+                <a:effectLst/>
+                <a:latin typeface="ui-sans-serif"/>
+              </a:rPr>
+              <a:t>hinge binders</a:t>
+            </a:r>
+            <a:r>
+              <a:rPr lang="en-US" sz="1200" i="0" dirty="0">
+                <a:solidFill>
+                  <a:srgbClr val="0F0F0F"/>
+                </a:solidFill>
+                <a:effectLst/>
+                <a:latin typeface="ui-sans-serif"/>
+              </a:rPr>
+              <a:t>, while Class 2 (gamma) is driven by </a:t>
+            </a:r>
+            <a:r>
+              <a:rPr lang="en-US" sz="1200" i="0" dirty="0" err="1">
+                <a:solidFill>
+                  <a:srgbClr val="0F0F0F"/>
+                </a:solidFill>
+                <a:effectLst/>
+                <a:latin typeface="ui-sans-serif"/>
+              </a:rPr>
+              <a:t>isoquinoline</a:t>
+            </a:r>
+            <a:r>
+              <a:rPr lang="en-US" sz="1200" i="0" dirty="0">
+                <a:solidFill>
+                  <a:srgbClr val="0F0F0F"/>
+                </a:solidFill>
+                <a:effectLst/>
+                <a:latin typeface="ui-sans-serif"/>
+              </a:rPr>
+              <a:t>/</a:t>
+            </a:r>
+            <a:r>
+              <a:rPr lang="en-US" sz="1200" i="0" dirty="0" err="1">
+                <a:solidFill>
+                  <a:srgbClr val="0F0F0F"/>
+                </a:solidFill>
+                <a:effectLst/>
+                <a:latin typeface="ui-sans-serif"/>
+              </a:rPr>
+              <a:t>dihydroisoquinolinone</a:t>
+            </a:r>
+            <a:r>
+              <a:rPr lang="en-US" sz="1200" i="0" dirty="0">
+                <a:solidFill>
+                  <a:srgbClr val="0F0F0F"/>
+                </a:solidFill>
+                <a:effectLst/>
+                <a:latin typeface="ui-sans-serif"/>
+              </a:rPr>
+              <a:t> scaffolds. This </a:t>
+            </a:r>
+            <a:r>
+              <a:rPr lang="en-US" sz="1200" b="1" i="0" dirty="0">
+                <a:solidFill>
+                  <a:srgbClr val="0F0F0F"/>
+                </a:solidFill>
+                <a:effectLst/>
+                <a:latin typeface="ui-sans-serif"/>
+              </a:rPr>
+              <a:t>aligns with known structure-activity relationships (SAR) in PI3K inhibitor design.</a:t>
+            </a:r>
+          </a:p>
+          <a:p>
+            <a:endParaRPr lang="en-US" sz="1200" i="0" dirty="0">
+              <a:solidFill>
+                <a:srgbClr val="0F0F0F"/>
+              </a:solidFill>
+              <a:effectLst/>
+              <a:latin typeface="ui-sans-serif"/>
+            </a:endParaRPr>
+          </a:p>
+          <a:p>
+            <a:pPr marL="228600" indent="-228600">
+              <a:buFont typeface="+mj-lt"/>
+              <a:buAutoNum type="arabicPeriod" startAt="2"/>
+            </a:pPr>
+            <a:r>
+              <a:rPr lang="en-US" sz="1200" b="1" i="0" dirty="0">
+                <a:solidFill>
+                  <a:srgbClr val="0F0F0F"/>
+                </a:solidFill>
+                <a:effectLst/>
+                <a:latin typeface="ui-sans-serif"/>
+              </a:rPr>
+              <a:t>Hinge Region Mimicry</a:t>
+            </a:r>
+            <a:r>
+              <a:rPr lang="en-US" sz="1200" i="0" dirty="0">
+                <a:solidFill>
+                  <a:srgbClr val="0F0F0F"/>
+                </a:solidFill>
+                <a:effectLst/>
+                <a:latin typeface="ui-sans-serif"/>
+              </a:rPr>
+              <a:t>: The high anchor occurrence of cyano-pyrimidines in Class 1 confirms the model has learned the </a:t>
+            </a:r>
+            <a:r>
+              <a:rPr lang="en-US" sz="1200" b="1" i="0" dirty="0">
+                <a:solidFill>
+                  <a:srgbClr val="0F0F0F"/>
+                </a:solidFill>
+                <a:effectLst/>
+                <a:latin typeface="ui-sans-serif"/>
+              </a:rPr>
+              <a:t>canonical hydrogen-bonding motif</a:t>
+            </a:r>
+            <a:r>
+              <a:rPr lang="en-US" sz="1200" i="0" dirty="0">
+                <a:solidFill>
+                  <a:srgbClr val="0F0F0F"/>
+                </a:solidFill>
+                <a:effectLst/>
+                <a:latin typeface="ui-sans-serif"/>
+              </a:rPr>
+              <a:t> required for PI3K catalytic domain binding.</a:t>
+            </a:r>
+          </a:p>
+          <a:p>
+            <a:endParaRPr lang="en-US" sz="1200" i="0" dirty="0">
+              <a:solidFill>
+                <a:srgbClr val="0F0F0F"/>
+              </a:solidFill>
+              <a:effectLst/>
+              <a:latin typeface="ui-sans-serif"/>
+            </a:endParaRPr>
+          </a:p>
+          <a:p>
+            <a:pPr marL="228600" indent="-228600">
+              <a:buFont typeface="+mj-lt"/>
+              <a:buAutoNum type="arabicPeriod" startAt="3"/>
+            </a:pPr>
+            <a:r>
+              <a:rPr lang="en-US" sz="1200" b="1" i="0" dirty="0">
+                <a:solidFill>
+                  <a:srgbClr val="0F0F0F"/>
+                </a:solidFill>
+                <a:effectLst/>
+                <a:latin typeface="ui-sans-serif"/>
+              </a:rPr>
+              <a:t>Scaffold-Driven Selectivity: </a:t>
+            </a:r>
+            <a:r>
+              <a:rPr lang="en-US" sz="1200" i="0" dirty="0">
+                <a:solidFill>
+                  <a:srgbClr val="0F0F0F"/>
+                </a:solidFill>
+                <a:effectLst/>
+                <a:latin typeface="ui-sans-serif"/>
+              </a:rPr>
+              <a:t>The dominance of bicyclic nitrogenous cores (</a:t>
+            </a:r>
+            <a:r>
+              <a:rPr lang="en-US" sz="1200" i="0" dirty="0" err="1">
+                <a:solidFill>
+                  <a:srgbClr val="0F0F0F"/>
+                </a:solidFill>
+                <a:effectLst/>
+                <a:latin typeface="ui-sans-serif"/>
+              </a:rPr>
+              <a:t>isoquinolines</a:t>
+            </a:r>
+            <a:r>
+              <a:rPr lang="en-US" sz="1200" i="0" dirty="0">
+                <a:solidFill>
+                  <a:srgbClr val="0F0F0F"/>
+                </a:solidFill>
+                <a:effectLst/>
+                <a:latin typeface="ui-sans-serif"/>
+              </a:rPr>
+              <a:t>) in Class 2 suggests that PI3K-gamma selectivity is </a:t>
+            </a:r>
+            <a:r>
+              <a:rPr lang="en-US" sz="1200" b="1" i="0" dirty="0">
+                <a:solidFill>
+                  <a:srgbClr val="0F0F0F"/>
+                </a:solidFill>
+                <a:effectLst/>
+                <a:latin typeface="ui-sans-serif"/>
+              </a:rPr>
+              <a:t>heavily scaffold-dependent</a:t>
+            </a:r>
+            <a:r>
+              <a:rPr lang="en-US" sz="1200" i="0" dirty="0">
+                <a:solidFill>
+                  <a:srgbClr val="0F0F0F"/>
+                </a:solidFill>
+                <a:effectLst/>
+                <a:latin typeface="ui-sans-serif"/>
+              </a:rPr>
+              <a:t>, likely due to subtle differences in the </a:t>
+            </a:r>
+            <a:r>
+              <a:rPr lang="en-US" sz="1200" b="1" i="0" dirty="0">
+                <a:solidFill>
+                  <a:srgbClr val="0F0F0F"/>
+                </a:solidFill>
+                <a:effectLst/>
+                <a:latin typeface="ui-sans-serif"/>
+              </a:rPr>
+              <a:t>gatekeeper residue </a:t>
+            </a:r>
+            <a:r>
+              <a:rPr lang="en-US" sz="1200" i="0" dirty="0">
+                <a:solidFill>
+                  <a:srgbClr val="0F0F0F"/>
+                </a:solidFill>
+                <a:effectLst/>
+                <a:latin typeface="ui-sans-serif"/>
+              </a:rPr>
+              <a:t>or </a:t>
+            </a:r>
+            <a:r>
+              <a:rPr lang="en-US" sz="1200" b="1" i="0" dirty="0">
+                <a:solidFill>
+                  <a:srgbClr val="0F0F0F"/>
+                </a:solidFill>
+                <a:effectLst/>
+                <a:latin typeface="ui-sans-serif"/>
+              </a:rPr>
+              <a:t>allosteric pocket topology </a:t>
+            </a:r>
+            <a:r>
+              <a:rPr lang="en-US" sz="1200" i="0" dirty="0">
+                <a:solidFill>
+                  <a:srgbClr val="0F0F0F"/>
+                </a:solidFill>
+                <a:effectLst/>
+                <a:latin typeface="ui-sans-serif"/>
+              </a:rPr>
+              <a:t>compared to PI3K-delta.</a:t>
+            </a:r>
+            <a:endParaRPr lang="en-US" sz="1200" dirty="0"/>
+          </a:p>
+        </p:txBody>
+      </p:sp>
+      <p:sp>
+        <p:nvSpPr>
+          <p:cNvPr id="9" name="TextBox 8">
+            <a:extLst>
+              <a:ext uri="{FF2B5EF4-FFF2-40B4-BE49-F238E27FC236}">
+                <a16:creationId xmlns:a16="http://schemas.microsoft.com/office/drawing/2014/main" id="{C3F42E95-3848-627F-8242-E941B7FDCC8D}"/>
+              </a:ext>
+            </a:extLst>
+          </p:cNvPr>
+          <p:cNvSpPr txBox="1"/>
+          <p:nvPr/>
+        </p:nvSpPr>
+        <p:spPr>
+          <a:xfrm>
+            <a:off x="2911012" y="3418140"/>
+            <a:ext cx="2232171" cy="577081"/>
+          </a:xfrm>
+          <a:prstGeom prst="rect">
+            <a:avLst/>
+          </a:prstGeom>
+          <a:noFill/>
+        </p:spPr>
+        <p:txBody>
+          <a:bodyPr wrap="square" rtlCol="0">
+            <a:spAutoFit/>
+          </a:bodyPr>
+          <a:lstStyle/>
+          <a:p>
+            <a:pPr algn="ctr"/>
+            <a:r>
+              <a:rPr lang="en-US" sz="1050" b="1" i="0" dirty="0">
+                <a:solidFill>
+                  <a:srgbClr val="0F0F0F"/>
+                </a:solidFill>
+                <a:effectLst/>
+                <a:latin typeface="ui-sans-serif"/>
+              </a:rPr>
+              <a:t>Rank 1</a:t>
+            </a:r>
+          </a:p>
+          <a:p>
+            <a:pPr algn="ctr"/>
+            <a:r>
+              <a:rPr lang="en-US" sz="1050" b="1" dirty="0">
+                <a:solidFill>
+                  <a:srgbClr val="0F0F0F"/>
+                </a:solidFill>
+                <a:latin typeface="ui-sans-serif"/>
+              </a:rPr>
+              <a:t>Anchor occurrence: 0.26</a:t>
+            </a:r>
+          </a:p>
+          <a:p>
+            <a:pPr algn="ctr"/>
+            <a:r>
+              <a:rPr lang="en-US" sz="1050" b="1" dirty="0">
+                <a:solidFill>
+                  <a:srgbClr val="0F0F0F"/>
+                </a:solidFill>
+                <a:latin typeface="ui-sans-serif"/>
+              </a:rPr>
+              <a:t>Substructure occurrence: 0.26</a:t>
+            </a:r>
+            <a:endParaRPr lang="en-US" sz="1050" dirty="0"/>
+          </a:p>
+        </p:txBody>
+      </p:sp>
+      <p:pic>
+        <p:nvPicPr>
+          <p:cNvPr id="10" name="Picture 9" descr="A red and black molecule&#10;&#10;AI-generated content may be incorrect.">
+            <a:extLst>
+              <a:ext uri="{FF2B5EF4-FFF2-40B4-BE49-F238E27FC236}">
+                <a16:creationId xmlns:a16="http://schemas.microsoft.com/office/drawing/2014/main" id="{47330EB2-DB9F-9E41-0B1F-5FA28BD643EF}"/>
+              </a:ext>
+            </a:extLst>
+          </p:cNvPr>
+          <p:cNvPicPr>
+            <a:picLocks noChangeAspect="1"/>
+          </p:cNvPicPr>
+          <p:nvPr/>
+        </p:nvPicPr>
+        <p:blipFill>
+          <a:blip r:embed="rId6">
+            <a:extLst>
+              <a:ext uri="{28A0092B-C50C-407E-A947-70E740481C1C}">
+                <a14:useLocalDpi xmlns:a14="http://schemas.microsoft.com/office/drawing/2010/main" val="0"/>
+              </a:ext>
+            </a:extLst>
+          </a:blip>
+          <a:srcRect t="9899" r="60477" b="34643"/>
+          <a:stretch/>
+        </p:blipFill>
+        <p:spPr>
+          <a:xfrm>
+            <a:off x="7269598" y="2036913"/>
+            <a:ext cx="4813209" cy="1238203"/>
+          </a:xfrm>
+          <a:prstGeom prst="rect">
+            <a:avLst/>
+          </a:prstGeom>
+        </p:spPr>
+      </p:pic>
+      <p:sp>
+        <p:nvSpPr>
+          <p:cNvPr id="11" name="TextBox 10">
+            <a:extLst>
+              <a:ext uri="{FF2B5EF4-FFF2-40B4-BE49-F238E27FC236}">
+                <a16:creationId xmlns:a16="http://schemas.microsoft.com/office/drawing/2014/main" id="{8953382F-B91C-34AE-6427-637CD14B0DC2}"/>
+              </a:ext>
+            </a:extLst>
+          </p:cNvPr>
+          <p:cNvSpPr txBox="1"/>
+          <p:nvPr/>
+        </p:nvSpPr>
+        <p:spPr>
+          <a:xfrm>
+            <a:off x="5143183" y="3418140"/>
+            <a:ext cx="2232171" cy="577081"/>
+          </a:xfrm>
+          <a:prstGeom prst="rect">
+            <a:avLst/>
+          </a:prstGeom>
+          <a:noFill/>
+        </p:spPr>
+        <p:txBody>
+          <a:bodyPr wrap="square" rtlCol="0">
+            <a:spAutoFit/>
+          </a:bodyPr>
+          <a:lstStyle/>
+          <a:p>
+            <a:pPr algn="ctr"/>
+            <a:r>
+              <a:rPr lang="en-US" sz="1050" b="1" i="0" dirty="0">
+                <a:solidFill>
+                  <a:srgbClr val="0F0F0F"/>
+                </a:solidFill>
+                <a:effectLst/>
+                <a:latin typeface="ui-sans-serif"/>
+              </a:rPr>
+              <a:t>Rank 2</a:t>
+            </a:r>
+          </a:p>
+          <a:p>
+            <a:pPr algn="ctr"/>
+            <a:r>
+              <a:rPr lang="en-US" sz="1050" b="1" dirty="0">
+                <a:solidFill>
+                  <a:srgbClr val="0F0F0F"/>
+                </a:solidFill>
+                <a:latin typeface="ui-sans-serif"/>
+              </a:rPr>
+              <a:t>Anchor occurrence: 0.25</a:t>
+            </a:r>
+          </a:p>
+          <a:p>
+            <a:pPr algn="ctr"/>
+            <a:r>
+              <a:rPr lang="en-US" sz="1050" b="1" dirty="0">
+                <a:solidFill>
+                  <a:srgbClr val="0F0F0F"/>
+                </a:solidFill>
+                <a:latin typeface="ui-sans-serif"/>
+              </a:rPr>
+              <a:t>Substructure occurrence: 0.25</a:t>
+            </a:r>
+            <a:endParaRPr lang="en-US" sz="1050" dirty="0"/>
+          </a:p>
+        </p:txBody>
+      </p:sp>
+      <p:sp>
+        <p:nvSpPr>
+          <p:cNvPr id="12" name="TextBox 11">
+            <a:extLst>
+              <a:ext uri="{FF2B5EF4-FFF2-40B4-BE49-F238E27FC236}">
+                <a16:creationId xmlns:a16="http://schemas.microsoft.com/office/drawing/2014/main" id="{EF3C7FA0-007C-44E0-AD1D-4F4E9B24DE88}"/>
+              </a:ext>
+            </a:extLst>
+          </p:cNvPr>
+          <p:cNvSpPr txBox="1"/>
+          <p:nvPr/>
+        </p:nvSpPr>
+        <p:spPr>
+          <a:xfrm>
+            <a:off x="7357147" y="3418140"/>
+            <a:ext cx="2232171" cy="577081"/>
+          </a:xfrm>
+          <a:prstGeom prst="rect">
+            <a:avLst/>
+          </a:prstGeom>
+          <a:noFill/>
+        </p:spPr>
+        <p:txBody>
+          <a:bodyPr wrap="square" rtlCol="0">
+            <a:spAutoFit/>
+          </a:bodyPr>
+          <a:lstStyle/>
+          <a:p>
+            <a:pPr algn="ctr"/>
+            <a:r>
+              <a:rPr lang="en-US" sz="1050" b="1" i="0" dirty="0">
+                <a:solidFill>
+                  <a:srgbClr val="0F0F0F"/>
+                </a:solidFill>
+                <a:effectLst/>
+                <a:latin typeface="ui-sans-serif"/>
+              </a:rPr>
+              <a:t>Rank 1</a:t>
+            </a:r>
+          </a:p>
+          <a:p>
+            <a:pPr algn="ctr"/>
+            <a:r>
+              <a:rPr lang="en-US" sz="1050" b="1" dirty="0">
+                <a:solidFill>
+                  <a:srgbClr val="0F0F0F"/>
+                </a:solidFill>
+                <a:latin typeface="ui-sans-serif"/>
+              </a:rPr>
+              <a:t>Anchor occurrence: 0.36</a:t>
+            </a:r>
+          </a:p>
+          <a:p>
+            <a:pPr algn="ctr"/>
+            <a:r>
+              <a:rPr lang="en-US" sz="1050" b="1" dirty="0">
+                <a:solidFill>
+                  <a:srgbClr val="0F0F0F"/>
+                </a:solidFill>
+                <a:latin typeface="ui-sans-serif"/>
+              </a:rPr>
+              <a:t>Substructure occurrence: 0.82</a:t>
+            </a:r>
+            <a:endParaRPr lang="en-US" sz="1050" dirty="0"/>
+          </a:p>
+        </p:txBody>
+      </p:sp>
+      <p:sp>
+        <p:nvSpPr>
+          <p:cNvPr id="13" name="TextBox 12">
+            <a:extLst>
+              <a:ext uri="{FF2B5EF4-FFF2-40B4-BE49-F238E27FC236}">
+                <a16:creationId xmlns:a16="http://schemas.microsoft.com/office/drawing/2014/main" id="{5CAA06B7-C48C-5C41-CA78-BCBF97EE9A45}"/>
+              </a:ext>
+            </a:extLst>
+          </p:cNvPr>
+          <p:cNvSpPr txBox="1"/>
+          <p:nvPr/>
+        </p:nvSpPr>
+        <p:spPr>
+          <a:xfrm>
+            <a:off x="9686382" y="3418140"/>
+            <a:ext cx="2232171" cy="577081"/>
+          </a:xfrm>
+          <a:prstGeom prst="rect">
+            <a:avLst/>
+          </a:prstGeom>
+          <a:noFill/>
+        </p:spPr>
+        <p:txBody>
+          <a:bodyPr wrap="square" rtlCol="0">
+            <a:spAutoFit/>
+          </a:bodyPr>
+          <a:lstStyle/>
+          <a:p>
+            <a:pPr algn="ctr"/>
+            <a:r>
+              <a:rPr lang="en-US" sz="1050" b="1" i="0" dirty="0">
+                <a:solidFill>
+                  <a:srgbClr val="0F0F0F"/>
+                </a:solidFill>
+                <a:effectLst/>
+                <a:latin typeface="ui-sans-serif"/>
+              </a:rPr>
+              <a:t>Rank 2</a:t>
+            </a:r>
+          </a:p>
+          <a:p>
+            <a:pPr algn="ctr"/>
+            <a:r>
+              <a:rPr lang="en-US" sz="1050" b="1" dirty="0">
+                <a:solidFill>
+                  <a:srgbClr val="0F0F0F"/>
+                </a:solidFill>
+                <a:latin typeface="ui-sans-serif"/>
+              </a:rPr>
+              <a:t>Anchor occurrence: 0.18</a:t>
+            </a:r>
+          </a:p>
+          <a:p>
+            <a:pPr algn="ctr"/>
+            <a:r>
+              <a:rPr lang="en-US" sz="1050" b="1" dirty="0">
+                <a:solidFill>
+                  <a:srgbClr val="0F0F0F"/>
+                </a:solidFill>
+                <a:latin typeface="ui-sans-serif"/>
+              </a:rPr>
+              <a:t>Substructure occurrence: 0.36</a:t>
+            </a:r>
+            <a:endParaRPr lang="en-US" sz="1050" dirty="0"/>
+          </a:p>
+        </p:txBody>
+      </p:sp>
+    </p:spTree>
+    <p:extLst>
+      <p:ext uri="{BB962C8B-B14F-4D97-AF65-F5344CB8AC3E}">
+        <p14:creationId xmlns:p14="http://schemas.microsoft.com/office/powerpoint/2010/main" val="1649923256"/>
+      </p:ext>
+    </p:extLst>
+  </p:cSld>
+  <p:clrMapOvr>
+    <a:masterClrMapping/>
+  </p:clrMapOvr>
+</p:sld>
+</file>
+
+<file path=ppt/slides/slide9.xml><?xml version="1.0" encoding="utf-8"?>
 <p:sld xmlns:a="http://schemas.openxmlformats.org/drawingml/2006/main" xmlns:r="http://schemas.openxmlformats.org/officeDocument/2006/relationships" xmlns:p="http://schemas.openxmlformats.org/presentationml/2006/main">
   <p:cSld>
     <p:spTree>
@@ -11105,1145 +14153,6 @@
     <p:extLst>
       <p:ext uri="{BB962C8B-B14F-4D97-AF65-F5344CB8AC3E}">
         <p14:creationId xmlns:p14="http://schemas.microsoft.com/office/powerpoint/2010/main" val="909832984"/>
-      </p:ext>
-    </p:extLst>
-  </p:cSld>
-  <p:clrMapOvr>
-    <a:masterClrMapping/>
-  </p:clrMapOvr>
-</p:sld>
-</file>
-
-<file path=ppt/slides/slide8.xml><?xml version="1.0" encoding="utf-8"?>
-<p:sld xmlns:a="http://schemas.openxmlformats.org/drawingml/2006/main" xmlns:r="http://schemas.openxmlformats.org/officeDocument/2006/relationships" xmlns:p="http://schemas.openxmlformats.org/presentationml/2006/main">
-  <p:cSld>
-    <p:spTree>
-      <p:nvGrpSpPr>
-        <p:cNvPr id="1" name=""/>
-        <p:cNvGrpSpPr/>
-        <p:nvPr/>
-      </p:nvGrpSpPr>
-      <p:grpSpPr>
-        <a:xfrm>
-          <a:off x="0" y="0"/>
-          <a:ext cx="0" cy="0"/>
-          <a:chOff x="0" y="0"/>
-          <a:chExt cx="0" cy="0"/>
-        </a:xfrm>
-      </p:grpSpPr>
-      <p:sp>
-        <p:nvSpPr>
-          <p:cNvPr id="46" name="TextBox 45">
-            <a:extLst>
-              <a:ext uri="{FF2B5EF4-FFF2-40B4-BE49-F238E27FC236}">
-                <a16:creationId xmlns:a16="http://schemas.microsoft.com/office/drawing/2014/main" id="{C02F4519-6E55-F26A-E1A3-2105A25F6A50}"/>
-              </a:ext>
-            </a:extLst>
-          </p:cNvPr>
-          <p:cNvSpPr txBox="1"/>
-          <p:nvPr/>
-        </p:nvSpPr>
-        <p:spPr>
-          <a:xfrm>
-            <a:off x="232995" y="4144987"/>
-            <a:ext cx="4168792" cy="2385268"/>
-          </a:xfrm>
-          <a:prstGeom prst="rect">
-            <a:avLst/>
-          </a:prstGeom>
-          <a:noFill/>
-        </p:spPr>
-        <p:txBody>
-          <a:bodyPr wrap="square">
-            <a:spAutoFit/>
-          </a:bodyPr>
-          <a:lstStyle/>
-          <a:p>
-            <a:pPr algn="just"/>
-            <a:r>
-              <a:rPr lang="en-US" sz="1600" b="1" dirty="0"/>
-              <a:t>Comparing XAI methods</a:t>
-            </a:r>
-          </a:p>
-          <a:p>
-            <a:pPr marL="171450" indent="-171450" algn="just">
-              <a:buFont typeface="Arial" panose="020B0604020202020204" pitchFamily="34" charset="0"/>
-              <a:buChar char="•"/>
-            </a:pPr>
-            <a:endParaRPr lang="en-US" sz="1200" b="1" dirty="0"/>
-          </a:p>
-          <a:p>
-            <a:pPr marL="171450" indent="-171450" algn="just">
-              <a:buFont typeface="Arial" panose="020B0604020202020204" pitchFamily="34" charset="0"/>
-              <a:buChar char="•"/>
-            </a:pPr>
-            <a:r>
-              <a:rPr lang="en-US" sz="1100" b="1" dirty="0"/>
-              <a:t>Agreement: </a:t>
-            </a:r>
-            <a:r>
-              <a:rPr lang="en-US" sz="1100" dirty="0"/>
-              <a:t>Both methods highlight that modifications to the R-groups attached to the morpholine ring are the most sensitive levers for changing bioactivity.</a:t>
-            </a:r>
-          </a:p>
-          <a:p>
-            <a:pPr algn="just"/>
-            <a:endParaRPr lang="en-US" sz="1100" b="1" dirty="0"/>
-          </a:p>
-          <a:p>
-            <a:pPr marL="171450" indent="-171450" algn="just">
-              <a:buFont typeface="Arial" panose="020B0604020202020204" pitchFamily="34" charset="0"/>
-              <a:buChar char="•"/>
-            </a:pPr>
-            <a:r>
-              <a:rPr lang="en-US" sz="1100" b="1" dirty="0"/>
-              <a:t>Disagreement: </a:t>
-            </a:r>
-            <a:r>
-              <a:rPr lang="en-US" sz="1100" dirty="0" err="1"/>
-              <a:t>MolCE</a:t>
-            </a:r>
-            <a:r>
-              <a:rPr lang="en-US" sz="1100" dirty="0"/>
-              <a:t> provides a theoretical contrastive feature (a specific R-group that is "anti-activating"). Counterfactuals provides concrete examples of inactive molecules. </a:t>
-            </a:r>
-            <a:r>
-              <a:rPr lang="en-US" sz="1100" dirty="0" err="1"/>
-              <a:t>MolCE</a:t>
-            </a:r>
-            <a:r>
-              <a:rPr lang="en-US" sz="1100" dirty="0"/>
-              <a:t> might suggest an R-group not present in the immediate neighborhood of the query, whereas Counterfactuals are constrained by the available library of R-groups for substitution.</a:t>
-            </a:r>
-          </a:p>
-        </p:txBody>
-      </p:sp>
-      <p:grpSp>
-        <p:nvGrpSpPr>
-          <p:cNvPr id="19" name="Group 18">
-            <a:extLst>
-              <a:ext uri="{FF2B5EF4-FFF2-40B4-BE49-F238E27FC236}">
-                <a16:creationId xmlns:a16="http://schemas.microsoft.com/office/drawing/2014/main" id="{3E3C0CE0-F9D7-0B88-458B-B30D6DB941D5}"/>
-              </a:ext>
-            </a:extLst>
-          </p:cNvPr>
-          <p:cNvGrpSpPr/>
-          <p:nvPr/>
-        </p:nvGrpSpPr>
-        <p:grpSpPr>
-          <a:xfrm>
-            <a:off x="232995" y="835775"/>
-            <a:ext cx="1774658" cy="2310063"/>
-            <a:chOff x="990492" y="2511372"/>
-            <a:chExt cx="1774658" cy="2310063"/>
-          </a:xfrm>
-        </p:grpSpPr>
-        <p:sp>
-          <p:nvSpPr>
-            <p:cNvPr id="20" name="Rectangle 19">
-              <a:extLst>
-                <a:ext uri="{FF2B5EF4-FFF2-40B4-BE49-F238E27FC236}">
-                  <a16:creationId xmlns:a16="http://schemas.microsoft.com/office/drawing/2014/main" id="{9E9712B8-35C2-9D0B-5448-8B73757EC2F0}"/>
-                </a:ext>
-              </a:extLst>
-            </p:cNvPr>
-            <p:cNvSpPr/>
-            <p:nvPr/>
-          </p:nvSpPr>
-          <p:spPr>
-            <a:xfrm>
-              <a:off x="990492" y="2511372"/>
-              <a:ext cx="1774658" cy="2310063"/>
-            </a:xfrm>
-            <a:prstGeom prst="rect">
-              <a:avLst/>
-            </a:prstGeom>
-            <a:solidFill>
-              <a:schemeClr val="accent1">
-                <a:lumMod val="20000"/>
-                <a:lumOff val="80000"/>
-              </a:schemeClr>
-            </a:solidFill>
-            <a:ln>
-              <a:solidFill>
-                <a:schemeClr val="tx2">
-                  <a:lumMod val="25000"/>
-                  <a:lumOff val="75000"/>
-                </a:schemeClr>
-              </a:solidFill>
-            </a:ln>
-          </p:spPr>
-          <p:style>
-            <a:lnRef idx="2">
-              <a:schemeClr val="accent1">
-                <a:shade val="15000"/>
-              </a:schemeClr>
-            </a:lnRef>
-            <a:fillRef idx="1">
-              <a:schemeClr val="accent1"/>
-            </a:fillRef>
-            <a:effectRef idx="0">
-              <a:schemeClr val="accent1"/>
-            </a:effectRef>
-            <a:fontRef idx="minor">
-              <a:schemeClr val="lt1"/>
-            </a:fontRef>
-          </p:style>
-          <p:txBody>
-            <a:bodyPr rtlCol="0" anchor="ctr"/>
-            <a:lstStyle/>
-            <a:p>
-              <a:pPr algn="ctr"/>
-              <a:endParaRPr lang="en-US" dirty="0"/>
-            </a:p>
-          </p:txBody>
-        </p:sp>
-        <p:pic>
-          <p:nvPicPr>
-            <p:cNvPr id="21" name="Graphic 20" descr="Customer review with solid fill">
-              <a:extLst>
-                <a:ext uri="{FF2B5EF4-FFF2-40B4-BE49-F238E27FC236}">
-                  <a16:creationId xmlns:a16="http://schemas.microsoft.com/office/drawing/2014/main" id="{F3BE275F-DAC2-8C41-2B3A-FD5002884F56}"/>
-                </a:ext>
-              </a:extLst>
-            </p:cNvPr>
-            <p:cNvPicPr>
-              <a:picLocks noChangeAspect="1"/>
-            </p:cNvPicPr>
-            <p:nvPr/>
-          </p:nvPicPr>
-          <p:blipFill>
-            <a:blip r:embed="rId2">
-              <a:extLst>
-                <a:ext uri="{96DAC541-7B7A-43D3-8B79-37D633B846F1}">
-                  <asvg:svgBlip xmlns:asvg="http://schemas.microsoft.com/office/drawing/2016/SVG/main" r:embed="rId3"/>
-                </a:ext>
-              </a:extLst>
-            </a:blip>
-            <a:stretch>
-              <a:fillRect/>
-            </a:stretch>
-          </p:blipFill>
-          <p:spPr>
-            <a:xfrm>
-              <a:off x="1400027" y="3700649"/>
-              <a:ext cx="965534" cy="965534"/>
-            </a:xfrm>
-            <a:prstGeom prst="rect">
-              <a:avLst/>
-            </a:prstGeom>
-          </p:spPr>
-        </p:pic>
-        <p:pic>
-          <p:nvPicPr>
-            <p:cNvPr id="25" name="Picture 24">
-              <a:extLst>
-                <a:ext uri="{FF2B5EF4-FFF2-40B4-BE49-F238E27FC236}">
-                  <a16:creationId xmlns:a16="http://schemas.microsoft.com/office/drawing/2014/main" id="{FD0F25F4-DE18-9E33-120A-923A478A8BA4}"/>
-                </a:ext>
-              </a:extLst>
-            </p:cNvPr>
-            <p:cNvPicPr>
-              <a:picLocks noChangeAspect="1"/>
-            </p:cNvPicPr>
-            <p:nvPr/>
-          </p:nvPicPr>
-          <p:blipFill>
-            <a:blip r:embed="rId4"/>
-            <a:stretch>
-              <a:fillRect/>
-            </a:stretch>
-          </p:blipFill>
-          <p:spPr>
-            <a:xfrm>
-              <a:off x="1126882" y="2607575"/>
-              <a:ext cx="1525117" cy="996871"/>
-            </a:xfrm>
-            <a:prstGeom prst="rect">
-              <a:avLst/>
-            </a:prstGeom>
-          </p:spPr>
-        </p:pic>
-      </p:grpSp>
-      <p:sp>
-        <p:nvSpPr>
-          <p:cNvPr id="26" name="Arrow: Right 25">
-            <a:extLst>
-              <a:ext uri="{FF2B5EF4-FFF2-40B4-BE49-F238E27FC236}">
-                <a16:creationId xmlns:a16="http://schemas.microsoft.com/office/drawing/2014/main" id="{46EB3E60-57A2-3048-A916-245D3EEE448E}"/>
-              </a:ext>
-            </a:extLst>
-          </p:cNvPr>
-          <p:cNvSpPr/>
-          <p:nvPr/>
-        </p:nvSpPr>
-        <p:spPr>
-          <a:xfrm>
-            <a:off x="2327498" y="1803354"/>
-            <a:ext cx="666746" cy="374904"/>
-          </a:xfrm>
-          <a:prstGeom prst="rightArrow">
-            <a:avLst/>
-          </a:prstGeom>
-        </p:spPr>
-        <p:style>
-          <a:lnRef idx="2">
-            <a:schemeClr val="accent1">
-              <a:shade val="15000"/>
-            </a:schemeClr>
-          </a:lnRef>
-          <a:fillRef idx="1">
-            <a:schemeClr val="accent1"/>
-          </a:fillRef>
-          <a:effectRef idx="0">
-            <a:schemeClr val="accent1"/>
-          </a:effectRef>
-          <a:fontRef idx="minor">
-            <a:schemeClr val="lt1"/>
-          </a:fontRef>
-        </p:style>
-        <p:txBody>
-          <a:bodyPr rtlCol="0" anchor="ctr"/>
-          <a:lstStyle/>
-          <a:p>
-            <a:pPr algn="ctr"/>
-            <a:endParaRPr lang="en-US"/>
-          </a:p>
-        </p:txBody>
-      </p:sp>
-      <p:grpSp>
-        <p:nvGrpSpPr>
-          <p:cNvPr id="11" name="Group 10">
-            <a:extLst>
-              <a:ext uri="{FF2B5EF4-FFF2-40B4-BE49-F238E27FC236}">
-                <a16:creationId xmlns:a16="http://schemas.microsoft.com/office/drawing/2014/main" id="{DA01BAF4-359C-BB38-4616-17928143767D}"/>
-              </a:ext>
-            </a:extLst>
-          </p:cNvPr>
-          <p:cNvGrpSpPr/>
-          <p:nvPr/>
-        </p:nvGrpSpPr>
-        <p:grpSpPr>
-          <a:xfrm>
-            <a:off x="3100852" y="406630"/>
-            <a:ext cx="4177285" cy="3044438"/>
-            <a:chOff x="2837001" y="180836"/>
-            <a:chExt cx="4177285" cy="3044438"/>
-          </a:xfrm>
-        </p:grpSpPr>
-        <p:grpSp>
-          <p:nvGrpSpPr>
-            <p:cNvPr id="2" name="Group 1">
-              <a:extLst>
-                <a:ext uri="{FF2B5EF4-FFF2-40B4-BE49-F238E27FC236}">
-                  <a16:creationId xmlns:a16="http://schemas.microsoft.com/office/drawing/2014/main" id="{5C615D10-25D2-1F41-F5FD-4EFD3DB05967}"/>
-                </a:ext>
-              </a:extLst>
-            </p:cNvPr>
-            <p:cNvGrpSpPr>
-              <a:grpSpLocks noChangeAspect="1"/>
-            </p:cNvGrpSpPr>
-            <p:nvPr/>
-          </p:nvGrpSpPr>
-          <p:grpSpPr>
-            <a:xfrm>
-              <a:off x="2837001" y="756337"/>
-              <a:ext cx="2160399" cy="2468937"/>
-              <a:chOff x="3436044" y="2054607"/>
-              <a:chExt cx="2487556" cy="2842817"/>
-            </a:xfrm>
-          </p:grpSpPr>
-          <p:pic>
-            <p:nvPicPr>
-              <p:cNvPr id="10" name="Picture 9" descr="A screenshot of a graph&#10;&#10;AI-generated content may be incorrect.">
-                <a:extLst>
-                  <a:ext uri="{FF2B5EF4-FFF2-40B4-BE49-F238E27FC236}">
-                    <a16:creationId xmlns:a16="http://schemas.microsoft.com/office/drawing/2014/main" id="{E5CCB7DC-7BE9-E070-5374-2C22E866120E}"/>
-                  </a:ext>
-                </a:extLst>
-              </p:cNvPr>
-              <p:cNvPicPr>
-                <a:picLocks noChangeAspect="1"/>
-              </p:cNvPicPr>
-              <p:nvPr/>
-            </p:nvPicPr>
-            <p:blipFill>
-              <a:blip r:embed="rId5">
-                <a:extLst>
-                  <a:ext uri="{28A0092B-C50C-407E-A947-70E740481C1C}">
-                    <a14:useLocalDpi xmlns:a14="http://schemas.microsoft.com/office/drawing/2010/main" val="0"/>
-                  </a:ext>
-                </a:extLst>
-              </a:blip>
-              <a:srcRect l="31035" t="24006" r="53731" b="44988"/>
-              <a:stretch/>
-            </p:blipFill>
-            <p:spPr>
-              <a:xfrm>
-                <a:off x="3436044" y="2054607"/>
-                <a:ext cx="2222549" cy="2392796"/>
-              </a:xfrm>
-              <a:prstGeom prst="rect">
-                <a:avLst/>
-              </a:prstGeom>
-            </p:spPr>
-          </p:pic>
-          <p:pic>
-            <p:nvPicPr>
-              <p:cNvPr id="15" name="Picture 14" descr="A screenshot of a graph&#10;&#10;AI-generated content may be incorrect.">
-                <a:extLst>
-                  <a:ext uri="{FF2B5EF4-FFF2-40B4-BE49-F238E27FC236}">
-                    <a16:creationId xmlns:a16="http://schemas.microsoft.com/office/drawing/2014/main" id="{413DC958-3438-AD99-8ED3-9413D987A5AC}"/>
-                  </a:ext>
-                </a:extLst>
-              </p:cNvPr>
-              <p:cNvPicPr>
-                <a:picLocks noChangeAspect="1"/>
-              </p:cNvPicPr>
-              <p:nvPr/>
-            </p:nvPicPr>
-            <p:blipFill>
-              <a:blip r:embed="rId5">
-                <a:extLst>
-                  <a:ext uri="{28A0092B-C50C-407E-A947-70E740481C1C}">
-                    <a14:useLocalDpi xmlns:a14="http://schemas.microsoft.com/office/drawing/2010/main" val="0"/>
-                  </a:ext>
-                </a:extLst>
-              </a:blip>
-              <a:srcRect l="31170" t="17838" r="53596" b="76213"/>
-              <a:stretch/>
-            </p:blipFill>
-            <p:spPr>
-              <a:xfrm>
-                <a:off x="3701051" y="4438366"/>
-                <a:ext cx="2222549" cy="459058"/>
-              </a:xfrm>
-              <a:prstGeom prst="rect">
-                <a:avLst/>
-              </a:prstGeom>
-            </p:spPr>
-          </p:pic>
-        </p:grpSp>
-        <p:grpSp>
-          <p:nvGrpSpPr>
-            <p:cNvPr id="3" name="Group 2">
-              <a:extLst>
-                <a:ext uri="{FF2B5EF4-FFF2-40B4-BE49-F238E27FC236}">
-                  <a16:creationId xmlns:a16="http://schemas.microsoft.com/office/drawing/2014/main" id="{32A6B30B-7C85-BDCD-D535-21D074298F51}"/>
-                </a:ext>
-              </a:extLst>
-            </p:cNvPr>
-            <p:cNvGrpSpPr>
-              <a:grpSpLocks noChangeAspect="1"/>
-            </p:cNvGrpSpPr>
-            <p:nvPr/>
-          </p:nvGrpSpPr>
-          <p:grpSpPr>
-            <a:xfrm>
-              <a:off x="5025516" y="794440"/>
-              <a:ext cx="1988770" cy="2392732"/>
-              <a:chOff x="5620740" y="1990807"/>
-              <a:chExt cx="2369090" cy="2850303"/>
-            </a:xfrm>
-          </p:grpSpPr>
-          <p:pic>
-            <p:nvPicPr>
-              <p:cNvPr id="12" name="Picture 11" descr="A screenshot of a graph&#10;&#10;AI-generated content may be incorrect.">
-                <a:extLst>
-                  <a:ext uri="{FF2B5EF4-FFF2-40B4-BE49-F238E27FC236}">
-                    <a16:creationId xmlns:a16="http://schemas.microsoft.com/office/drawing/2014/main" id="{635294F4-DE55-F52A-0F65-840B513A24A2}"/>
-                  </a:ext>
-                </a:extLst>
-              </p:cNvPr>
-              <p:cNvPicPr>
-                <a:picLocks noChangeAspect="1"/>
-              </p:cNvPicPr>
-              <p:nvPr/>
-            </p:nvPicPr>
-            <p:blipFill>
-              <a:blip r:embed="rId5">
-                <a:extLst>
-                  <a:ext uri="{28A0092B-C50C-407E-A947-70E740481C1C}">
-                    <a14:useLocalDpi xmlns:a14="http://schemas.microsoft.com/office/drawing/2010/main" val="0"/>
-                  </a:ext>
-                </a:extLst>
-              </a:blip>
-              <a:srcRect l="56362" t="23416" r="29209" b="43925"/>
-              <a:stretch/>
-            </p:blipFill>
-            <p:spPr>
-              <a:xfrm>
-                <a:off x="5620740" y="1990807"/>
-                <a:ext cx="2105025" cy="2520397"/>
-              </a:xfrm>
-              <a:prstGeom prst="rect">
-                <a:avLst/>
-              </a:prstGeom>
-            </p:spPr>
-          </p:pic>
-          <p:pic>
-            <p:nvPicPr>
-              <p:cNvPr id="16" name="Picture 15" descr="A screenshot of a graph&#10;&#10;AI-generated content may be incorrect.">
-                <a:extLst>
-                  <a:ext uri="{FF2B5EF4-FFF2-40B4-BE49-F238E27FC236}">
-                    <a16:creationId xmlns:a16="http://schemas.microsoft.com/office/drawing/2014/main" id="{65A8E5C2-6215-DED8-8284-904D83645C28}"/>
-                  </a:ext>
-                </a:extLst>
-              </p:cNvPr>
-              <p:cNvPicPr>
-                <a:picLocks noChangeAspect="1"/>
-              </p:cNvPicPr>
-              <p:nvPr/>
-            </p:nvPicPr>
-            <p:blipFill>
-              <a:blip r:embed="rId5">
-                <a:extLst>
-                  <a:ext uri="{28A0092B-C50C-407E-A947-70E740481C1C}">
-                    <a14:useLocalDpi xmlns:a14="http://schemas.microsoft.com/office/drawing/2010/main" val="0"/>
-                  </a:ext>
-                </a:extLst>
-              </a:blip>
-              <a:srcRect l="56362" t="18606" r="29209" b="76905"/>
-              <a:stretch/>
-            </p:blipFill>
-            <p:spPr>
-              <a:xfrm>
-                <a:off x="5884805" y="4494680"/>
-                <a:ext cx="2105025" cy="346430"/>
-              </a:xfrm>
-              <a:prstGeom prst="rect">
-                <a:avLst/>
-              </a:prstGeom>
-            </p:spPr>
-          </p:pic>
-        </p:grpSp>
-        <p:sp>
-          <p:nvSpPr>
-            <p:cNvPr id="7" name="TextBox 6">
-              <a:extLst>
-                <a:ext uri="{FF2B5EF4-FFF2-40B4-BE49-F238E27FC236}">
-                  <a16:creationId xmlns:a16="http://schemas.microsoft.com/office/drawing/2014/main" id="{2488285A-EC5F-953B-2AA0-843EC3F5127C}"/>
-                </a:ext>
-              </a:extLst>
-            </p:cNvPr>
-            <p:cNvSpPr txBox="1"/>
-            <p:nvPr/>
-          </p:nvSpPr>
-          <p:spPr>
-            <a:xfrm>
-              <a:off x="3774980" y="180836"/>
-              <a:ext cx="2444839" cy="369332"/>
-            </a:xfrm>
-            <a:prstGeom prst="rect">
-              <a:avLst/>
-            </a:prstGeom>
-            <a:noFill/>
-          </p:spPr>
-          <p:txBody>
-            <a:bodyPr wrap="square" rtlCol="0">
-              <a:spAutoFit/>
-            </a:bodyPr>
-            <a:lstStyle/>
-            <a:p>
-              <a:pPr algn="ctr"/>
-              <a:r>
-                <a:rPr lang="en-US" b="1" dirty="0"/>
-                <a:t>Counterfactuals</a:t>
-              </a:r>
-              <a:endParaRPr lang="de-DE" b="1" dirty="0"/>
-            </a:p>
-          </p:txBody>
-        </p:sp>
-      </p:grpSp>
-      <p:grpSp>
-        <p:nvGrpSpPr>
-          <p:cNvPr id="14" name="Group 13">
-            <a:extLst>
-              <a:ext uri="{FF2B5EF4-FFF2-40B4-BE49-F238E27FC236}">
-                <a16:creationId xmlns:a16="http://schemas.microsoft.com/office/drawing/2014/main" id="{CA32F1FE-2AD1-7279-C420-23D2BBBE4114}"/>
-              </a:ext>
-            </a:extLst>
-          </p:cNvPr>
-          <p:cNvGrpSpPr/>
-          <p:nvPr/>
-        </p:nvGrpSpPr>
-        <p:grpSpPr>
-          <a:xfrm>
-            <a:off x="7476422" y="406630"/>
-            <a:ext cx="4305800" cy="2445525"/>
-            <a:chOff x="7484339" y="181744"/>
-            <a:chExt cx="4305800" cy="2445525"/>
-          </a:xfrm>
-        </p:grpSpPr>
-        <p:grpSp>
-          <p:nvGrpSpPr>
-            <p:cNvPr id="5" name="Group 4">
-              <a:extLst>
-                <a:ext uri="{FF2B5EF4-FFF2-40B4-BE49-F238E27FC236}">
-                  <a16:creationId xmlns:a16="http://schemas.microsoft.com/office/drawing/2014/main" id="{41B0B536-979D-AF86-E1AA-3EDC1D09F714}"/>
-                </a:ext>
-              </a:extLst>
-            </p:cNvPr>
-            <p:cNvGrpSpPr>
-              <a:grpSpLocks noChangeAspect="1"/>
-            </p:cNvGrpSpPr>
-            <p:nvPr/>
-          </p:nvGrpSpPr>
-          <p:grpSpPr>
-            <a:xfrm>
-              <a:off x="7484339" y="1329135"/>
-              <a:ext cx="2052000" cy="1269160"/>
-              <a:chOff x="7955797" y="1713756"/>
-              <a:chExt cx="2885092" cy="1784427"/>
-            </a:xfrm>
-          </p:grpSpPr>
-          <p:pic>
-            <p:nvPicPr>
-              <p:cNvPr id="4" name="Picture 3" descr="A black and red chemical structure&#10;&#10;AI-generated content may be incorrect.">
-                <a:extLst>
-                  <a:ext uri="{FF2B5EF4-FFF2-40B4-BE49-F238E27FC236}">
-                    <a16:creationId xmlns:a16="http://schemas.microsoft.com/office/drawing/2014/main" id="{9B8DE2D9-50FB-48E1-3766-F90DC4B43C31}"/>
-                  </a:ext>
-                </a:extLst>
-              </p:cNvPr>
-              <p:cNvPicPr>
-                <a:picLocks noChangeAspect="1"/>
-              </p:cNvPicPr>
-              <p:nvPr/>
-            </p:nvPicPr>
-            <p:blipFill>
-              <a:blip r:embed="rId6">
-                <a:extLst>
-                  <a:ext uri="{28A0092B-C50C-407E-A947-70E740481C1C}">
-                    <a14:useLocalDpi xmlns:a14="http://schemas.microsoft.com/office/drawing/2010/main" val="0"/>
-                  </a:ext>
-                </a:extLst>
-              </a:blip>
-              <a:srcRect l="26131" t="13384" r="50592" b="35527"/>
-              <a:stretch/>
-            </p:blipFill>
-            <p:spPr>
-              <a:xfrm>
-                <a:off x="7955797" y="1713756"/>
-                <a:ext cx="2885092" cy="1385205"/>
-              </a:xfrm>
-              <a:prstGeom prst="rect">
-                <a:avLst/>
-              </a:prstGeom>
-            </p:spPr>
-          </p:pic>
-          <p:pic>
-            <p:nvPicPr>
-              <p:cNvPr id="17" name="Picture 16" descr="A black and red chemical structure&#10;&#10;AI-generated content may be incorrect.">
-                <a:extLst>
-                  <a:ext uri="{FF2B5EF4-FFF2-40B4-BE49-F238E27FC236}">
-                    <a16:creationId xmlns:a16="http://schemas.microsoft.com/office/drawing/2014/main" id="{9A57B164-6AA0-9A5C-969C-361475D72D25}"/>
-                  </a:ext>
-                </a:extLst>
-              </p:cNvPr>
-              <p:cNvPicPr>
-                <a:picLocks noChangeAspect="1"/>
-              </p:cNvPicPr>
-              <p:nvPr/>
-            </p:nvPicPr>
-            <p:blipFill>
-              <a:blip r:embed="rId6">
-                <a:extLst>
-                  <a:ext uri="{28A0092B-C50C-407E-A947-70E740481C1C}">
-                    <a14:useLocalDpi xmlns:a14="http://schemas.microsoft.com/office/drawing/2010/main" val="0"/>
-                  </a:ext>
-                </a:extLst>
-              </a:blip>
-              <a:srcRect l="34138" t="87643" r="59329" b="4628"/>
-              <a:stretch/>
-            </p:blipFill>
-            <p:spPr>
-              <a:xfrm>
-                <a:off x="8883993" y="3231955"/>
-                <a:ext cx="1028700" cy="266228"/>
-              </a:xfrm>
-              <a:prstGeom prst="rect">
-                <a:avLst/>
-              </a:prstGeom>
-            </p:spPr>
-          </p:pic>
-        </p:grpSp>
-        <p:grpSp>
-          <p:nvGrpSpPr>
-            <p:cNvPr id="6" name="Group 5">
-              <a:extLst>
-                <a:ext uri="{FF2B5EF4-FFF2-40B4-BE49-F238E27FC236}">
-                  <a16:creationId xmlns:a16="http://schemas.microsoft.com/office/drawing/2014/main" id="{3AA3631B-3F0D-3733-0FDC-BBD18F86BEDB}"/>
-                </a:ext>
-              </a:extLst>
-            </p:cNvPr>
-            <p:cNvGrpSpPr>
-              <a:grpSpLocks noChangeAspect="1"/>
-            </p:cNvGrpSpPr>
-            <p:nvPr/>
-          </p:nvGrpSpPr>
-          <p:grpSpPr>
-            <a:xfrm>
-              <a:off x="9738139" y="1397550"/>
-              <a:ext cx="2052000" cy="1229719"/>
-              <a:chOff x="7951035" y="3350221"/>
-              <a:chExt cx="2894617" cy="1734681"/>
-            </a:xfrm>
-          </p:grpSpPr>
-          <p:pic>
-            <p:nvPicPr>
-              <p:cNvPr id="13" name="Picture 12" descr="A black and red chemical structure&#10;&#10;AI-generated content may be incorrect.">
-                <a:extLst>
-                  <a:ext uri="{FF2B5EF4-FFF2-40B4-BE49-F238E27FC236}">
-                    <a16:creationId xmlns:a16="http://schemas.microsoft.com/office/drawing/2014/main" id="{7E80FD93-EC36-7292-D41F-2AB7B9A8674E}"/>
-                  </a:ext>
-                </a:extLst>
-              </p:cNvPr>
-              <p:cNvPicPr>
-                <a:picLocks noChangeAspect="1"/>
-              </p:cNvPicPr>
-              <p:nvPr/>
-            </p:nvPicPr>
-            <p:blipFill>
-              <a:blip r:embed="rId6">
-                <a:extLst>
-                  <a:ext uri="{28A0092B-C50C-407E-A947-70E740481C1C}">
-                    <a14:useLocalDpi xmlns:a14="http://schemas.microsoft.com/office/drawing/2010/main" val="0"/>
-                  </a:ext>
-                </a:extLst>
-              </a:blip>
-              <a:srcRect l="51184" t="14586" r="25463" b="34325"/>
-              <a:stretch/>
-            </p:blipFill>
-            <p:spPr>
-              <a:xfrm>
-                <a:off x="7951035" y="3350221"/>
-                <a:ext cx="2894617" cy="1385206"/>
-              </a:xfrm>
-              <a:prstGeom prst="rect">
-                <a:avLst/>
-              </a:prstGeom>
-            </p:spPr>
-          </p:pic>
-          <p:pic>
-            <p:nvPicPr>
-              <p:cNvPr id="18" name="Picture 17" descr="A black and red chemical structure&#10;&#10;AI-generated content may be incorrect.">
-                <a:extLst>
-                  <a:ext uri="{FF2B5EF4-FFF2-40B4-BE49-F238E27FC236}">
-                    <a16:creationId xmlns:a16="http://schemas.microsoft.com/office/drawing/2014/main" id="{721B14D9-308B-88B5-4785-360A6C506019}"/>
-                  </a:ext>
-                </a:extLst>
-              </p:cNvPr>
-              <p:cNvPicPr>
-                <a:picLocks noChangeAspect="1"/>
-              </p:cNvPicPr>
-              <p:nvPr/>
-            </p:nvPicPr>
-            <p:blipFill>
-              <a:blip r:embed="rId6">
-                <a:extLst>
-                  <a:ext uri="{28A0092B-C50C-407E-A947-70E740481C1C}">
-                    <a14:useLocalDpi xmlns:a14="http://schemas.microsoft.com/office/drawing/2010/main" val="0"/>
-                  </a:ext>
-                </a:extLst>
-              </a:blip>
-              <a:srcRect l="59497" t="85098" r="34125" b="3309"/>
-              <a:stretch/>
-            </p:blipFill>
-            <p:spPr>
-              <a:xfrm>
-                <a:off x="8926807" y="4709945"/>
-                <a:ext cx="943073" cy="374957"/>
-              </a:xfrm>
-              <a:prstGeom prst="rect">
-                <a:avLst/>
-              </a:prstGeom>
-            </p:spPr>
-          </p:pic>
-        </p:grpSp>
-        <p:sp>
-          <p:nvSpPr>
-            <p:cNvPr id="9" name="TextBox 8">
-              <a:extLst>
-                <a:ext uri="{FF2B5EF4-FFF2-40B4-BE49-F238E27FC236}">
-                  <a16:creationId xmlns:a16="http://schemas.microsoft.com/office/drawing/2014/main" id="{641E8493-13A8-D084-AAF5-76892DBCDE12}"/>
-                </a:ext>
-              </a:extLst>
-            </p:cNvPr>
-            <p:cNvSpPr txBox="1"/>
-            <p:nvPr/>
-          </p:nvSpPr>
-          <p:spPr>
-            <a:xfrm>
-              <a:off x="8319300" y="181744"/>
-              <a:ext cx="2444839" cy="369332"/>
-            </a:xfrm>
-            <a:prstGeom prst="rect">
-              <a:avLst/>
-            </a:prstGeom>
-            <a:noFill/>
-          </p:spPr>
-          <p:txBody>
-            <a:bodyPr wrap="square" rtlCol="0">
-              <a:spAutoFit/>
-            </a:bodyPr>
-            <a:lstStyle/>
-            <a:p>
-              <a:pPr algn="ctr"/>
-              <a:r>
-                <a:rPr lang="en-US" sz="1800" b="1" dirty="0" err="1"/>
-                <a:t>MolCE</a:t>
-              </a:r>
-              <a:endParaRPr lang="de-DE" b="1" dirty="0"/>
-            </a:p>
-          </p:txBody>
-        </p:sp>
-      </p:grpSp>
-      <p:sp>
-        <p:nvSpPr>
-          <p:cNvPr id="22" name="Arrow: Right 21">
-            <a:extLst>
-              <a:ext uri="{FF2B5EF4-FFF2-40B4-BE49-F238E27FC236}">
-                <a16:creationId xmlns:a16="http://schemas.microsoft.com/office/drawing/2014/main" id="{CC3DB96C-E7DA-1AD3-B9F5-7FDA8BA9B3AD}"/>
-              </a:ext>
-            </a:extLst>
-          </p:cNvPr>
-          <p:cNvSpPr/>
-          <p:nvPr/>
-        </p:nvSpPr>
-        <p:spPr>
-          <a:xfrm rot="5400000">
-            <a:off x="786951" y="3558887"/>
-            <a:ext cx="666746" cy="374904"/>
-          </a:xfrm>
-          <a:prstGeom prst="rightArrow">
-            <a:avLst/>
-          </a:prstGeom>
-        </p:spPr>
-        <p:style>
-          <a:lnRef idx="2">
-            <a:schemeClr val="accent1">
-              <a:shade val="15000"/>
-            </a:schemeClr>
-          </a:lnRef>
-          <a:fillRef idx="1">
-            <a:schemeClr val="accent1"/>
-          </a:fillRef>
-          <a:effectRef idx="0">
-            <a:schemeClr val="accent1"/>
-          </a:effectRef>
-          <a:fontRef idx="minor">
-            <a:schemeClr val="lt1"/>
-          </a:fontRef>
-        </p:style>
-        <p:txBody>
-          <a:bodyPr rtlCol="0" anchor="ctr"/>
-          <a:lstStyle/>
-          <a:p>
-            <a:pPr algn="ctr"/>
-            <a:endParaRPr lang="en-US"/>
-          </a:p>
-        </p:txBody>
-      </p:sp>
-      <p:grpSp>
-        <p:nvGrpSpPr>
-          <p:cNvPr id="36" name="Group 35">
-            <a:extLst>
-              <a:ext uri="{FF2B5EF4-FFF2-40B4-BE49-F238E27FC236}">
-                <a16:creationId xmlns:a16="http://schemas.microsoft.com/office/drawing/2014/main" id="{9EC2A3B4-5B0E-882B-8458-F75AA108A5E6}"/>
-              </a:ext>
-            </a:extLst>
-          </p:cNvPr>
-          <p:cNvGrpSpPr/>
-          <p:nvPr/>
-        </p:nvGrpSpPr>
-        <p:grpSpPr>
-          <a:xfrm>
-            <a:off x="4841173" y="4522527"/>
-            <a:ext cx="6165816" cy="573974"/>
-            <a:chOff x="4841173" y="4193969"/>
-            <a:chExt cx="6165816" cy="573974"/>
-          </a:xfrm>
-        </p:grpSpPr>
-        <p:cxnSp>
-          <p:nvCxnSpPr>
-            <p:cNvPr id="24" name="Straight Arrow Connector 23">
-              <a:extLst>
-                <a:ext uri="{FF2B5EF4-FFF2-40B4-BE49-F238E27FC236}">
-                  <a16:creationId xmlns:a16="http://schemas.microsoft.com/office/drawing/2014/main" id="{FFDCAFC5-B9FC-083C-56A5-5CB45102C9FB}"/>
-                </a:ext>
-              </a:extLst>
-            </p:cNvPr>
-            <p:cNvCxnSpPr>
-              <a:cxnSpLocks/>
-            </p:cNvCxnSpPr>
-            <p:nvPr/>
-          </p:nvCxnSpPr>
-          <p:spPr>
-            <a:xfrm>
-              <a:off x="4841173" y="4480956"/>
-              <a:ext cx="1800000" cy="0"/>
-            </a:xfrm>
-            <a:prstGeom prst="straightConnector1">
-              <a:avLst/>
-            </a:prstGeom>
-            <a:ln>
-              <a:tailEnd type="triangle"/>
-            </a:ln>
-          </p:spPr>
-          <p:style>
-            <a:lnRef idx="2">
-              <a:schemeClr val="accent1"/>
-            </a:lnRef>
-            <a:fillRef idx="0">
-              <a:schemeClr val="accent1"/>
-            </a:fillRef>
-            <a:effectRef idx="1">
-              <a:schemeClr val="accent1"/>
-            </a:effectRef>
-            <a:fontRef idx="minor">
-              <a:schemeClr val="tx1"/>
-            </a:fontRef>
-          </p:style>
-        </p:cxnSp>
-        <p:sp>
-          <p:nvSpPr>
-            <p:cNvPr id="28" name="Rectangle: Rounded Corners 27">
-              <a:extLst>
-                <a:ext uri="{FF2B5EF4-FFF2-40B4-BE49-F238E27FC236}">
-                  <a16:creationId xmlns:a16="http://schemas.microsoft.com/office/drawing/2014/main" id="{5B927D80-0780-203A-8CD6-2AFA89094D43}"/>
-                </a:ext>
-              </a:extLst>
-            </p:cNvPr>
-            <p:cNvSpPr/>
-            <p:nvPr/>
-          </p:nvSpPr>
-          <p:spPr>
-            <a:xfrm>
-              <a:off x="7278137" y="4193969"/>
-              <a:ext cx="3728852" cy="573974"/>
-            </a:xfrm>
-            <a:prstGeom prst="roundRect">
-              <a:avLst/>
-            </a:prstGeom>
-            <a:solidFill>
-              <a:schemeClr val="bg1"/>
-            </a:solidFill>
-          </p:spPr>
-          <p:style>
-            <a:lnRef idx="2">
-              <a:schemeClr val="accent4">
-                <a:shade val="15000"/>
-              </a:schemeClr>
-            </a:lnRef>
-            <a:fillRef idx="1">
-              <a:schemeClr val="accent4"/>
-            </a:fillRef>
-            <a:effectRef idx="0">
-              <a:schemeClr val="accent4"/>
-            </a:effectRef>
-            <a:fontRef idx="minor">
-              <a:schemeClr val="lt1"/>
-            </a:fontRef>
-          </p:style>
-          <p:txBody>
-            <a:bodyPr rtlCol="0" anchor="ctr"/>
-            <a:lstStyle/>
-            <a:p>
-              <a:pPr algn="ctr"/>
-              <a:r>
-                <a:rPr lang="en-US" sz="1400" dirty="0">
-                  <a:solidFill>
-                    <a:schemeClr val="tx1"/>
-                  </a:solidFill>
-                </a:rPr>
-                <a:t>R-groups attached to the morpholine ring </a:t>
-              </a:r>
-              <a:endParaRPr lang="de-DE" sz="1400" dirty="0">
-                <a:solidFill>
-                  <a:schemeClr val="tx1"/>
-                </a:solidFill>
-              </a:endParaRPr>
-            </a:p>
-          </p:txBody>
-        </p:sp>
-      </p:grpSp>
-      <p:grpSp>
-        <p:nvGrpSpPr>
-          <p:cNvPr id="37" name="Group 36">
-            <a:extLst>
-              <a:ext uri="{FF2B5EF4-FFF2-40B4-BE49-F238E27FC236}">
-                <a16:creationId xmlns:a16="http://schemas.microsoft.com/office/drawing/2014/main" id="{94E61FAA-489A-631D-A169-A21283220D66}"/>
-              </a:ext>
-            </a:extLst>
-          </p:cNvPr>
-          <p:cNvGrpSpPr/>
-          <p:nvPr/>
-        </p:nvGrpSpPr>
-        <p:grpSpPr>
-          <a:xfrm>
-            <a:off x="4841173" y="5396256"/>
-            <a:ext cx="6165816" cy="1111401"/>
-            <a:chOff x="4841173" y="5067698"/>
-            <a:chExt cx="6165816" cy="1111401"/>
-          </a:xfrm>
-        </p:grpSpPr>
-        <p:cxnSp>
-          <p:nvCxnSpPr>
-            <p:cNvPr id="29" name="Straight Arrow Connector 28">
-              <a:extLst>
-                <a:ext uri="{FF2B5EF4-FFF2-40B4-BE49-F238E27FC236}">
-                  <a16:creationId xmlns:a16="http://schemas.microsoft.com/office/drawing/2014/main" id="{6BA7A5D6-C7CD-4C58-39DD-3212C8919ED5}"/>
-                </a:ext>
-              </a:extLst>
-            </p:cNvPr>
-            <p:cNvCxnSpPr>
-              <a:cxnSpLocks/>
-            </p:cNvCxnSpPr>
-            <p:nvPr/>
-          </p:nvCxnSpPr>
-          <p:spPr>
-            <a:xfrm>
-              <a:off x="4841173" y="5623398"/>
-              <a:ext cx="1800000" cy="0"/>
-            </a:xfrm>
-            <a:prstGeom prst="straightConnector1">
-              <a:avLst/>
-            </a:prstGeom>
-            <a:ln>
-              <a:tailEnd type="triangle"/>
-            </a:ln>
-          </p:spPr>
-          <p:style>
-            <a:lnRef idx="2">
-              <a:schemeClr val="accent1"/>
-            </a:lnRef>
-            <a:fillRef idx="0">
-              <a:schemeClr val="accent1"/>
-            </a:fillRef>
-            <a:effectRef idx="1">
-              <a:schemeClr val="accent1"/>
-            </a:effectRef>
-            <a:fontRef idx="minor">
-              <a:schemeClr val="tx1"/>
-            </a:fontRef>
-          </p:style>
-        </p:cxnSp>
-        <p:sp>
-          <p:nvSpPr>
-            <p:cNvPr id="30" name="Rectangle: Rounded Corners 29">
-              <a:extLst>
-                <a:ext uri="{FF2B5EF4-FFF2-40B4-BE49-F238E27FC236}">
-                  <a16:creationId xmlns:a16="http://schemas.microsoft.com/office/drawing/2014/main" id="{B0D4C90D-2A3D-51FF-63CF-89B19440DDFB}"/>
-                </a:ext>
-              </a:extLst>
-            </p:cNvPr>
-            <p:cNvSpPr/>
-            <p:nvPr/>
-          </p:nvSpPr>
-          <p:spPr>
-            <a:xfrm>
-              <a:off x="7278137" y="5067698"/>
-              <a:ext cx="3728852" cy="1111401"/>
-            </a:xfrm>
-            <a:prstGeom prst="roundRect">
-              <a:avLst/>
-            </a:prstGeom>
-            <a:solidFill>
-              <a:schemeClr val="bg1"/>
-            </a:solidFill>
-          </p:spPr>
-          <p:style>
-            <a:lnRef idx="2">
-              <a:schemeClr val="accent4">
-                <a:shade val="15000"/>
-              </a:schemeClr>
-            </a:lnRef>
-            <a:fillRef idx="1">
-              <a:schemeClr val="accent4"/>
-            </a:fillRef>
-            <a:effectRef idx="0">
-              <a:schemeClr val="accent4"/>
-            </a:effectRef>
-            <a:fontRef idx="minor">
-              <a:schemeClr val="lt1"/>
-            </a:fontRef>
-          </p:style>
-          <p:txBody>
-            <a:bodyPr rtlCol="0" anchor="ctr"/>
-            <a:lstStyle/>
-            <a:p>
-              <a:endParaRPr lang="en-US" sz="1400" dirty="0">
-                <a:solidFill>
-                  <a:schemeClr val="tx1"/>
-                </a:solidFill>
-              </a:endParaRPr>
-            </a:p>
-            <a:p>
-              <a:r>
-                <a:rPr lang="en-US" sz="1400" b="1" dirty="0" err="1">
-                  <a:solidFill>
-                    <a:schemeClr val="tx1"/>
-                  </a:solidFill>
-                </a:rPr>
-                <a:t>MolCE</a:t>
-              </a:r>
-              <a:r>
-                <a:rPr lang="en-US" sz="1400" dirty="0">
-                  <a:solidFill>
-                    <a:schemeClr val="tx1"/>
-                  </a:solidFill>
-                </a:rPr>
-                <a:t> - R-group that is “anti-activating”</a:t>
-              </a:r>
-            </a:p>
-            <a:p>
-              <a:endParaRPr lang="en-US" sz="1400" dirty="0">
-                <a:solidFill>
-                  <a:schemeClr val="tx1"/>
-                </a:solidFill>
-              </a:endParaRPr>
-            </a:p>
-            <a:p>
-              <a:r>
-                <a:rPr lang="en-US" sz="1400" b="1" dirty="0">
-                  <a:solidFill>
-                    <a:schemeClr val="tx1"/>
-                  </a:solidFill>
-                </a:rPr>
-                <a:t>Counterfactuals</a:t>
-              </a:r>
-              <a:r>
-                <a:rPr lang="en-US" sz="1400" dirty="0">
-                  <a:solidFill>
-                    <a:schemeClr val="tx1"/>
-                  </a:solidFill>
-                </a:rPr>
-                <a:t> - concrete examples of inactive molecules</a:t>
-              </a:r>
-            </a:p>
-            <a:p>
-              <a:r>
-                <a:rPr lang="en-US" sz="1400" dirty="0">
-                  <a:solidFill>
-                    <a:schemeClr val="tx1"/>
-                  </a:solidFill>
-                </a:rPr>
-                <a:t>   </a:t>
-              </a:r>
-              <a:endParaRPr lang="de-DE" sz="1400" dirty="0">
-                <a:solidFill>
-                  <a:schemeClr val="tx1"/>
-                </a:solidFill>
-              </a:endParaRPr>
-            </a:p>
-          </p:txBody>
-        </p:sp>
-      </p:grpSp>
-    </p:spTree>
-    <p:extLst>
-      <p:ext uri="{BB962C8B-B14F-4D97-AF65-F5344CB8AC3E}">
-        <p14:creationId xmlns:p14="http://schemas.microsoft.com/office/powerpoint/2010/main" val="377492229"/>
       </p:ext>
     </p:extLst>
   </p:cSld>
